--- a/51Careers_Addition.pptx
+++ b/51Careers_Addition.pptx
@@ -24094,7 +24094,7 @@
                 </a:solidFill>
                 <a:latin typeface="Segoe UI"/>
               </a:rPr>
-              <a:t>THREE-YEAR FINANCIAL MODEL</a:t>
+              <a:t>FINANCIAL OUTLOOK</a:t>
             </a:r>
           </a:p>
         </p:txBody>
@@ -24127,1188 +24127,84 @@
                 </a:solidFill>
                 <a:latin typeface="Georgia"/>
               </a:rPr>
-              <a:t>Illustrative path from free AI Resume to a paid multi-stream platform</a:t>
-            </a:r>
-          </a:p>
-        </p:txBody>
-      </p:sp>
-      <p:graphicFrame>
-        <p:nvGraphicFramePr>
-          <p:cNvPr id="4" name="Table 3"/>
-          <p:cNvGraphicFramePr>
-            <a:graphicFrameLocks noGrp="1"/>
-          </p:cNvGraphicFramePr>
-          <p:nvPr/>
-        </p:nvGraphicFramePr>
-        <p:xfrm>
-          <a:off x="502920" y="1078992"/>
-          <a:ext cx="11173968" cy="4892040"/>
-        </p:xfrm>
-        <a:graphic>
-          <a:graphicData uri="http://schemas.openxmlformats.org/drawingml/2006/table">
-            <a:tbl>
-              <a:tblPr firstRow="1" bandRow="1">
-                <a:tableStyleId>{5C22544A-7EE6-4342-B048-85BDC9FD1C3A}</a:tableStyleId>
-              </a:tblPr>
-              <a:tblGrid>
-                <a:gridCol w="3246120"/>
-                <a:gridCol w="2642616"/>
-                <a:gridCol w="2642616"/>
-                <a:gridCol w="2642616"/>
-              </a:tblGrid>
-              <a:tr h="407670">
-                <a:tc>
-                  <a:txBody>
-                    <a:bodyPr wrap="square"/>
-                    <a:lstStyle/>
-                    <a:p>
-                      <a:pPr algn="l"/>
-                    </a:p>
-                  </a:txBody>
-                  <a:tcPr anchor="ctr">
-                    <a:solidFill>
-                      <a:srgbClr val="0A6B63"/>
-                    </a:solidFill>
-                  </a:tcPr>
-                </a:tc>
-                <a:tc>
-                  <a:txBody>
-                    <a:bodyPr wrap="square"/>
-                    <a:lstStyle/>
-                    <a:p>
-                      <a:pPr algn="ctr"/>
-                      <a:r>
-                        <a:rPr sz="1200" b="1" i="0">
-                          <a:solidFill>
-                            <a:srgbClr val="FFFFFF"/>
-                          </a:solidFill>
-                          <a:latin typeface="Segoe UI"/>
-                        </a:rPr>
-                        <a:t>Year 1</a:t>
-                      </a:r>
-                    </a:p>
-                  </a:txBody>
-                  <a:tcPr anchor="ctr">
-                    <a:solidFill>
-                      <a:srgbClr val="0A6B63"/>
-                    </a:solidFill>
-                  </a:tcPr>
-                </a:tc>
-                <a:tc>
-                  <a:txBody>
-                    <a:bodyPr wrap="square"/>
-                    <a:lstStyle/>
-                    <a:p>
-                      <a:pPr algn="ctr"/>
-                      <a:r>
-                        <a:rPr sz="1200" b="1" i="0">
-                          <a:solidFill>
-                            <a:srgbClr val="FFFFFF"/>
-                          </a:solidFill>
-                          <a:latin typeface="Segoe UI"/>
-                        </a:rPr>
-                        <a:t>Year 2</a:t>
-                      </a:r>
-                    </a:p>
-                  </a:txBody>
-                  <a:tcPr anchor="ctr">
-                    <a:solidFill>
-                      <a:srgbClr val="0A6B63"/>
-                    </a:solidFill>
-                  </a:tcPr>
-                </a:tc>
-                <a:tc>
-                  <a:txBody>
-                    <a:bodyPr wrap="square"/>
-                    <a:lstStyle/>
-                    <a:p>
-                      <a:pPr algn="ctr"/>
-                      <a:r>
-                        <a:rPr sz="1200" b="1" i="0">
-                          <a:solidFill>
-                            <a:srgbClr val="FFFFFF"/>
-                          </a:solidFill>
-                          <a:latin typeface="Segoe UI"/>
-                        </a:rPr>
-                        <a:t>Year 3</a:t>
-                      </a:r>
-                    </a:p>
-                  </a:txBody>
-                  <a:tcPr anchor="ctr">
-                    <a:solidFill>
-                      <a:srgbClr val="0A6B63"/>
-                    </a:solidFill>
-                  </a:tcPr>
-                </a:tc>
-              </a:tr>
-              <a:tr h="407670">
-                <a:tc>
-                  <a:txBody>
-                    <a:bodyPr wrap="square"/>
-                    <a:lstStyle/>
-                    <a:p>
-                      <a:pPr algn="l"/>
-                      <a:r>
-                        <a:rPr sz="1100" b="1" i="0">
-                          <a:solidFill>
-                            <a:srgbClr val="0B1F33"/>
-                          </a:solidFill>
-                          <a:latin typeface="Segoe UI"/>
-                        </a:rPr>
-                        <a:t>Registered users</a:t>
-                      </a:r>
-                    </a:p>
-                  </a:txBody>
-                  <a:tcPr anchor="ctr">
-                    <a:solidFill>
-                      <a:srgbClr val="FFFFFF"/>
-                    </a:solidFill>
-                  </a:tcPr>
-                </a:tc>
-                <a:tc>
-                  <a:txBody>
-                    <a:bodyPr wrap="square"/>
-                    <a:lstStyle/>
-                    <a:p>
-                      <a:pPr algn="ctr"/>
-                      <a:r>
-                        <a:rPr sz="1100" b="0" i="0">
-                          <a:solidFill>
-                            <a:srgbClr val="0B1F33"/>
-                          </a:solidFill>
-                          <a:latin typeface="Segoe UI"/>
-                        </a:rPr>
-                        <a:t>80,000</a:t>
-                      </a:r>
-                    </a:p>
-                  </a:txBody>
-                  <a:tcPr anchor="ctr">
-                    <a:solidFill>
-                      <a:srgbClr val="FFFFFF"/>
-                    </a:solidFill>
-                  </a:tcPr>
-                </a:tc>
-                <a:tc>
-                  <a:txBody>
-                    <a:bodyPr wrap="square"/>
-                    <a:lstStyle/>
-                    <a:p>
-                      <a:pPr algn="ctr"/>
-                      <a:r>
-                        <a:rPr sz="1100" b="0" i="0">
-                          <a:solidFill>
-                            <a:srgbClr val="0B1F33"/>
-                          </a:solidFill>
-                          <a:latin typeface="Segoe UI"/>
-                        </a:rPr>
-                        <a:t>400,000</a:t>
-                      </a:r>
-                    </a:p>
-                  </a:txBody>
-                  <a:tcPr anchor="ctr">
-                    <a:solidFill>
-                      <a:srgbClr val="FFFFFF"/>
-                    </a:solidFill>
-                  </a:tcPr>
-                </a:tc>
-                <a:tc>
-                  <a:txBody>
-                    <a:bodyPr wrap="square"/>
-                    <a:lstStyle/>
-                    <a:p>
-                      <a:pPr algn="ctr"/>
-                      <a:r>
-                        <a:rPr sz="1100" b="0" i="0">
-                          <a:solidFill>
-                            <a:srgbClr val="0B1F33"/>
-                          </a:solidFill>
-                          <a:latin typeface="Segoe UI"/>
-                        </a:rPr>
-                        <a:t>1,200,000</a:t>
-                      </a:r>
-                    </a:p>
-                  </a:txBody>
-                  <a:tcPr anchor="ctr">
-                    <a:solidFill>
-                      <a:srgbClr val="FFFFFF"/>
-                    </a:solidFill>
-                  </a:tcPr>
-                </a:tc>
-              </a:tr>
-              <a:tr h="407670">
-                <a:tc>
-                  <a:txBody>
-                    <a:bodyPr wrap="square"/>
-                    <a:lstStyle/>
-                    <a:p>
-                      <a:pPr algn="l"/>
-                      <a:r>
-                        <a:rPr sz="1100" b="1" i="0">
-                          <a:solidFill>
-                            <a:srgbClr val="0B1F33"/>
-                          </a:solidFill>
-                          <a:latin typeface="Segoe UI"/>
-                        </a:rPr>
-                        <a:t>MAU</a:t>
-                      </a:r>
-                    </a:p>
-                  </a:txBody>
-                  <a:tcPr anchor="ctr">
-                    <a:solidFill>
-                      <a:srgbClr val="EEF3F8"/>
-                    </a:solidFill>
-                  </a:tcPr>
-                </a:tc>
-                <a:tc>
-                  <a:txBody>
-                    <a:bodyPr wrap="square"/>
-                    <a:lstStyle/>
-                    <a:p>
-                      <a:pPr algn="ctr"/>
-                      <a:r>
-                        <a:rPr sz="1100" b="0" i="0">
-                          <a:solidFill>
-                            <a:srgbClr val="0B1F33"/>
-                          </a:solidFill>
-                          <a:latin typeface="Segoe UI"/>
-                        </a:rPr>
-                        <a:t>20,000</a:t>
-                      </a:r>
-                    </a:p>
-                  </a:txBody>
-                  <a:tcPr anchor="ctr">
-                    <a:solidFill>
-                      <a:srgbClr val="EEF3F8"/>
-                    </a:solidFill>
-                  </a:tcPr>
-                </a:tc>
-                <a:tc>
-                  <a:txBody>
-                    <a:bodyPr wrap="square"/>
-                    <a:lstStyle/>
-                    <a:p>
-                      <a:pPr algn="ctr"/>
-                      <a:r>
-                        <a:rPr sz="1100" b="0" i="0">
-                          <a:solidFill>
-                            <a:srgbClr val="0B1F33"/>
-                          </a:solidFill>
-                          <a:latin typeface="Segoe UI"/>
-                        </a:rPr>
-                        <a:t>80,000</a:t>
-                      </a:r>
-                    </a:p>
-                  </a:txBody>
-                  <a:tcPr anchor="ctr">
-                    <a:solidFill>
-                      <a:srgbClr val="EEF3F8"/>
-                    </a:solidFill>
-                  </a:tcPr>
-                </a:tc>
-                <a:tc>
-                  <a:txBody>
-                    <a:bodyPr wrap="square"/>
-                    <a:lstStyle/>
-                    <a:p>
-                      <a:pPr algn="ctr"/>
-                      <a:r>
-                        <a:rPr sz="1100" b="0" i="0">
-                          <a:solidFill>
-                            <a:srgbClr val="0B1F33"/>
-                          </a:solidFill>
-                          <a:latin typeface="Segoe UI"/>
-                        </a:rPr>
-                        <a:t>220,000</a:t>
-                      </a:r>
-                    </a:p>
-                  </a:txBody>
-                  <a:tcPr anchor="ctr">
-                    <a:solidFill>
-                      <a:srgbClr val="EEF3F8"/>
-                    </a:solidFill>
-                  </a:tcPr>
-                </a:tc>
-              </a:tr>
-              <a:tr h="407670">
-                <a:tc>
-                  <a:txBody>
-                    <a:bodyPr wrap="square"/>
-                    <a:lstStyle/>
-                    <a:p>
-                      <a:pPr algn="l"/>
-                      <a:r>
-                        <a:rPr sz="1100" b="1" i="0">
-                          <a:solidFill>
-                            <a:srgbClr val="0B1F33"/>
-                          </a:solidFill>
-                          <a:latin typeface="Segoe UI"/>
-                        </a:rPr>
-                        <a:t>Paid users</a:t>
-                      </a:r>
-                    </a:p>
-                  </a:txBody>
-                  <a:tcPr anchor="ctr">
-                    <a:solidFill>
-                      <a:srgbClr val="FFFFFF"/>
-                    </a:solidFill>
-                  </a:tcPr>
-                </a:tc>
-                <a:tc>
-                  <a:txBody>
-                    <a:bodyPr wrap="square"/>
-                    <a:lstStyle/>
-                    <a:p>
-                      <a:pPr algn="ctr"/>
-                      <a:r>
-                        <a:rPr sz="1100" b="0" i="0">
-                          <a:solidFill>
-                            <a:srgbClr val="0B1F33"/>
-                          </a:solidFill>
-                          <a:latin typeface="Segoe UI"/>
-                        </a:rPr>
-                        <a:t>1,600</a:t>
-                      </a:r>
-                    </a:p>
-                  </a:txBody>
-                  <a:tcPr anchor="ctr">
-                    <a:solidFill>
-                      <a:srgbClr val="FFFFFF"/>
-                    </a:solidFill>
-                  </a:tcPr>
-                </a:tc>
-                <a:tc>
-                  <a:txBody>
-                    <a:bodyPr wrap="square"/>
-                    <a:lstStyle/>
-                    <a:p>
-                      <a:pPr algn="ctr"/>
-                      <a:r>
-                        <a:rPr sz="1100" b="0" i="0">
-                          <a:solidFill>
-                            <a:srgbClr val="0B1F33"/>
-                          </a:solidFill>
-                          <a:latin typeface="Segoe UI"/>
-                        </a:rPr>
-                        <a:t>16,000</a:t>
-                      </a:r>
-                    </a:p>
-                  </a:txBody>
-                  <a:tcPr anchor="ctr">
-                    <a:solidFill>
-                      <a:srgbClr val="FFFFFF"/>
-                    </a:solidFill>
-                  </a:tcPr>
-                </a:tc>
-                <a:tc>
-                  <a:txBody>
-                    <a:bodyPr wrap="square"/>
-                    <a:lstStyle/>
-                    <a:p>
-                      <a:pPr algn="ctr"/>
-                      <a:r>
-                        <a:rPr sz="1100" b="0" i="0">
-                          <a:solidFill>
-                            <a:srgbClr val="0B1F33"/>
-                          </a:solidFill>
-                          <a:latin typeface="Segoe UI"/>
-                        </a:rPr>
-                        <a:t>60,000</a:t>
-                      </a:r>
-                    </a:p>
-                  </a:txBody>
-                  <a:tcPr anchor="ctr">
-                    <a:solidFill>
-                      <a:srgbClr val="FFFFFF"/>
-                    </a:solidFill>
-                  </a:tcPr>
-                </a:tc>
-              </a:tr>
-              <a:tr h="407670">
-                <a:tc>
-                  <a:txBody>
-                    <a:bodyPr wrap="square"/>
-                    <a:lstStyle/>
-                    <a:p>
-                      <a:pPr algn="l"/>
-                      <a:r>
-                        <a:rPr sz="1100" b="1" i="0">
-                          <a:solidFill>
-                            <a:srgbClr val="0B1F33"/>
-                          </a:solidFill>
-                          <a:latin typeface="Segoe UI"/>
-                        </a:rPr>
-                        <a:t>AI revenue</a:t>
-                      </a:r>
-                    </a:p>
-                  </a:txBody>
-                  <a:tcPr anchor="ctr">
-                    <a:solidFill>
-                      <a:srgbClr val="EEF3F8"/>
-                    </a:solidFill>
-                  </a:tcPr>
-                </a:tc>
-                <a:tc>
-                  <a:txBody>
-                    <a:bodyPr wrap="square"/>
-                    <a:lstStyle/>
-                    <a:p>
-                      <a:pPr algn="ctr"/>
-                      <a:r>
-                        <a:rPr sz="1100" b="0" i="0">
-                          <a:solidFill>
-                            <a:srgbClr val="0B1F33"/>
-                          </a:solidFill>
-                          <a:latin typeface="Segoe UI"/>
-                        </a:rPr>
-                        <a:t>RMB 1.6M</a:t>
-                      </a:r>
-                    </a:p>
-                  </a:txBody>
-                  <a:tcPr anchor="ctr">
-                    <a:solidFill>
-                      <a:srgbClr val="EEF3F8"/>
-                    </a:solidFill>
-                  </a:tcPr>
-                </a:tc>
-                <a:tc>
-                  <a:txBody>
-                    <a:bodyPr wrap="square"/>
-                    <a:lstStyle/>
-                    <a:p>
-                      <a:pPr algn="ctr"/>
-                      <a:r>
-                        <a:rPr sz="1100" b="0" i="0">
-                          <a:solidFill>
-                            <a:srgbClr val="0B1F33"/>
-                          </a:solidFill>
-                          <a:latin typeface="Segoe UI"/>
-                        </a:rPr>
-                        <a:t>RMB 12.8M</a:t>
-                      </a:r>
-                    </a:p>
-                  </a:txBody>
-                  <a:tcPr anchor="ctr">
-                    <a:solidFill>
-                      <a:srgbClr val="EEF3F8"/>
-                    </a:solidFill>
-                  </a:tcPr>
-                </a:tc>
-                <a:tc>
-                  <a:txBody>
-                    <a:bodyPr wrap="square"/>
-                    <a:lstStyle/>
-                    <a:p>
-                      <a:pPr algn="ctr"/>
-                      <a:r>
-                        <a:rPr sz="1100" b="0" i="0">
-                          <a:solidFill>
-                            <a:srgbClr val="0B1F33"/>
-                          </a:solidFill>
-                          <a:latin typeface="Segoe UI"/>
-                        </a:rPr>
-                        <a:t>RMB 42.0M</a:t>
-                      </a:r>
-                    </a:p>
-                  </a:txBody>
-                  <a:tcPr anchor="ctr">
-                    <a:solidFill>
-                      <a:srgbClr val="EEF3F8"/>
-                    </a:solidFill>
-                  </a:tcPr>
-                </a:tc>
-              </a:tr>
-              <a:tr h="407670">
-                <a:tc>
-                  <a:txBody>
-                    <a:bodyPr wrap="square"/>
-                    <a:lstStyle/>
-                    <a:p>
-                      <a:pPr algn="l"/>
-                      <a:r>
-                        <a:rPr sz="1100" b="1" i="0">
-                          <a:solidFill>
-                            <a:srgbClr val="0B1F33"/>
-                          </a:solidFill>
-                          <a:latin typeface="Segoe UI"/>
-                        </a:rPr>
-                        <a:t>Career services</a:t>
-                      </a:r>
-                    </a:p>
-                  </a:txBody>
-                  <a:tcPr anchor="ctr">
-                    <a:solidFill>
-                      <a:srgbClr val="FFFFFF"/>
-                    </a:solidFill>
-                  </a:tcPr>
-                </a:tc>
-                <a:tc>
-                  <a:txBody>
-                    <a:bodyPr wrap="square"/>
-                    <a:lstStyle/>
-                    <a:p>
-                      <a:pPr algn="ctr"/>
-                      <a:r>
-                        <a:rPr sz="1100" b="0" i="0">
-                          <a:solidFill>
-                            <a:srgbClr val="0B1F33"/>
-                          </a:solidFill>
-                          <a:latin typeface="Segoe UI"/>
-                        </a:rPr>
-                        <a:t>RMB 4.0M</a:t>
-                      </a:r>
-                    </a:p>
-                  </a:txBody>
-                  <a:tcPr anchor="ctr">
-                    <a:solidFill>
-                      <a:srgbClr val="FFFFFF"/>
-                    </a:solidFill>
-                  </a:tcPr>
-                </a:tc>
-                <a:tc>
-                  <a:txBody>
-                    <a:bodyPr wrap="square"/>
-                    <a:lstStyle/>
-                    <a:p>
-                      <a:pPr algn="ctr"/>
-                      <a:r>
-                        <a:rPr sz="1100" b="0" i="0">
-                          <a:solidFill>
-                            <a:srgbClr val="0B1F33"/>
-                          </a:solidFill>
-                          <a:latin typeface="Segoe UI"/>
-                        </a:rPr>
-                        <a:t>RMB 6.5M</a:t>
-                      </a:r>
-                    </a:p>
-                  </a:txBody>
-                  <a:tcPr anchor="ctr">
-                    <a:solidFill>
-                      <a:srgbClr val="FFFFFF"/>
-                    </a:solidFill>
-                  </a:tcPr>
-                </a:tc>
-                <a:tc>
-                  <a:txBody>
-                    <a:bodyPr wrap="square"/>
-                    <a:lstStyle/>
-                    <a:p>
-                      <a:pPr algn="ctr"/>
-                      <a:r>
-                        <a:rPr sz="1100" b="0" i="0">
-                          <a:solidFill>
-                            <a:srgbClr val="0B1F33"/>
-                          </a:solidFill>
-                          <a:latin typeface="Segoe UI"/>
-                        </a:rPr>
-                        <a:t>RMB 9.0M</a:t>
-                      </a:r>
-                    </a:p>
-                  </a:txBody>
-                  <a:tcPr anchor="ctr">
-                    <a:solidFill>
-                      <a:srgbClr val="FFFFFF"/>
-                    </a:solidFill>
-                  </a:tcPr>
-                </a:tc>
-              </a:tr>
-              <a:tr h="407670">
-                <a:tc>
-                  <a:txBody>
-                    <a:bodyPr wrap="square"/>
-                    <a:lstStyle/>
-                    <a:p>
-                      <a:pPr algn="l"/>
-                      <a:r>
-                        <a:rPr sz="1100" b="1" i="0">
-                          <a:solidFill>
-                            <a:srgbClr val="0B1F33"/>
-                          </a:solidFill>
-                          <a:latin typeface="Segoe UI"/>
-                        </a:rPr>
-                        <a:t>Commission revenue</a:t>
-                      </a:r>
-                    </a:p>
-                  </a:txBody>
-                  <a:tcPr anchor="ctr">
-                    <a:solidFill>
-                      <a:srgbClr val="EEF3F8"/>
-                    </a:solidFill>
-                  </a:tcPr>
-                </a:tc>
-                <a:tc>
-                  <a:txBody>
-                    <a:bodyPr wrap="square"/>
-                    <a:lstStyle/>
-                    <a:p>
-                      <a:pPr algn="ctr"/>
-                      <a:r>
-                        <a:rPr sz="1100" b="0" i="0">
-                          <a:solidFill>
-                            <a:srgbClr val="0B1F33"/>
-                          </a:solidFill>
-                          <a:latin typeface="Segoe UI"/>
-                        </a:rPr>
-                        <a:t>RMB 0.2M</a:t>
-                      </a:r>
-                    </a:p>
-                  </a:txBody>
-                  <a:tcPr anchor="ctr">
-                    <a:solidFill>
-                      <a:srgbClr val="EEF3F8"/>
-                    </a:solidFill>
-                  </a:tcPr>
-                </a:tc>
-                <a:tc>
-                  <a:txBody>
-                    <a:bodyPr wrap="square"/>
-                    <a:lstStyle/>
-                    <a:p>
-                      <a:pPr algn="ctr"/>
-                      <a:r>
-                        <a:rPr sz="1100" b="0" i="0">
-                          <a:solidFill>
-                            <a:srgbClr val="0B1F33"/>
-                          </a:solidFill>
-                          <a:latin typeface="Segoe UI"/>
-                        </a:rPr>
-                        <a:t>RMB 2.4M</a:t>
-                      </a:r>
-                    </a:p>
-                  </a:txBody>
-                  <a:tcPr anchor="ctr">
-                    <a:solidFill>
-                      <a:srgbClr val="EEF3F8"/>
-                    </a:solidFill>
-                  </a:tcPr>
-                </a:tc>
-                <a:tc>
-                  <a:txBody>
-                    <a:bodyPr wrap="square"/>
-                    <a:lstStyle/>
-                    <a:p>
-                      <a:pPr algn="ctr"/>
-                      <a:r>
-                        <a:rPr sz="1100" b="0" i="0">
-                          <a:solidFill>
-                            <a:srgbClr val="0B1F33"/>
-                          </a:solidFill>
-                          <a:latin typeface="Segoe UI"/>
-                        </a:rPr>
-                        <a:t>RMB 8.5M</a:t>
-                      </a:r>
-                    </a:p>
-                  </a:txBody>
-                  <a:tcPr anchor="ctr">
-                    <a:solidFill>
-                      <a:srgbClr val="EEF3F8"/>
-                    </a:solidFill>
-                  </a:tcPr>
-                </a:tc>
-              </a:tr>
-              <a:tr h="407670">
-                <a:tc>
-                  <a:txBody>
-                    <a:bodyPr wrap="square"/>
-                    <a:lstStyle/>
-                    <a:p>
-                      <a:pPr algn="l"/>
-                      <a:r>
-                        <a:rPr sz="1100" b="1" i="0">
-                          <a:solidFill>
-                            <a:srgbClr val="0B1F33"/>
-                          </a:solidFill>
-                          <a:latin typeface="Segoe UI"/>
-                        </a:rPr>
-                        <a:t>Advertising</a:t>
-                      </a:r>
-                    </a:p>
-                  </a:txBody>
-                  <a:tcPr anchor="ctr">
-                    <a:solidFill>
-                      <a:srgbClr val="FFFFFF"/>
-                    </a:solidFill>
-                  </a:tcPr>
-                </a:tc>
-                <a:tc>
-                  <a:txBody>
-                    <a:bodyPr wrap="square"/>
-                    <a:lstStyle/>
-                    <a:p>
-                      <a:pPr algn="ctr"/>
-                      <a:r>
-                        <a:rPr sz="1100" b="0" i="0">
-                          <a:solidFill>
-                            <a:srgbClr val="0B1F33"/>
-                          </a:solidFill>
-                          <a:latin typeface="Segoe UI"/>
-                        </a:rPr>
-                        <a:t>—</a:t>
-                      </a:r>
-                    </a:p>
-                  </a:txBody>
-                  <a:tcPr anchor="ctr">
-                    <a:solidFill>
-                      <a:srgbClr val="FFFFFF"/>
-                    </a:solidFill>
-                  </a:tcPr>
-                </a:tc>
-                <a:tc>
-                  <a:txBody>
-                    <a:bodyPr wrap="square"/>
-                    <a:lstStyle/>
-                    <a:p>
-                      <a:pPr algn="ctr"/>
-                      <a:r>
-                        <a:rPr sz="1100" b="0" i="0">
-                          <a:solidFill>
-                            <a:srgbClr val="0B1F33"/>
-                          </a:solidFill>
-                          <a:latin typeface="Segoe UI"/>
-                        </a:rPr>
-                        <a:t>RMB 1.2M</a:t>
-                      </a:r>
-                    </a:p>
-                  </a:txBody>
-                  <a:tcPr anchor="ctr">
-                    <a:solidFill>
-                      <a:srgbClr val="FFFFFF"/>
-                    </a:solidFill>
-                  </a:tcPr>
-                </a:tc>
-                <a:tc>
-                  <a:txBody>
-                    <a:bodyPr wrap="square"/>
-                    <a:lstStyle/>
-                    <a:p>
-                      <a:pPr algn="ctr"/>
-                      <a:r>
-                        <a:rPr sz="1100" b="0" i="0">
-                          <a:solidFill>
-                            <a:srgbClr val="0B1F33"/>
-                          </a:solidFill>
-                          <a:latin typeface="Segoe UI"/>
-                        </a:rPr>
-                        <a:t>RMB 5.0M</a:t>
-                      </a:r>
-                    </a:p>
-                  </a:txBody>
-                  <a:tcPr anchor="ctr">
-                    <a:solidFill>
-                      <a:srgbClr val="FFFFFF"/>
-                    </a:solidFill>
-                  </a:tcPr>
-                </a:tc>
-              </a:tr>
-              <a:tr h="407670">
-                <a:tc>
-                  <a:txBody>
-                    <a:bodyPr wrap="square"/>
-                    <a:lstStyle/>
-                    <a:p>
-                      <a:pPr algn="l"/>
-                      <a:r>
-                        <a:rPr sz="1100" b="1" i="0">
-                          <a:solidFill>
-                            <a:srgbClr val="0B1F33"/>
-                          </a:solidFill>
-                          <a:latin typeface="Segoe UI"/>
-                        </a:rPr>
-                        <a:t>B2B revenue</a:t>
-                      </a:r>
-                    </a:p>
-                  </a:txBody>
-                  <a:tcPr anchor="ctr">
-                    <a:solidFill>
-                      <a:srgbClr val="EEF3F8"/>
-                    </a:solidFill>
-                  </a:tcPr>
-                </a:tc>
-                <a:tc>
-                  <a:txBody>
-                    <a:bodyPr wrap="square"/>
-                    <a:lstStyle/>
-                    <a:p>
-                      <a:pPr algn="ctr"/>
-                      <a:r>
-                        <a:rPr sz="1100" b="0" i="0">
-                          <a:solidFill>
-                            <a:srgbClr val="0B1F33"/>
-                          </a:solidFill>
-                          <a:latin typeface="Segoe UI"/>
-                        </a:rPr>
-                        <a:t>RMB 0.4M</a:t>
-                      </a:r>
-                    </a:p>
-                  </a:txBody>
-                  <a:tcPr anchor="ctr">
-                    <a:solidFill>
-                      <a:srgbClr val="EEF3F8"/>
-                    </a:solidFill>
-                  </a:tcPr>
-                </a:tc>
-                <a:tc>
-                  <a:txBody>
-                    <a:bodyPr wrap="square"/>
-                    <a:lstStyle/>
-                    <a:p>
-                      <a:pPr algn="ctr"/>
-                      <a:r>
-                        <a:rPr sz="1100" b="0" i="0">
-                          <a:solidFill>
-                            <a:srgbClr val="0B1F33"/>
-                          </a:solidFill>
-                          <a:latin typeface="Segoe UI"/>
-                        </a:rPr>
-                        <a:t>RMB 3.0M</a:t>
-                      </a:r>
-                    </a:p>
-                  </a:txBody>
-                  <a:tcPr anchor="ctr">
-                    <a:solidFill>
-                      <a:srgbClr val="EEF3F8"/>
-                    </a:solidFill>
-                  </a:tcPr>
-                </a:tc>
-                <a:tc>
-                  <a:txBody>
-                    <a:bodyPr wrap="square"/>
-                    <a:lstStyle/>
-                    <a:p>
-                      <a:pPr algn="ctr"/>
-                      <a:r>
-                        <a:rPr sz="1100" b="0" i="0">
-                          <a:solidFill>
-                            <a:srgbClr val="0B1F33"/>
-                          </a:solidFill>
-                          <a:latin typeface="Segoe UI"/>
-                        </a:rPr>
-                        <a:t>RMB 10.0M</a:t>
-                      </a:r>
-                    </a:p>
-                  </a:txBody>
-                  <a:tcPr anchor="ctr">
-                    <a:solidFill>
-                      <a:srgbClr val="EEF3F8"/>
-                    </a:solidFill>
-                  </a:tcPr>
-                </a:tc>
-              </a:tr>
-              <a:tr h="407670">
-                <a:tc>
-                  <a:txBody>
-                    <a:bodyPr wrap="square"/>
-                    <a:lstStyle/>
-                    <a:p>
-                      <a:pPr algn="l"/>
-                      <a:r>
-                        <a:rPr sz="1100" b="1" i="0">
-                          <a:solidFill>
-                            <a:srgbClr val="FFFFFF"/>
-                          </a:solidFill>
-                          <a:latin typeface="Segoe UI"/>
-                        </a:rPr>
-                        <a:t>Total revenue</a:t>
-                      </a:r>
-                    </a:p>
-                  </a:txBody>
-                  <a:tcPr anchor="ctr">
-                    <a:solidFill>
-                      <a:srgbClr val="0B1F33"/>
-                    </a:solidFill>
-                  </a:tcPr>
-                </a:tc>
-                <a:tc>
-                  <a:txBody>
-                    <a:bodyPr wrap="square"/>
-                    <a:lstStyle/>
-                    <a:p>
-                      <a:pPr algn="ctr"/>
-                      <a:r>
-                        <a:rPr sz="1100" b="1" i="0">
-                          <a:solidFill>
-                            <a:srgbClr val="FFFFFF"/>
-                          </a:solidFill>
-                          <a:latin typeface="Segoe UI"/>
-                        </a:rPr>
-                        <a:t>RMB 6.2M</a:t>
-                      </a:r>
-                    </a:p>
-                  </a:txBody>
-                  <a:tcPr anchor="ctr">
-                    <a:solidFill>
-                      <a:srgbClr val="0B1F33"/>
-                    </a:solidFill>
-                  </a:tcPr>
-                </a:tc>
-                <a:tc>
-                  <a:txBody>
-                    <a:bodyPr wrap="square"/>
-                    <a:lstStyle/>
-                    <a:p>
-                      <a:pPr algn="ctr"/>
-                      <a:r>
-                        <a:rPr sz="1100" b="1" i="0">
-                          <a:solidFill>
-                            <a:srgbClr val="FFFFFF"/>
-                          </a:solidFill>
-                          <a:latin typeface="Segoe UI"/>
-                        </a:rPr>
-                        <a:t>RMB 25.9M</a:t>
-                      </a:r>
-                    </a:p>
-                  </a:txBody>
-                  <a:tcPr anchor="ctr">
-                    <a:solidFill>
-                      <a:srgbClr val="0B1F33"/>
-                    </a:solidFill>
-                  </a:tcPr>
-                </a:tc>
-                <a:tc>
-                  <a:txBody>
-                    <a:bodyPr wrap="square"/>
-                    <a:lstStyle/>
-                    <a:p>
-                      <a:pPr algn="ctr"/>
-                      <a:r>
-                        <a:rPr sz="1100" b="1" i="0">
-                          <a:solidFill>
-                            <a:srgbClr val="FFFFFF"/>
-                          </a:solidFill>
-                          <a:latin typeface="Segoe UI"/>
-                        </a:rPr>
-                        <a:t>RMB 74.5M</a:t>
-                      </a:r>
-                    </a:p>
-                  </a:txBody>
-                  <a:tcPr anchor="ctr">
-                    <a:solidFill>
-                      <a:srgbClr val="0B1F33"/>
-                    </a:solidFill>
-                  </a:tcPr>
-                </a:tc>
-              </a:tr>
-              <a:tr h="407670">
-                <a:tc>
-                  <a:txBody>
-                    <a:bodyPr wrap="square"/>
-                    <a:lstStyle/>
-                    <a:p>
-                      <a:pPr algn="l"/>
-                      <a:r>
-                        <a:rPr sz="1100" b="1" i="0">
-                          <a:solidFill>
-                            <a:srgbClr val="FFFFFF"/>
-                          </a:solidFill>
-                          <a:latin typeface="Segoe UI"/>
-                        </a:rPr>
-                        <a:t>Gross profit</a:t>
-                      </a:r>
-                    </a:p>
-                  </a:txBody>
-                  <a:tcPr anchor="ctr">
-                    <a:solidFill>
-                      <a:srgbClr val="0B1F33"/>
-                    </a:solidFill>
-                  </a:tcPr>
-                </a:tc>
-                <a:tc>
-                  <a:txBody>
-                    <a:bodyPr wrap="square"/>
-                    <a:lstStyle/>
-                    <a:p>
-                      <a:pPr algn="ctr"/>
-                      <a:r>
-                        <a:rPr sz="1100" b="1" i="0">
-                          <a:solidFill>
-                            <a:srgbClr val="FFFFFF"/>
-                          </a:solidFill>
-                          <a:latin typeface="Segoe UI"/>
-                        </a:rPr>
-                        <a:t>RMB 3.5M</a:t>
-                      </a:r>
-                    </a:p>
-                  </a:txBody>
-                  <a:tcPr anchor="ctr">
-                    <a:solidFill>
-                      <a:srgbClr val="0B1F33"/>
-                    </a:solidFill>
-                  </a:tcPr>
-                </a:tc>
-                <a:tc>
-                  <a:txBody>
-                    <a:bodyPr wrap="square"/>
-                    <a:lstStyle/>
-                    <a:p>
-                      <a:pPr algn="ctr"/>
-                      <a:r>
-                        <a:rPr sz="1100" b="1" i="0">
-                          <a:solidFill>
-                            <a:srgbClr val="FFFFFF"/>
-                          </a:solidFill>
-                          <a:latin typeface="Segoe UI"/>
-                        </a:rPr>
-                        <a:t>RMB 16.8M</a:t>
-                      </a:r>
-                    </a:p>
-                  </a:txBody>
-                  <a:tcPr anchor="ctr">
-                    <a:solidFill>
-                      <a:srgbClr val="0B1F33"/>
-                    </a:solidFill>
-                  </a:tcPr>
-                </a:tc>
-                <a:tc>
-                  <a:txBody>
-                    <a:bodyPr wrap="square"/>
-                    <a:lstStyle/>
-                    <a:p>
-                      <a:pPr algn="ctr"/>
-                      <a:r>
-                        <a:rPr sz="1100" b="1" i="0">
-                          <a:solidFill>
-                            <a:srgbClr val="FFFFFF"/>
-                          </a:solidFill>
-                          <a:latin typeface="Segoe UI"/>
-                        </a:rPr>
-                        <a:t>RMB 50.0M</a:t>
-                      </a:r>
-                    </a:p>
-                  </a:txBody>
-                  <a:tcPr anchor="ctr">
-                    <a:solidFill>
-                      <a:srgbClr val="0B1F33"/>
-                    </a:solidFill>
-                  </a:tcPr>
-                </a:tc>
-              </a:tr>
-              <a:tr h="407670">
-                <a:tc>
-                  <a:txBody>
-                    <a:bodyPr wrap="square"/>
-                    <a:lstStyle/>
-                    <a:p>
-                      <a:pPr algn="l"/>
-                      <a:r>
-                        <a:rPr sz="1100" b="1" i="0">
-                          <a:solidFill>
-                            <a:srgbClr val="FFFFFF"/>
-                          </a:solidFill>
-                          <a:latin typeface="Segoe UI"/>
-                        </a:rPr>
-                        <a:t>EBITDA</a:t>
-                      </a:r>
-                    </a:p>
-                  </a:txBody>
-                  <a:tcPr anchor="ctr">
-                    <a:solidFill>
-                      <a:srgbClr val="0B1F33"/>
-                    </a:solidFill>
-                  </a:tcPr>
-                </a:tc>
-                <a:tc>
-                  <a:txBody>
-                    <a:bodyPr wrap="square"/>
-                    <a:lstStyle/>
-                    <a:p>
-                      <a:pPr algn="ctr"/>
-                      <a:r>
-                        <a:rPr sz="1100" b="1" i="0">
-                          <a:solidFill>
-                            <a:srgbClr val="FFFFFF"/>
-                          </a:solidFill>
-                          <a:latin typeface="Segoe UI"/>
-                        </a:rPr>
-                        <a:t>(RMB 9.0M)</a:t>
-                      </a:r>
-                    </a:p>
-                  </a:txBody>
-                  <a:tcPr anchor="ctr">
-                    <a:solidFill>
-                      <a:srgbClr val="0B1F33"/>
-                    </a:solidFill>
-                  </a:tcPr>
-                </a:tc>
-                <a:tc>
-                  <a:txBody>
-                    <a:bodyPr wrap="square"/>
-                    <a:lstStyle/>
-                    <a:p>
-                      <a:pPr algn="ctr"/>
-                      <a:r>
-                        <a:rPr sz="1100" b="1" i="0">
-                          <a:solidFill>
-                            <a:srgbClr val="FFFFFF"/>
-                          </a:solidFill>
-                          <a:latin typeface="Segoe UI"/>
-                        </a:rPr>
-                        <a:t>RMB 0.8M</a:t>
-                      </a:r>
-                    </a:p>
-                  </a:txBody>
-                  <a:tcPr anchor="ctr">
-                    <a:solidFill>
-                      <a:srgbClr val="0B1F33"/>
-                    </a:solidFill>
-                  </a:tcPr>
-                </a:tc>
-                <a:tc>
-                  <a:txBody>
-                    <a:bodyPr wrap="square"/>
-                    <a:lstStyle/>
-                    <a:p>
-                      <a:pPr algn="ctr"/>
-                      <a:r>
-                        <a:rPr sz="1100" b="1" i="0">
-                          <a:solidFill>
-                            <a:srgbClr val="FFFFFF"/>
-                          </a:solidFill>
-                          <a:latin typeface="Segoe UI"/>
-                        </a:rPr>
-                        <a:t>RMB 16.5M</a:t>
-                      </a:r>
-                    </a:p>
-                  </a:txBody>
-                  <a:tcPr anchor="ctr">
-                    <a:solidFill>
-                      <a:srgbClr val="0B1F33"/>
-                    </a:solidFill>
-                  </a:tcPr>
-                </a:tc>
-              </a:tr>
-            </a:tbl>
-          </a:graphicData>
-        </a:graphic>
-      </p:graphicFrame>
-      <p:sp>
-        <p:nvSpPr>
-          <p:cNvPr id="5" name="TextBox 4"/>
-          <p:cNvSpPr txBox="1"/>
-          <p:nvPr/>
-        </p:nvSpPr>
-        <p:spPr>
-          <a:xfrm>
-            <a:off x="502920" y="6016752"/>
-            <a:ext cx="11183112" cy="365760"/>
-          </a:xfrm>
-          <a:prstGeom prst="rect">
-            <a:avLst/>
-          </a:prstGeom>
-          <a:noFill/>
-        </p:spPr>
-        <p:txBody>
-          <a:bodyPr wrap="square" anchor="t"/>
-          <a:lstStyle/>
-          <a:p>
-            <a:pPr algn="l"/>
-            <a:r>
-              <a:rPr sz="1000" b="0" i="0">
+              <a:t>Three-Year Financial Model</a:t>
+            </a:r>
+          </a:p>
+        </p:txBody>
+      </p:sp>
+      <p:sp>
+        <p:nvSpPr>
+          <p:cNvPr id="4" name="TextBox 3"/>
+          <p:cNvSpPr txBox="1"/>
+          <p:nvPr/>
+        </p:nvSpPr>
+        <p:spPr>
+          <a:xfrm>
+            <a:off x="502920" y="841248"/>
+            <a:ext cx="11183112" cy="256032"/>
+          </a:xfrm>
+          <a:prstGeom prst="rect">
+            <a:avLst/>
+          </a:prstGeom>
+          <a:noFill/>
+        </p:spPr>
+        <p:txBody>
+          <a:bodyPr wrap="square" anchor="t"/>
+          <a:lstStyle/>
+          <a:p>
+            <a:pPr algn="l"/>
+            <a:r>
+              <a:rPr sz="1300" b="0" i="0">
                 <a:solidFill>
                   <a:srgbClr val="5E6E80"/>
                 </a:solidFill>
                 <a:latin typeface="Segoe UI"/>
               </a:rPr>
-              <a:t>Illustrative management projections only — not a forecast. Year 1 is the first 12 months post-financing.  USD at an illustrative RMB 6.73 / US$1. Figures labeled illustrative are management projections, not forecasts.</a:t>
-            </a:r>
+              <a:t>Path from free AI Resume to a paid multi-stream platform</a:t>
+            </a:r>
+          </a:p>
+        </p:txBody>
+      </p:sp>
+      <p:sp>
+        <p:nvSpPr>
+          <p:cNvPr id="5" name="Rectangle 4"/>
+          <p:cNvSpPr/>
+          <p:nvPr/>
+        </p:nvSpPr>
+        <p:spPr>
+          <a:xfrm>
+            <a:off x="502920" y="1115568"/>
+            <a:ext cx="11183112" cy="5102352"/>
+          </a:xfrm>
+          <a:prstGeom prst="rect">
+            <a:avLst/>
+          </a:prstGeom>
+          <a:solidFill>
+            <a:srgbClr val="FFFFFF"/>
+          </a:solidFill>
+          <a:ln>
+            <a:noFill/>
+          </a:ln>
+        </p:spPr>
+        <p:style>
+          <a:lnRef idx="1">
+            <a:schemeClr val="accent1"/>
+          </a:lnRef>
+          <a:fillRef idx="3">
+            <a:schemeClr val="accent1"/>
+          </a:fillRef>
+          <a:effectRef idx="2">
+            <a:schemeClr val="accent1"/>
+          </a:effectRef>
+          <a:fontRef idx="minor">
+            <a:schemeClr val="lt1"/>
+          </a:fontRef>
+        </p:style>
+        <p:txBody>
+          <a:bodyPr rtlCol="0" anchor="ctr"/>
+          <a:lstStyle/>
+          <a:p>
+            <a:pPr algn="ctr"/>
           </a:p>
         </p:txBody>
       </p:sp>
@@ -25320,8 +24216,8 @@
         </p:nvSpPr>
         <p:spPr>
           <a:xfrm>
-            <a:off x="0" y="0"/>
-            <a:ext cx="12191695" cy="73152"/>
+            <a:off x="502920" y="1115568"/>
+            <a:ext cx="11183112" cy="402336"/>
           </a:xfrm>
           <a:prstGeom prst="rect">
             <a:avLst/>
@@ -25363,8 +24259,348 @@
         </p:nvSpPr>
         <p:spPr>
           <a:xfrm>
-            <a:off x="0" y="6473952"/>
-            <a:ext cx="12191695" cy="384048"/>
+            <a:off x="502920" y="1115568"/>
+            <a:ext cx="73152" cy="5102352"/>
+          </a:xfrm>
+          <a:prstGeom prst="rect">
+            <a:avLst/>
+          </a:prstGeom>
+          <a:solidFill>
+            <a:srgbClr val="0A6B63"/>
+          </a:solidFill>
+          <a:ln>
+            <a:noFill/>
+          </a:ln>
+        </p:spPr>
+        <p:style>
+          <a:lnRef idx="1">
+            <a:schemeClr val="accent1"/>
+          </a:lnRef>
+          <a:fillRef idx="3">
+            <a:schemeClr val="accent1"/>
+          </a:fillRef>
+          <a:effectRef idx="2">
+            <a:schemeClr val="accent1"/>
+          </a:effectRef>
+          <a:fontRef idx="minor">
+            <a:schemeClr val="lt1"/>
+          </a:fontRef>
+        </p:style>
+        <p:txBody>
+          <a:bodyPr rtlCol="0" anchor="ctr"/>
+          <a:lstStyle/>
+          <a:p>
+            <a:pPr algn="ctr"/>
+          </a:p>
+        </p:txBody>
+      </p:sp>
+      <p:sp>
+        <p:nvSpPr>
+          <p:cNvPr id="8" name="TextBox 7"/>
+          <p:cNvSpPr txBox="1"/>
+          <p:nvPr/>
+        </p:nvSpPr>
+        <p:spPr>
+          <a:xfrm>
+            <a:off x="749808" y="1179576"/>
+            <a:ext cx="3383280" cy="292608"/>
+          </a:xfrm>
+          <a:prstGeom prst="rect">
+            <a:avLst/>
+          </a:prstGeom>
+          <a:noFill/>
+        </p:spPr>
+        <p:txBody>
+          <a:bodyPr wrap="square" anchor="t"/>
+          <a:lstStyle/>
+          <a:p>
+            <a:pPr algn="l"/>
+            <a:r>
+              <a:rPr sz="1200" b="1" i="0">
+                <a:solidFill>
+                  <a:srgbClr val="FFFFFF"/>
+                </a:solidFill>
+                <a:latin typeface="Segoe UI"/>
+              </a:rPr>
+              <a:t>Metric</a:t>
+            </a:r>
+          </a:p>
+        </p:txBody>
+      </p:sp>
+      <p:sp>
+        <p:nvSpPr>
+          <p:cNvPr id="9" name="TextBox 8"/>
+          <p:cNvSpPr txBox="1"/>
+          <p:nvPr/>
+        </p:nvSpPr>
+        <p:spPr>
+          <a:xfrm>
+            <a:off x="4297680" y="1179576"/>
+            <a:ext cx="2377440" cy="292608"/>
+          </a:xfrm>
+          <a:prstGeom prst="rect">
+            <a:avLst/>
+          </a:prstGeom>
+          <a:noFill/>
+        </p:spPr>
+        <p:txBody>
+          <a:bodyPr wrap="square" anchor="t"/>
+          <a:lstStyle/>
+          <a:p>
+            <a:pPr algn="ctr"/>
+            <a:r>
+              <a:rPr sz="1200" b="1" i="0">
+                <a:solidFill>
+                  <a:srgbClr val="FFFFFF"/>
+                </a:solidFill>
+                <a:latin typeface="Segoe UI"/>
+              </a:rPr>
+              <a:t>Year 1</a:t>
+            </a:r>
+          </a:p>
+        </p:txBody>
+      </p:sp>
+      <p:sp>
+        <p:nvSpPr>
+          <p:cNvPr id="10" name="TextBox 9"/>
+          <p:cNvSpPr txBox="1"/>
+          <p:nvPr/>
+        </p:nvSpPr>
+        <p:spPr>
+          <a:xfrm>
+            <a:off x="6903720" y="1179576"/>
+            <a:ext cx="2377440" cy="292608"/>
+          </a:xfrm>
+          <a:prstGeom prst="rect">
+            <a:avLst/>
+          </a:prstGeom>
+          <a:noFill/>
+        </p:spPr>
+        <p:txBody>
+          <a:bodyPr wrap="square" anchor="t"/>
+          <a:lstStyle/>
+          <a:p>
+            <a:pPr algn="ctr"/>
+            <a:r>
+              <a:rPr sz="1200" b="1" i="0">
+                <a:solidFill>
+                  <a:srgbClr val="FFFFFF"/>
+                </a:solidFill>
+                <a:latin typeface="Segoe UI"/>
+              </a:rPr>
+              <a:t>Year 2</a:t>
+            </a:r>
+          </a:p>
+        </p:txBody>
+      </p:sp>
+      <p:sp>
+        <p:nvSpPr>
+          <p:cNvPr id="11" name="TextBox 10"/>
+          <p:cNvSpPr txBox="1"/>
+          <p:nvPr/>
+        </p:nvSpPr>
+        <p:spPr>
+          <a:xfrm>
+            <a:off x="9509760" y="1179576"/>
+            <a:ext cx="2377440" cy="292608"/>
+          </a:xfrm>
+          <a:prstGeom prst="rect">
+            <a:avLst/>
+          </a:prstGeom>
+          <a:noFill/>
+        </p:spPr>
+        <p:txBody>
+          <a:bodyPr wrap="square" anchor="t"/>
+          <a:lstStyle/>
+          <a:p>
+            <a:pPr algn="ctr"/>
+            <a:r>
+              <a:rPr sz="1200" b="1" i="0">
+                <a:solidFill>
+                  <a:srgbClr val="FFFFFF"/>
+                </a:solidFill>
+                <a:latin typeface="Segoe UI"/>
+              </a:rPr>
+              <a:t>Year 3</a:t>
+            </a:r>
+          </a:p>
+        </p:txBody>
+      </p:sp>
+      <p:sp>
+        <p:nvSpPr>
+          <p:cNvPr id="12" name="TextBox 11"/>
+          <p:cNvSpPr txBox="1"/>
+          <p:nvPr/>
+        </p:nvSpPr>
+        <p:spPr>
+          <a:xfrm>
+            <a:off x="749808" y="1609344"/>
+            <a:ext cx="10515600" cy="201168"/>
+          </a:xfrm>
+          <a:prstGeom prst="rect">
+            <a:avLst/>
+          </a:prstGeom>
+          <a:noFill/>
+        </p:spPr>
+        <p:txBody>
+          <a:bodyPr wrap="square" anchor="t"/>
+          <a:lstStyle/>
+          <a:p>
+            <a:pPr algn="l"/>
+            <a:r>
+              <a:rPr sz="1000" b="1" i="0">
+                <a:solidFill>
+                  <a:srgbClr val="0A6B63"/>
+                </a:solidFill>
+                <a:latin typeface="Segoe UI"/>
+              </a:rPr>
+              <a:t>USERS</a:t>
+            </a:r>
+          </a:p>
+        </p:txBody>
+      </p:sp>
+      <p:sp>
+        <p:nvSpPr>
+          <p:cNvPr id="13" name="TextBox 12"/>
+          <p:cNvSpPr txBox="1"/>
+          <p:nvPr/>
+        </p:nvSpPr>
+        <p:spPr>
+          <a:xfrm>
+            <a:off x="749808" y="1837943"/>
+            <a:ext cx="3383280" cy="274320"/>
+          </a:xfrm>
+          <a:prstGeom prst="rect">
+            <a:avLst/>
+          </a:prstGeom>
+          <a:noFill/>
+        </p:spPr>
+        <p:txBody>
+          <a:bodyPr wrap="square" anchor="t"/>
+          <a:lstStyle/>
+          <a:p>
+            <a:pPr algn="l"/>
+            <a:r>
+              <a:rPr sz="1300" b="0" i="0">
+                <a:solidFill>
+                  <a:srgbClr val="0B1F33"/>
+                </a:solidFill>
+                <a:latin typeface="Segoe UI"/>
+              </a:rPr>
+              <a:t>Registered users</a:t>
+            </a:r>
+          </a:p>
+        </p:txBody>
+      </p:sp>
+      <p:sp>
+        <p:nvSpPr>
+          <p:cNvPr id="14" name="TextBox 13"/>
+          <p:cNvSpPr txBox="1"/>
+          <p:nvPr/>
+        </p:nvSpPr>
+        <p:spPr>
+          <a:xfrm>
+            <a:off x="4297680" y="1828800"/>
+            <a:ext cx="2377440" cy="292608"/>
+          </a:xfrm>
+          <a:prstGeom prst="rect">
+            <a:avLst/>
+          </a:prstGeom>
+          <a:noFill/>
+        </p:spPr>
+        <p:txBody>
+          <a:bodyPr wrap="square" anchor="t"/>
+          <a:lstStyle/>
+          <a:p>
+            <a:pPr algn="ctr"/>
+            <a:r>
+              <a:rPr sz="1600" b="1" i="0">
+                <a:solidFill>
+                  <a:srgbClr val="0A6B63"/>
+                </a:solidFill>
+                <a:latin typeface="Georgia"/>
+              </a:rPr>
+              <a:t>x</a:t>
+            </a:r>
+          </a:p>
+        </p:txBody>
+      </p:sp>
+      <p:sp>
+        <p:nvSpPr>
+          <p:cNvPr id="15" name="TextBox 14"/>
+          <p:cNvSpPr txBox="1"/>
+          <p:nvPr/>
+        </p:nvSpPr>
+        <p:spPr>
+          <a:xfrm>
+            <a:off x="6903720" y="1828800"/>
+            <a:ext cx="2377440" cy="292608"/>
+          </a:xfrm>
+          <a:prstGeom prst="rect">
+            <a:avLst/>
+          </a:prstGeom>
+          <a:noFill/>
+        </p:spPr>
+        <p:txBody>
+          <a:bodyPr wrap="square" anchor="t"/>
+          <a:lstStyle/>
+          <a:p>
+            <a:pPr algn="ctr"/>
+            <a:r>
+              <a:rPr sz="1600" b="1" i="0">
+                <a:solidFill>
+                  <a:srgbClr val="0A6B63"/>
+                </a:solidFill>
+                <a:latin typeface="Georgia"/>
+              </a:rPr>
+              <a:t>x</a:t>
+            </a:r>
+          </a:p>
+        </p:txBody>
+      </p:sp>
+      <p:sp>
+        <p:nvSpPr>
+          <p:cNvPr id="16" name="TextBox 15"/>
+          <p:cNvSpPr txBox="1"/>
+          <p:nvPr/>
+        </p:nvSpPr>
+        <p:spPr>
+          <a:xfrm>
+            <a:off x="9509760" y="1828800"/>
+            <a:ext cx="2377440" cy="292608"/>
+          </a:xfrm>
+          <a:prstGeom prst="rect">
+            <a:avLst/>
+          </a:prstGeom>
+          <a:noFill/>
+        </p:spPr>
+        <p:txBody>
+          <a:bodyPr wrap="square" anchor="t"/>
+          <a:lstStyle/>
+          <a:p>
+            <a:pPr algn="ctr"/>
+            <a:r>
+              <a:rPr sz="1600" b="1" i="0">
+                <a:solidFill>
+                  <a:srgbClr val="0A6B63"/>
+                </a:solidFill>
+                <a:latin typeface="Georgia"/>
+              </a:rPr>
+              <a:t>x</a:t>
+            </a:r>
+          </a:p>
+        </p:txBody>
+      </p:sp>
+      <p:sp>
+        <p:nvSpPr>
+          <p:cNvPr id="17" name="Rectangle 16"/>
+          <p:cNvSpPr/>
+          <p:nvPr/>
+        </p:nvSpPr>
+        <p:spPr>
+          <a:xfrm>
+            <a:off x="576072" y="2121408"/>
+            <a:ext cx="11036808" cy="292608"/>
           </a:xfrm>
           <a:prstGeom prst="rect">
             <a:avLst/>
@@ -25400,14 +24636,278 @@
       </p:sp>
       <p:sp>
         <p:nvSpPr>
-          <p:cNvPr id="8" name="Rectangle 7"/>
+          <p:cNvPr id="18" name="TextBox 17"/>
+          <p:cNvSpPr txBox="1"/>
+          <p:nvPr/>
+        </p:nvSpPr>
+        <p:spPr>
+          <a:xfrm>
+            <a:off x="749808" y="2130551"/>
+            <a:ext cx="3383280" cy="274320"/>
+          </a:xfrm>
+          <a:prstGeom prst="rect">
+            <a:avLst/>
+          </a:prstGeom>
+          <a:noFill/>
+        </p:spPr>
+        <p:txBody>
+          <a:bodyPr wrap="square" anchor="t"/>
+          <a:lstStyle/>
+          <a:p>
+            <a:pPr algn="l"/>
+            <a:r>
+              <a:rPr sz="1300" b="0" i="0">
+                <a:solidFill>
+                  <a:srgbClr val="0B1F33"/>
+                </a:solidFill>
+                <a:latin typeface="Segoe UI"/>
+              </a:rPr>
+              <a:t>Monthly active users</a:t>
+            </a:r>
+          </a:p>
+        </p:txBody>
+      </p:sp>
+      <p:sp>
+        <p:nvSpPr>
+          <p:cNvPr id="19" name="TextBox 18"/>
+          <p:cNvSpPr txBox="1"/>
+          <p:nvPr/>
+        </p:nvSpPr>
+        <p:spPr>
+          <a:xfrm>
+            <a:off x="4297680" y="2121408"/>
+            <a:ext cx="2377440" cy="292608"/>
+          </a:xfrm>
+          <a:prstGeom prst="rect">
+            <a:avLst/>
+          </a:prstGeom>
+          <a:noFill/>
+        </p:spPr>
+        <p:txBody>
+          <a:bodyPr wrap="square" anchor="t"/>
+          <a:lstStyle/>
+          <a:p>
+            <a:pPr algn="ctr"/>
+            <a:r>
+              <a:rPr sz="1600" b="1" i="0">
+                <a:solidFill>
+                  <a:srgbClr val="0A6B63"/>
+                </a:solidFill>
+                <a:latin typeface="Georgia"/>
+              </a:rPr>
+              <a:t>x</a:t>
+            </a:r>
+          </a:p>
+        </p:txBody>
+      </p:sp>
+      <p:sp>
+        <p:nvSpPr>
+          <p:cNvPr id="20" name="TextBox 19"/>
+          <p:cNvSpPr txBox="1"/>
+          <p:nvPr/>
+        </p:nvSpPr>
+        <p:spPr>
+          <a:xfrm>
+            <a:off x="6903720" y="2121408"/>
+            <a:ext cx="2377440" cy="292608"/>
+          </a:xfrm>
+          <a:prstGeom prst="rect">
+            <a:avLst/>
+          </a:prstGeom>
+          <a:noFill/>
+        </p:spPr>
+        <p:txBody>
+          <a:bodyPr wrap="square" anchor="t"/>
+          <a:lstStyle/>
+          <a:p>
+            <a:pPr algn="ctr"/>
+            <a:r>
+              <a:rPr sz="1600" b="1" i="0">
+                <a:solidFill>
+                  <a:srgbClr val="0A6B63"/>
+                </a:solidFill>
+                <a:latin typeface="Georgia"/>
+              </a:rPr>
+              <a:t>x</a:t>
+            </a:r>
+          </a:p>
+        </p:txBody>
+      </p:sp>
+      <p:sp>
+        <p:nvSpPr>
+          <p:cNvPr id="21" name="TextBox 20"/>
+          <p:cNvSpPr txBox="1"/>
+          <p:nvPr/>
+        </p:nvSpPr>
+        <p:spPr>
+          <a:xfrm>
+            <a:off x="9509760" y="2121408"/>
+            <a:ext cx="2377440" cy="292608"/>
+          </a:xfrm>
+          <a:prstGeom prst="rect">
+            <a:avLst/>
+          </a:prstGeom>
+          <a:noFill/>
+        </p:spPr>
+        <p:txBody>
+          <a:bodyPr wrap="square" anchor="t"/>
+          <a:lstStyle/>
+          <a:p>
+            <a:pPr algn="ctr"/>
+            <a:r>
+              <a:rPr sz="1600" b="1" i="0">
+                <a:solidFill>
+                  <a:srgbClr val="0A6B63"/>
+                </a:solidFill>
+                <a:latin typeface="Georgia"/>
+              </a:rPr>
+              <a:t>x</a:t>
+            </a:r>
+          </a:p>
+        </p:txBody>
+      </p:sp>
+      <p:sp>
+        <p:nvSpPr>
+          <p:cNvPr id="22" name="TextBox 21"/>
+          <p:cNvSpPr txBox="1"/>
+          <p:nvPr/>
+        </p:nvSpPr>
+        <p:spPr>
+          <a:xfrm>
+            <a:off x="749808" y="2423159"/>
+            <a:ext cx="3383280" cy="274320"/>
+          </a:xfrm>
+          <a:prstGeom prst="rect">
+            <a:avLst/>
+          </a:prstGeom>
+          <a:noFill/>
+        </p:spPr>
+        <p:txBody>
+          <a:bodyPr wrap="square" anchor="t"/>
+          <a:lstStyle/>
+          <a:p>
+            <a:pPr algn="l"/>
+            <a:r>
+              <a:rPr sz="1300" b="0" i="0">
+                <a:solidFill>
+                  <a:srgbClr val="0B1F33"/>
+                </a:solidFill>
+                <a:latin typeface="Segoe UI"/>
+              </a:rPr>
+              <a:t>Paid users</a:t>
+            </a:r>
+          </a:p>
+        </p:txBody>
+      </p:sp>
+      <p:sp>
+        <p:nvSpPr>
+          <p:cNvPr id="23" name="TextBox 22"/>
+          <p:cNvSpPr txBox="1"/>
+          <p:nvPr/>
+        </p:nvSpPr>
+        <p:spPr>
+          <a:xfrm>
+            <a:off x="4297680" y="2414015"/>
+            <a:ext cx="2377440" cy="292608"/>
+          </a:xfrm>
+          <a:prstGeom prst="rect">
+            <a:avLst/>
+          </a:prstGeom>
+          <a:noFill/>
+        </p:spPr>
+        <p:txBody>
+          <a:bodyPr wrap="square" anchor="t"/>
+          <a:lstStyle/>
+          <a:p>
+            <a:pPr algn="ctr"/>
+            <a:r>
+              <a:rPr sz="1600" b="1" i="0">
+                <a:solidFill>
+                  <a:srgbClr val="0A6B63"/>
+                </a:solidFill>
+                <a:latin typeface="Georgia"/>
+              </a:rPr>
+              <a:t>x</a:t>
+            </a:r>
+          </a:p>
+        </p:txBody>
+      </p:sp>
+      <p:sp>
+        <p:nvSpPr>
+          <p:cNvPr id="24" name="TextBox 23"/>
+          <p:cNvSpPr txBox="1"/>
+          <p:nvPr/>
+        </p:nvSpPr>
+        <p:spPr>
+          <a:xfrm>
+            <a:off x="6903720" y="2414015"/>
+            <a:ext cx="2377440" cy="292608"/>
+          </a:xfrm>
+          <a:prstGeom prst="rect">
+            <a:avLst/>
+          </a:prstGeom>
+          <a:noFill/>
+        </p:spPr>
+        <p:txBody>
+          <a:bodyPr wrap="square" anchor="t"/>
+          <a:lstStyle/>
+          <a:p>
+            <a:pPr algn="ctr"/>
+            <a:r>
+              <a:rPr sz="1600" b="1" i="0">
+                <a:solidFill>
+                  <a:srgbClr val="0A6B63"/>
+                </a:solidFill>
+                <a:latin typeface="Georgia"/>
+              </a:rPr>
+              <a:t>x</a:t>
+            </a:r>
+          </a:p>
+        </p:txBody>
+      </p:sp>
+      <p:sp>
+        <p:nvSpPr>
+          <p:cNvPr id="25" name="TextBox 24"/>
+          <p:cNvSpPr txBox="1"/>
+          <p:nvPr/>
+        </p:nvSpPr>
+        <p:spPr>
+          <a:xfrm>
+            <a:off x="9509760" y="2414015"/>
+            <a:ext cx="2377440" cy="292608"/>
+          </a:xfrm>
+          <a:prstGeom prst="rect">
+            <a:avLst/>
+          </a:prstGeom>
+          <a:noFill/>
+        </p:spPr>
+        <p:txBody>
+          <a:bodyPr wrap="square" anchor="t"/>
+          <a:lstStyle/>
+          <a:p>
+            <a:pPr algn="ctr"/>
+            <a:r>
+              <a:rPr sz="1600" b="1" i="0">
+                <a:solidFill>
+                  <a:srgbClr val="0A6B63"/>
+                </a:solidFill>
+                <a:latin typeface="Georgia"/>
+              </a:rPr>
+              <a:t>x</a:t>
+            </a:r>
+          </a:p>
+        </p:txBody>
+      </p:sp>
+      <p:sp>
+        <p:nvSpPr>
+          <p:cNvPr id="26" name="Rectangle 25"/>
           <p:cNvSpPr/>
           <p:nvPr/>
         </p:nvSpPr>
         <p:spPr>
           <a:xfrm>
-            <a:off x="0" y="6473952"/>
-            <a:ext cx="12191695" cy="9144"/>
+            <a:off x="749808" y="2724911"/>
+            <a:ext cx="10515600" cy="9144"/>
           </a:xfrm>
           <a:prstGeom prst="rect">
             <a:avLst/>
@@ -25443,7 +24943,1549 @@
       </p:sp>
       <p:sp>
         <p:nvSpPr>
-          <p:cNvPr id="9" name="TextBox 8"/>
+          <p:cNvPr id="27" name="TextBox 26"/>
+          <p:cNvSpPr txBox="1"/>
+          <p:nvPr/>
+        </p:nvSpPr>
+        <p:spPr>
+          <a:xfrm>
+            <a:off x="749808" y="2779775"/>
+            <a:ext cx="10515600" cy="201168"/>
+          </a:xfrm>
+          <a:prstGeom prst="rect">
+            <a:avLst/>
+          </a:prstGeom>
+          <a:noFill/>
+        </p:spPr>
+        <p:txBody>
+          <a:bodyPr wrap="square" anchor="t"/>
+          <a:lstStyle/>
+          <a:p>
+            <a:pPr algn="l"/>
+            <a:r>
+              <a:rPr sz="1000" b="1" i="0">
+                <a:solidFill>
+                  <a:srgbClr val="0A6B63"/>
+                </a:solidFill>
+                <a:latin typeface="Segoe UI"/>
+              </a:rPr>
+              <a:t>REVENUE</a:t>
+            </a:r>
+          </a:p>
+        </p:txBody>
+      </p:sp>
+      <p:sp>
+        <p:nvSpPr>
+          <p:cNvPr id="28" name="TextBox 27"/>
+          <p:cNvSpPr txBox="1"/>
+          <p:nvPr/>
+        </p:nvSpPr>
+        <p:spPr>
+          <a:xfrm>
+            <a:off x="749808" y="3008375"/>
+            <a:ext cx="3383280" cy="274320"/>
+          </a:xfrm>
+          <a:prstGeom prst="rect">
+            <a:avLst/>
+          </a:prstGeom>
+          <a:noFill/>
+        </p:spPr>
+        <p:txBody>
+          <a:bodyPr wrap="square" anchor="t"/>
+          <a:lstStyle/>
+          <a:p>
+            <a:pPr algn="l"/>
+            <a:r>
+              <a:rPr sz="1300" b="0" i="0">
+                <a:solidFill>
+                  <a:srgbClr val="0B1F33"/>
+                </a:solidFill>
+                <a:latin typeface="Segoe UI"/>
+              </a:rPr>
+              <a:t>AI revenue</a:t>
+            </a:r>
+          </a:p>
+        </p:txBody>
+      </p:sp>
+      <p:sp>
+        <p:nvSpPr>
+          <p:cNvPr id="29" name="TextBox 28"/>
+          <p:cNvSpPr txBox="1"/>
+          <p:nvPr/>
+        </p:nvSpPr>
+        <p:spPr>
+          <a:xfrm>
+            <a:off x="4297680" y="2999231"/>
+            <a:ext cx="2377440" cy="292608"/>
+          </a:xfrm>
+          <a:prstGeom prst="rect">
+            <a:avLst/>
+          </a:prstGeom>
+          <a:noFill/>
+        </p:spPr>
+        <p:txBody>
+          <a:bodyPr wrap="square" anchor="t"/>
+          <a:lstStyle/>
+          <a:p>
+            <a:pPr algn="ctr"/>
+            <a:r>
+              <a:rPr sz="1600" b="1" i="0">
+                <a:solidFill>
+                  <a:srgbClr val="0A6B63"/>
+                </a:solidFill>
+                <a:latin typeface="Georgia"/>
+              </a:rPr>
+              <a:t>x</a:t>
+            </a:r>
+          </a:p>
+        </p:txBody>
+      </p:sp>
+      <p:sp>
+        <p:nvSpPr>
+          <p:cNvPr id="30" name="TextBox 29"/>
+          <p:cNvSpPr txBox="1"/>
+          <p:nvPr/>
+        </p:nvSpPr>
+        <p:spPr>
+          <a:xfrm>
+            <a:off x="6903720" y="2999231"/>
+            <a:ext cx="2377440" cy="292608"/>
+          </a:xfrm>
+          <a:prstGeom prst="rect">
+            <a:avLst/>
+          </a:prstGeom>
+          <a:noFill/>
+        </p:spPr>
+        <p:txBody>
+          <a:bodyPr wrap="square" anchor="t"/>
+          <a:lstStyle/>
+          <a:p>
+            <a:pPr algn="ctr"/>
+            <a:r>
+              <a:rPr sz="1600" b="1" i="0">
+                <a:solidFill>
+                  <a:srgbClr val="0A6B63"/>
+                </a:solidFill>
+                <a:latin typeface="Georgia"/>
+              </a:rPr>
+              <a:t>x</a:t>
+            </a:r>
+          </a:p>
+        </p:txBody>
+      </p:sp>
+      <p:sp>
+        <p:nvSpPr>
+          <p:cNvPr id="31" name="TextBox 30"/>
+          <p:cNvSpPr txBox="1"/>
+          <p:nvPr/>
+        </p:nvSpPr>
+        <p:spPr>
+          <a:xfrm>
+            <a:off x="9509760" y="2999231"/>
+            <a:ext cx="2377440" cy="292608"/>
+          </a:xfrm>
+          <a:prstGeom prst="rect">
+            <a:avLst/>
+          </a:prstGeom>
+          <a:noFill/>
+        </p:spPr>
+        <p:txBody>
+          <a:bodyPr wrap="square" anchor="t"/>
+          <a:lstStyle/>
+          <a:p>
+            <a:pPr algn="ctr"/>
+            <a:r>
+              <a:rPr sz="1600" b="1" i="0">
+                <a:solidFill>
+                  <a:srgbClr val="0A6B63"/>
+                </a:solidFill>
+                <a:latin typeface="Georgia"/>
+              </a:rPr>
+              <a:t>x</a:t>
+            </a:r>
+          </a:p>
+        </p:txBody>
+      </p:sp>
+      <p:sp>
+        <p:nvSpPr>
+          <p:cNvPr id="32" name="Rectangle 31"/>
+          <p:cNvSpPr/>
+          <p:nvPr/>
+        </p:nvSpPr>
+        <p:spPr>
+          <a:xfrm>
+            <a:off x="576072" y="3291839"/>
+            <a:ext cx="11036808" cy="292608"/>
+          </a:xfrm>
+          <a:prstGeom prst="rect">
+            <a:avLst/>
+          </a:prstGeom>
+          <a:solidFill>
+            <a:srgbClr val="F5F8FB"/>
+          </a:solidFill>
+          <a:ln>
+            <a:noFill/>
+          </a:ln>
+        </p:spPr>
+        <p:style>
+          <a:lnRef idx="1">
+            <a:schemeClr val="accent1"/>
+          </a:lnRef>
+          <a:fillRef idx="3">
+            <a:schemeClr val="accent1"/>
+          </a:fillRef>
+          <a:effectRef idx="2">
+            <a:schemeClr val="accent1"/>
+          </a:effectRef>
+          <a:fontRef idx="minor">
+            <a:schemeClr val="lt1"/>
+          </a:fontRef>
+        </p:style>
+        <p:txBody>
+          <a:bodyPr rtlCol="0" anchor="ctr"/>
+          <a:lstStyle/>
+          <a:p>
+            <a:pPr algn="ctr"/>
+          </a:p>
+        </p:txBody>
+      </p:sp>
+      <p:sp>
+        <p:nvSpPr>
+          <p:cNvPr id="33" name="TextBox 32"/>
+          <p:cNvSpPr txBox="1"/>
+          <p:nvPr/>
+        </p:nvSpPr>
+        <p:spPr>
+          <a:xfrm>
+            <a:off x="749808" y="3300983"/>
+            <a:ext cx="3383280" cy="274320"/>
+          </a:xfrm>
+          <a:prstGeom prst="rect">
+            <a:avLst/>
+          </a:prstGeom>
+          <a:noFill/>
+        </p:spPr>
+        <p:txBody>
+          <a:bodyPr wrap="square" anchor="t"/>
+          <a:lstStyle/>
+          <a:p>
+            <a:pPr algn="l"/>
+            <a:r>
+              <a:rPr sz="1300" b="0" i="0">
+                <a:solidFill>
+                  <a:srgbClr val="0B1F33"/>
+                </a:solidFill>
+                <a:latin typeface="Segoe UI"/>
+              </a:rPr>
+              <a:t>Career services</a:t>
+            </a:r>
+          </a:p>
+        </p:txBody>
+      </p:sp>
+      <p:sp>
+        <p:nvSpPr>
+          <p:cNvPr id="34" name="TextBox 33"/>
+          <p:cNvSpPr txBox="1"/>
+          <p:nvPr/>
+        </p:nvSpPr>
+        <p:spPr>
+          <a:xfrm>
+            <a:off x="4297680" y="3291839"/>
+            <a:ext cx="2377440" cy="292608"/>
+          </a:xfrm>
+          <a:prstGeom prst="rect">
+            <a:avLst/>
+          </a:prstGeom>
+          <a:noFill/>
+        </p:spPr>
+        <p:txBody>
+          <a:bodyPr wrap="square" anchor="t"/>
+          <a:lstStyle/>
+          <a:p>
+            <a:pPr algn="ctr"/>
+            <a:r>
+              <a:rPr sz="1600" b="1" i="0">
+                <a:solidFill>
+                  <a:srgbClr val="0A6B63"/>
+                </a:solidFill>
+                <a:latin typeface="Georgia"/>
+              </a:rPr>
+              <a:t>x</a:t>
+            </a:r>
+          </a:p>
+        </p:txBody>
+      </p:sp>
+      <p:sp>
+        <p:nvSpPr>
+          <p:cNvPr id="35" name="TextBox 34"/>
+          <p:cNvSpPr txBox="1"/>
+          <p:nvPr/>
+        </p:nvSpPr>
+        <p:spPr>
+          <a:xfrm>
+            <a:off x="6903720" y="3291839"/>
+            <a:ext cx="2377440" cy="292608"/>
+          </a:xfrm>
+          <a:prstGeom prst="rect">
+            <a:avLst/>
+          </a:prstGeom>
+          <a:noFill/>
+        </p:spPr>
+        <p:txBody>
+          <a:bodyPr wrap="square" anchor="t"/>
+          <a:lstStyle/>
+          <a:p>
+            <a:pPr algn="ctr"/>
+            <a:r>
+              <a:rPr sz="1600" b="1" i="0">
+                <a:solidFill>
+                  <a:srgbClr val="0A6B63"/>
+                </a:solidFill>
+                <a:latin typeface="Georgia"/>
+              </a:rPr>
+              <a:t>x</a:t>
+            </a:r>
+          </a:p>
+        </p:txBody>
+      </p:sp>
+      <p:sp>
+        <p:nvSpPr>
+          <p:cNvPr id="36" name="TextBox 35"/>
+          <p:cNvSpPr txBox="1"/>
+          <p:nvPr/>
+        </p:nvSpPr>
+        <p:spPr>
+          <a:xfrm>
+            <a:off x="9509760" y="3291839"/>
+            <a:ext cx="2377440" cy="292608"/>
+          </a:xfrm>
+          <a:prstGeom prst="rect">
+            <a:avLst/>
+          </a:prstGeom>
+          <a:noFill/>
+        </p:spPr>
+        <p:txBody>
+          <a:bodyPr wrap="square" anchor="t"/>
+          <a:lstStyle/>
+          <a:p>
+            <a:pPr algn="ctr"/>
+            <a:r>
+              <a:rPr sz="1600" b="1" i="0">
+                <a:solidFill>
+                  <a:srgbClr val="0A6B63"/>
+                </a:solidFill>
+                <a:latin typeface="Georgia"/>
+              </a:rPr>
+              <a:t>x</a:t>
+            </a:r>
+          </a:p>
+        </p:txBody>
+      </p:sp>
+      <p:sp>
+        <p:nvSpPr>
+          <p:cNvPr id="37" name="TextBox 36"/>
+          <p:cNvSpPr txBox="1"/>
+          <p:nvPr/>
+        </p:nvSpPr>
+        <p:spPr>
+          <a:xfrm>
+            <a:off x="749808" y="3593591"/>
+            <a:ext cx="3383280" cy="274320"/>
+          </a:xfrm>
+          <a:prstGeom prst="rect">
+            <a:avLst/>
+          </a:prstGeom>
+          <a:noFill/>
+        </p:spPr>
+        <p:txBody>
+          <a:bodyPr wrap="square" anchor="t"/>
+          <a:lstStyle/>
+          <a:p>
+            <a:pPr algn="l"/>
+            <a:r>
+              <a:rPr sz="1300" b="0" i="0">
+                <a:solidFill>
+                  <a:srgbClr val="0B1F33"/>
+                </a:solidFill>
+                <a:latin typeface="Segoe UI"/>
+              </a:rPr>
+              <a:t>Commission revenue</a:t>
+            </a:r>
+          </a:p>
+        </p:txBody>
+      </p:sp>
+      <p:sp>
+        <p:nvSpPr>
+          <p:cNvPr id="38" name="TextBox 37"/>
+          <p:cNvSpPr txBox="1"/>
+          <p:nvPr/>
+        </p:nvSpPr>
+        <p:spPr>
+          <a:xfrm>
+            <a:off x="4297680" y="3584447"/>
+            <a:ext cx="2377440" cy="292608"/>
+          </a:xfrm>
+          <a:prstGeom prst="rect">
+            <a:avLst/>
+          </a:prstGeom>
+          <a:noFill/>
+        </p:spPr>
+        <p:txBody>
+          <a:bodyPr wrap="square" anchor="t"/>
+          <a:lstStyle/>
+          <a:p>
+            <a:pPr algn="ctr"/>
+            <a:r>
+              <a:rPr sz="1600" b="1" i="0">
+                <a:solidFill>
+                  <a:srgbClr val="0A6B63"/>
+                </a:solidFill>
+                <a:latin typeface="Georgia"/>
+              </a:rPr>
+              <a:t>x</a:t>
+            </a:r>
+          </a:p>
+        </p:txBody>
+      </p:sp>
+      <p:sp>
+        <p:nvSpPr>
+          <p:cNvPr id="39" name="TextBox 38"/>
+          <p:cNvSpPr txBox="1"/>
+          <p:nvPr/>
+        </p:nvSpPr>
+        <p:spPr>
+          <a:xfrm>
+            <a:off x="6903720" y="3584447"/>
+            <a:ext cx="2377440" cy="292608"/>
+          </a:xfrm>
+          <a:prstGeom prst="rect">
+            <a:avLst/>
+          </a:prstGeom>
+          <a:noFill/>
+        </p:spPr>
+        <p:txBody>
+          <a:bodyPr wrap="square" anchor="t"/>
+          <a:lstStyle/>
+          <a:p>
+            <a:pPr algn="ctr"/>
+            <a:r>
+              <a:rPr sz="1600" b="1" i="0">
+                <a:solidFill>
+                  <a:srgbClr val="0A6B63"/>
+                </a:solidFill>
+                <a:latin typeface="Georgia"/>
+              </a:rPr>
+              <a:t>x</a:t>
+            </a:r>
+          </a:p>
+        </p:txBody>
+      </p:sp>
+      <p:sp>
+        <p:nvSpPr>
+          <p:cNvPr id="40" name="TextBox 39"/>
+          <p:cNvSpPr txBox="1"/>
+          <p:nvPr/>
+        </p:nvSpPr>
+        <p:spPr>
+          <a:xfrm>
+            <a:off x="9509760" y="3584447"/>
+            <a:ext cx="2377440" cy="292608"/>
+          </a:xfrm>
+          <a:prstGeom prst="rect">
+            <a:avLst/>
+          </a:prstGeom>
+          <a:noFill/>
+        </p:spPr>
+        <p:txBody>
+          <a:bodyPr wrap="square" anchor="t"/>
+          <a:lstStyle/>
+          <a:p>
+            <a:pPr algn="ctr"/>
+            <a:r>
+              <a:rPr sz="1600" b="1" i="0">
+                <a:solidFill>
+                  <a:srgbClr val="0A6B63"/>
+                </a:solidFill>
+                <a:latin typeface="Georgia"/>
+              </a:rPr>
+              <a:t>x</a:t>
+            </a:r>
+          </a:p>
+        </p:txBody>
+      </p:sp>
+      <p:sp>
+        <p:nvSpPr>
+          <p:cNvPr id="41" name="Rectangle 40"/>
+          <p:cNvSpPr/>
+          <p:nvPr/>
+        </p:nvSpPr>
+        <p:spPr>
+          <a:xfrm>
+            <a:off x="576072" y="3877055"/>
+            <a:ext cx="11036808" cy="292608"/>
+          </a:xfrm>
+          <a:prstGeom prst="rect">
+            <a:avLst/>
+          </a:prstGeom>
+          <a:solidFill>
+            <a:srgbClr val="F5F8FB"/>
+          </a:solidFill>
+          <a:ln>
+            <a:noFill/>
+          </a:ln>
+        </p:spPr>
+        <p:style>
+          <a:lnRef idx="1">
+            <a:schemeClr val="accent1"/>
+          </a:lnRef>
+          <a:fillRef idx="3">
+            <a:schemeClr val="accent1"/>
+          </a:fillRef>
+          <a:effectRef idx="2">
+            <a:schemeClr val="accent1"/>
+          </a:effectRef>
+          <a:fontRef idx="minor">
+            <a:schemeClr val="lt1"/>
+          </a:fontRef>
+        </p:style>
+        <p:txBody>
+          <a:bodyPr rtlCol="0" anchor="ctr"/>
+          <a:lstStyle/>
+          <a:p>
+            <a:pPr algn="ctr"/>
+          </a:p>
+        </p:txBody>
+      </p:sp>
+      <p:sp>
+        <p:nvSpPr>
+          <p:cNvPr id="42" name="TextBox 41"/>
+          <p:cNvSpPr txBox="1"/>
+          <p:nvPr/>
+        </p:nvSpPr>
+        <p:spPr>
+          <a:xfrm>
+            <a:off x="749808" y="3886199"/>
+            <a:ext cx="3383280" cy="274320"/>
+          </a:xfrm>
+          <a:prstGeom prst="rect">
+            <a:avLst/>
+          </a:prstGeom>
+          <a:noFill/>
+        </p:spPr>
+        <p:txBody>
+          <a:bodyPr wrap="square" anchor="t"/>
+          <a:lstStyle/>
+          <a:p>
+            <a:pPr algn="l"/>
+            <a:r>
+              <a:rPr sz="1300" b="0" i="0">
+                <a:solidFill>
+                  <a:srgbClr val="0B1F33"/>
+                </a:solidFill>
+                <a:latin typeface="Segoe UI"/>
+              </a:rPr>
+              <a:t>Advertising</a:t>
+            </a:r>
+          </a:p>
+        </p:txBody>
+      </p:sp>
+      <p:sp>
+        <p:nvSpPr>
+          <p:cNvPr id="43" name="TextBox 42"/>
+          <p:cNvSpPr txBox="1"/>
+          <p:nvPr/>
+        </p:nvSpPr>
+        <p:spPr>
+          <a:xfrm>
+            <a:off x="4297680" y="3877055"/>
+            <a:ext cx="2377440" cy="292608"/>
+          </a:xfrm>
+          <a:prstGeom prst="rect">
+            <a:avLst/>
+          </a:prstGeom>
+          <a:noFill/>
+        </p:spPr>
+        <p:txBody>
+          <a:bodyPr wrap="square" anchor="t"/>
+          <a:lstStyle/>
+          <a:p>
+            <a:pPr algn="ctr"/>
+            <a:r>
+              <a:rPr sz="1600" b="1" i="0">
+                <a:solidFill>
+                  <a:srgbClr val="0A6B63"/>
+                </a:solidFill>
+                <a:latin typeface="Georgia"/>
+              </a:rPr>
+              <a:t>x</a:t>
+            </a:r>
+          </a:p>
+        </p:txBody>
+      </p:sp>
+      <p:sp>
+        <p:nvSpPr>
+          <p:cNvPr id="44" name="TextBox 43"/>
+          <p:cNvSpPr txBox="1"/>
+          <p:nvPr/>
+        </p:nvSpPr>
+        <p:spPr>
+          <a:xfrm>
+            <a:off x="6903720" y="3877055"/>
+            <a:ext cx="2377440" cy="292608"/>
+          </a:xfrm>
+          <a:prstGeom prst="rect">
+            <a:avLst/>
+          </a:prstGeom>
+          <a:noFill/>
+        </p:spPr>
+        <p:txBody>
+          <a:bodyPr wrap="square" anchor="t"/>
+          <a:lstStyle/>
+          <a:p>
+            <a:pPr algn="ctr"/>
+            <a:r>
+              <a:rPr sz="1600" b="1" i="0">
+                <a:solidFill>
+                  <a:srgbClr val="0A6B63"/>
+                </a:solidFill>
+                <a:latin typeface="Georgia"/>
+              </a:rPr>
+              <a:t>x</a:t>
+            </a:r>
+          </a:p>
+        </p:txBody>
+      </p:sp>
+      <p:sp>
+        <p:nvSpPr>
+          <p:cNvPr id="45" name="TextBox 44"/>
+          <p:cNvSpPr txBox="1"/>
+          <p:nvPr/>
+        </p:nvSpPr>
+        <p:spPr>
+          <a:xfrm>
+            <a:off x="9509760" y="3877055"/>
+            <a:ext cx="2377440" cy="292608"/>
+          </a:xfrm>
+          <a:prstGeom prst="rect">
+            <a:avLst/>
+          </a:prstGeom>
+          <a:noFill/>
+        </p:spPr>
+        <p:txBody>
+          <a:bodyPr wrap="square" anchor="t"/>
+          <a:lstStyle/>
+          <a:p>
+            <a:pPr algn="ctr"/>
+            <a:r>
+              <a:rPr sz="1600" b="1" i="0">
+                <a:solidFill>
+                  <a:srgbClr val="0A6B63"/>
+                </a:solidFill>
+                <a:latin typeface="Georgia"/>
+              </a:rPr>
+              <a:t>x</a:t>
+            </a:r>
+          </a:p>
+        </p:txBody>
+      </p:sp>
+      <p:sp>
+        <p:nvSpPr>
+          <p:cNvPr id="46" name="TextBox 45"/>
+          <p:cNvSpPr txBox="1"/>
+          <p:nvPr/>
+        </p:nvSpPr>
+        <p:spPr>
+          <a:xfrm>
+            <a:off x="749808" y="4178807"/>
+            <a:ext cx="3383280" cy="274320"/>
+          </a:xfrm>
+          <a:prstGeom prst="rect">
+            <a:avLst/>
+          </a:prstGeom>
+          <a:noFill/>
+        </p:spPr>
+        <p:txBody>
+          <a:bodyPr wrap="square" anchor="t"/>
+          <a:lstStyle/>
+          <a:p>
+            <a:pPr algn="l"/>
+            <a:r>
+              <a:rPr sz="1300" b="0" i="0">
+                <a:solidFill>
+                  <a:srgbClr val="0B1F33"/>
+                </a:solidFill>
+                <a:latin typeface="Segoe UI"/>
+              </a:rPr>
+              <a:t>B2B revenue</a:t>
+            </a:r>
+          </a:p>
+        </p:txBody>
+      </p:sp>
+      <p:sp>
+        <p:nvSpPr>
+          <p:cNvPr id="47" name="TextBox 46"/>
+          <p:cNvSpPr txBox="1"/>
+          <p:nvPr/>
+        </p:nvSpPr>
+        <p:spPr>
+          <a:xfrm>
+            <a:off x="4297680" y="4169663"/>
+            <a:ext cx="2377440" cy="292608"/>
+          </a:xfrm>
+          <a:prstGeom prst="rect">
+            <a:avLst/>
+          </a:prstGeom>
+          <a:noFill/>
+        </p:spPr>
+        <p:txBody>
+          <a:bodyPr wrap="square" anchor="t"/>
+          <a:lstStyle/>
+          <a:p>
+            <a:pPr algn="ctr"/>
+            <a:r>
+              <a:rPr sz="1600" b="1" i="0">
+                <a:solidFill>
+                  <a:srgbClr val="0A6B63"/>
+                </a:solidFill>
+                <a:latin typeface="Georgia"/>
+              </a:rPr>
+              <a:t>x</a:t>
+            </a:r>
+          </a:p>
+        </p:txBody>
+      </p:sp>
+      <p:sp>
+        <p:nvSpPr>
+          <p:cNvPr id="48" name="TextBox 47"/>
+          <p:cNvSpPr txBox="1"/>
+          <p:nvPr/>
+        </p:nvSpPr>
+        <p:spPr>
+          <a:xfrm>
+            <a:off x="6903720" y="4169663"/>
+            <a:ext cx="2377440" cy="292608"/>
+          </a:xfrm>
+          <a:prstGeom prst="rect">
+            <a:avLst/>
+          </a:prstGeom>
+          <a:noFill/>
+        </p:spPr>
+        <p:txBody>
+          <a:bodyPr wrap="square" anchor="t"/>
+          <a:lstStyle/>
+          <a:p>
+            <a:pPr algn="ctr"/>
+            <a:r>
+              <a:rPr sz="1600" b="1" i="0">
+                <a:solidFill>
+                  <a:srgbClr val="0A6B63"/>
+                </a:solidFill>
+                <a:latin typeface="Georgia"/>
+              </a:rPr>
+              <a:t>x</a:t>
+            </a:r>
+          </a:p>
+        </p:txBody>
+      </p:sp>
+      <p:sp>
+        <p:nvSpPr>
+          <p:cNvPr id="49" name="TextBox 48"/>
+          <p:cNvSpPr txBox="1"/>
+          <p:nvPr/>
+        </p:nvSpPr>
+        <p:spPr>
+          <a:xfrm>
+            <a:off x="9509760" y="4169663"/>
+            <a:ext cx="2377440" cy="292608"/>
+          </a:xfrm>
+          <a:prstGeom prst="rect">
+            <a:avLst/>
+          </a:prstGeom>
+          <a:noFill/>
+        </p:spPr>
+        <p:txBody>
+          <a:bodyPr wrap="square" anchor="t"/>
+          <a:lstStyle/>
+          <a:p>
+            <a:pPr algn="ctr"/>
+            <a:r>
+              <a:rPr sz="1600" b="1" i="0">
+                <a:solidFill>
+                  <a:srgbClr val="0A6B63"/>
+                </a:solidFill>
+                <a:latin typeface="Georgia"/>
+              </a:rPr>
+              <a:t>x</a:t>
+            </a:r>
+          </a:p>
+        </p:txBody>
+      </p:sp>
+      <p:sp>
+        <p:nvSpPr>
+          <p:cNvPr id="50" name="Rectangle 49"/>
+          <p:cNvSpPr/>
+          <p:nvPr/>
+        </p:nvSpPr>
+        <p:spPr>
+          <a:xfrm>
+            <a:off x="749808" y="4480560"/>
+            <a:ext cx="10515600" cy="9144"/>
+          </a:xfrm>
+          <a:prstGeom prst="rect">
+            <a:avLst/>
+          </a:prstGeom>
+          <a:solidFill>
+            <a:srgbClr val="D4DEE8"/>
+          </a:solidFill>
+          <a:ln>
+            <a:noFill/>
+          </a:ln>
+        </p:spPr>
+        <p:style>
+          <a:lnRef idx="1">
+            <a:schemeClr val="accent1"/>
+          </a:lnRef>
+          <a:fillRef idx="3">
+            <a:schemeClr val="accent1"/>
+          </a:fillRef>
+          <a:effectRef idx="2">
+            <a:schemeClr val="accent1"/>
+          </a:effectRef>
+          <a:fontRef idx="minor">
+            <a:schemeClr val="lt1"/>
+          </a:fontRef>
+        </p:style>
+        <p:txBody>
+          <a:bodyPr rtlCol="0" anchor="ctr"/>
+          <a:lstStyle/>
+          <a:p>
+            <a:pPr algn="ctr"/>
+          </a:p>
+        </p:txBody>
+      </p:sp>
+      <p:sp>
+        <p:nvSpPr>
+          <p:cNvPr id="51" name="TextBox 50"/>
+          <p:cNvSpPr txBox="1"/>
+          <p:nvPr/>
+        </p:nvSpPr>
+        <p:spPr>
+          <a:xfrm>
+            <a:off x="749808" y="4535424"/>
+            <a:ext cx="10515600" cy="201168"/>
+          </a:xfrm>
+          <a:prstGeom prst="rect">
+            <a:avLst/>
+          </a:prstGeom>
+          <a:noFill/>
+        </p:spPr>
+        <p:txBody>
+          <a:bodyPr wrap="square" anchor="t"/>
+          <a:lstStyle/>
+          <a:p>
+            <a:pPr algn="l"/>
+            <a:r>
+              <a:rPr sz="1000" b="1" i="0">
+                <a:solidFill>
+                  <a:srgbClr val="0A6B63"/>
+                </a:solidFill>
+                <a:latin typeface="Segoe UI"/>
+              </a:rPr>
+              <a:t>PROFITABILITY</a:t>
+            </a:r>
+          </a:p>
+        </p:txBody>
+      </p:sp>
+      <p:sp>
+        <p:nvSpPr>
+          <p:cNvPr id="52" name="Rectangle 51"/>
+          <p:cNvSpPr/>
+          <p:nvPr/>
+        </p:nvSpPr>
+        <p:spPr>
+          <a:xfrm>
+            <a:off x="576072" y="4754880"/>
+            <a:ext cx="11036808" cy="292608"/>
+          </a:xfrm>
+          <a:prstGeom prst="rect">
+            <a:avLst/>
+          </a:prstGeom>
+          <a:solidFill>
+            <a:srgbClr val="EEF3F8"/>
+          </a:solidFill>
+          <a:ln>
+            <a:noFill/>
+          </a:ln>
+        </p:spPr>
+        <p:style>
+          <a:lnRef idx="1">
+            <a:schemeClr val="accent1"/>
+          </a:lnRef>
+          <a:fillRef idx="3">
+            <a:schemeClr val="accent1"/>
+          </a:fillRef>
+          <a:effectRef idx="2">
+            <a:schemeClr val="accent1"/>
+          </a:effectRef>
+          <a:fontRef idx="minor">
+            <a:schemeClr val="lt1"/>
+          </a:fontRef>
+        </p:style>
+        <p:txBody>
+          <a:bodyPr rtlCol="0" anchor="ctr"/>
+          <a:lstStyle/>
+          <a:p>
+            <a:pPr algn="ctr"/>
+          </a:p>
+        </p:txBody>
+      </p:sp>
+      <p:sp>
+        <p:nvSpPr>
+          <p:cNvPr id="53" name="TextBox 52"/>
+          <p:cNvSpPr txBox="1"/>
+          <p:nvPr/>
+        </p:nvSpPr>
+        <p:spPr>
+          <a:xfrm>
+            <a:off x="749808" y="4764024"/>
+            <a:ext cx="3383280" cy="274320"/>
+          </a:xfrm>
+          <a:prstGeom prst="rect">
+            <a:avLst/>
+          </a:prstGeom>
+          <a:noFill/>
+        </p:spPr>
+        <p:txBody>
+          <a:bodyPr wrap="square" anchor="t"/>
+          <a:lstStyle/>
+          <a:p>
+            <a:pPr algn="l"/>
+            <a:r>
+              <a:rPr sz="1300" b="1" i="0">
+                <a:solidFill>
+                  <a:srgbClr val="0B1F33"/>
+                </a:solidFill>
+                <a:latin typeface="Segoe UI"/>
+              </a:rPr>
+              <a:t>Total revenue</a:t>
+            </a:r>
+          </a:p>
+        </p:txBody>
+      </p:sp>
+      <p:sp>
+        <p:nvSpPr>
+          <p:cNvPr id="54" name="TextBox 53"/>
+          <p:cNvSpPr txBox="1"/>
+          <p:nvPr/>
+        </p:nvSpPr>
+        <p:spPr>
+          <a:xfrm>
+            <a:off x="4297680" y="4754880"/>
+            <a:ext cx="2377440" cy="292608"/>
+          </a:xfrm>
+          <a:prstGeom prst="rect">
+            <a:avLst/>
+          </a:prstGeom>
+          <a:noFill/>
+        </p:spPr>
+        <p:txBody>
+          <a:bodyPr wrap="square" anchor="t"/>
+          <a:lstStyle/>
+          <a:p>
+            <a:pPr algn="ctr"/>
+            <a:r>
+              <a:rPr sz="1600" b="1" i="0">
+                <a:solidFill>
+                  <a:srgbClr val="0A6B63"/>
+                </a:solidFill>
+                <a:latin typeface="Georgia"/>
+              </a:rPr>
+              <a:t>x</a:t>
+            </a:r>
+          </a:p>
+        </p:txBody>
+      </p:sp>
+      <p:sp>
+        <p:nvSpPr>
+          <p:cNvPr id="55" name="TextBox 54"/>
+          <p:cNvSpPr txBox="1"/>
+          <p:nvPr/>
+        </p:nvSpPr>
+        <p:spPr>
+          <a:xfrm>
+            <a:off x="6903720" y="4754880"/>
+            <a:ext cx="2377440" cy="292608"/>
+          </a:xfrm>
+          <a:prstGeom prst="rect">
+            <a:avLst/>
+          </a:prstGeom>
+          <a:noFill/>
+        </p:spPr>
+        <p:txBody>
+          <a:bodyPr wrap="square" anchor="t"/>
+          <a:lstStyle/>
+          <a:p>
+            <a:pPr algn="ctr"/>
+            <a:r>
+              <a:rPr sz="1600" b="1" i="0">
+                <a:solidFill>
+                  <a:srgbClr val="0A6B63"/>
+                </a:solidFill>
+                <a:latin typeface="Georgia"/>
+              </a:rPr>
+              <a:t>x</a:t>
+            </a:r>
+          </a:p>
+        </p:txBody>
+      </p:sp>
+      <p:sp>
+        <p:nvSpPr>
+          <p:cNvPr id="56" name="TextBox 55"/>
+          <p:cNvSpPr txBox="1"/>
+          <p:nvPr/>
+        </p:nvSpPr>
+        <p:spPr>
+          <a:xfrm>
+            <a:off x="9509760" y="4754880"/>
+            <a:ext cx="2377440" cy="292608"/>
+          </a:xfrm>
+          <a:prstGeom prst="rect">
+            <a:avLst/>
+          </a:prstGeom>
+          <a:noFill/>
+        </p:spPr>
+        <p:txBody>
+          <a:bodyPr wrap="square" anchor="t"/>
+          <a:lstStyle/>
+          <a:p>
+            <a:pPr algn="ctr"/>
+            <a:r>
+              <a:rPr sz="1600" b="1" i="0">
+                <a:solidFill>
+                  <a:srgbClr val="0A6B63"/>
+                </a:solidFill>
+                <a:latin typeface="Georgia"/>
+              </a:rPr>
+              <a:t>x</a:t>
+            </a:r>
+          </a:p>
+        </p:txBody>
+      </p:sp>
+      <p:sp>
+        <p:nvSpPr>
+          <p:cNvPr id="57" name="Rectangle 56"/>
+          <p:cNvSpPr/>
+          <p:nvPr/>
+        </p:nvSpPr>
+        <p:spPr>
+          <a:xfrm>
+            <a:off x="576072" y="5047488"/>
+            <a:ext cx="11036808" cy="292608"/>
+          </a:xfrm>
+          <a:prstGeom prst="rect">
+            <a:avLst/>
+          </a:prstGeom>
+          <a:solidFill>
+            <a:srgbClr val="EEF3F8"/>
+          </a:solidFill>
+          <a:ln>
+            <a:noFill/>
+          </a:ln>
+        </p:spPr>
+        <p:style>
+          <a:lnRef idx="1">
+            <a:schemeClr val="accent1"/>
+          </a:lnRef>
+          <a:fillRef idx="3">
+            <a:schemeClr val="accent1"/>
+          </a:fillRef>
+          <a:effectRef idx="2">
+            <a:schemeClr val="accent1"/>
+          </a:effectRef>
+          <a:fontRef idx="minor">
+            <a:schemeClr val="lt1"/>
+          </a:fontRef>
+        </p:style>
+        <p:txBody>
+          <a:bodyPr rtlCol="0" anchor="ctr"/>
+          <a:lstStyle/>
+          <a:p>
+            <a:pPr algn="ctr"/>
+          </a:p>
+        </p:txBody>
+      </p:sp>
+      <p:sp>
+        <p:nvSpPr>
+          <p:cNvPr id="58" name="TextBox 57"/>
+          <p:cNvSpPr txBox="1"/>
+          <p:nvPr/>
+        </p:nvSpPr>
+        <p:spPr>
+          <a:xfrm>
+            <a:off x="749808" y="5056632"/>
+            <a:ext cx="3383280" cy="274320"/>
+          </a:xfrm>
+          <a:prstGeom prst="rect">
+            <a:avLst/>
+          </a:prstGeom>
+          <a:noFill/>
+        </p:spPr>
+        <p:txBody>
+          <a:bodyPr wrap="square" anchor="t"/>
+          <a:lstStyle/>
+          <a:p>
+            <a:pPr algn="l"/>
+            <a:r>
+              <a:rPr sz="1300" b="1" i="0">
+                <a:solidFill>
+                  <a:srgbClr val="0B1F33"/>
+                </a:solidFill>
+                <a:latin typeface="Segoe UI"/>
+              </a:rPr>
+              <a:t>Gross profit</a:t>
+            </a:r>
+          </a:p>
+        </p:txBody>
+      </p:sp>
+      <p:sp>
+        <p:nvSpPr>
+          <p:cNvPr id="59" name="TextBox 58"/>
+          <p:cNvSpPr txBox="1"/>
+          <p:nvPr/>
+        </p:nvSpPr>
+        <p:spPr>
+          <a:xfrm>
+            <a:off x="4297680" y="5047488"/>
+            <a:ext cx="2377440" cy="292608"/>
+          </a:xfrm>
+          <a:prstGeom prst="rect">
+            <a:avLst/>
+          </a:prstGeom>
+          <a:noFill/>
+        </p:spPr>
+        <p:txBody>
+          <a:bodyPr wrap="square" anchor="t"/>
+          <a:lstStyle/>
+          <a:p>
+            <a:pPr algn="ctr"/>
+            <a:r>
+              <a:rPr sz="1600" b="1" i="0">
+                <a:solidFill>
+                  <a:srgbClr val="0A6B63"/>
+                </a:solidFill>
+                <a:latin typeface="Georgia"/>
+              </a:rPr>
+              <a:t>x</a:t>
+            </a:r>
+          </a:p>
+        </p:txBody>
+      </p:sp>
+      <p:sp>
+        <p:nvSpPr>
+          <p:cNvPr id="60" name="TextBox 59"/>
+          <p:cNvSpPr txBox="1"/>
+          <p:nvPr/>
+        </p:nvSpPr>
+        <p:spPr>
+          <a:xfrm>
+            <a:off x="6903720" y="5047488"/>
+            <a:ext cx="2377440" cy="292608"/>
+          </a:xfrm>
+          <a:prstGeom prst="rect">
+            <a:avLst/>
+          </a:prstGeom>
+          <a:noFill/>
+        </p:spPr>
+        <p:txBody>
+          <a:bodyPr wrap="square" anchor="t"/>
+          <a:lstStyle/>
+          <a:p>
+            <a:pPr algn="ctr"/>
+            <a:r>
+              <a:rPr sz="1600" b="1" i="0">
+                <a:solidFill>
+                  <a:srgbClr val="0A6B63"/>
+                </a:solidFill>
+                <a:latin typeface="Georgia"/>
+              </a:rPr>
+              <a:t>x</a:t>
+            </a:r>
+          </a:p>
+        </p:txBody>
+      </p:sp>
+      <p:sp>
+        <p:nvSpPr>
+          <p:cNvPr id="61" name="TextBox 60"/>
+          <p:cNvSpPr txBox="1"/>
+          <p:nvPr/>
+        </p:nvSpPr>
+        <p:spPr>
+          <a:xfrm>
+            <a:off x="9509760" y="5047488"/>
+            <a:ext cx="2377440" cy="292608"/>
+          </a:xfrm>
+          <a:prstGeom prst="rect">
+            <a:avLst/>
+          </a:prstGeom>
+          <a:noFill/>
+        </p:spPr>
+        <p:txBody>
+          <a:bodyPr wrap="square" anchor="t"/>
+          <a:lstStyle/>
+          <a:p>
+            <a:pPr algn="ctr"/>
+            <a:r>
+              <a:rPr sz="1600" b="1" i="0">
+                <a:solidFill>
+                  <a:srgbClr val="0A6B63"/>
+                </a:solidFill>
+                <a:latin typeface="Georgia"/>
+              </a:rPr>
+              <a:t>x</a:t>
+            </a:r>
+          </a:p>
+        </p:txBody>
+      </p:sp>
+      <p:sp>
+        <p:nvSpPr>
+          <p:cNvPr id="62" name="Rectangle 61"/>
+          <p:cNvSpPr/>
+          <p:nvPr/>
+        </p:nvSpPr>
+        <p:spPr>
+          <a:xfrm>
+            <a:off x="576072" y="5340096"/>
+            <a:ext cx="11036808" cy="292608"/>
+          </a:xfrm>
+          <a:prstGeom prst="rect">
+            <a:avLst/>
+          </a:prstGeom>
+          <a:solidFill>
+            <a:srgbClr val="EEF3F8"/>
+          </a:solidFill>
+          <a:ln>
+            <a:noFill/>
+          </a:ln>
+        </p:spPr>
+        <p:style>
+          <a:lnRef idx="1">
+            <a:schemeClr val="accent1"/>
+          </a:lnRef>
+          <a:fillRef idx="3">
+            <a:schemeClr val="accent1"/>
+          </a:fillRef>
+          <a:effectRef idx="2">
+            <a:schemeClr val="accent1"/>
+          </a:effectRef>
+          <a:fontRef idx="minor">
+            <a:schemeClr val="lt1"/>
+          </a:fontRef>
+        </p:style>
+        <p:txBody>
+          <a:bodyPr rtlCol="0" anchor="ctr"/>
+          <a:lstStyle/>
+          <a:p>
+            <a:pPr algn="ctr"/>
+          </a:p>
+        </p:txBody>
+      </p:sp>
+      <p:sp>
+        <p:nvSpPr>
+          <p:cNvPr id="63" name="TextBox 62"/>
+          <p:cNvSpPr txBox="1"/>
+          <p:nvPr/>
+        </p:nvSpPr>
+        <p:spPr>
+          <a:xfrm>
+            <a:off x="749808" y="5349240"/>
+            <a:ext cx="3383280" cy="274320"/>
+          </a:xfrm>
+          <a:prstGeom prst="rect">
+            <a:avLst/>
+          </a:prstGeom>
+          <a:noFill/>
+        </p:spPr>
+        <p:txBody>
+          <a:bodyPr wrap="square" anchor="t"/>
+          <a:lstStyle/>
+          <a:p>
+            <a:pPr algn="l"/>
+            <a:r>
+              <a:rPr sz="1300" b="1" i="0">
+                <a:solidFill>
+                  <a:srgbClr val="0B1F33"/>
+                </a:solidFill>
+                <a:latin typeface="Segoe UI"/>
+              </a:rPr>
+              <a:t>EBITDA</a:t>
+            </a:r>
+          </a:p>
+        </p:txBody>
+      </p:sp>
+      <p:sp>
+        <p:nvSpPr>
+          <p:cNvPr id="64" name="TextBox 63"/>
+          <p:cNvSpPr txBox="1"/>
+          <p:nvPr/>
+        </p:nvSpPr>
+        <p:spPr>
+          <a:xfrm>
+            <a:off x="4297680" y="5340096"/>
+            <a:ext cx="2377440" cy="292608"/>
+          </a:xfrm>
+          <a:prstGeom prst="rect">
+            <a:avLst/>
+          </a:prstGeom>
+          <a:noFill/>
+        </p:spPr>
+        <p:txBody>
+          <a:bodyPr wrap="square" anchor="t"/>
+          <a:lstStyle/>
+          <a:p>
+            <a:pPr algn="ctr"/>
+            <a:r>
+              <a:rPr sz="1600" b="1" i="0">
+                <a:solidFill>
+                  <a:srgbClr val="0A6B63"/>
+                </a:solidFill>
+                <a:latin typeface="Georgia"/>
+              </a:rPr>
+              <a:t>x</a:t>
+            </a:r>
+          </a:p>
+        </p:txBody>
+      </p:sp>
+      <p:sp>
+        <p:nvSpPr>
+          <p:cNvPr id="65" name="TextBox 64"/>
+          <p:cNvSpPr txBox="1"/>
+          <p:nvPr/>
+        </p:nvSpPr>
+        <p:spPr>
+          <a:xfrm>
+            <a:off x="6903720" y="5340096"/>
+            <a:ext cx="2377440" cy="292608"/>
+          </a:xfrm>
+          <a:prstGeom prst="rect">
+            <a:avLst/>
+          </a:prstGeom>
+          <a:noFill/>
+        </p:spPr>
+        <p:txBody>
+          <a:bodyPr wrap="square" anchor="t"/>
+          <a:lstStyle/>
+          <a:p>
+            <a:pPr algn="ctr"/>
+            <a:r>
+              <a:rPr sz="1600" b="1" i="0">
+                <a:solidFill>
+                  <a:srgbClr val="0A6B63"/>
+                </a:solidFill>
+                <a:latin typeface="Georgia"/>
+              </a:rPr>
+              <a:t>x</a:t>
+            </a:r>
+          </a:p>
+        </p:txBody>
+      </p:sp>
+      <p:sp>
+        <p:nvSpPr>
+          <p:cNvPr id="66" name="TextBox 65"/>
+          <p:cNvSpPr txBox="1"/>
+          <p:nvPr/>
+        </p:nvSpPr>
+        <p:spPr>
+          <a:xfrm>
+            <a:off x="9509760" y="5340096"/>
+            <a:ext cx="2377440" cy="292608"/>
+          </a:xfrm>
+          <a:prstGeom prst="rect">
+            <a:avLst/>
+          </a:prstGeom>
+          <a:noFill/>
+        </p:spPr>
+        <p:txBody>
+          <a:bodyPr wrap="square" anchor="t"/>
+          <a:lstStyle/>
+          <a:p>
+            <a:pPr algn="ctr"/>
+            <a:r>
+              <a:rPr sz="1600" b="1" i="0">
+                <a:solidFill>
+                  <a:srgbClr val="0A6B63"/>
+                </a:solidFill>
+                <a:latin typeface="Georgia"/>
+              </a:rPr>
+              <a:t>x</a:t>
+            </a:r>
+          </a:p>
+        </p:txBody>
+      </p:sp>
+      <p:sp>
+        <p:nvSpPr>
+          <p:cNvPr id="67" name="TextBox 66"/>
+          <p:cNvSpPr txBox="1"/>
+          <p:nvPr/>
+        </p:nvSpPr>
+        <p:spPr>
+          <a:xfrm>
+            <a:off x="749808" y="5833872"/>
+            <a:ext cx="10515600" cy="274320"/>
+          </a:xfrm>
+          <a:prstGeom prst="rect">
+            <a:avLst/>
+          </a:prstGeom>
+          <a:noFill/>
+        </p:spPr>
+        <p:txBody>
+          <a:bodyPr wrap="square" anchor="t"/>
+          <a:lstStyle/>
+          <a:p>
+            <a:pPr algn="l"/>
+            <a:r>
+              <a:rPr sz="1100" b="0" i="0">
+                <a:solidFill>
+                  <a:srgbClr val="5E6E80"/>
+                </a:solidFill>
+                <a:latin typeface="Segoe UI"/>
+              </a:rPr>
+              <a:t>Confidential discussion framework. Year 1 is the first 12 months post-financing. Figures to be completed in diligence.</a:t>
+            </a:r>
+          </a:p>
+        </p:txBody>
+      </p:sp>
+      <p:sp>
+        <p:nvSpPr>
+          <p:cNvPr id="68" name="Rectangle 67"/>
+          <p:cNvSpPr/>
+          <p:nvPr/>
+        </p:nvSpPr>
+        <p:spPr>
+          <a:xfrm>
+            <a:off x="0" y="0"/>
+            <a:ext cx="12191695" cy="73152"/>
+          </a:xfrm>
+          <a:prstGeom prst="rect">
+            <a:avLst/>
+          </a:prstGeom>
+          <a:solidFill>
+            <a:srgbClr val="0A6B63"/>
+          </a:solidFill>
+          <a:ln>
+            <a:noFill/>
+          </a:ln>
+        </p:spPr>
+        <p:style>
+          <a:lnRef idx="1">
+            <a:schemeClr val="accent1"/>
+          </a:lnRef>
+          <a:fillRef idx="3">
+            <a:schemeClr val="accent1"/>
+          </a:fillRef>
+          <a:effectRef idx="2">
+            <a:schemeClr val="accent1"/>
+          </a:effectRef>
+          <a:fontRef idx="minor">
+            <a:schemeClr val="lt1"/>
+          </a:fontRef>
+        </p:style>
+        <p:txBody>
+          <a:bodyPr rtlCol="0" anchor="ctr"/>
+          <a:lstStyle/>
+          <a:p>
+            <a:pPr algn="ctr"/>
+          </a:p>
+        </p:txBody>
+      </p:sp>
+      <p:sp>
+        <p:nvSpPr>
+          <p:cNvPr id="69" name="Rectangle 68"/>
+          <p:cNvSpPr/>
+          <p:nvPr/>
+        </p:nvSpPr>
+        <p:spPr>
+          <a:xfrm>
+            <a:off x="0" y="6473952"/>
+            <a:ext cx="12191695" cy="384048"/>
+          </a:xfrm>
+          <a:prstGeom prst="rect">
+            <a:avLst/>
+          </a:prstGeom>
+          <a:solidFill>
+            <a:srgbClr val="F5F8FB"/>
+          </a:solidFill>
+          <a:ln>
+            <a:noFill/>
+          </a:ln>
+        </p:spPr>
+        <p:style>
+          <a:lnRef idx="1">
+            <a:schemeClr val="accent1"/>
+          </a:lnRef>
+          <a:fillRef idx="3">
+            <a:schemeClr val="accent1"/>
+          </a:fillRef>
+          <a:effectRef idx="2">
+            <a:schemeClr val="accent1"/>
+          </a:effectRef>
+          <a:fontRef idx="minor">
+            <a:schemeClr val="lt1"/>
+          </a:fontRef>
+        </p:style>
+        <p:txBody>
+          <a:bodyPr rtlCol="0" anchor="ctr"/>
+          <a:lstStyle/>
+          <a:p>
+            <a:pPr algn="ctr"/>
+          </a:p>
+        </p:txBody>
+      </p:sp>
+      <p:sp>
+        <p:nvSpPr>
+          <p:cNvPr id="70" name="Rectangle 69"/>
+          <p:cNvSpPr/>
+          <p:nvPr/>
+        </p:nvSpPr>
+        <p:spPr>
+          <a:xfrm>
+            <a:off x="0" y="6473952"/>
+            <a:ext cx="12191695" cy="9144"/>
+          </a:xfrm>
+          <a:prstGeom prst="rect">
+            <a:avLst/>
+          </a:prstGeom>
+          <a:solidFill>
+            <a:srgbClr val="D4DEE8"/>
+          </a:solidFill>
+          <a:ln>
+            <a:noFill/>
+          </a:ln>
+        </p:spPr>
+        <p:style>
+          <a:lnRef idx="1">
+            <a:schemeClr val="accent1"/>
+          </a:lnRef>
+          <a:fillRef idx="3">
+            <a:schemeClr val="accent1"/>
+          </a:fillRef>
+          <a:effectRef idx="2">
+            <a:schemeClr val="accent1"/>
+          </a:effectRef>
+          <a:fontRef idx="minor">
+            <a:schemeClr val="lt1"/>
+          </a:fontRef>
+        </p:style>
+        <p:txBody>
+          <a:bodyPr rtlCol="0" anchor="ctr"/>
+          <a:lstStyle/>
+          <a:p>
+            <a:pPr algn="ctr"/>
+          </a:p>
+        </p:txBody>
+      </p:sp>
+      <p:sp>
+        <p:nvSpPr>
+          <p:cNvPr id="71" name="TextBox 70"/>
           <p:cNvSpPr txBox="1"/>
           <p:nvPr/>
         </p:nvSpPr>
@@ -25476,7 +26518,7 @@
       </p:sp>
       <p:sp>
         <p:nvSpPr>
-          <p:cNvPr id="10" name="TextBox 9"/>
+          <p:cNvPr id="72" name="TextBox 71"/>
           <p:cNvSpPr txBox="1"/>
           <p:nvPr/>
         </p:nvSpPr>
@@ -33842,7 +34884,7 @@
                 </a:solidFill>
                 <a:latin typeface="Georgia"/>
               </a:rPr>
-              <a:t>RMB 6.2M</a:t>
+              <a:t>RMB  x</a:t>
             </a:r>
           </a:p>
         </p:txBody>
@@ -33875,7 +34917,7 @@
                 </a:solidFill>
                 <a:latin typeface="Segoe UI"/>
               </a:rPr>
-              <a:t>≈ US$0.9M</a:t>
+              <a:t>≈  US$  x</a:t>
             </a:r>
           </a:p>
         </p:txBody>
@@ -33941,7 +34983,7 @@
                 </a:solidFill>
                 <a:latin typeface="Georgia"/>
               </a:rPr>
-              <a:t>RMB 25.9M</a:t>
+              <a:t>RMB  x</a:t>
             </a:r>
           </a:p>
         </p:txBody>
@@ -33974,7 +35016,7 @@
                 </a:solidFill>
                 <a:latin typeface="Segoe UI"/>
               </a:rPr>
-              <a:t>≈ US$3.8M</a:t>
+              <a:t>≈  US$  x</a:t>
             </a:r>
           </a:p>
         </p:txBody>
@@ -34040,7 +35082,7 @@
                 </a:solidFill>
                 <a:latin typeface="Georgia"/>
               </a:rPr>
-              <a:t>RMB 74.5M</a:t>
+              <a:t>RMB  x</a:t>
             </a:r>
           </a:p>
         </p:txBody>
@@ -34073,7 +35115,7 @@
                 </a:solidFill>
                 <a:latin typeface="Segoe UI"/>
               </a:rPr>
-              <a:t>≈ US$11.1M</a:t>
+              <a:t>≈  US$  x</a:t>
             </a:r>
           </a:p>
         </p:txBody>
@@ -34106,7 +35148,7 @@
                 </a:solidFill>
                 <a:latin typeface="Segoe UI"/>
               </a:rPr>
-              <a:t>Logic: global job seekers → addressable AI Resume users → paid conversion → stacked revenue (AI + services + commission + B2B + ads).  USD at an illustrative RMB 6.73 / US$1. Figures labeled illustrative are management projections, not forecasts.</a:t>
+              <a:t>Logic: global job seekers → addressable AI Resume users → paid conversion → stacked revenue (AI + services + commission + B2B + ads). Revenue figures to be completed.</a:t>
             </a:r>
           </a:p>
         </p:txBody>

--- a/51Careers_Addition.pptx
+++ b/51Careers_Addition.pptx
@@ -30488,7 +30488,7 @@
         </p:nvSpPr>
         <p:spPr>
           <a:xfrm>
-            <a:off x="822960" y="5029200"/>
+            <a:off x="822960" y="4983480"/>
             <a:ext cx="10515600" cy="457200"/>
           </a:xfrm>
           <a:prstGeom prst="rect">
@@ -30515,13 +30515,89 @@
       </p:sp>
       <p:sp>
         <p:nvSpPr>
-          <p:cNvPr id="9" name="TextBox 8"/>
-          <p:cNvSpPr txBox="1"/>
-          <p:nvPr/>
-        </p:nvSpPr>
-        <p:spPr>
-          <a:xfrm>
-            <a:off x="822960" y="6126480"/>
+          <p:cNvPr id="9" name="Rectangle 8"/>
+          <p:cNvSpPr/>
+          <p:nvPr/>
+        </p:nvSpPr>
+        <p:spPr>
+          <a:xfrm>
+            <a:off x="0" y="5806440"/>
+            <a:ext cx="12191695" cy="1051560"/>
+          </a:xfrm>
+          <a:prstGeom prst="rect">
+            <a:avLst/>
+          </a:prstGeom>
+          <a:solidFill>
+            <a:srgbClr val="081828"/>
+          </a:solidFill>
+          <a:ln>
+            <a:noFill/>
+          </a:ln>
+        </p:spPr>
+        <p:style>
+          <a:lnRef idx="1">
+            <a:schemeClr val="accent1"/>
+          </a:lnRef>
+          <a:fillRef idx="3">
+            <a:schemeClr val="accent1"/>
+          </a:fillRef>
+          <a:effectRef idx="2">
+            <a:schemeClr val="accent1"/>
+          </a:effectRef>
+          <a:fontRef idx="minor">
+            <a:schemeClr val="lt1"/>
+          </a:fontRef>
+        </p:style>
+        <p:txBody>
+          <a:bodyPr rtlCol="0" anchor="ctr"/>
+          <a:lstStyle/>
+          <a:p>
+            <a:pPr algn="ctr"/>
+          </a:p>
+        </p:txBody>
+      </p:sp>
+      <p:sp>
+        <p:nvSpPr>
+          <p:cNvPr id="10" name="TextBox 9"/>
+          <p:cNvSpPr txBox="1"/>
+          <p:nvPr/>
+        </p:nvSpPr>
+        <p:spPr>
+          <a:xfrm>
+            <a:off x="822960" y="6016752"/>
+            <a:ext cx="10515600" cy="292608"/>
+          </a:xfrm>
+          <a:prstGeom prst="rect">
+            <a:avLst/>
+          </a:prstGeom>
+          <a:noFill/>
+        </p:spPr>
+        <p:txBody>
+          <a:bodyPr wrap="square" anchor="t"/>
+          <a:lstStyle/>
+          <a:p>
+            <a:pPr algn="l"/>
+            <a:r>
+              <a:rPr sz="1400" b="1" i="0">
+                <a:solidFill>
+                  <a:srgbClr val="D7EBE8"/>
+                </a:solidFill>
+                <a:latin typeface="Segoe UI"/>
+              </a:rPr>
+              <a:t>CHINA R&amp;D   ·   U.S. COMMERCIALIZATION   ·   GLOBAL DISTRIBUTION</a:t>
+            </a:r>
+          </a:p>
+        </p:txBody>
+      </p:sp>
+      <p:sp>
+        <p:nvSpPr>
+          <p:cNvPr id="11" name="TextBox 10"/>
+          <p:cNvSpPr txBox="1"/>
+          <p:nvPr/>
+        </p:nvSpPr>
+        <p:spPr>
+          <a:xfrm>
+            <a:off x="822960" y="6355080"/>
             <a:ext cx="10515600" cy="292608"/>
           </a:xfrm>
           <a:prstGeom prst="rect">
@@ -35439,7 +35515,7 @@
         <p:spPr>
           <a:xfrm>
             <a:off x="502920" y="1115568"/>
-            <a:ext cx="6949440" cy="548640"/>
+            <a:ext cx="6949440" cy="658368"/>
           </a:xfrm>
           <a:prstGeom prst="roundRect">
             <a:avLst>
@@ -35484,7 +35560,7 @@
         <p:spPr>
           <a:xfrm>
             <a:off x="502920" y="1115568"/>
-            <a:ext cx="73152" cy="548640"/>
+            <a:ext cx="73152" cy="658368"/>
           </a:xfrm>
           <a:prstGeom prst="rect">
             <a:avLst/>
@@ -35526,21 +35602,21 @@
         </p:nvSpPr>
         <p:spPr>
           <a:xfrm>
-            <a:off x="777240" y="1225296"/>
-            <a:ext cx="457200" cy="329184"/>
-          </a:xfrm>
-          <a:prstGeom prst="rect">
-            <a:avLst/>
-          </a:prstGeom>
-          <a:noFill/>
-        </p:spPr>
-        <p:txBody>
-          <a:bodyPr wrap="square" anchor="t"/>
-          <a:lstStyle/>
-          <a:p>
-            <a:pPr algn="l"/>
-            <a:r>
-              <a:rPr sz="1400" b="1" i="0">
+            <a:off x="777240" y="1261872"/>
+            <a:ext cx="457200" cy="384048"/>
+          </a:xfrm>
+          <a:prstGeom prst="rect">
+            <a:avLst/>
+          </a:prstGeom>
+          <a:noFill/>
+        </p:spPr>
+        <p:txBody>
+          <a:bodyPr wrap="square" anchor="t"/>
+          <a:lstStyle/>
+          <a:p>
+            <a:pPr algn="l"/>
+            <a:r>
+              <a:rPr sz="1600" b="1" i="0">
                 <a:solidFill>
                   <a:srgbClr val="0A6B63"/>
                 </a:solidFill>
@@ -35559,21 +35635,21 @@
         </p:nvSpPr>
         <p:spPr>
           <a:xfrm>
-            <a:off x="1325880" y="1225296"/>
-            <a:ext cx="5852160" cy="329184"/>
-          </a:xfrm>
-          <a:prstGeom prst="rect">
-            <a:avLst/>
-          </a:prstGeom>
-          <a:noFill/>
-        </p:spPr>
-        <p:txBody>
-          <a:bodyPr wrap="square" anchor="t"/>
-          <a:lstStyle/>
-          <a:p>
-            <a:pPr algn="l"/>
-            <a:r>
-              <a:rPr sz="1600" b="1" i="0">
+            <a:off x="1325880" y="1261872"/>
+            <a:ext cx="5852160" cy="384048"/>
+          </a:xfrm>
+          <a:prstGeom prst="rect">
+            <a:avLst/>
+          </a:prstGeom>
+          <a:noFill/>
+        </p:spPr>
+        <p:txBody>
+          <a:bodyPr wrap="square" anchor="t"/>
+          <a:lstStyle/>
+          <a:p>
+            <a:pPr algn="l"/>
+            <a:r>
+              <a:rPr sz="1700" b="1" i="0">
                 <a:solidFill>
                   <a:srgbClr val="0B1F33"/>
                 </a:solidFill>
@@ -35592,8 +35668,8 @@
         </p:nvSpPr>
         <p:spPr>
           <a:xfrm>
-            <a:off x="502920" y="1737360"/>
-            <a:ext cx="6949440" cy="548640"/>
+            <a:off x="502920" y="1828800"/>
+            <a:ext cx="6949440" cy="658368"/>
           </a:xfrm>
           <a:prstGeom prst="roundRect">
             <a:avLst>
@@ -35637,8 +35713,8 @@
         </p:nvSpPr>
         <p:spPr>
           <a:xfrm>
-            <a:off x="502920" y="1737360"/>
-            <a:ext cx="73152" cy="548640"/>
+            <a:off x="502920" y="1828800"/>
+            <a:ext cx="73152" cy="658368"/>
           </a:xfrm>
           <a:prstGeom prst="rect">
             <a:avLst/>
@@ -35680,21 +35756,21 @@
         </p:nvSpPr>
         <p:spPr>
           <a:xfrm>
-            <a:off x="777240" y="1847088"/>
-            <a:ext cx="457200" cy="329184"/>
-          </a:xfrm>
-          <a:prstGeom prst="rect">
-            <a:avLst/>
-          </a:prstGeom>
-          <a:noFill/>
-        </p:spPr>
-        <p:txBody>
-          <a:bodyPr wrap="square" anchor="t"/>
-          <a:lstStyle/>
-          <a:p>
-            <a:pPr algn="l"/>
-            <a:r>
-              <a:rPr sz="1400" b="1" i="0">
+            <a:off x="777240" y="1975104"/>
+            <a:ext cx="457200" cy="384048"/>
+          </a:xfrm>
+          <a:prstGeom prst="rect">
+            <a:avLst/>
+          </a:prstGeom>
+          <a:noFill/>
+        </p:spPr>
+        <p:txBody>
+          <a:bodyPr wrap="square" anchor="t"/>
+          <a:lstStyle/>
+          <a:p>
+            <a:pPr algn="l"/>
+            <a:r>
+              <a:rPr sz="1600" b="1" i="0">
                 <a:solidFill>
                   <a:srgbClr val="0A6B63"/>
                 </a:solidFill>
@@ -35713,21 +35789,21 @@
         </p:nvSpPr>
         <p:spPr>
           <a:xfrm>
-            <a:off x="1325880" y="1847088"/>
-            <a:ext cx="5852160" cy="329184"/>
-          </a:xfrm>
-          <a:prstGeom prst="rect">
-            <a:avLst/>
-          </a:prstGeom>
-          <a:noFill/>
-        </p:spPr>
-        <p:txBody>
-          <a:bodyPr wrap="square" anchor="t"/>
-          <a:lstStyle/>
-          <a:p>
-            <a:pPr algn="l"/>
-            <a:r>
-              <a:rPr sz="1600" b="1" i="0">
+            <a:off x="1325880" y="1975104"/>
+            <a:ext cx="5852160" cy="384048"/>
+          </a:xfrm>
+          <a:prstGeom prst="rect">
+            <a:avLst/>
+          </a:prstGeom>
+          <a:noFill/>
+        </p:spPr>
+        <p:txBody>
+          <a:bodyPr wrap="square" anchor="t"/>
+          <a:lstStyle/>
+          <a:p>
+            <a:pPr algn="l"/>
+            <a:r>
+              <a:rPr sz="1700" b="1" i="0">
                 <a:solidFill>
                   <a:srgbClr val="0B1F33"/>
                 </a:solidFill>
@@ -35746,8 +35822,8 @@
         </p:nvSpPr>
         <p:spPr>
           <a:xfrm>
-            <a:off x="502920" y="2359152"/>
-            <a:ext cx="6949440" cy="548640"/>
+            <a:off x="502920" y="2542032"/>
+            <a:ext cx="6949440" cy="658368"/>
           </a:xfrm>
           <a:prstGeom prst="roundRect">
             <a:avLst>
@@ -35791,8 +35867,8 @@
         </p:nvSpPr>
         <p:spPr>
           <a:xfrm>
-            <a:off x="502920" y="2359152"/>
-            <a:ext cx="73152" cy="548640"/>
+            <a:off x="502920" y="2542032"/>
+            <a:ext cx="73152" cy="658368"/>
           </a:xfrm>
           <a:prstGeom prst="rect">
             <a:avLst/>
@@ -35834,21 +35910,21 @@
         </p:nvSpPr>
         <p:spPr>
           <a:xfrm>
-            <a:off x="777240" y="2468880"/>
-            <a:ext cx="457200" cy="329184"/>
-          </a:xfrm>
-          <a:prstGeom prst="rect">
-            <a:avLst/>
-          </a:prstGeom>
-          <a:noFill/>
-        </p:spPr>
-        <p:txBody>
-          <a:bodyPr wrap="square" anchor="t"/>
-          <a:lstStyle/>
-          <a:p>
-            <a:pPr algn="l"/>
-            <a:r>
-              <a:rPr sz="1400" b="1" i="0">
+            <a:off x="777240" y="2688336"/>
+            <a:ext cx="457200" cy="384048"/>
+          </a:xfrm>
+          <a:prstGeom prst="rect">
+            <a:avLst/>
+          </a:prstGeom>
+          <a:noFill/>
+        </p:spPr>
+        <p:txBody>
+          <a:bodyPr wrap="square" anchor="t"/>
+          <a:lstStyle/>
+          <a:p>
+            <a:pPr algn="l"/>
+            <a:r>
+              <a:rPr sz="1600" b="1" i="0">
                 <a:solidFill>
                   <a:srgbClr val="0A6B63"/>
                 </a:solidFill>
@@ -35867,21 +35943,21 @@
         </p:nvSpPr>
         <p:spPr>
           <a:xfrm>
-            <a:off x="1325880" y="2468880"/>
-            <a:ext cx="5852160" cy="329184"/>
-          </a:xfrm>
-          <a:prstGeom prst="rect">
-            <a:avLst/>
-          </a:prstGeom>
-          <a:noFill/>
-        </p:spPr>
-        <p:txBody>
-          <a:bodyPr wrap="square" anchor="t"/>
-          <a:lstStyle/>
-          <a:p>
-            <a:pPr algn="l"/>
-            <a:r>
-              <a:rPr sz="1600" b="1" i="0">
+            <a:off x="1325880" y="2688336"/>
+            <a:ext cx="5852160" cy="384048"/>
+          </a:xfrm>
+          <a:prstGeom prst="rect">
+            <a:avLst/>
+          </a:prstGeom>
+          <a:noFill/>
+        </p:spPr>
+        <p:txBody>
+          <a:bodyPr wrap="square" anchor="t"/>
+          <a:lstStyle/>
+          <a:p>
+            <a:pPr algn="l"/>
+            <a:r>
+              <a:rPr sz="1700" b="1" i="0">
                 <a:solidFill>
                   <a:srgbClr val="0B1F33"/>
                 </a:solidFill>
@@ -35900,8 +35976,8 @@
         </p:nvSpPr>
         <p:spPr>
           <a:xfrm>
-            <a:off x="502920" y="2980944"/>
-            <a:ext cx="6949440" cy="548640"/>
+            <a:off x="502920" y="3255264"/>
+            <a:ext cx="6949440" cy="658368"/>
           </a:xfrm>
           <a:prstGeom prst="roundRect">
             <a:avLst>
@@ -35945,8 +36021,8 @@
         </p:nvSpPr>
         <p:spPr>
           <a:xfrm>
-            <a:off x="502920" y="2980944"/>
-            <a:ext cx="73152" cy="548640"/>
+            <a:off x="502920" y="3255264"/>
+            <a:ext cx="73152" cy="658368"/>
           </a:xfrm>
           <a:prstGeom prst="rect">
             <a:avLst/>
@@ -35988,21 +36064,21 @@
         </p:nvSpPr>
         <p:spPr>
           <a:xfrm>
-            <a:off x="777240" y="3090672"/>
-            <a:ext cx="457200" cy="329184"/>
-          </a:xfrm>
-          <a:prstGeom prst="rect">
-            <a:avLst/>
-          </a:prstGeom>
-          <a:noFill/>
-        </p:spPr>
-        <p:txBody>
-          <a:bodyPr wrap="square" anchor="t"/>
-          <a:lstStyle/>
-          <a:p>
-            <a:pPr algn="l"/>
-            <a:r>
-              <a:rPr sz="1400" b="1" i="0">
+            <a:off x="777240" y="3401568"/>
+            <a:ext cx="457200" cy="384048"/>
+          </a:xfrm>
+          <a:prstGeom prst="rect">
+            <a:avLst/>
+          </a:prstGeom>
+          <a:noFill/>
+        </p:spPr>
+        <p:txBody>
+          <a:bodyPr wrap="square" anchor="t"/>
+          <a:lstStyle/>
+          <a:p>
+            <a:pPr algn="l"/>
+            <a:r>
+              <a:rPr sz="1600" b="1" i="0">
                 <a:solidFill>
                   <a:srgbClr val="0A6B63"/>
                 </a:solidFill>
@@ -36021,21 +36097,21 @@
         </p:nvSpPr>
         <p:spPr>
           <a:xfrm>
-            <a:off x="1325880" y="3090672"/>
-            <a:ext cx="5852160" cy="329184"/>
-          </a:xfrm>
-          <a:prstGeom prst="rect">
-            <a:avLst/>
-          </a:prstGeom>
-          <a:noFill/>
-        </p:spPr>
-        <p:txBody>
-          <a:bodyPr wrap="square" anchor="t"/>
-          <a:lstStyle/>
-          <a:p>
-            <a:pPr algn="l"/>
-            <a:r>
-              <a:rPr sz="1600" b="1" i="0">
+            <a:off x="1325880" y="3401568"/>
+            <a:ext cx="5852160" cy="384048"/>
+          </a:xfrm>
+          <a:prstGeom prst="rect">
+            <a:avLst/>
+          </a:prstGeom>
+          <a:noFill/>
+        </p:spPr>
+        <p:txBody>
+          <a:bodyPr wrap="square" anchor="t"/>
+          <a:lstStyle/>
+          <a:p>
+            <a:pPr algn="l"/>
+            <a:r>
+              <a:rPr sz="1700" b="1" i="0">
                 <a:solidFill>
                   <a:srgbClr val="0B1F33"/>
                 </a:solidFill>
@@ -36054,8 +36130,8 @@
         </p:nvSpPr>
         <p:spPr>
           <a:xfrm>
-            <a:off x="502920" y="3602736"/>
-            <a:ext cx="6949440" cy="548640"/>
+            <a:off x="502920" y="3968496"/>
+            <a:ext cx="6949440" cy="658368"/>
           </a:xfrm>
           <a:prstGeom prst="roundRect">
             <a:avLst>
@@ -36099,8 +36175,8 @@
         </p:nvSpPr>
         <p:spPr>
           <a:xfrm>
-            <a:off x="502920" y="3602736"/>
-            <a:ext cx="73152" cy="548640"/>
+            <a:off x="502920" y="3968496"/>
+            <a:ext cx="73152" cy="658368"/>
           </a:xfrm>
           <a:prstGeom prst="rect">
             <a:avLst/>
@@ -36142,21 +36218,21 @@
         </p:nvSpPr>
         <p:spPr>
           <a:xfrm>
-            <a:off x="777240" y="3712464"/>
-            <a:ext cx="457200" cy="329184"/>
-          </a:xfrm>
-          <a:prstGeom prst="rect">
-            <a:avLst/>
-          </a:prstGeom>
-          <a:noFill/>
-        </p:spPr>
-        <p:txBody>
-          <a:bodyPr wrap="square" anchor="t"/>
-          <a:lstStyle/>
-          <a:p>
-            <a:pPr algn="l"/>
-            <a:r>
-              <a:rPr sz="1400" b="1" i="0">
+            <a:off x="777240" y="4114800"/>
+            <a:ext cx="457200" cy="384048"/>
+          </a:xfrm>
+          <a:prstGeom prst="rect">
+            <a:avLst/>
+          </a:prstGeom>
+          <a:noFill/>
+        </p:spPr>
+        <p:txBody>
+          <a:bodyPr wrap="square" anchor="t"/>
+          <a:lstStyle/>
+          <a:p>
+            <a:pPr algn="l"/>
+            <a:r>
+              <a:rPr sz="1600" b="1" i="0">
                 <a:solidFill>
                   <a:srgbClr val="0A6B63"/>
                 </a:solidFill>
@@ -36175,21 +36251,21 @@
         </p:nvSpPr>
         <p:spPr>
           <a:xfrm>
-            <a:off x="1325880" y="3712464"/>
-            <a:ext cx="5852160" cy="329184"/>
-          </a:xfrm>
-          <a:prstGeom prst="rect">
-            <a:avLst/>
-          </a:prstGeom>
-          <a:noFill/>
-        </p:spPr>
-        <p:txBody>
-          <a:bodyPr wrap="square" anchor="t"/>
-          <a:lstStyle/>
-          <a:p>
-            <a:pPr algn="l"/>
-            <a:r>
-              <a:rPr sz="1600" b="1" i="0">
+            <a:off x="1325880" y="4114800"/>
+            <a:ext cx="5852160" cy="384048"/>
+          </a:xfrm>
+          <a:prstGeom prst="rect">
+            <a:avLst/>
+          </a:prstGeom>
+          <a:noFill/>
+        </p:spPr>
+        <p:txBody>
+          <a:bodyPr wrap="square" anchor="t"/>
+          <a:lstStyle/>
+          <a:p>
+            <a:pPr algn="l"/>
+            <a:r>
+              <a:rPr sz="1700" b="1" i="0">
                 <a:solidFill>
                   <a:srgbClr val="0B1F33"/>
                 </a:solidFill>
@@ -36208,8 +36284,8 @@
         </p:nvSpPr>
         <p:spPr>
           <a:xfrm>
-            <a:off x="502920" y="4224528"/>
-            <a:ext cx="6949440" cy="548640"/>
+            <a:off x="502920" y="4681728"/>
+            <a:ext cx="6949440" cy="658368"/>
           </a:xfrm>
           <a:prstGeom prst="roundRect">
             <a:avLst>
@@ -36253,8 +36329,8 @@
         </p:nvSpPr>
         <p:spPr>
           <a:xfrm>
-            <a:off x="502920" y="4224528"/>
-            <a:ext cx="73152" cy="548640"/>
+            <a:off x="502920" y="4681728"/>
+            <a:ext cx="73152" cy="658368"/>
           </a:xfrm>
           <a:prstGeom prst="rect">
             <a:avLst/>
@@ -36296,21 +36372,21 @@
         </p:nvSpPr>
         <p:spPr>
           <a:xfrm>
-            <a:off x="777240" y="4334256"/>
-            <a:ext cx="457200" cy="329184"/>
-          </a:xfrm>
-          <a:prstGeom prst="rect">
-            <a:avLst/>
-          </a:prstGeom>
-          <a:noFill/>
-        </p:spPr>
-        <p:txBody>
-          <a:bodyPr wrap="square" anchor="t"/>
-          <a:lstStyle/>
-          <a:p>
-            <a:pPr algn="l"/>
-            <a:r>
-              <a:rPr sz="1400" b="1" i="0">
+            <a:off x="777240" y="4828032"/>
+            <a:ext cx="457200" cy="384048"/>
+          </a:xfrm>
+          <a:prstGeom prst="rect">
+            <a:avLst/>
+          </a:prstGeom>
+          <a:noFill/>
+        </p:spPr>
+        <p:txBody>
+          <a:bodyPr wrap="square" anchor="t"/>
+          <a:lstStyle/>
+          <a:p>
+            <a:pPr algn="l"/>
+            <a:r>
+              <a:rPr sz="1600" b="1" i="0">
                 <a:solidFill>
                   <a:srgbClr val="0A6B63"/>
                 </a:solidFill>
@@ -36329,21 +36405,21 @@
         </p:nvSpPr>
         <p:spPr>
           <a:xfrm>
-            <a:off x="1325880" y="4334256"/>
-            <a:ext cx="5852160" cy="329184"/>
-          </a:xfrm>
-          <a:prstGeom prst="rect">
-            <a:avLst/>
-          </a:prstGeom>
-          <a:noFill/>
-        </p:spPr>
-        <p:txBody>
-          <a:bodyPr wrap="square" anchor="t"/>
-          <a:lstStyle/>
-          <a:p>
-            <a:pPr algn="l"/>
-            <a:r>
-              <a:rPr sz="1600" b="1" i="0">
+            <a:off x="1325880" y="4828032"/>
+            <a:ext cx="5852160" cy="384048"/>
+          </a:xfrm>
+          <a:prstGeom prst="rect">
+            <a:avLst/>
+          </a:prstGeom>
+          <a:noFill/>
+        </p:spPr>
+        <p:txBody>
+          <a:bodyPr wrap="square" anchor="t"/>
+          <a:lstStyle/>
+          <a:p>
+            <a:pPr algn="l"/>
+            <a:r>
+              <a:rPr sz="1700" b="1" i="0">
                 <a:solidFill>
                   <a:srgbClr val="0B1F33"/>
                 </a:solidFill>
@@ -36362,8 +36438,8 @@
         </p:nvSpPr>
         <p:spPr>
           <a:xfrm>
-            <a:off x="502920" y="4846320"/>
-            <a:ext cx="6949440" cy="548640"/>
+            <a:off x="502920" y="5394960"/>
+            <a:ext cx="6949440" cy="658368"/>
           </a:xfrm>
           <a:prstGeom prst="roundRect">
             <a:avLst>
@@ -36407,8 +36483,8 @@
         </p:nvSpPr>
         <p:spPr>
           <a:xfrm>
-            <a:off x="502920" y="4846320"/>
-            <a:ext cx="73152" cy="548640"/>
+            <a:off x="502920" y="5394960"/>
+            <a:ext cx="73152" cy="658368"/>
           </a:xfrm>
           <a:prstGeom prst="rect">
             <a:avLst/>
@@ -36450,21 +36526,21 @@
         </p:nvSpPr>
         <p:spPr>
           <a:xfrm>
-            <a:off x="777240" y="4956048"/>
-            <a:ext cx="457200" cy="329184"/>
-          </a:xfrm>
-          <a:prstGeom prst="rect">
-            <a:avLst/>
-          </a:prstGeom>
-          <a:noFill/>
-        </p:spPr>
-        <p:txBody>
-          <a:bodyPr wrap="square" anchor="t"/>
-          <a:lstStyle/>
-          <a:p>
-            <a:pPr algn="l"/>
-            <a:r>
-              <a:rPr sz="1400" b="1" i="0">
+            <a:off x="777240" y="5541264"/>
+            <a:ext cx="457200" cy="384048"/>
+          </a:xfrm>
+          <a:prstGeom prst="rect">
+            <a:avLst/>
+          </a:prstGeom>
+          <a:noFill/>
+        </p:spPr>
+        <p:txBody>
+          <a:bodyPr wrap="square" anchor="t"/>
+          <a:lstStyle/>
+          <a:p>
+            <a:pPr algn="l"/>
+            <a:r>
+              <a:rPr sz="1600" b="1" i="0">
                 <a:solidFill>
                   <a:srgbClr val="0A6B63"/>
                 </a:solidFill>
@@ -36483,21 +36559,21 @@
         </p:nvSpPr>
         <p:spPr>
           <a:xfrm>
-            <a:off x="1325880" y="4956048"/>
-            <a:ext cx="5852160" cy="329184"/>
-          </a:xfrm>
-          <a:prstGeom prst="rect">
-            <a:avLst/>
-          </a:prstGeom>
-          <a:noFill/>
-        </p:spPr>
-        <p:txBody>
-          <a:bodyPr wrap="square" anchor="t"/>
-          <a:lstStyle/>
-          <a:p>
-            <a:pPr algn="l"/>
-            <a:r>
-              <a:rPr sz="1600" b="1" i="0">
+            <a:off x="1325880" y="5541264"/>
+            <a:ext cx="5852160" cy="384048"/>
+          </a:xfrm>
+          <a:prstGeom prst="rect">
+            <a:avLst/>
+          </a:prstGeom>
+          <a:noFill/>
+        </p:spPr>
+        <p:txBody>
+          <a:bodyPr wrap="square" anchor="t"/>
+          <a:lstStyle/>
+          <a:p>
+            <a:pPr algn="l"/>
+            <a:r>
+              <a:rPr sz="1700" b="1" i="0">
                 <a:solidFill>
                   <a:srgbClr val="0B1F33"/>
                 </a:solidFill>
@@ -36517,7 +36593,7 @@
         <p:spPr>
           <a:xfrm>
             <a:off x="7680960" y="1115568"/>
-            <a:ext cx="4005072" cy="5102352"/>
+            <a:ext cx="4005072" cy="5175504"/>
           </a:xfrm>
           <a:prstGeom prst="roundRect">
             <a:avLst>

--- a/51Careers_Addition.pptx
+++ b/51Careers_Addition.pptx
@@ -3400,6 +3400,8 @@
                   <a:srgbClr val="D7EBE8"/>
                 </a:solidFill>
                 <a:latin typeface="Segoe UI"/>
+                <a:ea typeface="Segoe UI"/>
+                <a:cs typeface="Segoe UI"/>
               </a:rPr>
               <a:t>CONFIDENTIAL INVESTOR PRESENTATION</a:t>
             </a:r>
@@ -3433,6 +3435,8 @@
                   <a:srgbClr val="FFFFFF"/>
                 </a:solidFill>
                 <a:latin typeface="Georgia"/>
+                <a:ea typeface="Georgia"/>
+                <a:cs typeface="Georgia"/>
               </a:rPr>
               <a:t>51 CAREERS</a:t>
             </a:r>
@@ -3466,6 +3470,8 @@
                   <a:srgbClr val="D7EBE8"/>
                 </a:solidFill>
                 <a:latin typeface="Segoe UI"/>
+                <a:ea typeface="Segoe UI"/>
+                <a:cs typeface="Segoe UI"/>
               </a:rPr>
               <a:t>Building the Global AI Career Platform</a:t>
             </a:r>
@@ -3499,6 +3505,8 @@
                   <a:srgbClr val="0A6B63"/>
                 </a:solidFill>
                 <a:latin typeface="Segoe UI"/>
+                <a:ea typeface="Segoe UI"/>
+                <a:cs typeface="Segoe UI"/>
               </a:rPr>
               <a:t>AI Resume  →  AI Career  →  Global Talent Ecosystem</a:t>
             </a:r>
@@ -3532,6 +3540,8 @@
                   <a:srgbClr val="FFFFFF"/>
                 </a:solidFill>
                 <a:latin typeface="Segoe UI"/>
+                <a:ea typeface="Segoe UI"/>
+                <a:cs typeface="Segoe UI"/>
               </a:rPr>
               <a:t>Seeking RMB 20 Million in Growth Capital   ·   ≈ US$2.97 Million</a:t>
             </a:r>
@@ -3653,6 +3663,8 @@
                   <a:srgbClr val="0A6B63"/>
                 </a:solidFill>
                 <a:latin typeface="Segoe UI"/>
+                <a:ea typeface="Segoe UI"/>
+                <a:cs typeface="Segoe UI"/>
               </a:rPr>
               <a:t>PRE-MONEY</a:t>
             </a:r>
@@ -3686,6 +3698,8 @@
                   <a:srgbClr val="FFFFFF"/>
                 </a:solidFill>
                 <a:latin typeface="Georgia"/>
+                <a:ea typeface="Georgia"/>
+                <a:cs typeface="Georgia"/>
               </a:rPr>
               <a:t>RMB 180M</a:t>
             </a:r>
@@ -3719,6 +3733,8 @@
                   <a:srgbClr val="D7EBE8"/>
                 </a:solidFill>
                 <a:latin typeface="Segoe UI"/>
+                <a:ea typeface="Segoe UI"/>
+                <a:cs typeface="Segoe UI"/>
               </a:rPr>
               <a:t>≈ US$26.7 million</a:t>
             </a:r>
@@ -3840,6 +3856,8 @@
                   <a:srgbClr val="0A6B63"/>
                 </a:solidFill>
                 <a:latin typeface="Segoe UI"/>
+                <a:ea typeface="Segoe UI"/>
+                <a:cs typeface="Segoe UI"/>
               </a:rPr>
               <a:t>RAISE  ·  10% EQUITY</a:t>
             </a:r>
@@ -3873,6 +3891,8 @@
                   <a:srgbClr val="FFFFFF"/>
                 </a:solidFill>
                 <a:latin typeface="Georgia"/>
+                <a:ea typeface="Georgia"/>
+                <a:cs typeface="Georgia"/>
               </a:rPr>
               <a:t>RMB 20M</a:t>
             </a:r>
@@ -3906,6 +3926,8 @@
                   <a:srgbClr val="D7EBE8"/>
                 </a:solidFill>
                 <a:latin typeface="Segoe UI"/>
+                <a:ea typeface="Segoe UI"/>
+                <a:cs typeface="Segoe UI"/>
               </a:rPr>
               <a:t>≈ US$2.97 million</a:t>
             </a:r>
@@ -4027,6 +4049,8 @@
                   <a:srgbClr val="0A6B63"/>
                 </a:solidFill>
                 <a:latin typeface="Segoe UI"/>
+                <a:ea typeface="Segoe UI"/>
+                <a:cs typeface="Segoe UI"/>
               </a:rPr>
               <a:t>POST-MONEY</a:t>
             </a:r>
@@ -4060,6 +4084,8 @@
                   <a:srgbClr val="FFFFFF"/>
                 </a:solidFill>
                 <a:latin typeface="Georgia"/>
+                <a:ea typeface="Georgia"/>
+                <a:cs typeface="Georgia"/>
               </a:rPr>
               <a:t>RMB 200M</a:t>
             </a:r>
@@ -4093,6 +4119,8 @@
                   <a:srgbClr val="D7EBE8"/>
                 </a:solidFill>
                 <a:latin typeface="Segoe UI"/>
+                <a:ea typeface="Segoe UI"/>
+                <a:cs typeface="Segoe UI"/>
               </a:rPr>
               <a:t>≈ US$29.7 million</a:t>
             </a:r>
@@ -4126,6 +4154,8 @@
                   <a:srgbClr val="C5D5E0"/>
                 </a:solidFill>
                 <a:latin typeface="Segoe UI"/>
+                <a:ea typeface="Segoe UI"/>
+                <a:cs typeface="Segoe UI"/>
               </a:rPr>
               <a:t>The resume is the entry point. The ambition is the global AI career platform — connecting job seekers, employers, career services, education, and the talent ecosystem.</a:t>
             </a:r>
@@ -4159,6 +4189,8 @@
                   <a:srgbClr val="9AB0C0"/>
                 </a:solidFill>
                 <a:latin typeface="Segoe UI"/>
+                <a:ea typeface="Segoe UI"/>
+                <a:cs typeface="Segoe UI"/>
               </a:rPr>
               <a:t>CHINA R&amp;D   ·   U.S. COMMERCIALIZATION   ·   GLOBAL DISTRIBUTION</a:t>
             </a:r>
@@ -4199,8 +4231,8 @@
         </p:nvSpPr>
         <p:spPr>
           <a:xfrm>
-            <a:off x="502920" y="201168"/>
-            <a:ext cx="11183112" cy="219456"/>
+            <a:off x="502920" y="182880"/>
+            <a:ext cx="11183112" cy="201168"/>
           </a:xfrm>
           <a:prstGeom prst="rect">
             <a:avLst/>
@@ -4218,6 +4250,8 @@
                   <a:srgbClr val="0A6B63"/>
                 </a:solidFill>
                 <a:latin typeface="Segoe UI"/>
+                <a:ea typeface="Segoe UI"/>
+                <a:cs typeface="Segoe UI"/>
               </a:rPr>
               <a:t>08  ·  TECHNOLOGY ADVANTAGE</a:t>
             </a:r>
@@ -4232,8 +4266,8 @@
         </p:nvSpPr>
         <p:spPr>
           <a:xfrm>
-            <a:off x="502920" y="402336"/>
-            <a:ext cx="11183112" cy="438912"/>
+            <a:off x="502920" y="365760"/>
+            <a:ext cx="11183112" cy="457200"/>
           </a:xfrm>
           <a:prstGeom prst="rect">
             <a:avLst/>
@@ -4251,6 +4285,8 @@
                   <a:srgbClr val="0B1F33"/>
                 </a:solidFill>
                 <a:latin typeface="Georgia"/>
+                <a:ea typeface="Georgia"/>
+                <a:cs typeface="Georgia"/>
               </a:rPr>
               <a:t>We Are Not Simply Building an LLM Wrapper</a:t>
             </a:r>
@@ -4329,6 +4365,8 @@
                   <a:srgbClr val="FFFFFF"/>
                 </a:solidFill>
                 <a:latin typeface="Georgia"/>
+                <a:ea typeface="Georgia"/>
+                <a:cs typeface="Georgia"/>
               </a:rPr>
               <a:t>LLM  +  Career Knowledge  +  Resume Framework  +  Job Intelligence  +  User Data</a:t>
             </a:r>
@@ -4407,6 +4445,8 @@
                   <a:srgbClr val="0B1F33"/>
                 </a:solidFill>
                 <a:latin typeface="Segoe UI"/>
+                <a:ea typeface="Segoe UI"/>
+                <a:cs typeface="Segoe UI"/>
               </a:rPr>
               <a:t>Career-experience extraction</a:t>
             </a:r>
@@ -4485,6 +4525,8 @@
                   <a:srgbClr val="0B1F33"/>
                 </a:solidFill>
                 <a:latin typeface="Segoe UI"/>
+                <a:ea typeface="Segoe UI"/>
+                <a:cs typeface="Segoe UI"/>
               </a:rPr>
               <a:t>Achievement quantification</a:t>
             </a:r>
@@ -4563,6 +4605,8 @@
                   <a:srgbClr val="0B1F33"/>
                 </a:solidFill>
                 <a:latin typeface="Segoe UI"/>
+                <a:ea typeface="Segoe UI"/>
+                <a:cs typeface="Segoe UI"/>
               </a:rPr>
               <a:t>Job-description analysis</a:t>
             </a:r>
@@ -4641,6 +4685,8 @@
                   <a:srgbClr val="0B1F33"/>
                 </a:solidFill>
                 <a:latin typeface="Segoe UI"/>
+                <a:ea typeface="Segoe UI"/>
+                <a:cs typeface="Segoe UI"/>
               </a:rPr>
               <a:t>Resume optimization</a:t>
             </a:r>
@@ -4719,6 +4765,8 @@
                   <a:srgbClr val="0B1F33"/>
                 </a:solidFill>
                 <a:latin typeface="Segoe UI"/>
+                <a:ea typeface="Segoe UI"/>
+                <a:cs typeface="Segoe UI"/>
               </a:rPr>
               <a:t>Industry terminology</a:t>
             </a:r>
@@ -4797,6 +4845,8 @@
                   <a:srgbClr val="0B1F33"/>
                 </a:solidFill>
                 <a:latin typeface="Segoe UI"/>
+                <a:ea typeface="Segoe UI"/>
+                <a:cs typeface="Segoe UI"/>
               </a:rPr>
               <a:t>Role-specific requirements</a:t>
             </a:r>
@@ -4875,6 +4925,8 @@
                   <a:srgbClr val="0B1F33"/>
                 </a:solidFill>
                 <a:latin typeface="Segoe UI"/>
+                <a:ea typeface="Segoe UI"/>
+                <a:cs typeface="Segoe UI"/>
               </a:rPr>
               <a:t>Geographic resume conventions</a:t>
             </a:r>
@@ -4953,6 +5005,8 @@
                   <a:srgbClr val="0B1F33"/>
                 </a:solidFill>
                 <a:latin typeface="Segoe UI"/>
+                <a:ea typeface="Segoe UI"/>
+                <a:cs typeface="Segoe UI"/>
               </a:rPr>
               <a:t>ATS optimization</a:t>
             </a:r>
@@ -4986,6 +5040,8 @@
                   <a:srgbClr val="0A6B63"/>
                 </a:solidFill>
                 <a:latin typeface="Segoe UI"/>
+                <a:ea typeface="Segoe UI"/>
+                <a:cs typeface="Segoe UI"/>
               </a:rPr>
               <a:t>DATA FEEDBACK LOOP</a:t>
             </a:r>
@@ -5064,6 +5120,8 @@
                   <a:srgbClr val="0A6B63"/>
                 </a:solidFill>
                 <a:latin typeface="Segoe UI"/>
+                <a:ea typeface="Segoe UI"/>
+                <a:cs typeface="Segoe UI"/>
               </a:rPr>
               <a:t>01</a:t>
             </a:r>
@@ -5097,6 +5155,8 @@
                   <a:srgbClr val="0B1F33"/>
                 </a:solidFill>
                 <a:latin typeface="Segoe UI"/>
+                <a:ea typeface="Segoe UI"/>
+                <a:cs typeface="Segoe UI"/>
               </a:rPr>
               <a:t>User input</a:t>
             </a:r>
@@ -5175,6 +5235,8 @@
                   <a:srgbClr val="0A6B63"/>
                 </a:solidFill>
                 <a:latin typeface="Segoe UI"/>
+                <a:ea typeface="Segoe UI"/>
+                <a:cs typeface="Segoe UI"/>
               </a:rPr>
               <a:t>02</a:t>
             </a:r>
@@ -5208,6 +5270,8 @@
                   <a:srgbClr val="0B1F33"/>
                 </a:solidFill>
                 <a:latin typeface="Segoe UI"/>
+                <a:ea typeface="Segoe UI"/>
+                <a:cs typeface="Segoe UI"/>
               </a:rPr>
               <a:t>AI analysis</a:t>
             </a:r>
@@ -5286,6 +5350,8 @@
                   <a:srgbClr val="0A6B63"/>
                 </a:solidFill>
                 <a:latin typeface="Segoe UI"/>
+                <a:ea typeface="Segoe UI"/>
+                <a:cs typeface="Segoe UI"/>
               </a:rPr>
               <a:t>03</a:t>
             </a:r>
@@ -5319,6 +5385,8 @@
                   <a:srgbClr val="0B1F33"/>
                 </a:solidFill>
                 <a:latin typeface="Segoe UI"/>
+                <a:ea typeface="Segoe UI"/>
+                <a:cs typeface="Segoe UI"/>
               </a:rPr>
               <a:t>Resume gen.</a:t>
             </a:r>
@@ -5397,6 +5465,8 @@
                   <a:srgbClr val="0A6B63"/>
                 </a:solidFill>
                 <a:latin typeface="Segoe UI"/>
+                <a:ea typeface="Segoe UI"/>
+                <a:cs typeface="Segoe UI"/>
               </a:rPr>
               <a:t>04</a:t>
             </a:r>
@@ -5430,6 +5500,8 @@
                   <a:srgbClr val="0B1F33"/>
                 </a:solidFill>
                 <a:latin typeface="Segoe UI"/>
+                <a:ea typeface="Segoe UI"/>
+                <a:cs typeface="Segoe UI"/>
               </a:rPr>
               <a:t>Application</a:t>
             </a:r>
@@ -5508,6 +5580,8 @@
                   <a:srgbClr val="0A6B63"/>
                 </a:solidFill>
                 <a:latin typeface="Segoe UI"/>
+                <a:ea typeface="Segoe UI"/>
+                <a:cs typeface="Segoe UI"/>
               </a:rPr>
               <a:t>05</a:t>
             </a:r>
@@ -5541,6 +5615,8 @@
                   <a:srgbClr val="0B1F33"/>
                 </a:solidFill>
                 <a:latin typeface="Segoe UI"/>
+                <a:ea typeface="Segoe UI"/>
+                <a:cs typeface="Segoe UI"/>
               </a:rPr>
               <a:t>Feedback</a:t>
             </a:r>
@@ -5619,6 +5695,8 @@
                   <a:srgbClr val="0A6B63"/>
                 </a:solidFill>
                 <a:latin typeface="Segoe UI"/>
+                <a:ea typeface="Segoe UI"/>
+                <a:cs typeface="Segoe UI"/>
               </a:rPr>
               <a:t>06</a:t>
             </a:r>
@@ -5652,6 +5730,8 @@
                   <a:srgbClr val="0B1F33"/>
                 </a:solidFill>
                 <a:latin typeface="Segoe UI"/>
+                <a:ea typeface="Segoe UI"/>
+                <a:cs typeface="Segoe UI"/>
               </a:rPr>
               <a:t>Model upgrade</a:t>
             </a:r>
@@ -5730,6 +5810,8 @@
                   <a:srgbClr val="0A6B63"/>
                 </a:solidFill>
                 <a:latin typeface="Segoe UI"/>
+                <a:ea typeface="Segoe UI"/>
+                <a:cs typeface="Segoe UI"/>
               </a:rPr>
               <a:t>07</a:t>
             </a:r>
@@ -5763,6 +5845,8 @@
                   <a:srgbClr val="0B1F33"/>
                 </a:solidFill>
                 <a:latin typeface="Segoe UI"/>
+                <a:ea typeface="Segoe UI"/>
+                <a:cs typeface="Segoe UI"/>
               </a:rPr>
               <a:t>Better outcomes</a:t>
             </a:r>
@@ -5841,6 +5925,8 @@
                   <a:srgbClr val="0A6B63"/>
                 </a:solidFill>
                 <a:latin typeface="Segoe UI"/>
+                <a:ea typeface="Segoe UI"/>
+                <a:cs typeface="Segoe UI"/>
               </a:rPr>
               <a:t>08</a:t>
             </a:r>
@@ -5874,6 +5960,8 @@
                   <a:srgbClr val="0B1F33"/>
                 </a:solidFill>
                 <a:latin typeface="Segoe UI"/>
+                <a:ea typeface="Segoe UI"/>
+                <a:cs typeface="Segoe UI"/>
               </a:rPr>
               <a:t>More users</a:t>
             </a:r>
@@ -5907,6 +5995,8 @@
                   <a:srgbClr val="5E6E80"/>
                 </a:solidFill>
                 <a:latin typeface="Segoe UI"/>
+                <a:ea typeface="Segoe UI"/>
+                <a:cs typeface="Segoe UI"/>
               </a:rPr>
               <a:t>Each cycle compounds proprietary career intelligence that generic chat models do not accumulate.</a:t>
             </a:r>
@@ -6069,6 +6159,8 @@
                   <a:srgbClr val="5E6E80"/>
                 </a:solidFill>
                 <a:latin typeface="Segoe UI"/>
+                <a:ea typeface="Segoe UI"/>
+                <a:cs typeface="Segoe UI"/>
               </a:rPr>
               <a:t>51 CAREERS   ·   CONFIDENTIAL INVESTOR PRESENTATION</a:t>
             </a:r>
@@ -6102,6 +6194,8 @@
                   <a:srgbClr val="5E6E80"/>
                 </a:solidFill>
                 <a:latin typeface="Segoe UI"/>
+                <a:ea typeface="Segoe UI"/>
+                <a:cs typeface="Segoe UI"/>
               </a:rPr>
               <a:t>10</a:t>
             </a:r>
@@ -6142,8 +6236,8 @@
         </p:nvSpPr>
         <p:spPr>
           <a:xfrm>
-            <a:off x="502920" y="201168"/>
-            <a:ext cx="11183112" cy="219456"/>
+            <a:off x="502920" y="182880"/>
+            <a:ext cx="11183112" cy="201168"/>
           </a:xfrm>
           <a:prstGeom prst="rect">
             <a:avLst/>
@@ -6161,6 +6255,8 @@
                   <a:srgbClr val="0A6B63"/>
                 </a:solidFill>
                 <a:latin typeface="Segoe UI"/>
+                <a:ea typeface="Segoe UI"/>
+                <a:cs typeface="Segoe UI"/>
               </a:rPr>
               <a:t>09  ·  GLOBAL MARKET OPPORTUNITY</a:t>
             </a:r>
@@ -6175,8 +6271,8 @@
         </p:nvSpPr>
         <p:spPr>
           <a:xfrm>
-            <a:off x="502920" y="402336"/>
-            <a:ext cx="11183112" cy="438912"/>
+            <a:off x="502920" y="365760"/>
+            <a:ext cx="11183112" cy="457200"/>
           </a:xfrm>
           <a:prstGeom prst="rect">
             <a:avLst/>
@@ -6194,6 +6290,8 @@
                   <a:srgbClr val="0B1F33"/>
                 </a:solidFill>
                 <a:latin typeface="Georgia"/>
+                <a:ea typeface="Georgia"/>
+                <a:cs typeface="Georgia"/>
               </a:rPr>
               <a:t>AI Resume Is a Naturally Global Product</a:t>
             </a:r>
@@ -6208,8 +6306,8 @@
         </p:nvSpPr>
         <p:spPr>
           <a:xfrm>
-            <a:off x="502920" y="841248"/>
-            <a:ext cx="11183112" cy="256032"/>
+            <a:off x="502920" y="822960"/>
+            <a:ext cx="11183112" cy="237744"/>
           </a:xfrm>
           <a:prstGeom prst="rect">
             <a:avLst/>
@@ -6227,6 +6325,8 @@
                   <a:srgbClr val="5E6E80"/>
                 </a:solidFill>
                 <a:latin typeface="Segoe UI"/>
+                <a:ea typeface="Segoe UI"/>
+                <a:cs typeface="Segoe UI"/>
               </a:rPr>
               <a:t>A resume is a universal component of the global employment market.</a:t>
             </a:r>
@@ -6305,6 +6405,8 @@
                   <a:srgbClr val="0B1F33"/>
                 </a:solidFill>
                 <a:latin typeface="Segoe UI"/>
+                <a:ea typeface="Segoe UI"/>
+                <a:cs typeface="Segoe UI"/>
               </a:rPr>
               <a:t>United States</a:t>
             </a:r>
@@ -6383,6 +6485,8 @@
                   <a:srgbClr val="0B1F33"/>
                 </a:solidFill>
                 <a:latin typeface="Segoe UI"/>
+                <a:ea typeface="Segoe UI"/>
+                <a:cs typeface="Segoe UI"/>
               </a:rPr>
               <a:t>Canada</a:t>
             </a:r>
@@ -6461,6 +6565,8 @@
                   <a:srgbClr val="0B1F33"/>
                 </a:solidFill>
                 <a:latin typeface="Segoe UI"/>
+                <a:ea typeface="Segoe UI"/>
+                <a:cs typeface="Segoe UI"/>
               </a:rPr>
               <a:t>Central America</a:t>
             </a:r>
@@ -6539,6 +6645,8 @@
                   <a:srgbClr val="0B1F33"/>
                 </a:solidFill>
                 <a:latin typeface="Segoe UI"/>
+                <a:ea typeface="Segoe UI"/>
+                <a:cs typeface="Segoe UI"/>
               </a:rPr>
               <a:t>United Kingdom</a:t>
             </a:r>
@@ -6617,6 +6725,8 @@
                   <a:srgbClr val="0B1F33"/>
                 </a:solidFill>
                 <a:latin typeface="Segoe UI"/>
+                <a:ea typeface="Segoe UI"/>
+                <a:cs typeface="Segoe UI"/>
               </a:rPr>
               <a:t>Australia</a:t>
             </a:r>
@@ -6695,6 +6805,8 @@
                   <a:srgbClr val="0B1F33"/>
                 </a:solidFill>
                 <a:latin typeface="Segoe UI"/>
+                <a:ea typeface="Segoe UI"/>
+                <a:cs typeface="Segoe UI"/>
               </a:rPr>
               <a:t>Singapore</a:t>
             </a:r>
@@ -6773,6 +6885,8 @@
                   <a:srgbClr val="0B1F33"/>
                 </a:solidFill>
                 <a:latin typeface="Segoe UI"/>
+                <a:ea typeface="Segoe UI"/>
+                <a:cs typeface="Segoe UI"/>
               </a:rPr>
               <a:t>Hong Kong</a:t>
             </a:r>
@@ -6851,6 +6965,8 @@
                   <a:srgbClr val="0B1F33"/>
                 </a:solidFill>
                 <a:latin typeface="Segoe UI"/>
+                <a:ea typeface="Segoe UI"/>
+                <a:cs typeface="Segoe UI"/>
               </a:rPr>
               <a:t>China</a:t>
             </a:r>
@@ -6929,6 +7045,8 @@
                   <a:srgbClr val="0B1F33"/>
                 </a:solidFill>
                 <a:latin typeface="Segoe UI"/>
+                <a:ea typeface="Segoe UI"/>
+                <a:cs typeface="Segoe UI"/>
               </a:rPr>
               <a:t>Europe</a:t>
             </a:r>
@@ -7007,6 +7125,8 @@
                   <a:srgbClr val="0B1F33"/>
                 </a:solidFill>
                 <a:latin typeface="Segoe UI"/>
+                <a:ea typeface="Segoe UI"/>
+                <a:cs typeface="Segoe UI"/>
               </a:rPr>
               <a:t>Middle East</a:t>
             </a:r>
@@ -7085,6 +7205,8 @@
                   <a:srgbClr val="0A6B63"/>
                 </a:solidFill>
                 <a:latin typeface="Segoe UI"/>
+                <a:ea typeface="Segoe UI"/>
+                <a:cs typeface="Segoe UI"/>
               </a:rPr>
               <a:t>THE UNIVERSAL QUESTION</a:t>
             </a:r>
@@ -7118,6 +7240,8 @@
                   <a:srgbClr val="FFFFFF"/>
                 </a:solidFill>
                 <a:latin typeface="Georgia"/>
+                <a:ea typeface="Georgia"/>
+                <a:cs typeface="Georgia"/>
               </a:rPr>
               <a:t>“How do I present my professional value to employers?”</a:t>
             </a:r>
@@ -7151,6 +7275,8 @@
                   <a:srgbClr val="D7EBE8"/>
                 </a:solidFill>
                 <a:latin typeface="Segoe UI"/>
+                <a:ea typeface="Segoe UI"/>
+                <a:cs typeface="Segoe UI"/>
               </a:rPr>
               <a:t>That shared problem gives AI Resume a fundamentally different scalability profile from traditional, local career-consulting businesses.</a:t>
             </a:r>
@@ -7313,6 +7439,8 @@
                   <a:srgbClr val="5E6E80"/>
                 </a:solidFill>
                 <a:latin typeface="Segoe UI"/>
+                <a:ea typeface="Segoe UI"/>
+                <a:cs typeface="Segoe UI"/>
               </a:rPr>
               <a:t>51 CAREERS   ·   CONFIDENTIAL INVESTOR PRESENTATION</a:t>
             </a:r>
@@ -7346,6 +7474,8 @@
                   <a:srgbClr val="5E6E80"/>
                 </a:solidFill>
                 <a:latin typeface="Segoe UI"/>
+                <a:ea typeface="Segoe UI"/>
+                <a:cs typeface="Segoe UI"/>
               </a:rPr>
               <a:t>11</a:t>
             </a:r>
@@ -7386,8 +7516,8 @@
         </p:nvSpPr>
         <p:spPr>
           <a:xfrm>
-            <a:off x="502920" y="201168"/>
-            <a:ext cx="11183112" cy="219456"/>
+            <a:off x="502920" y="182880"/>
+            <a:ext cx="11183112" cy="201168"/>
           </a:xfrm>
           <a:prstGeom prst="rect">
             <a:avLst/>
@@ -7405,6 +7535,8 @@
                   <a:srgbClr val="0A6B63"/>
                 </a:solidFill>
                 <a:latin typeface="Segoe UI"/>
+                <a:ea typeface="Segoe UI"/>
+                <a:cs typeface="Segoe UI"/>
               </a:rPr>
               <a:t>10  ·  GLOBAL PRODUCT STRATEGY</a:t>
             </a:r>
@@ -7419,8 +7551,8 @@
         </p:nvSpPr>
         <p:spPr>
           <a:xfrm>
-            <a:off x="502920" y="402336"/>
-            <a:ext cx="11183112" cy="438912"/>
+            <a:off x="502920" y="365760"/>
+            <a:ext cx="11183112" cy="457200"/>
           </a:xfrm>
           <a:prstGeom prst="rect">
             <a:avLst/>
@@ -7438,6 +7570,8 @@
                   <a:srgbClr val="0B1F33"/>
                 </a:solidFill>
                 <a:latin typeface="Georgia"/>
+                <a:ea typeface="Georgia"/>
+                <a:cs typeface="Georgia"/>
               </a:rPr>
               <a:t>One Platform. Multiple Labor Markets.</a:t>
             </a:r>
@@ -7559,6 +7693,8 @@
                   <a:srgbClr val="0B1F33"/>
                 </a:solidFill>
                 <a:latin typeface="Georgia"/>
+                <a:ea typeface="Georgia"/>
+                <a:cs typeface="Georgia"/>
               </a:rPr>
               <a:t>Geography</a:t>
             </a:r>
@@ -7592,6 +7728,8 @@
                   <a:srgbClr val="2C3A4B"/>
                 </a:solidFill>
                 <a:latin typeface="Segoe UI"/>
+                <a:ea typeface="Segoe UI"/>
+                <a:cs typeface="Segoe UI"/>
               </a:rPr>
               <a:t>U.S.  ·  Canada  ·  Central America  ·  U.K.  ·  Australia  ·  Europe  ·  Asia  ·  Middle East</a:t>
             </a:r>
@@ -7713,6 +7851,8 @@
                   <a:srgbClr val="0B1F33"/>
                 </a:solidFill>
                 <a:latin typeface="Georgia"/>
+                <a:ea typeface="Georgia"/>
+                <a:cs typeface="Georgia"/>
               </a:rPr>
               <a:t>Industry</a:t>
             </a:r>
@@ -7746,6 +7886,8 @@
                   <a:srgbClr val="2C3A4B"/>
                 </a:solidFill>
                 <a:latin typeface="Segoe UI"/>
+                <a:ea typeface="Segoe UI"/>
+                <a:cs typeface="Segoe UI"/>
               </a:rPr>
               <a:t>Applicable across industries — including Technology, Fintech, Financial Services, Advanced Manufacturing, Consulting, Healthcare, Marketing, Education, and more.</a:t>
             </a:r>
@@ -7867,6 +8009,8 @@
                   <a:srgbClr val="0B1F33"/>
                 </a:solidFill>
                 <a:latin typeface="Georgia"/>
+                <a:ea typeface="Georgia"/>
+                <a:cs typeface="Georgia"/>
               </a:rPr>
               <a:t>Career level</a:t>
             </a:r>
@@ -7900,6 +8044,8 @@
                   <a:srgbClr val="2C3A4B"/>
                 </a:solidFill>
                 <a:latin typeface="Segoe UI"/>
+                <a:ea typeface="Segoe UI"/>
+                <a:cs typeface="Segoe UI"/>
               </a:rPr>
               <a:t>Student / Graduate / Professional / Manager / Executive</a:t>
             </a:r>
@@ -8021,6 +8167,8 @@
                   <a:srgbClr val="0B1F33"/>
                 </a:solidFill>
                 <a:latin typeface="Georgia"/>
+                <a:ea typeface="Georgia"/>
+                <a:cs typeface="Georgia"/>
               </a:rPr>
               <a:t>Target role</a:t>
             </a:r>
@@ -8054,6 +8202,8 @@
                   <a:srgbClr val="2C3A4B"/>
                 </a:solidFill>
                 <a:latin typeface="Segoe UI"/>
+                <a:ea typeface="Segoe UI"/>
+                <a:cs typeface="Segoe UI"/>
               </a:rPr>
               <a:t>Software Engineer / PM / Data Scientist / Marketing / Finance / more</a:t>
             </a:r>
@@ -8175,6 +8325,8 @@
                   <a:srgbClr val="0B1F33"/>
                 </a:solidFill>
                 <a:latin typeface="Georgia"/>
+                <a:ea typeface="Georgia"/>
+                <a:cs typeface="Georgia"/>
               </a:rPr>
               <a:t>Target employer</a:t>
             </a:r>
@@ -8208,6 +8360,8 @@
                   <a:srgbClr val="2C3A4B"/>
                 </a:solidFill>
                 <a:latin typeface="Segoe UI"/>
+                <a:ea typeface="Segoe UI"/>
+                <a:cs typeface="Segoe UI"/>
               </a:rPr>
               <a:t>Startup / SME / Enterprise / Multinational</a:t>
             </a:r>
@@ -8370,6 +8524,8 @@
                   <a:srgbClr val="5E6E80"/>
                 </a:solidFill>
                 <a:latin typeface="Segoe UI"/>
+                <a:ea typeface="Segoe UI"/>
+                <a:cs typeface="Segoe UI"/>
               </a:rPr>
               <a:t>51 CAREERS   ·   CONFIDENTIAL INVESTOR PRESENTATION</a:t>
             </a:r>
@@ -8403,6 +8559,8 @@
                   <a:srgbClr val="5E6E80"/>
                 </a:solidFill>
                 <a:latin typeface="Segoe UI"/>
+                <a:ea typeface="Segoe UI"/>
+                <a:cs typeface="Segoe UI"/>
               </a:rPr>
               <a:t>12</a:t>
             </a:r>
@@ -8443,8 +8601,8 @@
         </p:nvSpPr>
         <p:spPr>
           <a:xfrm>
-            <a:off x="502920" y="201168"/>
-            <a:ext cx="11183112" cy="219456"/>
+            <a:off x="502920" y="182880"/>
+            <a:ext cx="11183112" cy="201168"/>
           </a:xfrm>
           <a:prstGeom prst="rect">
             <a:avLst/>
@@ -8462,6 +8620,8 @@
                   <a:srgbClr val="0A6B63"/>
                 </a:solidFill>
                 <a:latin typeface="Segoe UI"/>
+                <a:ea typeface="Segoe UI"/>
+                <a:cs typeface="Segoe UI"/>
               </a:rPr>
               <a:t>11  ·  FROM AI RESUME TO AI CAREER AGENT</a:t>
             </a:r>
@@ -8476,8 +8636,8 @@
         </p:nvSpPr>
         <p:spPr>
           <a:xfrm>
-            <a:off x="502920" y="402336"/>
-            <a:ext cx="11183112" cy="438912"/>
+            <a:off x="502920" y="365760"/>
+            <a:ext cx="11183112" cy="457200"/>
           </a:xfrm>
           <a:prstGeom prst="rect">
             <a:avLst/>
@@ -8495,6 +8655,8 @@
                   <a:srgbClr val="0B1F33"/>
                 </a:solidFill>
                 <a:latin typeface="Georgia"/>
+                <a:ea typeface="Georgia"/>
+                <a:cs typeface="Georgia"/>
               </a:rPr>
               <a:t>Resume Is the Entry Point — Not the Destination</a:t>
             </a:r>
@@ -8616,6 +8778,8 @@
                   <a:srgbClr val="0A6B63"/>
                 </a:solidFill>
                 <a:latin typeface="Segoe UI"/>
+                <a:ea typeface="Segoe UI"/>
+                <a:cs typeface="Segoe UI"/>
               </a:rPr>
               <a:t>PHASE 1</a:t>
             </a:r>
@@ -8649,6 +8813,8 @@
                   <a:srgbClr val="0B1F33"/>
                 </a:solidFill>
                 <a:latin typeface="Georgia"/>
+                <a:ea typeface="Georgia"/>
+                <a:cs typeface="Georgia"/>
               </a:rPr>
               <a:t>AI Resume</a:t>
             </a:r>
@@ -8682,6 +8848,8 @@
                   <a:srgbClr val="2C3A4B"/>
                 </a:solidFill>
                 <a:latin typeface="Segoe UI"/>
+                <a:ea typeface="Segoe UI"/>
+                <a:cs typeface="Segoe UI"/>
               </a:rPr>
               <a:t>“Help me create a better resume.”</a:t>
             </a:r>
@@ -8803,6 +8971,8 @@
                   <a:srgbClr val="0A6B63"/>
                 </a:solidFill>
                 <a:latin typeface="Segoe UI"/>
+                <a:ea typeface="Segoe UI"/>
+                <a:cs typeface="Segoe UI"/>
               </a:rPr>
               <a:t>PHASE 2</a:t>
             </a:r>
@@ -8836,6 +9006,8 @@
                   <a:srgbClr val="0B1F33"/>
                 </a:solidFill>
                 <a:latin typeface="Georgia"/>
+                <a:ea typeface="Georgia"/>
+                <a:cs typeface="Georgia"/>
               </a:rPr>
               <a:t>AI Career Assistant</a:t>
             </a:r>
@@ -8869,6 +9041,8 @@
                   <a:srgbClr val="2C3A4B"/>
                 </a:solidFill>
                 <a:latin typeface="Segoe UI"/>
+                <a:ea typeface="Segoe UI"/>
+                <a:cs typeface="Segoe UI"/>
               </a:rPr>
               <a:t>“What jobs should I apply for?”</a:t>
             </a:r>
@@ -8990,6 +9164,8 @@
                   <a:srgbClr val="0A6B63"/>
                 </a:solidFill>
                 <a:latin typeface="Segoe UI"/>
+                <a:ea typeface="Segoe UI"/>
+                <a:cs typeface="Segoe UI"/>
               </a:rPr>
               <a:t>PHASE 3</a:t>
             </a:r>
@@ -9023,6 +9199,8 @@
                   <a:srgbClr val="0B1F33"/>
                 </a:solidFill>
                 <a:latin typeface="Georgia"/>
+                <a:ea typeface="Georgia"/>
+                <a:cs typeface="Georgia"/>
               </a:rPr>
               <a:t>AI Career Agent</a:t>
             </a:r>
@@ -9056,6 +9234,8 @@
                   <a:srgbClr val="2C3A4B"/>
                 </a:solidFill>
                 <a:latin typeface="Segoe UI"/>
+                <a:ea typeface="Segoe UI"/>
+                <a:cs typeface="Segoe UI"/>
               </a:rPr>
               <a:t>“Help me manage my entire job search.”</a:t>
             </a:r>
@@ -9177,6 +9357,8 @@
                   <a:srgbClr val="0A6B63"/>
                 </a:solidFill>
                 <a:latin typeface="Segoe UI"/>
+                <a:ea typeface="Segoe UI"/>
+                <a:cs typeface="Segoe UI"/>
               </a:rPr>
               <a:t>PHASE 4</a:t>
             </a:r>
@@ -9210,6 +9392,8 @@
                   <a:srgbClr val="0B1F33"/>
                 </a:solidFill>
                 <a:latin typeface="Georgia"/>
+                <a:ea typeface="Georgia"/>
+                <a:cs typeface="Georgia"/>
               </a:rPr>
               <a:t>Global Platform</a:t>
             </a:r>
@@ -9243,6 +9427,8 @@
                   <a:srgbClr val="2C3A4B"/>
                 </a:solidFill>
                 <a:latin typeface="Segoe UI"/>
+                <a:ea typeface="Segoe UI"/>
+                <a:cs typeface="Segoe UI"/>
               </a:rPr>
               <a:t>Job seekers × employers × services × education × talent ecosystem</a:t>
             </a:r>
@@ -9321,6 +9507,8 @@
                   <a:srgbClr val="0B1F33"/>
                 </a:solidFill>
                 <a:latin typeface="Segoe UI"/>
+                <a:ea typeface="Segoe UI"/>
+                <a:cs typeface="Segoe UI"/>
               </a:rPr>
               <a:t>Resume creation</a:t>
             </a:r>
@@ -9399,6 +9587,8 @@
                   <a:srgbClr val="0B1F33"/>
                 </a:solidFill>
                 <a:latin typeface="Segoe UI"/>
+                <a:ea typeface="Segoe UI"/>
+                <a:cs typeface="Segoe UI"/>
               </a:rPr>
               <a:t>Job discovery</a:t>
             </a:r>
@@ -9477,6 +9667,8 @@
                   <a:srgbClr val="0B1F33"/>
                 </a:solidFill>
                 <a:latin typeface="Segoe UI"/>
+                <a:ea typeface="Segoe UI"/>
+                <a:cs typeface="Segoe UI"/>
               </a:rPr>
               <a:t>Job matching</a:t>
             </a:r>
@@ -9555,6 +9747,8 @@
                   <a:srgbClr val="0B1F33"/>
                 </a:solidFill>
                 <a:latin typeface="Segoe UI"/>
+                <a:ea typeface="Segoe UI"/>
+                <a:cs typeface="Segoe UI"/>
               </a:rPr>
               <a:t>Application optimization</a:t>
             </a:r>
@@ -9633,6 +9827,8 @@
                   <a:srgbClr val="0B1F33"/>
                 </a:solidFill>
                 <a:latin typeface="Segoe UI"/>
+                <a:ea typeface="Segoe UI"/>
+                <a:cs typeface="Segoe UI"/>
               </a:rPr>
               <a:t>Cover letters</a:t>
             </a:r>
@@ -9711,6 +9907,8 @@
                   <a:srgbClr val="0B1F33"/>
                 </a:solidFill>
                 <a:latin typeface="Segoe UI"/>
+                <a:ea typeface="Segoe UI"/>
+                <a:cs typeface="Segoe UI"/>
               </a:rPr>
               <a:t>Interview prep</a:t>
             </a:r>
@@ -9789,6 +9987,8 @@
                   <a:srgbClr val="0B1F33"/>
                 </a:solidFill>
                 <a:latin typeface="Segoe UI"/>
+                <a:ea typeface="Segoe UI"/>
+                <a:cs typeface="Segoe UI"/>
               </a:rPr>
               <a:t>Career planning</a:t>
             </a:r>
@@ -9951,6 +10151,8 @@
                   <a:srgbClr val="5E6E80"/>
                 </a:solidFill>
                 <a:latin typeface="Segoe UI"/>
+                <a:ea typeface="Segoe UI"/>
+                <a:cs typeface="Segoe UI"/>
               </a:rPr>
               <a:t>51 CAREERS   ·   CONFIDENTIAL INVESTOR PRESENTATION</a:t>
             </a:r>
@@ -9984,6 +10186,8 @@
                   <a:srgbClr val="5E6E80"/>
                 </a:solidFill>
                 <a:latin typeface="Segoe UI"/>
+                <a:ea typeface="Segoe UI"/>
+                <a:cs typeface="Segoe UI"/>
               </a:rPr>
               <a:t>13</a:t>
             </a:r>
@@ -10024,8 +10228,8 @@
         </p:nvSpPr>
         <p:spPr>
           <a:xfrm>
-            <a:off x="502920" y="201168"/>
-            <a:ext cx="11183112" cy="219456"/>
+            <a:off x="502920" y="182880"/>
+            <a:ext cx="11183112" cy="201168"/>
           </a:xfrm>
           <a:prstGeom prst="rect">
             <a:avLst/>
@@ -10043,6 +10247,8 @@
                   <a:srgbClr val="0A6B63"/>
                 </a:solidFill>
                 <a:latin typeface="Segoe UI"/>
+                <a:ea typeface="Segoe UI"/>
+                <a:cs typeface="Segoe UI"/>
               </a:rPr>
               <a:t>12  ·  BUSINESS MODEL</a:t>
             </a:r>
@@ -10057,25 +10263,27 @@
         </p:nvSpPr>
         <p:spPr>
           <a:xfrm>
-            <a:off x="502920" y="402336"/>
-            <a:ext cx="11183112" cy="438912"/>
-          </a:xfrm>
-          <a:prstGeom prst="rect">
-            <a:avLst/>
-          </a:prstGeom>
-          <a:noFill/>
-        </p:spPr>
-        <p:txBody>
-          <a:bodyPr wrap="square" anchor="t"/>
-          <a:lstStyle/>
-          <a:p>
-            <a:pPr algn="l"/>
-            <a:r>
-              <a:rPr sz="2400" b="1" i="0">
+            <a:off x="502920" y="365760"/>
+            <a:ext cx="11183112" cy="457200"/>
+          </a:xfrm>
+          <a:prstGeom prst="rect">
+            <a:avLst/>
+          </a:prstGeom>
+          <a:noFill/>
+        </p:spPr>
+        <p:txBody>
+          <a:bodyPr wrap="square" anchor="t"/>
+          <a:lstStyle/>
+          <a:p>
+            <a:pPr algn="l"/>
+            <a:r>
+              <a:rPr sz="2000" b="1" i="0">
                 <a:solidFill>
                   <a:srgbClr val="0B1F33"/>
                 </a:solidFill>
                 <a:latin typeface="Georgia"/>
+                <a:ea typeface="Georgia"/>
+                <a:cs typeface="Georgia"/>
               </a:rPr>
               <a:t>Multiple Monetization Layers Across the Career Journey</a:t>
             </a:r>
@@ -10197,6 +10405,8 @@
                   <a:srgbClr val="0B1F33"/>
                 </a:solidFill>
                 <a:latin typeface="Segoe UI"/>
+                <a:ea typeface="Segoe UI"/>
+                <a:cs typeface="Segoe UI"/>
               </a:rPr>
               <a:t>01  AI PRODUCT</a:t>
             </a:r>
@@ -10230,6 +10440,8 @@
                   <a:srgbClr val="2C3A4B"/>
                 </a:solidFill>
                 <a:latin typeface="Segoe UI"/>
+                <a:ea typeface="Segoe UI"/>
+                <a:cs typeface="Segoe UI"/>
               </a:rPr>
               <a:t>Subscription, premium AI features, resume packages, AI Career tools.</a:t>
             </a:r>
@@ -10351,6 +10563,8 @@
                   <a:srgbClr val="0B1F33"/>
                 </a:solidFill>
                 <a:latin typeface="Segoe UI"/>
+                <a:ea typeface="Segoe UI"/>
+                <a:cs typeface="Segoe UI"/>
               </a:rPr>
               <a:t>02  CAREER SERVICES</a:t>
             </a:r>
@@ -10384,6 +10598,8 @@
                   <a:srgbClr val="2C3A4B"/>
                 </a:solidFill>
                 <a:latin typeface="Segoe UI"/>
+                <a:ea typeface="Segoe UI"/>
+                <a:cs typeface="Segoe UI"/>
               </a:rPr>
               <a:t>Resume consulting, career consulting, interview coaching, premium services.</a:t>
             </a:r>
@@ -10505,6 +10721,8 @@
                   <a:srgbClr val="0B1F33"/>
                 </a:solidFill>
                 <a:latin typeface="Segoe UI"/>
+                <a:ea typeface="Segoe UI"/>
+                <a:cs typeface="Segoe UI"/>
               </a:rPr>
               <a:t>03  REFERRAL &amp; COMMISSION</a:t>
             </a:r>
@@ -10538,6 +10756,8 @@
                   <a:srgbClr val="2C3A4B"/>
                 </a:solidFill>
                 <a:latin typeface="Segoe UI"/>
+                <a:ea typeface="Segoe UI"/>
+                <a:cs typeface="Segoe UI"/>
               </a:rPr>
               <a:t>CPA / CPS / revenue share with education, training, and recruitment partners.</a:t>
             </a:r>
@@ -10659,6 +10879,8 @@
                   <a:srgbClr val="0B1F33"/>
                 </a:solidFill>
                 <a:latin typeface="Segoe UI"/>
+                <a:ea typeface="Segoe UI"/>
+                <a:cs typeface="Segoe UI"/>
               </a:rPr>
               <a:t>04  B2B / EMPLOYERS</a:t>
             </a:r>
@@ -10692,6 +10914,8 @@
                   <a:srgbClr val="2C3A4B"/>
                 </a:solidFill>
                 <a:latin typeface="Segoe UI"/>
+                <a:ea typeface="Segoe UI"/>
+                <a:cs typeface="Segoe UI"/>
               </a:rPr>
               <a:t>Talent acquisition, employer branding, recruitment campaigns, job promotion.</a:t>
             </a:r>
@@ -10813,6 +11037,8 @@
                   <a:srgbClr val="0B1F33"/>
                 </a:solidFill>
                 <a:latin typeface="Segoe UI"/>
+                <a:ea typeface="Segoe UI"/>
+                <a:cs typeface="Segoe UI"/>
               </a:rPr>
               <a:t>05  ADVERTISING</a:t>
             </a:r>
@@ -10846,6 +11072,8 @@
                   <a:srgbClr val="2C3A4B"/>
                 </a:solidFill>
                 <a:latin typeface="Segoe UI"/>
+                <a:ea typeface="Segoe UI"/>
+                <a:cs typeface="Segoe UI"/>
               </a:rPr>
               <a:t>As traffic scales: relevant brands → targeted career audience.</a:t>
             </a:r>
@@ -10967,6 +11195,8 @@
                   <a:srgbClr val="0B1F33"/>
                 </a:solidFill>
                 <a:latin typeface="Segoe UI"/>
+                <a:ea typeface="Segoe UI"/>
+                <a:cs typeface="Segoe UI"/>
               </a:rPr>
               <a:t>06  SPONSORSHIP</a:t>
             </a:r>
@@ -11000,6 +11230,8 @@
                   <a:srgbClr val="2C3A4B"/>
                 </a:solidFill>
                 <a:latin typeface="Segoe UI"/>
+                <a:ea typeface="Segoe UI"/>
+                <a:cs typeface="Segoe UI"/>
               </a:rPr>
               <a:t>Career fairs, conferences, recruitment events, AI career events.</a:t>
             </a:r>
@@ -11162,6 +11394,8 @@
                   <a:srgbClr val="5E6E80"/>
                 </a:solidFill>
                 <a:latin typeface="Segoe UI"/>
+                <a:ea typeface="Segoe UI"/>
+                <a:cs typeface="Segoe UI"/>
               </a:rPr>
               <a:t>51 CAREERS   ·   CONFIDENTIAL INVESTOR PRESENTATION</a:t>
             </a:r>
@@ -11195,6 +11429,8 @@
                   <a:srgbClr val="5E6E80"/>
                 </a:solidFill>
                 <a:latin typeface="Segoe UI"/>
+                <a:ea typeface="Segoe UI"/>
+                <a:cs typeface="Segoe UI"/>
               </a:rPr>
               <a:t>14</a:t>
             </a:r>
@@ -11235,8 +11471,8 @@
         </p:nvSpPr>
         <p:spPr>
           <a:xfrm>
-            <a:off x="502920" y="201168"/>
-            <a:ext cx="11183112" cy="219456"/>
+            <a:off x="502920" y="182880"/>
+            <a:ext cx="11183112" cy="201168"/>
           </a:xfrm>
           <a:prstGeom prst="rect">
             <a:avLst/>
@@ -11254,6 +11490,8 @@
                   <a:srgbClr val="0A6B63"/>
                 </a:solidFill>
                 <a:latin typeface="Segoe UI"/>
+                <a:ea typeface="Segoe UI"/>
+                <a:cs typeface="Segoe UI"/>
               </a:rPr>
               <a:t>13  ·  THE CAREER MONETIZATION FLYWHEEL</a:t>
             </a:r>
@@ -11268,8 +11506,8 @@
         </p:nvSpPr>
         <p:spPr>
           <a:xfrm>
-            <a:off x="502920" y="402336"/>
-            <a:ext cx="11183112" cy="438912"/>
+            <a:off x="502920" y="365760"/>
+            <a:ext cx="11183112" cy="457200"/>
           </a:xfrm>
           <a:prstGeom prst="rect">
             <a:avLst/>
@@ -11287,6 +11525,8 @@
                   <a:srgbClr val="0B1F33"/>
                 </a:solidFill>
                 <a:latin typeface="Georgia"/>
+                <a:ea typeface="Georgia"/>
+                <a:cs typeface="Georgia"/>
               </a:rPr>
               <a:t>One User Can Generate Multiple Revenue Opportunities</a:t>
             </a:r>
@@ -11365,6 +11605,8 @@
                   <a:srgbClr val="0A6B63"/>
                 </a:solidFill>
                 <a:latin typeface="Segoe UI"/>
+                <a:ea typeface="Segoe UI"/>
+                <a:cs typeface="Segoe UI"/>
               </a:rPr>
               <a:t>01</a:t>
             </a:r>
@@ -11398,6 +11640,8 @@
                   <a:srgbClr val="0B1F33"/>
                 </a:solidFill>
                 <a:latin typeface="Segoe UI"/>
+                <a:ea typeface="Segoe UI"/>
+                <a:cs typeface="Segoe UI"/>
               </a:rPr>
               <a:t>Free AI Resume</a:t>
             </a:r>
@@ -11476,6 +11720,8 @@
                   <a:srgbClr val="0A6B63"/>
                 </a:solidFill>
                 <a:latin typeface="Segoe UI"/>
+                <a:ea typeface="Segoe UI"/>
+                <a:cs typeface="Segoe UI"/>
               </a:rPr>
               <a:t>02</a:t>
             </a:r>
@@ -11509,6 +11755,8 @@
                   <a:srgbClr val="0B1F33"/>
                 </a:solidFill>
                 <a:latin typeface="Segoe UI"/>
+                <a:ea typeface="Segoe UI"/>
+                <a:cs typeface="Segoe UI"/>
               </a:rPr>
               <a:t>User acquisition</a:t>
             </a:r>
@@ -11587,6 +11835,8 @@
                   <a:srgbClr val="0A6B63"/>
                 </a:solidFill>
                 <a:latin typeface="Segoe UI"/>
+                <a:ea typeface="Segoe UI"/>
+                <a:cs typeface="Segoe UI"/>
               </a:rPr>
               <a:t>03</a:t>
             </a:r>
@@ -11620,6 +11870,8 @@
                   <a:srgbClr val="0B1F33"/>
                 </a:solidFill>
                 <a:latin typeface="Segoe UI"/>
+                <a:ea typeface="Segoe UI"/>
+                <a:cs typeface="Segoe UI"/>
               </a:rPr>
               <a:t>Career profile</a:t>
             </a:r>
@@ -11698,6 +11950,8 @@
                   <a:srgbClr val="0A6B63"/>
                 </a:solidFill>
                 <a:latin typeface="Segoe UI"/>
+                <a:ea typeface="Segoe UI"/>
+                <a:cs typeface="Segoe UI"/>
               </a:rPr>
               <a:t>04</a:t>
             </a:r>
@@ -11731,6 +11985,8 @@
                   <a:srgbClr val="0B1F33"/>
                 </a:solidFill>
                 <a:latin typeface="Segoe UI"/>
+                <a:ea typeface="Segoe UI"/>
+                <a:cs typeface="Segoe UI"/>
               </a:rPr>
               <a:t>AI Career tools</a:t>
             </a:r>
@@ -11809,6 +12065,8 @@
                   <a:srgbClr val="0A6B63"/>
                 </a:solidFill>
                 <a:latin typeface="Segoe UI"/>
+                <a:ea typeface="Segoe UI"/>
+                <a:cs typeface="Segoe UI"/>
               </a:rPr>
               <a:t>05</a:t>
             </a:r>
@@ -11842,6 +12100,8 @@
                   <a:srgbClr val="0B1F33"/>
                 </a:solidFill>
                 <a:latin typeface="Segoe UI"/>
+                <a:ea typeface="Segoe UI"/>
+                <a:cs typeface="Segoe UI"/>
               </a:rPr>
               <a:t>Premium subscription</a:t>
             </a:r>
@@ -11920,6 +12180,8 @@
                   <a:srgbClr val="0A6B63"/>
                 </a:solidFill>
                 <a:latin typeface="Segoe UI"/>
+                <a:ea typeface="Segoe UI"/>
+                <a:cs typeface="Segoe UI"/>
               </a:rPr>
               <a:t>06</a:t>
             </a:r>
@@ -11953,6 +12215,8 @@
                   <a:srgbClr val="0B1F33"/>
                 </a:solidFill>
                 <a:latin typeface="Segoe UI"/>
+                <a:ea typeface="Segoe UI"/>
+                <a:cs typeface="Segoe UI"/>
               </a:rPr>
               <a:t>Career services</a:t>
             </a:r>
@@ -12031,6 +12295,8 @@
                   <a:srgbClr val="0A6B63"/>
                 </a:solidFill>
                 <a:latin typeface="Segoe UI"/>
+                <a:ea typeface="Segoe UI"/>
+                <a:cs typeface="Segoe UI"/>
               </a:rPr>
               <a:t>07</a:t>
             </a:r>
@@ -12064,6 +12330,8 @@
                   <a:srgbClr val="0B1F33"/>
                 </a:solidFill>
                 <a:latin typeface="Segoe UI"/>
+                <a:ea typeface="Segoe UI"/>
+                <a:cs typeface="Segoe UI"/>
               </a:rPr>
               <a:t>Job matching</a:t>
             </a:r>
@@ -12142,6 +12410,8 @@
                   <a:srgbClr val="0A6B63"/>
                 </a:solidFill>
                 <a:latin typeface="Segoe UI"/>
+                <a:ea typeface="Segoe UI"/>
+                <a:cs typeface="Segoe UI"/>
               </a:rPr>
               <a:t>08</a:t>
             </a:r>
@@ -12175,6 +12445,8 @@
                   <a:srgbClr val="0B1F33"/>
                 </a:solidFill>
                 <a:latin typeface="Segoe UI"/>
+                <a:ea typeface="Segoe UI"/>
+                <a:cs typeface="Segoe UI"/>
               </a:rPr>
               <a:t>Recruitment / referral</a:t>
             </a:r>
@@ -12253,6 +12525,8 @@
                   <a:srgbClr val="0A6B63"/>
                 </a:solidFill>
                 <a:latin typeface="Segoe UI"/>
+                <a:ea typeface="Segoe UI"/>
+                <a:cs typeface="Segoe UI"/>
               </a:rPr>
               <a:t>09</a:t>
             </a:r>
@@ -12286,6 +12560,8 @@
                   <a:srgbClr val="0B1F33"/>
                 </a:solidFill>
                 <a:latin typeface="Segoe UI"/>
+                <a:ea typeface="Segoe UI"/>
+                <a:cs typeface="Segoe UI"/>
               </a:rPr>
               <a:t>Advertising</a:t>
             </a:r>
@@ -12364,6 +12640,8 @@
                   <a:srgbClr val="0A6B63"/>
                 </a:solidFill>
                 <a:latin typeface="Segoe UI"/>
+                <a:ea typeface="Segoe UI"/>
+                <a:cs typeface="Segoe UI"/>
               </a:rPr>
               <a:t>10</a:t>
             </a:r>
@@ -12397,6 +12675,8 @@
                   <a:srgbClr val="0B1F33"/>
                 </a:solidFill>
                 <a:latin typeface="Segoe UI"/>
+                <a:ea typeface="Segoe UI"/>
+                <a:cs typeface="Segoe UI"/>
               </a:rPr>
               <a:t>Employer services</a:t>
             </a:r>
@@ -12475,6 +12755,8 @@
                   <a:srgbClr val="0A6B63"/>
                 </a:solidFill>
                 <a:latin typeface="Segoe UI"/>
+                <a:ea typeface="Segoe UI"/>
+                <a:cs typeface="Segoe UI"/>
               </a:rPr>
               <a:t>THEREFORE</a:t>
             </a:r>
@@ -12508,6 +12790,8 @@
                   <a:srgbClr val="FFFFFF"/>
                 </a:solidFill>
                 <a:latin typeface="Georgia"/>
+                <a:ea typeface="Georgia"/>
+                <a:cs typeface="Georgia"/>
               </a:rPr>
               <a:t>Revenue is not limited to the first AI Resume transaction. The long-term objective is to maximize lifetime value per career user.</a:t>
             </a:r>
@@ -12670,6 +12954,8 @@
                   <a:srgbClr val="5E6E80"/>
                 </a:solidFill>
                 <a:latin typeface="Segoe UI"/>
+                <a:ea typeface="Segoe UI"/>
+                <a:cs typeface="Segoe UI"/>
               </a:rPr>
               <a:t>51 CAREERS   ·   CONFIDENTIAL INVESTOR PRESENTATION</a:t>
             </a:r>
@@ -12703,6 +12989,8 @@
                   <a:srgbClr val="5E6E80"/>
                 </a:solidFill>
                 <a:latin typeface="Segoe UI"/>
+                <a:ea typeface="Segoe UI"/>
+                <a:cs typeface="Segoe UI"/>
               </a:rPr>
               <a:t>15</a:t>
             </a:r>
@@ -12743,8 +13031,8 @@
         </p:nvSpPr>
         <p:spPr>
           <a:xfrm>
-            <a:off x="502920" y="201168"/>
-            <a:ext cx="11183112" cy="219456"/>
+            <a:off x="502920" y="182880"/>
+            <a:ext cx="11183112" cy="201168"/>
           </a:xfrm>
           <a:prstGeom prst="rect">
             <a:avLst/>
@@ -12762,6 +13050,8 @@
                   <a:srgbClr val="0A6B63"/>
                 </a:solidFill>
                 <a:latin typeface="Segoe UI"/>
+                <a:ea typeface="Segoe UI"/>
+                <a:cs typeface="Segoe UI"/>
               </a:rPr>
               <a:t>14  ·  USER ACQUISITION</a:t>
             </a:r>
@@ -12776,8 +13066,8 @@
         </p:nvSpPr>
         <p:spPr>
           <a:xfrm>
-            <a:off x="502920" y="402336"/>
-            <a:ext cx="11183112" cy="438912"/>
+            <a:off x="502920" y="365760"/>
+            <a:ext cx="11183112" cy="457200"/>
           </a:xfrm>
           <a:prstGeom prst="rect">
             <a:avLst/>
@@ -12795,6 +13085,8 @@
                   <a:srgbClr val="0B1F33"/>
                 </a:solidFill>
                 <a:latin typeface="Georgia"/>
+                <a:ea typeface="Georgia"/>
+                <a:cs typeface="Georgia"/>
               </a:rPr>
               <a:t>Digital  +  Offline  +  Organic</a:t>
             </a:r>
@@ -12916,6 +13208,8 @@
                   <a:srgbClr val="0A6B63"/>
                 </a:solidFill>
                 <a:latin typeface="Segoe UI"/>
+                <a:ea typeface="Segoe UI"/>
+                <a:cs typeface="Segoe UI"/>
               </a:rPr>
               <a:t>DIGITAL</a:t>
             </a:r>
@@ -12949,6 +13243,8 @@
                   <a:srgbClr val="2C3A4B"/>
                 </a:solidFill>
                 <a:latin typeface="Segoe UI"/>
+                <a:ea typeface="Segoe UI"/>
+                <a:cs typeface="Segoe UI"/>
               </a:rPr>
               <a:t>▸  Google</a:t>
             </a:r>
@@ -12982,6 +13278,8 @@
                   <a:srgbClr val="2C3A4B"/>
                 </a:solidFill>
                 <a:latin typeface="Segoe UI"/>
+                <a:ea typeface="Segoe UI"/>
+                <a:cs typeface="Segoe UI"/>
               </a:rPr>
               <a:t>▸  Meta</a:t>
             </a:r>
@@ -13015,6 +13313,8 @@
                   <a:srgbClr val="2C3A4B"/>
                 </a:solidFill>
                 <a:latin typeface="Segoe UI"/>
+                <a:ea typeface="Segoe UI"/>
+                <a:cs typeface="Segoe UI"/>
               </a:rPr>
               <a:t>▸  TikTok</a:t>
             </a:r>
@@ -13048,6 +13348,8 @@
                   <a:srgbClr val="2C3A4B"/>
                 </a:solidFill>
                 <a:latin typeface="Segoe UI"/>
+                <a:ea typeface="Segoe UI"/>
+                <a:cs typeface="Segoe UI"/>
               </a:rPr>
               <a:t>▸  YouTube</a:t>
             </a:r>
@@ -13081,6 +13383,8 @@
                   <a:srgbClr val="2C3A4B"/>
                 </a:solidFill>
                 <a:latin typeface="Segoe UI"/>
+                <a:ea typeface="Segoe UI"/>
+                <a:cs typeface="Segoe UI"/>
               </a:rPr>
               <a:t>▸  LinkedIn</a:t>
             </a:r>
@@ -13114,6 +13418,8 @@
                   <a:srgbClr val="2C3A4B"/>
                 </a:solidFill>
                 <a:latin typeface="Segoe UI"/>
+                <a:ea typeface="Segoe UI"/>
+                <a:cs typeface="Segoe UI"/>
               </a:rPr>
               <a:t>▸  Search / social</a:t>
             </a:r>
@@ -13147,6 +13453,8 @@
                   <a:srgbClr val="2C3A4B"/>
                 </a:solidFill>
                 <a:latin typeface="Segoe UI"/>
+                <a:ea typeface="Segoe UI"/>
+                <a:cs typeface="Segoe UI"/>
               </a:rPr>
               <a:t>▸  Content marketing</a:t>
             </a:r>
@@ -13268,6 +13576,8 @@
                   <a:srgbClr val="2F5D8A"/>
                 </a:solidFill>
                 <a:latin typeface="Segoe UI"/>
+                <a:ea typeface="Segoe UI"/>
+                <a:cs typeface="Segoe UI"/>
               </a:rPr>
               <a:t>ORGANIC</a:t>
             </a:r>
@@ -13301,6 +13611,8 @@
                   <a:srgbClr val="2C3A4B"/>
                 </a:solidFill>
                 <a:latin typeface="Segoe UI"/>
+                <a:ea typeface="Segoe UI"/>
+                <a:cs typeface="Segoe UI"/>
               </a:rPr>
               <a:t>▸  SEO</a:t>
             </a:r>
@@ -13334,6 +13646,8 @@
                   <a:srgbClr val="2C3A4B"/>
                 </a:solidFill>
                 <a:latin typeface="Segoe UI"/>
+                <a:ea typeface="Segoe UI"/>
+                <a:cs typeface="Segoe UI"/>
               </a:rPr>
               <a:t>▸  AI-search optimization</a:t>
             </a:r>
@@ -13367,6 +13681,8 @@
                   <a:srgbClr val="2C3A4B"/>
                 </a:solidFill>
                 <a:latin typeface="Segoe UI"/>
+                <a:ea typeface="Segoe UI"/>
+                <a:cs typeface="Segoe UI"/>
               </a:rPr>
               <a:t>▸  Career content</a:t>
             </a:r>
@@ -13400,6 +13716,8 @@
                   <a:srgbClr val="2C3A4B"/>
                 </a:solidFill>
                 <a:latin typeface="Segoe UI"/>
+                <a:ea typeface="Segoe UI"/>
+                <a:cs typeface="Segoe UI"/>
               </a:rPr>
               <a:t>▸  Educational content</a:t>
             </a:r>
@@ -13433,6 +13751,8 @@
                   <a:srgbClr val="2C3A4B"/>
                 </a:solidFill>
                 <a:latin typeface="Segoe UI"/>
+                <a:ea typeface="Segoe UI"/>
+                <a:cs typeface="Segoe UI"/>
               </a:rPr>
               <a:t>▸  Referral programs</a:t>
             </a:r>
@@ -13466,6 +13786,8 @@
                   <a:srgbClr val="2C3A4B"/>
                 </a:solidFill>
                 <a:latin typeface="Segoe UI"/>
+                <a:ea typeface="Segoe UI"/>
+                <a:cs typeface="Segoe UI"/>
               </a:rPr>
               <a:t>▸  Affiliate partnerships</a:t>
             </a:r>
@@ -13587,6 +13909,8 @@
                   <a:srgbClr val="8A6D3B"/>
                 </a:solidFill>
                 <a:latin typeface="Segoe UI"/>
+                <a:ea typeface="Segoe UI"/>
+                <a:cs typeface="Segoe UI"/>
               </a:rPr>
               <a:t>OFFLINE</a:t>
             </a:r>
@@ -13620,6 +13944,8 @@
                   <a:srgbClr val="2C3A4B"/>
                 </a:solidFill>
                 <a:latin typeface="Segoe UI"/>
+                <a:ea typeface="Segoe UI"/>
+                <a:cs typeface="Segoe UI"/>
               </a:rPr>
               <a:t>▸  Universities</a:t>
             </a:r>
@@ -13653,6 +13979,8 @@
                   <a:srgbClr val="2C3A4B"/>
                 </a:solidFill>
                 <a:latin typeface="Segoe UI"/>
+                <a:ea typeface="Segoe UI"/>
+                <a:cs typeface="Segoe UI"/>
               </a:rPr>
               <a:t>▸  Career fairs</a:t>
             </a:r>
@@ -13686,6 +14014,8 @@
                   <a:srgbClr val="2C3A4B"/>
                 </a:solidFill>
                 <a:latin typeface="Segoe UI"/>
+                <a:ea typeface="Segoe UI"/>
+                <a:cs typeface="Segoe UI"/>
               </a:rPr>
               <a:t>▸  Student organizations</a:t>
             </a:r>
@@ -13719,6 +14049,8 @@
                   <a:srgbClr val="2C3A4B"/>
                 </a:solidFill>
                 <a:latin typeface="Segoe UI"/>
+                <a:ea typeface="Segoe UI"/>
+                <a:cs typeface="Segoe UI"/>
               </a:rPr>
               <a:t>▸  Professional orgs</a:t>
             </a:r>
@@ -13752,6 +14084,8 @@
                   <a:srgbClr val="2C3A4B"/>
                 </a:solidFill>
                 <a:latin typeface="Segoe UI"/>
+                <a:ea typeface="Segoe UI"/>
+                <a:cs typeface="Segoe UI"/>
               </a:rPr>
               <a:t>▸  Community events</a:t>
             </a:r>
@@ -13785,6 +14119,8 @@
                   <a:srgbClr val="2C3A4B"/>
                 </a:solidFill>
                 <a:latin typeface="Segoe UI"/>
+                <a:ea typeface="Segoe UI"/>
+                <a:cs typeface="Segoe UI"/>
               </a:rPr>
               <a:t>▸  Employer events</a:t>
             </a:r>
@@ -13863,6 +14199,8 @@
                   <a:srgbClr val="FFFFFF"/>
                 </a:solidFill>
                 <a:latin typeface="Segoe UI"/>
+                <a:ea typeface="Segoe UI"/>
+                <a:cs typeface="Segoe UI"/>
               </a:rPr>
               <a:t>CORE GROWTH STRATEGY</a:t>
             </a:r>
@@ -13896,6 +14234,8 @@
                   <a:srgbClr val="FFFFFF"/>
                 </a:solidFill>
                 <a:latin typeface="Segoe UI"/>
+                <a:ea typeface="Segoe UI"/>
+                <a:cs typeface="Segoe UI"/>
               </a:rPr>
               <a:t>Free AI product  →  Low-friction acquisition  →  Registration  →  Engagement  →  Monetization</a:t>
             </a:r>
@@ -14058,6 +14398,8 @@
                   <a:srgbClr val="5E6E80"/>
                 </a:solidFill>
                 <a:latin typeface="Segoe UI"/>
+                <a:ea typeface="Segoe UI"/>
+                <a:cs typeface="Segoe UI"/>
               </a:rPr>
               <a:t>51 CAREERS   ·   CONFIDENTIAL INVESTOR PRESENTATION</a:t>
             </a:r>
@@ -14091,6 +14433,8 @@
                   <a:srgbClr val="5E6E80"/>
                 </a:solidFill>
                 <a:latin typeface="Segoe UI"/>
+                <a:ea typeface="Segoe UI"/>
+                <a:cs typeface="Segoe UI"/>
               </a:rPr>
               <a:t>16</a:t>
             </a:r>
@@ -14131,8 +14475,8 @@
         </p:nvSpPr>
         <p:spPr>
           <a:xfrm>
-            <a:off x="502920" y="201168"/>
-            <a:ext cx="11183112" cy="219456"/>
+            <a:off x="502920" y="182880"/>
+            <a:ext cx="11183112" cy="201168"/>
           </a:xfrm>
           <a:prstGeom prst="rect">
             <a:avLst/>
@@ -14150,6 +14494,8 @@
                   <a:srgbClr val="0A6B63"/>
                 </a:solidFill>
                 <a:latin typeface="Segoe UI"/>
+                <a:ea typeface="Segoe UI"/>
+                <a:cs typeface="Segoe UI"/>
               </a:rPr>
               <a:t>15  ·  CHINA + U.S. + GLOBAL</a:t>
             </a:r>
@@ -14164,25 +14510,27 @@
         </p:nvSpPr>
         <p:spPr>
           <a:xfrm>
-            <a:off x="502920" y="402336"/>
-            <a:ext cx="11183112" cy="438912"/>
-          </a:xfrm>
-          <a:prstGeom prst="rect">
-            <a:avLst/>
-          </a:prstGeom>
-          <a:noFill/>
-        </p:spPr>
-        <p:txBody>
-          <a:bodyPr wrap="square" anchor="t"/>
-          <a:lstStyle/>
-          <a:p>
-            <a:pPr algn="l"/>
-            <a:r>
-              <a:rPr sz="2400" b="1" i="0">
+            <a:off x="502920" y="365760"/>
+            <a:ext cx="11183112" cy="457200"/>
+          </a:xfrm>
+          <a:prstGeom prst="rect">
+            <a:avLst/>
+          </a:prstGeom>
+          <a:noFill/>
+        </p:spPr>
+        <p:txBody>
+          <a:bodyPr wrap="square" anchor="t"/>
+          <a:lstStyle/>
+          <a:p>
+            <a:pPr algn="l"/>
+            <a:r>
+              <a:rPr sz="2000" b="1" i="0">
                 <a:solidFill>
                   <a:srgbClr val="0B1F33"/>
                 </a:solidFill>
                 <a:latin typeface="Georgia"/>
+                <a:ea typeface="Georgia"/>
+                <a:cs typeface="Georgia"/>
               </a:rPr>
               <a:t>China as R&amp;D Base  ·  U.S. as Commercialization Market</a:t>
             </a:r>
@@ -14304,6 +14652,8 @@
                   <a:srgbClr val="0B1F33"/>
                 </a:solidFill>
                 <a:latin typeface="Segoe UI"/>
+                <a:ea typeface="Segoe UI"/>
+                <a:cs typeface="Segoe UI"/>
               </a:rPr>
               <a:t>CHINA  ·  R&amp;D AND PRODUCT</a:t>
             </a:r>
@@ -14337,6 +14687,8 @@
                   <a:srgbClr val="2C3A4B"/>
                 </a:solidFill>
                 <a:latin typeface="Segoe UI"/>
+                <a:ea typeface="Segoe UI"/>
+                <a:cs typeface="Segoe UI"/>
               </a:rPr>
               <a:t>Product, design, engineering, AI, testing, marketing operations, B2B business development.</a:t>
             </a:r>
@@ -14458,6 +14810,8 @@
                   <a:srgbClr val="0B1F33"/>
                 </a:solidFill>
                 <a:latin typeface="Segoe UI"/>
+                <a:ea typeface="Segoe UI"/>
+                <a:cs typeface="Segoe UI"/>
               </a:rPr>
               <a:t>UNITED STATES  ·  INTERNATIONAL GTM</a:t>
             </a:r>
@@ -14491,6 +14845,8 @@
                   <a:srgbClr val="2C3A4B"/>
                 </a:solidFill>
                 <a:latin typeface="Segoe UI"/>
+                <a:ea typeface="Segoe UI"/>
+                <a:cs typeface="Segoe UI"/>
               </a:rPr>
               <a:t>User acquisition, local partnerships, employer and university relationships, offline events, brand building.</a:t>
             </a:r>
@@ -14612,6 +14968,8 @@
                   <a:srgbClr val="0B1F33"/>
                 </a:solidFill>
                 <a:latin typeface="Segoe UI"/>
+                <a:ea typeface="Segoe UI"/>
+                <a:cs typeface="Segoe UI"/>
               </a:rPr>
               <a:t>GLOBAL EXPANSION</a:t>
             </a:r>
@@ -14645,6 +15003,8 @@
                   <a:srgbClr val="2C3A4B"/>
                 </a:solidFill>
                 <a:latin typeface="Segoe UI"/>
+                <a:ea typeface="Segoe UI"/>
+                <a:cs typeface="Segoe UI"/>
               </a:rPr>
               <a:t>Once product-market fit is established: North America → UK → Australia → Europe → Asia → other markets.</a:t>
             </a:r>
@@ -14807,6 +15167,8 @@
                   <a:srgbClr val="5E6E80"/>
                 </a:solidFill>
                 <a:latin typeface="Segoe UI"/>
+                <a:ea typeface="Segoe UI"/>
+                <a:cs typeface="Segoe UI"/>
               </a:rPr>
               <a:t>51 CAREERS   ·   CONFIDENTIAL INVESTOR PRESENTATION</a:t>
             </a:r>
@@ -14840,6 +15202,8 @@
                   <a:srgbClr val="5E6E80"/>
                 </a:solidFill>
                 <a:latin typeface="Segoe UI"/>
+                <a:ea typeface="Segoe UI"/>
+                <a:cs typeface="Segoe UI"/>
               </a:rPr>
               <a:t>17</a:t>
             </a:r>
@@ -14880,8 +15244,8 @@
         </p:nvSpPr>
         <p:spPr>
           <a:xfrm>
-            <a:off x="502920" y="201168"/>
-            <a:ext cx="11183112" cy="219456"/>
+            <a:off x="502920" y="182880"/>
+            <a:ext cx="11183112" cy="201168"/>
           </a:xfrm>
           <a:prstGeom prst="rect">
             <a:avLst/>
@@ -14899,6 +15263,8 @@
                   <a:srgbClr val="0A6B63"/>
                 </a:solidFill>
                 <a:latin typeface="Segoe UI"/>
+                <a:ea typeface="Segoe UI"/>
+                <a:cs typeface="Segoe UI"/>
               </a:rPr>
               <a:t>16  ·  COMPETITIVE LANDSCAPE</a:t>
             </a:r>
@@ -14913,8 +15279,8 @@
         </p:nvSpPr>
         <p:spPr>
           <a:xfrm>
-            <a:off x="502920" y="402336"/>
-            <a:ext cx="11183112" cy="438912"/>
+            <a:off x="502920" y="365760"/>
+            <a:ext cx="11183112" cy="457200"/>
           </a:xfrm>
           <a:prstGeom prst="rect">
             <a:avLst/>
@@ -14932,6 +15298,8 @@
                   <a:srgbClr val="0B1F33"/>
                 </a:solidFill>
                 <a:latin typeface="Georgia"/>
+                <a:ea typeface="Georgia"/>
+                <a:cs typeface="Georgia"/>
               </a:rPr>
               <a:t>Career Infrastructure — Not Another Resume Builder</a:t>
             </a:r>
@@ -15010,6 +15378,8 @@
                   <a:srgbClr val="5E6E80"/>
                 </a:solidFill>
                 <a:latin typeface="Segoe UI"/>
+                <a:ea typeface="Segoe UI"/>
+                <a:cs typeface="Segoe UI"/>
               </a:rPr>
               <a:t>JOB PLATFORMS</a:t>
             </a:r>
@@ -15043,6 +15413,8 @@
                   <a:srgbClr val="2C3A4B"/>
                 </a:solidFill>
                 <a:latin typeface="Segoe UI"/>
+                <a:ea typeface="Segoe UI"/>
+                <a:cs typeface="Segoe UI"/>
               </a:rPr>
               <a:t>Large user base  ·  Limited personalized career intelligence</a:t>
             </a:r>
@@ -15121,6 +15493,8 @@
                   <a:srgbClr val="5E6E80"/>
                 </a:solidFill>
                 <a:latin typeface="Segoe UI"/>
+                <a:ea typeface="Segoe UI"/>
+                <a:cs typeface="Segoe UI"/>
               </a:rPr>
               <a:t>GENERAL-PURPOSE AI</a:t>
             </a:r>
@@ -15154,6 +15528,8 @@
                   <a:srgbClr val="2C3A4B"/>
                 </a:solidFill>
                 <a:latin typeface="Segoe UI"/>
+                <a:ea typeface="Segoe UI"/>
+                <a:cs typeface="Segoe UI"/>
               </a:rPr>
               <a:t>High AI capability  ·  Limited career specialization</a:t>
             </a:r>
@@ -15232,6 +15608,8 @@
                   <a:srgbClr val="5E6E80"/>
                 </a:solidFill>
                 <a:latin typeface="Segoe UI"/>
+                <a:ea typeface="Segoe UI"/>
+                <a:cs typeface="Segoe UI"/>
               </a:rPr>
               <a:t>TRADITIONAL CAREER SERVICES</a:t>
             </a:r>
@@ -15265,6 +15643,8 @@
                   <a:srgbClr val="2C3A4B"/>
                 </a:solidFill>
                 <a:latin typeface="Segoe UI"/>
+                <a:ea typeface="Segoe UI"/>
+                <a:cs typeface="Segoe UI"/>
               </a:rPr>
               <a:t>High human service  ·  Low scalability</a:t>
             </a:r>
@@ -15343,6 +15723,8 @@
                   <a:srgbClr val="5E6E80"/>
                 </a:solidFill>
                 <a:latin typeface="Segoe UI"/>
+                <a:ea typeface="Segoe UI"/>
+                <a:cs typeface="Segoe UI"/>
               </a:rPr>
               <a:t>AI RESUME TOOLS</a:t>
             </a:r>
@@ -15376,6 +15758,8 @@
                   <a:srgbClr val="2C3A4B"/>
                 </a:solidFill>
                 <a:latin typeface="Segoe UI"/>
+                <a:ea typeface="Segoe UI"/>
+                <a:cs typeface="Segoe UI"/>
               </a:rPr>
               <a:t>Resume-focused  ·  Limited ecosystem</a:t>
             </a:r>
@@ -15454,6 +15838,8 @@
                   <a:srgbClr val="0A6B63"/>
                 </a:solidFill>
                 <a:latin typeface="Segoe UI"/>
+                <a:ea typeface="Segoe UI"/>
+                <a:cs typeface="Segoe UI"/>
               </a:rPr>
               <a:t>51 CAREERS</a:t>
             </a:r>
@@ -15487,6 +15873,8 @@
                   <a:srgbClr val="FFFFFF"/>
                 </a:solidFill>
                 <a:latin typeface="Segoe UI"/>
+                <a:ea typeface="Segoe UI"/>
+                <a:cs typeface="Segoe UI"/>
               </a:rPr>
               <a:t>AI  +  Career expertise  +  Services  +  Marketplace. We are not competing only with resume builders — we are building career infrastructure.</a:t>
             </a:r>
@@ -15649,6 +16037,8 @@
                   <a:srgbClr val="5E6E80"/>
                 </a:solidFill>
                 <a:latin typeface="Segoe UI"/>
+                <a:ea typeface="Segoe UI"/>
+                <a:cs typeface="Segoe UI"/>
               </a:rPr>
               <a:t>51 CAREERS   ·   CONFIDENTIAL INVESTOR PRESENTATION</a:t>
             </a:r>
@@ -15682,6 +16072,8 @@
                   <a:srgbClr val="5E6E80"/>
                 </a:solidFill>
                 <a:latin typeface="Segoe UI"/>
+                <a:ea typeface="Segoe UI"/>
+                <a:cs typeface="Segoe UI"/>
               </a:rPr>
               <a:t>18</a:t>
             </a:r>
@@ -15722,8 +16114,8 @@
         </p:nvSpPr>
         <p:spPr>
           <a:xfrm>
-            <a:off x="502920" y="201168"/>
-            <a:ext cx="11183112" cy="219456"/>
+            <a:off x="502920" y="182880"/>
+            <a:ext cx="11183112" cy="201168"/>
           </a:xfrm>
           <a:prstGeom prst="rect">
             <a:avLst/>
@@ -15741,6 +16133,8 @@
                   <a:srgbClr val="0A6B63"/>
                 </a:solidFill>
                 <a:latin typeface="Segoe UI"/>
+                <a:ea typeface="Segoe UI"/>
+                <a:cs typeface="Segoe UI"/>
               </a:rPr>
               <a:t>17  ·  COMPETITIVE ADVANTAGES</a:t>
             </a:r>
@@ -15755,8 +16149,8 @@
         </p:nvSpPr>
         <p:spPr>
           <a:xfrm>
-            <a:off x="502920" y="402336"/>
-            <a:ext cx="11183112" cy="438912"/>
+            <a:off x="502920" y="365760"/>
+            <a:ext cx="11183112" cy="457200"/>
           </a:xfrm>
           <a:prstGeom prst="rect">
             <a:avLst/>
@@ -15774,6 +16168,8 @@
                   <a:srgbClr val="0B1F33"/>
                 </a:solidFill>
                 <a:latin typeface="Georgia"/>
+                <a:ea typeface="Georgia"/>
+                <a:cs typeface="Georgia"/>
               </a:rPr>
               <a:t>Why 51 Careers</a:t>
             </a:r>
@@ -15852,6 +16248,8 @@
                   <a:srgbClr val="0A6B63"/>
                 </a:solidFill>
                 <a:latin typeface="Georgia"/>
+                <a:ea typeface="Georgia"/>
+                <a:cs typeface="Georgia"/>
               </a:rPr>
               <a:t>01</a:t>
             </a:r>
@@ -15885,6 +16283,8 @@
                   <a:srgbClr val="0B1F33"/>
                 </a:solidFill>
                 <a:latin typeface="Segoe UI"/>
+                <a:ea typeface="Segoe UI"/>
+                <a:cs typeface="Segoe UI"/>
               </a:rPr>
               <a:t>Existing career-services foundation</a:t>
             </a:r>
@@ -15918,6 +16318,8 @@
                   <a:srgbClr val="2C3A4B"/>
                 </a:solidFill>
                 <a:latin typeface="Segoe UI"/>
+                <a:ea typeface="Segoe UI"/>
+                <a:cs typeface="Segoe UI"/>
               </a:rPr>
               <a:t>We understand the industry from an operating perspective.</a:t>
             </a:r>
@@ -15996,6 +16398,8 @@
                   <a:srgbClr val="0A6B63"/>
                 </a:solidFill>
                 <a:latin typeface="Georgia"/>
+                <a:ea typeface="Georgia"/>
+                <a:cs typeface="Georgia"/>
               </a:rPr>
               <a:t>02</a:t>
             </a:r>
@@ -16029,6 +16433,8 @@
                   <a:srgbClr val="0B1F33"/>
                 </a:solidFill>
                 <a:latin typeface="Segoe UI"/>
+                <a:ea typeface="Segoe UI"/>
+                <a:cs typeface="Segoe UI"/>
               </a:rPr>
               <a:t>AI product already in development</a:t>
             </a:r>
@@ -16062,6 +16468,8 @@
                   <a:srgbClr val="2C3A4B"/>
                 </a:solidFill>
                 <a:latin typeface="Segoe UI"/>
+                <a:ea typeface="Segoe UI"/>
+                <a:cs typeface="Segoe UI"/>
               </a:rPr>
               <a:t>Not a concept or a slide-deck company. Demo built and tested.</a:t>
             </a:r>
@@ -16140,6 +16548,8 @@
                   <a:srgbClr val="0A6B63"/>
                 </a:solidFill>
                 <a:latin typeface="Georgia"/>
+                <a:ea typeface="Georgia"/>
+                <a:cs typeface="Georgia"/>
               </a:rPr>
               <a:t>03</a:t>
             </a:r>
@@ -16173,6 +16583,8 @@
                   <a:srgbClr val="0B1F33"/>
                 </a:solidFill>
                 <a:latin typeface="Segoe UI"/>
+                <a:ea typeface="Segoe UI"/>
+                <a:cs typeface="Segoe UI"/>
               </a:rPr>
               <a:t>Global scalability</a:t>
             </a:r>
@@ -16206,6 +16618,8 @@
                   <a:srgbClr val="2C3A4B"/>
                 </a:solidFill>
                 <a:latin typeface="Segoe UI"/>
+                <a:ea typeface="Segoe UI"/>
+                <a:cs typeface="Segoe UI"/>
               </a:rPr>
               <a:t>AI Resume can be distributed worldwide through digital channels.</a:t>
             </a:r>
@@ -16284,6 +16698,8 @@
                   <a:srgbClr val="0A6B63"/>
                 </a:solidFill>
                 <a:latin typeface="Georgia"/>
+                <a:ea typeface="Georgia"/>
+                <a:cs typeface="Georgia"/>
               </a:rPr>
               <a:t>04</a:t>
             </a:r>
@@ -16317,6 +16733,8 @@
                   <a:srgbClr val="0B1F33"/>
                 </a:solidFill>
                 <a:latin typeface="Segoe UI"/>
+                <a:ea typeface="Segoe UI"/>
+                <a:cs typeface="Segoe UI"/>
               </a:rPr>
               <a:t>Multiple monetization paths</a:t>
             </a:r>
@@ -16350,6 +16768,8 @@
                   <a:srgbClr val="2C3A4B"/>
                 </a:solidFill>
                 <a:latin typeface="Segoe UI"/>
+                <a:ea typeface="Segoe UI"/>
+                <a:cs typeface="Segoe UI"/>
               </a:rPr>
               <a:t>Subscription + services + commission + B2B + ads + sponsorship.</a:t>
             </a:r>
@@ -16428,6 +16848,8 @@
                   <a:srgbClr val="0A6B63"/>
                 </a:solidFill>
                 <a:latin typeface="Georgia"/>
+                <a:ea typeface="Georgia"/>
+                <a:cs typeface="Georgia"/>
               </a:rPr>
               <a:t>05</a:t>
             </a:r>
@@ -16461,6 +16883,8 @@
                   <a:srgbClr val="0B1F33"/>
                 </a:solidFill>
                 <a:latin typeface="Segoe UI"/>
+                <a:ea typeface="Segoe UI"/>
+                <a:cs typeface="Segoe UI"/>
               </a:rPr>
               <a:t>AI + human hybrid</a:t>
             </a:r>
@@ -16494,6 +16918,8 @@
                   <a:srgbClr val="2C3A4B"/>
                 </a:solidFill>
                 <a:latin typeface="Segoe UI"/>
+                <a:ea typeface="Segoe UI"/>
+                <a:cs typeface="Segoe UI"/>
               </a:rPr>
               <a:t>AI for scalable work; humans for high-value, complex services.</a:t>
             </a:r>
@@ -16572,6 +16998,8 @@
                   <a:srgbClr val="0A6B63"/>
                 </a:solidFill>
                 <a:latin typeface="Georgia"/>
+                <a:ea typeface="Georgia"/>
+                <a:cs typeface="Georgia"/>
               </a:rPr>
               <a:t>06</a:t>
             </a:r>
@@ -16605,6 +17033,8 @@
                   <a:srgbClr val="0B1F33"/>
                 </a:solidFill>
                 <a:latin typeface="Segoe UI"/>
+                <a:ea typeface="Segoe UI"/>
+                <a:cs typeface="Segoe UI"/>
               </a:rPr>
               <a:t>Platform potential</a:t>
             </a:r>
@@ -16638,6 +17068,8 @@
                   <a:srgbClr val="2C3A4B"/>
                 </a:solidFill>
                 <a:latin typeface="Segoe UI"/>
+                <a:ea typeface="Segoe UI"/>
+                <a:cs typeface="Segoe UI"/>
               </a:rPr>
               <a:t>The long-term opportunity extends beyond resumes into the career ecosystem.</a:t>
             </a:r>
@@ -16800,6 +17232,8 @@
                   <a:srgbClr val="5E6E80"/>
                 </a:solidFill>
                 <a:latin typeface="Segoe UI"/>
+                <a:ea typeface="Segoe UI"/>
+                <a:cs typeface="Segoe UI"/>
               </a:rPr>
               <a:t>51 CAREERS   ·   CONFIDENTIAL INVESTOR PRESENTATION</a:t>
             </a:r>
@@ -16833,6 +17267,8 @@
                   <a:srgbClr val="5E6E80"/>
                 </a:solidFill>
                 <a:latin typeface="Segoe UI"/>
+                <a:ea typeface="Segoe UI"/>
+                <a:cs typeface="Segoe UI"/>
               </a:rPr>
               <a:t>19</a:t>
             </a:r>
@@ -16873,8 +17309,8 @@
         </p:nvSpPr>
         <p:spPr>
           <a:xfrm>
-            <a:off x="502920" y="201168"/>
-            <a:ext cx="11183112" cy="219456"/>
+            <a:off x="502920" y="182880"/>
+            <a:ext cx="11183112" cy="201168"/>
           </a:xfrm>
           <a:prstGeom prst="rect">
             <a:avLst/>
@@ -16892,6 +17328,8 @@
                   <a:srgbClr val="0A6B63"/>
                 </a:solidFill>
                 <a:latin typeface="Segoe UI"/>
+                <a:ea typeface="Segoe UI"/>
+                <a:cs typeface="Segoe UI"/>
               </a:rPr>
               <a:t>01  ·  EXECUTIVE SUMMARY</a:t>
             </a:r>
@@ -16906,8 +17344,8 @@
         </p:nvSpPr>
         <p:spPr>
           <a:xfrm>
-            <a:off x="502920" y="402336"/>
-            <a:ext cx="11183112" cy="438912"/>
+            <a:off x="502920" y="365760"/>
+            <a:ext cx="11183112" cy="457200"/>
           </a:xfrm>
           <a:prstGeom prst="rect">
             <a:avLst/>
@@ -16925,6 +17363,8 @@
                   <a:srgbClr val="0B1F33"/>
                 </a:solidFill>
                 <a:latin typeface="Georgia"/>
+                <a:ea typeface="Georgia"/>
+                <a:cs typeface="Georgia"/>
               </a:rPr>
               <a:t>Building the AI-Powered Future of Career Services</a:t>
             </a:r>
@@ -16939,8 +17379,8 @@
         </p:nvSpPr>
         <p:spPr>
           <a:xfrm>
-            <a:off x="502920" y="841248"/>
-            <a:ext cx="11183112" cy="256032"/>
+            <a:off x="502920" y="822960"/>
+            <a:ext cx="11183112" cy="237744"/>
           </a:xfrm>
           <a:prstGeom prst="rect">
             <a:avLst/>
@@ -16958,6 +17398,8 @@
                   <a:srgbClr val="5E6E80"/>
                 </a:solidFill>
                 <a:latin typeface="Segoe UI"/>
+                <a:ea typeface="Segoe UI"/>
+                <a:cs typeface="Segoe UI"/>
               </a:rPr>
               <a:t>Career Services  →  AI Resume  →  AI Career Platform  →  Global Career Marketplace</a:t>
             </a:r>
@@ -17083,6 +17525,8 @@
                   <a:srgbClr val="0B1F33"/>
                 </a:solidFill>
                 <a:latin typeface="Segoe UI"/>
+                <a:ea typeface="Segoe UI"/>
+                <a:cs typeface="Segoe UI"/>
               </a:rPr>
               <a:t>Who we are</a:t>
             </a:r>
@@ -17099,6 +17543,8 @@
                   <a:srgbClr val="2C3A4B"/>
                 </a:solidFill>
                 <a:latin typeface="Segoe UI"/>
+                <a:ea typeface="Segoe UI"/>
+                <a:cs typeface="Segoe UI"/>
               </a:rPr>
               <a:t>51 Careers is building a global AI Career Platform to help job seekers create better resumes, discover opportunities, improve job-search outcomes, and access professional career services.</a:t>
             </a:r>
@@ -17115,6 +17561,8 @@
                   <a:srgbClr val="0B1F33"/>
                 </a:solidFill>
                 <a:latin typeface="Segoe UI"/>
+                <a:ea typeface="Segoe UI"/>
+                <a:cs typeface="Segoe UI"/>
               </a:rPr>
               <a:t>Entry point</a:t>
             </a:r>
@@ -17131,6 +17579,8 @@
                   <a:srgbClr val="2C3A4B"/>
                 </a:solidFill>
                 <a:latin typeface="Segoe UI"/>
+                <a:ea typeface="Segoe UI"/>
+                <a:cs typeface="Segoe UI"/>
               </a:rPr>
               <a:t>An AI-powered Resume Platform that turns unstructured career experience into professional, quantified, job-specific resumes.</a:t>
             </a:r>
@@ -17147,6 +17597,8 @@
                   <a:srgbClr val="0B1F33"/>
                 </a:solidFill>
                 <a:latin typeface="Segoe UI"/>
+                <a:ea typeface="Segoe UI"/>
+                <a:cs typeface="Segoe UI"/>
               </a:rPr>
               <a:t>This round</a:t>
             </a:r>
@@ -17159,6 +17611,8 @@
                   <a:srgbClr val="2C3A4B"/>
                 </a:solidFill>
                 <a:latin typeface="Segoe UI"/>
+                <a:ea typeface="Segoe UI"/>
+                <a:cs typeface="Segoe UI"/>
               </a:rPr>
               <a:t>RMB 20 million (10% of RMB 200 million post-money) to accelerate product development, user acquisition, and global commercialization. Pre-money RMB 180 million.</a:t>
             </a:r>
@@ -17237,6 +17691,8 @@
                   <a:srgbClr val="0A6B63"/>
                 </a:solidFill>
                 <a:latin typeface="Georgia"/>
+                <a:ea typeface="Georgia"/>
+                <a:cs typeface="Georgia"/>
               </a:rPr>
               <a:t>01</a:t>
             </a:r>
@@ -17270,6 +17726,8 @@
                   <a:srgbClr val="2C3A4B"/>
                 </a:solidFill>
                 <a:latin typeface="Segoe UI"/>
+                <a:ea typeface="Segoe UI"/>
+                <a:cs typeface="Segoe UI"/>
               </a:rPr>
               <a:t>AI Resume demo already developed</a:t>
             </a:r>
@@ -17348,6 +17806,8 @@
                   <a:srgbClr val="0A6B63"/>
                 </a:solidFill>
                 <a:latin typeface="Georgia"/>
+                <a:ea typeface="Georgia"/>
+                <a:cs typeface="Georgia"/>
               </a:rPr>
               <a:t>02</a:t>
             </a:r>
@@ -17381,6 +17841,8 @@
                   <a:srgbClr val="2C3A4B"/>
                 </a:solidFill>
                 <a:latin typeface="Segoe UI"/>
+                <a:ea typeface="Segoe UI"/>
+                <a:cs typeface="Segoe UI"/>
               </a:rPr>
               <a:t>Initial testing completed with promising results</a:t>
             </a:r>
@@ -17459,6 +17921,8 @@
                   <a:srgbClr val="0A6B63"/>
                 </a:solidFill>
                 <a:latin typeface="Georgia"/>
+                <a:ea typeface="Georgia"/>
+                <a:cs typeface="Georgia"/>
               </a:rPr>
               <a:t>03</a:t>
             </a:r>
@@ -17492,6 +17956,8 @@
                   <a:srgbClr val="2C3A4B"/>
                 </a:solidFill>
                 <a:latin typeface="Segoe UI"/>
+                <a:ea typeface="Segoe UI"/>
+                <a:cs typeface="Segoe UI"/>
               </a:rPr>
               <a:t>Stronger professional positioning &amp; quantification vs. general-purpose models in internal tests</a:t>
             </a:r>
@@ -17570,6 +18036,8 @@
                   <a:srgbClr val="0A6B63"/>
                 </a:solidFill>
                 <a:latin typeface="Georgia"/>
+                <a:ea typeface="Georgia"/>
+                <a:cs typeface="Georgia"/>
               </a:rPr>
               <a:t>04</a:t>
             </a:r>
@@ -17603,6 +18071,8 @@
                   <a:srgbClr val="2C3A4B"/>
                 </a:solidFill>
                 <a:latin typeface="Segoe UI"/>
+                <a:ea typeface="Segoe UI"/>
+                <a:cs typeface="Segoe UI"/>
               </a:rPr>
               <a:t>Product can serve users globally from day one</a:t>
             </a:r>
@@ -17681,6 +18151,8 @@
                   <a:srgbClr val="0A6B63"/>
                 </a:solidFill>
                 <a:latin typeface="Georgia"/>
+                <a:ea typeface="Georgia"/>
+                <a:cs typeface="Georgia"/>
               </a:rPr>
               <a:t>05</a:t>
             </a:r>
@@ -17714,6 +18186,8 @@
                   <a:srgbClr val="2C3A4B"/>
                 </a:solidFill>
                 <a:latin typeface="Segoe UI"/>
+                <a:ea typeface="Segoe UI"/>
+                <a:cs typeface="Segoe UI"/>
               </a:rPr>
               <a:t>Existing career-services business: domain expertise + monetization</a:t>
             </a:r>
@@ -17792,6 +18266,8 @@
                   <a:srgbClr val="0A6B63"/>
                 </a:solidFill>
                 <a:latin typeface="Georgia"/>
+                <a:ea typeface="Georgia"/>
+                <a:cs typeface="Georgia"/>
               </a:rPr>
               <a:t>06</a:t>
             </a:r>
@@ -17825,6 +18301,8 @@
                   <a:srgbClr val="2C3A4B"/>
                 </a:solidFill>
                 <a:latin typeface="Segoe UI"/>
+                <a:ea typeface="Segoe UI"/>
+                <a:cs typeface="Segoe UI"/>
               </a:rPr>
               <a:t>U.S. market as the first international growth beachhead</a:t>
             </a:r>
@@ -17903,6 +18381,8 @@
                   <a:srgbClr val="0A6B63"/>
                 </a:solidFill>
                 <a:latin typeface="Georgia"/>
+                <a:ea typeface="Georgia"/>
+                <a:cs typeface="Georgia"/>
               </a:rPr>
               <a:t>07</a:t>
             </a:r>
@@ -17936,6 +18416,8 @@
                   <a:srgbClr val="2C3A4B"/>
                 </a:solidFill>
                 <a:latin typeface="Segoe UI"/>
+                <a:ea typeface="Segoe UI"/>
+                <a:cs typeface="Segoe UI"/>
               </a:rPr>
               <a:t>Multiple revenue streams beyond AI Resume subscriptions</a:t>
             </a:r>
@@ -18014,6 +18496,8 @@
                   <a:srgbClr val="0A6B63"/>
                 </a:solidFill>
                 <a:latin typeface="Georgia"/>
+                <a:ea typeface="Georgia"/>
+                <a:cs typeface="Georgia"/>
               </a:rPr>
               <a:t>08</a:t>
             </a:r>
@@ -18047,6 +18531,8 @@
                   <a:srgbClr val="2C3A4B"/>
                 </a:solidFill>
                 <a:latin typeface="Segoe UI"/>
+                <a:ea typeface="Segoe UI"/>
+                <a:cs typeface="Segoe UI"/>
               </a:rPr>
               <a:t>RMB 20M to fund product, acquisition, and global go-to-market</a:t>
             </a:r>
@@ -18209,6 +18695,8 @@
                   <a:srgbClr val="5E6E80"/>
                 </a:solidFill>
                 <a:latin typeface="Segoe UI"/>
+                <a:ea typeface="Segoe UI"/>
+                <a:cs typeface="Segoe UI"/>
               </a:rPr>
               <a:t>51 CAREERS   ·   CONFIDENTIAL INVESTOR PRESENTATION</a:t>
             </a:r>
@@ -18242,6 +18730,8 @@
                   <a:srgbClr val="5E6E80"/>
                 </a:solidFill>
                 <a:latin typeface="Segoe UI"/>
+                <a:ea typeface="Segoe UI"/>
+                <a:cs typeface="Segoe UI"/>
               </a:rPr>
               <a:t>2</a:t>
             </a:r>
@@ -18282,8 +18772,8 @@
         </p:nvSpPr>
         <p:spPr>
           <a:xfrm>
-            <a:off x="502920" y="201168"/>
-            <a:ext cx="11183112" cy="219456"/>
+            <a:off x="502920" y="182880"/>
+            <a:ext cx="11183112" cy="201168"/>
           </a:xfrm>
           <a:prstGeom prst="rect">
             <a:avLst/>
@@ -18301,6 +18791,8 @@
                   <a:srgbClr val="0A6B63"/>
                 </a:solidFill>
                 <a:latin typeface="Segoe UI"/>
+                <a:ea typeface="Segoe UI"/>
+                <a:cs typeface="Segoe UI"/>
               </a:rPr>
               <a:t>18  ·  TEAM &amp; OPERATING STRUCTURE</a:t>
             </a:r>
@@ -18315,25 +18807,27 @@
         </p:nvSpPr>
         <p:spPr>
           <a:xfrm>
-            <a:off x="502920" y="402336"/>
-            <a:ext cx="11183112" cy="438912"/>
-          </a:xfrm>
-          <a:prstGeom prst="rect">
-            <a:avLst/>
-          </a:prstGeom>
-          <a:noFill/>
-        </p:spPr>
-        <p:txBody>
-          <a:bodyPr wrap="square" anchor="t"/>
-          <a:lstStyle/>
-          <a:p>
-            <a:pPr algn="l"/>
-            <a:r>
-              <a:rPr sz="2400" b="1" i="0">
+            <a:off x="502920" y="365760"/>
+            <a:ext cx="11183112" cy="457200"/>
+          </a:xfrm>
+          <a:prstGeom prst="rect">
+            <a:avLst/>
+          </a:prstGeom>
+          <a:noFill/>
+        </p:spPr>
+        <p:txBody>
+          <a:bodyPr wrap="square" anchor="t"/>
+          <a:lstStyle/>
+          <a:p>
+            <a:pPr algn="l"/>
+            <a:r>
+              <a:rPr sz="2000" b="1" i="0">
                 <a:solidFill>
                   <a:srgbClr val="0B1F33"/>
                 </a:solidFill>
                 <a:latin typeface="Georgia"/>
+                <a:ea typeface="Georgia"/>
+                <a:cs typeface="Georgia"/>
               </a:rPr>
               <a:t>Core founding team in place  ·  Planned hiring funded by this round</a:t>
             </a:r>
@@ -18455,6 +18949,8 @@
                   <a:srgbClr val="0A6B63"/>
                 </a:solidFill>
                 <a:latin typeface="Segoe UI"/>
+                <a:ea typeface="Segoe UI"/>
+                <a:cs typeface="Segoe UI"/>
               </a:rPr>
               <a:t>EXISTING</a:t>
             </a:r>
@@ -18488,6 +18984,8 @@
                   <a:srgbClr val="0B1F33"/>
                 </a:solidFill>
                 <a:latin typeface="Georgia"/>
+                <a:ea typeface="Georgia"/>
+                <a:cs typeface="Georgia"/>
               </a:rPr>
               <a:t>FOUNDING TEAM</a:t>
             </a:r>
@@ -18521,6 +19019,8 @@
                   <a:srgbClr val="0B1F33"/>
                 </a:solidFill>
                 <a:latin typeface="Georgia"/>
+                <a:ea typeface="Georgia"/>
+                <a:cs typeface="Georgia"/>
               </a:rPr>
               <a:t>4</a:t>
             </a:r>
@@ -18554,6 +19054,8 @@
                   <a:srgbClr val="2C3A4B"/>
                 </a:solidFill>
                 <a:latin typeface="Segoe UI"/>
+                <a:ea typeface="Segoe UI"/>
+                <a:cs typeface="Segoe UI"/>
               </a:rPr>
               <a:t>Core founding team members</a:t>
             </a:r>
@@ -18587,6 +19089,8 @@
                   <a:srgbClr val="2C3A4B"/>
                 </a:solidFill>
                 <a:latin typeface="Segoe UI"/>
+                <a:ea typeface="Segoe UI"/>
+                <a:cs typeface="Segoe UI"/>
               </a:rPr>
               <a:t>▸  In place today</a:t>
             </a:r>
@@ -18620,6 +19124,8 @@
                   <a:srgbClr val="2C3A4B"/>
                 </a:solidFill>
                 <a:latin typeface="Segoe UI"/>
+                <a:ea typeface="Segoe UI"/>
+                <a:cs typeface="Segoe UI"/>
               </a:rPr>
               <a:t>▸  Product, capital, and go-to-market leadership</a:t>
             </a:r>
@@ -18653,6 +19159,8 @@
                   <a:srgbClr val="2C3A4B"/>
                 </a:solidFill>
                 <a:latin typeface="Segoe UI"/>
+                <a:ea typeface="Segoe UI"/>
+                <a:cs typeface="Segoe UI"/>
               </a:rPr>
               <a:t>▸  Additional roles are not yet hired</a:t>
             </a:r>
@@ -18686,6 +19194,8 @@
                   <a:srgbClr val="2C3A4B"/>
                 </a:solidFill>
                 <a:latin typeface="Segoe UI"/>
+                <a:ea typeface="Segoe UI"/>
+                <a:cs typeface="Segoe UI"/>
               </a:rPr>
               <a:t>▸  This round funds the planned operating team</a:t>
             </a:r>
@@ -18807,6 +19317,8 @@
                   <a:srgbClr val="5E6E80"/>
                 </a:solidFill>
                 <a:latin typeface="Segoe UI"/>
+                <a:ea typeface="Segoe UI"/>
+                <a:cs typeface="Segoe UI"/>
               </a:rPr>
               <a:t>PLANNED</a:t>
             </a:r>
@@ -18840,6 +19352,8 @@
                   <a:srgbClr val="0B1F33"/>
                 </a:solidFill>
                 <a:latin typeface="Segoe UI"/>
+                <a:ea typeface="Segoe UI"/>
+                <a:cs typeface="Segoe UI"/>
               </a:rPr>
               <a:t>CHINA TECHNOLOGY</a:t>
             </a:r>
@@ -18873,6 +19387,8 @@
                   <a:srgbClr val="0B1F33"/>
                 </a:solidFill>
                 <a:latin typeface="Georgia"/>
+                <a:ea typeface="Georgia"/>
+                <a:cs typeface="Georgia"/>
               </a:rPr>
               <a:t>7</a:t>
             </a:r>
@@ -18906,6 +19422,8 @@
                   <a:srgbClr val="5E6E80"/>
                 </a:solidFill>
                 <a:latin typeface="Segoe UI"/>
+                <a:ea typeface="Segoe UI"/>
+                <a:cs typeface="Segoe UI"/>
               </a:rPr>
               <a:t>Product, design, engineering, and AI.</a:t>
             </a:r>
@@ -18939,6 +19457,8 @@
                   <a:srgbClr val="2C3A4B"/>
                 </a:solidFill>
                 <a:latin typeface="Segoe UI"/>
+                <a:ea typeface="Segoe UI"/>
+                <a:cs typeface="Segoe UI"/>
               </a:rPr>
               <a:t>Product Manager</a:t>
             </a:r>
@@ -18972,6 +19492,8 @@
                   <a:srgbClr val="0A6B63"/>
                 </a:solidFill>
                 <a:latin typeface="Segoe UI"/>
+                <a:ea typeface="Segoe UI"/>
+                <a:cs typeface="Segoe UI"/>
               </a:rPr>
               <a:t>1</a:t>
             </a:r>
@@ -19005,6 +19527,8 @@
                   <a:srgbClr val="2C3A4B"/>
                 </a:solidFill>
                 <a:latin typeface="Segoe UI"/>
+                <a:ea typeface="Segoe UI"/>
+                <a:cs typeface="Segoe UI"/>
               </a:rPr>
               <a:t>Designer</a:t>
             </a:r>
@@ -19038,6 +19562,8 @@
                   <a:srgbClr val="0A6B63"/>
                 </a:solidFill>
                 <a:latin typeface="Segoe UI"/>
+                <a:ea typeface="Segoe UI"/>
+                <a:cs typeface="Segoe UI"/>
               </a:rPr>
               <a:t>1</a:t>
             </a:r>
@@ -19071,6 +19597,8 @@
                   <a:srgbClr val="2C3A4B"/>
                 </a:solidFill>
                 <a:latin typeface="Segoe UI"/>
+                <a:ea typeface="Segoe UI"/>
+                <a:cs typeface="Segoe UI"/>
               </a:rPr>
               <a:t>QA / Testing</a:t>
             </a:r>
@@ -19104,6 +19632,8 @@
                   <a:srgbClr val="0A6B63"/>
                 </a:solidFill>
                 <a:latin typeface="Segoe UI"/>
+                <a:ea typeface="Segoe UI"/>
+                <a:cs typeface="Segoe UI"/>
               </a:rPr>
               <a:t>1</a:t>
             </a:r>
@@ -19137,6 +19667,8 @@
                   <a:srgbClr val="2C3A4B"/>
                 </a:solidFill>
                 <a:latin typeface="Segoe UI"/>
+                <a:ea typeface="Segoe UI"/>
+                <a:cs typeface="Segoe UI"/>
               </a:rPr>
               <a:t>Front-End Engineer</a:t>
             </a:r>
@@ -19170,6 +19702,8 @@
                   <a:srgbClr val="0A6B63"/>
                 </a:solidFill>
                 <a:latin typeface="Segoe UI"/>
+                <a:ea typeface="Segoe UI"/>
+                <a:cs typeface="Segoe UI"/>
               </a:rPr>
               <a:t>1</a:t>
             </a:r>
@@ -19203,6 +19737,8 @@
                   <a:srgbClr val="2C3A4B"/>
                 </a:solidFill>
                 <a:latin typeface="Segoe UI"/>
+                <a:ea typeface="Segoe UI"/>
+                <a:cs typeface="Segoe UI"/>
               </a:rPr>
               <a:t>Back-End Engineers</a:t>
             </a:r>
@@ -19236,6 +19772,8 @@
                   <a:srgbClr val="0A6B63"/>
                 </a:solidFill>
                 <a:latin typeface="Segoe UI"/>
+                <a:ea typeface="Segoe UI"/>
+                <a:cs typeface="Segoe UI"/>
               </a:rPr>
               <a:t>2</a:t>
             </a:r>
@@ -19269,6 +19807,8 @@
                   <a:srgbClr val="2C3A4B"/>
                 </a:solidFill>
                 <a:latin typeface="Segoe UI"/>
+                <a:ea typeface="Segoe UI"/>
+                <a:cs typeface="Segoe UI"/>
               </a:rPr>
               <a:t>AI Engineer</a:t>
             </a:r>
@@ -19302,6 +19842,8 @@
                   <a:srgbClr val="0A6B63"/>
                 </a:solidFill>
                 <a:latin typeface="Segoe UI"/>
+                <a:ea typeface="Segoe UI"/>
+                <a:cs typeface="Segoe UI"/>
               </a:rPr>
               <a:t>1</a:t>
             </a:r>
@@ -19423,6 +19965,8 @@
                   <a:srgbClr val="5E6E80"/>
                 </a:solidFill>
                 <a:latin typeface="Segoe UI"/>
+                <a:ea typeface="Segoe UI"/>
+                <a:cs typeface="Segoe UI"/>
               </a:rPr>
               <a:t>PLANNED</a:t>
             </a:r>
@@ -19456,6 +20000,8 @@
                   <a:srgbClr val="0B1F33"/>
                 </a:solidFill>
                 <a:latin typeface="Segoe UI"/>
+                <a:ea typeface="Segoe UI"/>
+                <a:cs typeface="Segoe UI"/>
               </a:rPr>
               <a:t>CHINA GROWTH</a:t>
             </a:r>
@@ -19489,6 +20035,8 @@
                   <a:srgbClr val="0B1F33"/>
                 </a:solidFill>
                 <a:latin typeface="Georgia"/>
+                <a:ea typeface="Georgia"/>
+                <a:cs typeface="Georgia"/>
               </a:rPr>
               <a:t>2+</a:t>
             </a:r>
@@ -19522,6 +20070,8 @@
                   <a:srgbClr val="5E6E80"/>
                 </a:solidFill>
                 <a:latin typeface="Segoe UI"/>
+                <a:ea typeface="Segoe UI"/>
+                <a:cs typeface="Segoe UI"/>
               </a:rPr>
               <a:t>Performance marketing and B2B development.</a:t>
             </a:r>
@@ -19555,6 +20105,8 @@
                   <a:srgbClr val="2C3A4B"/>
                 </a:solidFill>
                 <a:latin typeface="Segoe UI"/>
+                <a:ea typeface="Segoe UI"/>
+                <a:cs typeface="Segoe UI"/>
               </a:rPr>
               <a:t>Marketing / Performance</a:t>
             </a:r>
@@ -19588,6 +20140,8 @@
                   <a:srgbClr val="0A6B63"/>
                 </a:solidFill>
                 <a:latin typeface="Segoe UI"/>
+                <a:ea typeface="Segoe UI"/>
+                <a:cs typeface="Segoe UI"/>
               </a:rPr>
               <a:t>1</a:t>
             </a:r>
@@ -19621,6 +20175,8 @@
                   <a:srgbClr val="2C3A4B"/>
                 </a:solidFill>
                 <a:latin typeface="Segoe UI"/>
+                <a:ea typeface="Segoe UI"/>
+                <a:cs typeface="Segoe UI"/>
               </a:rPr>
               <a:t>B2B Business Development</a:t>
             </a:r>
@@ -19654,6 +20210,8 @@
                   <a:srgbClr val="0A6B63"/>
                 </a:solidFill>
                 <a:latin typeface="Segoe UI"/>
+                <a:ea typeface="Segoe UI"/>
+                <a:cs typeface="Segoe UI"/>
               </a:rPr>
               <a:t>1+</a:t>
             </a:r>
@@ -19775,6 +20333,8 @@
                   <a:srgbClr val="5E6E80"/>
                 </a:solidFill>
                 <a:latin typeface="Segoe UI"/>
+                <a:ea typeface="Segoe UI"/>
+                <a:cs typeface="Segoe UI"/>
               </a:rPr>
               <a:t>PLANNED</a:t>
             </a:r>
@@ -19808,6 +20368,8 @@
                   <a:srgbClr val="0B1F33"/>
                 </a:solidFill>
                 <a:latin typeface="Segoe UI"/>
+                <a:ea typeface="Segoe UI"/>
+                <a:cs typeface="Segoe UI"/>
               </a:rPr>
               <a:t>U.S. GROWTH</a:t>
             </a:r>
@@ -19841,6 +20403,8 @@
                   <a:srgbClr val="0B1F33"/>
                 </a:solidFill>
                 <a:latin typeface="Georgia"/>
+                <a:ea typeface="Georgia"/>
+                <a:cs typeface="Georgia"/>
               </a:rPr>
               <a:t>3</a:t>
             </a:r>
@@ -19874,6 +20438,8 @@
                   <a:srgbClr val="5E6E80"/>
                 </a:solidFill>
                 <a:latin typeface="Segoe UI"/>
+                <a:ea typeface="Segoe UI"/>
+                <a:cs typeface="Segoe UI"/>
               </a:rPr>
               <a:t>Paid digital and local field marketing.</a:t>
             </a:r>
@@ -19907,6 +20473,8 @@
                   <a:srgbClr val="2C3A4B"/>
                 </a:solidFill>
                 <a:latin typeface="Segoe UI"/>
+                <a:ea typeface="Segoe UI"/>
+                <a:cs typeface="Segoe UI"/>
               </a:rPr>
               <a:t>Performance Marketing</a:t>
             </a:r>
@@ -19940,6 +20508,8 @@
                   <a:srgbClr val="0A6B63"/>
                 </a:solidFill>
                 <a:latin typeface="Segoe UI"/>
+                <a:ea typeface="Segoe UI"/>
+                <a:cs typeface="Segoe UI"/>
               </a:rPr>
               <a:t>1</a:t>
             </a:r>
@@ -19973,6 +20543,8 @@
                   <a:srgbClr val="2C3A4B"/>
                 </a:solidFill>
                 <a:latin typeface="Segoe UI"/>
+                <a:ea typeface="Segoe UI"/>
+                <a:cs typeface="Segoe UI"/>
               </a:rPr>
               <a:t>Local / Field Marketing</a:t>
             </a:r>
@@ -20006,6 +20578,8 @@
                   <a:srgbClr val="0A6B63"/>
                 </a:solidFill>
                 <a:latin typeface="Segoe UI"/>
+                <a:ea typeface="Segoe UI"/>
+                <a:cs typeface="Segoe UI"/>
               </a:rPr>
               <a:t>2</a:t>
             </a:r>
@@ -20084,6 +20658,8 @@
                   <a:srgbClr val="2C3A4B"/>
                 </a:solidFill>
                 <a:latin typeface="Segoe UI"/>
+                <a:ea typeface="Segoe UI"/>
+                <a:cs typeface="Segoe UI"/>
               </a:rPr>
               <a:t>Only the core founding team is in place today. China technology, China growth, and U.S. growth roles are planned hires — not current headcount.</a:t>
             </a:r>
@@ -20246,6 +20822,8 @@
                   <a:srgbClr val="5E6E80"/>
                 </a:solidFill>
                 <a:latin typeface="Segoe UI"/>
+                <a:ea typeface="Segoe UI"/>
+                <a:cs typeface="Segoe UI"/>
               </a:rPr>
               <a:t>51 CAREERS   ·   CONFIDENTIAL INVESTOR PRESENTATION</a:t>
             </a:r>
@@ -20279,6 +20857,8 @@
                   <a:srgbClr val="5E6E80"/>
                 </a:solidFill>
                 <a:latin typeface="Segoe UI"/>
+                <a:ea typeface="Segoe UI"/>
+                <a:cs typeface="Segoe UI"/>
               </a:rPr>
               <a:t>20</a:t>
             </a:r>
@@ -20319,8 +20899,8 @@
         </p:nvSpPr>
         <p:spPr>
           <a:xfrm>
-            <a:off x="502920" y="201168"/>
-            <a:ext cx="11183112" cy="219456"/>
+            <a:off x="502920" y="182880"/>
+            <a:ext cx="11183112" cy="201168"/>
           </a:xfrm>
           <a:prstGeom prst="rect">
             <a:avLst/>
@@ -20338,6 +20918,8 @@
                   <a:srgbClr val="0A6B63"/>
                 </a:solidFill>
                 <a:latin typeface="Segoe UI"/>
+                <a:ea typeface="Segoe UI"/>
+                <a:cs typeface="Segoe UI"/>
               </a:rPr>
               <a:t>19  ·  USE OF FUNDS</a:t>
             </a:r>
@@ -20352,8 +20934,8 @@
         </p:nvSpPr>
         <p:spPr>
           <a:xfrm>
-            <a:off x="502920" y="402336"/>
-            <a:ext cx="11183112" cy="438912"/>
+            <a:off x="502920" y="365760"/>
+            <a:ext cx="11183112" cy="457200"/>
           </a:xfrm>
           <a:prstGeom prst="rect">
             <a:avLst/>
@@ -20371,6 +20953,8 @@
                   <a:srgbClr val="0B1F33"/>
                 </a:solidFill>
                 <a:latin typeface="Georgia"/>
+                <a:ea typeface="Georgia"/>
+                <a:cs typeface="Georgia"/>
               </a:rPr>
               <a:t>RMB 20 Million Growth Financing</a:t>
             </a:r>
@@ -20385,8 +20969,8 @@
         </p:nvSpPr>
         <p:spPr>
           <a:xfrm>
-            <a:off x="502920" y="841248"/>
-            <a:ext cx="11183112" cy="256032"/>
+            <a:off x="502920" y="822960"/>
+            <a:ext cx="11183112" cy="237744"/>
           </a:xfrm>
           <a:prstGeom prst="rect">
             <a:avLst/>
@@ -20404,6 +20988,8 @@
                   <a:srgbClr val="5E6E80"/>
                 </a:solidFill>
                 <a:latin typeface="Segoe UI"/>
+                <a:ea typeface="Segoe UI"/>
+                <a:cs typeface="Segoe UI"/>
               </a:rPr>
               <a:t>RMB 13.1M is a planned personnel + advertising budget. Remaining capital funds infrastructure, AI, operations, events, expansion and working capital.</a:t>
             </a:r>
@@ -20455,6 +21041,8 @@
                   <a:srgbClr val="2C3A4B"/>
                 </a:solidFill>
                 <a:latin typeface="Segoe UI"/>
+                <a:ea typeface="Segoe UI"/>
+                <a:cs typeface="Segoe UI"/>
               </a:rPr>
               <a:t>Marketing &amp; user acquisition</a:t>
             </a:r>
@@ -20488,6 +21076,8 @@
                   <a:srgbClr val="0B1F33"/>
                 </a:solidFill>
                 <a:latin typeface="Segoe UI"/>
+                <a:ea typeface="Segoe UI"/>
+                <a:cs typeface="Segoe UI"/>
               </a:rPr>
               <a:t>40%   ·   RMB 8.0M</a:t>
             </a:r>
@@ -20521,6 +21111,8 @@
                   <a:srgbClr val="2C3A4B"/>
                 </a:solidFill>
                 <a:latin typeface="Segoe UI"/>
+                <a:ea typeface="Segoe UI"/>
+                <a:cs typeface="Segoe UI"/>
               </a:rPr>
               <a:t>Product &amp; AI development</a:t>
             </a:r>
@@ -20554,6 +21146,8 @@
                   <a:srgbClr val="0B1F33"/>
                 </a:solidFill>
                 <a:latin typeface="Segoe UI"/>
+                <a:ea typeface="Segoe UI"/>
+                <a:cs typeface="Segoe UI"/>
               </a:rPr>
               <a:t>22.5%   ·   RMB 4.5M</a:t>
             </a:r>
@@ -20587,6 +21181,8 @@
                   <a:srgbClr val="2C3A4B"/>
                 </a:solidFill>
                 <a:latin typeface="Segoe UI"/>
+                <a:ea typeface="Segoe UI"/>
+                <a:cs typeface="Segoe UI"/>
               </a:rPr>
               <a:t>U.S. market expansion</a:t>
             </a:r>
@@ -20620,6 +21216,8 @@
                   <a:srgbClr val="0B1F33"/>
                 </a:solidFill>
                 <a:latin typeface="Segoe UI"/>
+                <a:ea typeface="Segoe UI"/>
+                <a:cs typeface="Segoe UI"/>
               </a:rPr>
               <a:t>12.5%   ·   RMB 2.5M</a:t>
             </a:r>
@@ -20653,6 +21251,8 @@
                   <a:srgbClr val="2C3A4B"/>
                 </a:solidFill>
                 <a:latin typeface="Segoe UI"/>
+                <a:ea typeface="Segoe UI"/>
+                <a:cs typeface="Segoe UI"/>
               </a:rPr>
               <a:t>China market &amp; B2B</a:t>
             </a:r>
@@ -20686,6 +21286,8 @@
                   <a:srgbClr val="0B1F33"/>
                 </a:solidFill>
                 <a:latin typeface="Segoe UI"/>
+                <a:ea typeface="Segoe UI"/>
+                <a:cs typeface="Segoe UI"/>
               </a:rPr>
               <a:t>7.5%   ·   RMB 1.5M</a:t>
             </a:r>
@@ -20719,6 +21321,8 @@
                   <a:srgbClr val="2C3A4B"/>
                 </a:solidFill>
                 <a:latin typeface="Segoe UI"/>
+                <a:ea typeface="Segoe UI"/>
+                <a:cs typeface="Segoe UI"/>
               </a:rPr>
               <a:t>Brand &amp; events</a:t>
             </a:r>
@@ -20752,6 +21356,8 @@
                   <a:srgbClr val="0B1F33"/>
                 </a:solidFill>
                 <a:latin typeface="Segoe UI"/>
+                <a:ea typeface="Segoe UI"/>
+                <a:cs typeface="Segoe UI"/>
               </a:rPr>
               <a:t>7.5%   ·   RMB 1.5M</a:t>
             </a:r>
@@ -20785,6 +21391,8 @@
                   <a:srgbClr val="2C3A4B"/>
                 </a:solidFill>
                 <a:latin typeface="Segoe UI"/>
+                <a:ea typeface="Segoe UI"/>
+                <a:cs typeface="Segoe UI"/>
               </a:rPr>
               <a:t>Operations / legal / finance</a:t>
             </a:r>
@@ -20818,6 +21426,8 @@
                   <a:srgbClr val="0B1F33"/>
                 </a:solidFill>
                 <a:latin typeface="Segoe UI"/>
+                <a:ea typeface="Segoe UI"/>
+                <a:cs typeface="Segoe UI"/>
               </a:rPr>
               <a:t>5%   ·   RMB 1.0M</a:t>
             </a:r>
@@ -20851,6 +21461,8 @@
                   <a:srgbClr val="2C3A4B"/>
                 </a:solidFill>
                 <a:latin typeface="Segoe UI"/>
+                <a:ea typeface="Segoe UI"/>
+                <a:cs typeface="Segoe UI"/>
               </a:rPr>
               <a:t>Cash reserve</a:t>
             </a:r>
@@ -20884,6 +21496,8 @@
                   <a:srgbClr val="0B1F33"/>
                 </a:solidFill>
                 <a:latin typeface="Segoe UI"/>
+                <a:ea typeface="Segoe UI"/>
+                <a:cs typeface="Segoe UI"/>
               </a:rPr>
               <a:t>5%   ·   RMB 1.0M</a:t>
             </a:r>
@@ -20962,6 +21576,8 @@
                   <a:srgbClr val="0A6B63"/>
                 </a:solidFill>
                 <a:latin typeface="Segoe UI"/>
+                <a:ea typeface="Segoe UI"/>
+                <a:cs typeface="Segoe UI"/>
               </a:rPr>
               <a:t>PERSONNEL</a:t>
             </a:r>
@@ -20995,6 +21611,8 @@
                   <a:srgbClr val="0B1F33"/>
                 </a:solidFill>
                 <a:latin typeface="Georgia"/>
+                <a:ea typeface="Georgia"/>
+                <a:cs typeface="Georgia"/>
               </a:rPr>
               <a:t>RMB 5.1M</a:t>
             </a:r>
@@ -21028,6 +21646,8 @@
                   <a:srgbClr val="5E6E80"/>
                 </a:solidFill>
                 <a:latin typeface="Segoe UI"/>
+                <a:ea typeface="Segoe UI"/>
+                <a:cs typeface="Segoe UI"/>
               </a:rPr>
               <a:t>Planned hiring budget — not current payroll</a:t>
             </a:r>
@@ -21106,6 +21726,8 @@
                   <a:srgbClr val="0A6B63"/>
                 </a:solidFill>
                 <a:latin typeface="Segoe UI"/>
+                <a:ea typeface="Segoe UI"/>
+                <a:cs typeface="Segoe UI"/>
               </a:rPr>
               <a:t>CHINA ADS</a:t>
             </a:r>
@@ -21139,6 +21761,8 @@
                   <a:srgbClr val="0B1F33"/>
                 </a:solidFill>
                 <a:latin typeface="Georgia"/>
+                <a:ea typeface="Georgia"/>
+                <a:cs typeface="Georgia"/>
               </a:rPr>
               <a:t>RMB 1.0M</a:t>
             </a:r>
@@ -21172,6 +21796,8 @@
                   <a:srgbClr val="5E6E80"/>
                 </a:solidFill>
                 <a:latin typeface="Segoe UI"/>
+                <a:ea typeface="Segoe UI"/>
+                <a:cs typeface="Segoe UI"/>
               </a:rPr>
               <a:t>Planned annual spend</a:t>
             </a:r>
@@ -21250,6 +21876,8 @@
                   <a:srgbClr val="0A6B63"/>
                 </a:solidFill>
                 <a:latin typeface="Segoe UI"/>
+                <a:ea typeface="Segoe UI"/>
+                <a:cs typeface="Segoe UI"/>
               </a:rPr>
               <a:t>U.S. ADS</a:t>
             </a:r>
@@ -21283,6 +21911,8 @@
                   <a:srgbClr val="0B1F33"/>
                 </a:solidFill>
                 <a:latin typeface="Georgia"/>
+                <a:ea typeface="Georgia"/>
+                <a:cs typeface="Georgia"/>
               </a:rPr>
               <a:t>RMB 7.0M</a:t>
             </a:r>
@@ -21316,6 +21946,8 @@
                   <a:srgbClr val="5E6E80"/>
                 </a:solidFill>
                 <a:latin typeface="Segoe UI"/>
+                <a:ea typeface="Segoe UI"/>
+                <a:cs typeface="Segoe UI"/>
               </a:rPr>
               <a:t>Planned annual spend</a:t>
             </a:r>
@@ -21394,6 +22026,8 @@
                   <a:srgbClr val="0A6B63"/>
                 </a:solidFill>
                 <a:latin typeface="Segoe UI"/>
+                <a:ea typeface="Segoe UI"/>
+                <a:cs typeface="Segoe UI"/>
               </a:rPr>
               <a:t>P+A BUDGET</a:t>
             </a:r>
@@ -21427,6 +22061,8 @@
                   <a:srgbClr val="0B1F33"/>
                 </a:solidFill>
                 <a:latin typeface="Georgia"/>
+                <a:ea typeface="Georgia"/>
+                <a:cs typeface="Georgia"/>
               </a:rPr>
               <a:t>RMB 13.1M</a:t>
             </a:r>
@@ -21460,6 +22096,8 @@
                   <a:srgbClr val="5E6E80"/>
                 </a:solidFill>
                 <a:latin typeface="Segoe UI"/>
+                <a:ea typeface="Segoe UI"/>
+                <a:cs typeface="Segoe UI"/>
               </a:rPr>
               <a:t>Planned personnel + advertising</a:t>
             </a:r>
@@ -21622,6 +22260,8 @@
                   <a:srgbClr val="5E6E80"/>
                 </a:solidFill>
                 <a:latin typeface="Segoe UI"/>
+                <a:ea typeface="Segoe UI"/>
+                <a:cs typeface="Segoe UI"/>
               </a:rPr>
               <a:t>51 CAREERS   ·   CONFIDENTIAL INVESTOR PRESENTATION</a:t>
             </a:r>
@@ -21655,6 +22295,8 @@
                   <a:srgbClr val="5E6E80"/>
                 </a:solidFill>
                 <a:latin typeface="Segoe UI"/>
+                <a:ea typeface="Segoe UI"/>
+                <a:cs typeface="Segoe UI"/>
               </a:rPr>
               <a:t>21</a:t>
             </a:r>
@@ -21695,8 +22337,8 @@
         </p:nvSpPr>
         <p:spPr>
           <a:xfrm>
-            <a:off x="502920" y="201168"/>
-            <a:ext cx="11183112" cy="219456"/>
+            <a:off x="502920" y="182880"/>
+            <a:ext cx="11183112" cy="201168"/>
           </a:xfrm>
           <a:prstGeom prst="rect">
             <a:avLst/>
@@ -21714,6 +22356,8 @@
                   <a:srgbClr val="0A6B63"/>
                 </a:solidFill>
                 <a:latin typeface="Segoe UI"/>
+                <a:ea typeface="Segoe UI"/>
+                <a:cs typeface="Segoe UI"/>
               </a:rPr>
               <a:t>20  ·  GROWTH ROADMAP</a:t>
             </a:r>
@@ -21728,8 +22372,8 @@
         </p:nvSpPr>
         <p:spPr>
           <a:xfrm>
-            <a:off x="502920" y="402336"/>
-            <a:ext cx="11183112" cy="438912"/>
+            <a:off x="502920" y="365760"/>
+            <a:ext cx="11183112" cy="457200"/>
           </a:xfrm>
           <a:prstGeom prst="rect">
             <a:avLst/>
@@ -21747,6 +22391,8 @@
                   <a:srgbClr val="0B1F33"/>
                 </a:solidFill>
                 <a:latin typeface="Georgia"/>
+                <a:ea typeface="Georgia"/>
+                <a:cs typeface="Georgia"/>
               </a:rPr>
               <a:t>Validation  →  Growth  →  Global Expansion</a:t>
             </a:r>
@@ -21868,6 +22514,8 @@
                   <a:srgbClr val="FFFFFF"/>
                 </a:solidFill>
                 <a:latin typeface="Segoe UI"/>
+                <a:ea typeface="Segoe UI"/>
+                <a:cs typeface="Segoe UI"/>
               </a:rPr>
               <a:t>PHASE 1  ·  0–6 MONTHS</a:t>
             </a:r>
@@ -21901,6 +22549,8 @@
                   <a:srgbClr val="FFFFFF"/>
                 </a:solidFill>
                 <a:latin typeface="Georgia"/>
+                <a:ea typeface="Georgia"/>
+                <a:cs typeface="Georgia"/>
               </a:rPr>
               <a:t>Product validation</a:t>
             </a:r>
@@ -21934,6 +22584,8 @@
                   <a:srgbClr val="2C3A4B"/>
                 </a:solidFill>
                 <a:latin typeface="Segoe UI"/>
+                <a:ea typeface="Segoe UI"/>
+                <a:cs typeface="Segoe UI"/>
               </a:rPr>
               <a:t>▸  Launch AI Resume</a:t>
             </a:r>
@@ -21967,6 +22619,8 @@
                   <a:srgbClr val="2C3A4B"/>
                 </a:solidFill>
                 <a:latin typeface="Segoe UI"/>
+                <a:ea typeface="Segoe UI"/>
+                <a:cs typeface="Segoe UI"/>
               </a:rPr>
               <a:t>▸  Improve AI quality</a:t>
             </a:r>
@@ -22000,6 +22654,8 @@
                   <a:srgbClr val="2C3A4B"/>
                 </a:solidFill>
                 <a:latin typeface="Segoe UI"/>
+                <a:ea typeface="Segoe UI"/>
+                <a:cs typeface="Segoe UI"/>
               </a:rPr>
               <a:t>▸  Structured A/B testing</a:t>
             </a:r>
@@ -22033,6 +22689,8 @@
                   <a:srgbClr val="2C3A4B"/>
                 </a:solidFill>
                 <a:latin typeface="Segoe UI"/>
+                <a:ea typeface="Segoe UI"/>
+                <a:cs typeface="Segoe UI"/>
               </a:rPr>
               <a:t>▸  Initial CAC benchmarks</a:t>
             </a:r>
@@ -22066,6 +22724,8 @@
                   <a:srgbClr val="2C3A4B"/>
                 </a:solidFill>
                 <a:latin typeface="Segoe UI"/>
+                <a:ea typeface="Segoe UI"/>
+                <a:cs typeface="Segoe UI"/>
               </a:rPr>
               <a:t>▸  Conversion funnel</a:t>
             </a:r>
@@ -22099,6 +22759,8 @@
                   <a:srgbClr val="2C3A4B"/>
                 </a:solidFill>
                 <a:latin typeface="Segoe UI"/>
+                <a:ea typeface="Segoe UI"/>
+                <a:cs typeface="Segoe UI"/>
               </a:rPr>
               <a:t>▸  Validate pricing</a:t>
             </a:r>
@@ -22220,6 +22882,8 @@
                   <a:srgbClr val="FFFFFF"/>
                 </a:solidFill>
                 <a:latin typeface="Segoe UI"/>
+                <a:ea typeface="Segoe UI"/>
+                <a:cs typeface="Segoe UI"/>
               </a:rPr>
               <a:t>PHASE 2  ·  6–12 MONTHS</a:t>
             </a:r>
@@ -22253,6 +22917,8 @@
                   <a:srgbClr val="FFFFFF"/>
                 </a:solidFill>
                 <a:latin typeface="Georgia"/>
+                <a:ea typeface="Georgia"/>
+                <a:cs typeface="Georgia"/>
               </a:rPr>
               <a:t>Growth</a:t>
             </a:r>
@@ -22286,6 +22952,8 @@
                   <a:srgbClr val="2C3A4B"/>
                 </a:solidFill>
                 <a:latin typeface="Segoe UI"/>
+                <a:ea typeface="Segoe UI"/>
+                <a:cs typeface="Segoe UI"/>
               </a:rPr>
               <a:t>▸  Scale paid acquisition</a:t>
             </a:r>
@@ -22319,6 +22987,8 @@
                   <a:srgbClr val="2C3A4B"/>
                 </a:solidFill>
                 <a:latin typeface="Segoe UI"/>
+                <a:ea typeface="Segoe UI"/>
+                <a:cs typeface="Segoe UI"/>
               </a:rPr>
               <a:t>▸  Build SEO engine</a:t>
             </a:r>
@@ -22352,6 +23022,8 @@
                   <a:srgbClr val="2C3A4B"/>
                 </a:solidFill>
                 <a:latin typeface="Segoe UI"/>
+                <a:ea typeface="Segoe UI"/>
+                <a:cs typeface="Segoe UI"/>
               </a:rPr>
               <a:t>▸  Expand U.S. acquisition</a:t>
             </a:r>
@@ -22385,6 +23057,8 @@
                   <a:srgbClr val="2C3A4B"/>
                 </a:solidFill>
                 <a:latin typeface="Segoe UI"/>
+                <a:ea typeface="Segoe UI"/>
+                <a:cs typeface="Segoe UI"/>
               </a:rPr>
               <a:t>▸  B2B partnerships</a:t>
             </a:r>
@@ -22418,6 +23092,8 @@
                   <a:srgbClr val="2C3A4B"/>
                 </a:solidFill>
                 <a:latin typeface="Segoe UI"/>
+                <a:ea typeface="Segoe UI"/>
+                <a:cs typeface="Segoe UI"/>
               </a:rPr>
               <a:t>▸  More AI Career features</a:t>
             </a:r>
@@ -22451,6 +23127,8 @@
                   <a:srgbClr val="2C3A4B"/>
                 </a:solidFill>
                 <a:latin typeface="Segoe UI"/>
+                <a:ea typeface="Segoe UI"/>
+                <a:cs typeface="Segoe UI"/>
               </a:rPr>
               <a:t>▸  Expand monetization</a:t>
             </a:r>
@@ -22572,6 +23250,8 @@
                   <a:srgbClr val="FFFFFF"/>
                 </a:solidFill>
                 <a:latin typeface="Segoe UI"/>
+                <a:ea typeface="Segoe UI"/>
+                <a:cs typeface="Segoe UI"/>
               </a:rPr>
               <a:t>PHASE 3  ·  12–24 MONTHS</a:t>
             </a:r>
@@ -22605,6 +23285,8 @@
                   <a:srgbClr val="FFFFFF"/>
                 </a:solidFill>
                 <a:latin typeface="Georgia"/>
+                <a:ea typeface="Georgia"/>
+                <a:cs typeface="Georgia"/>
               </a:rPr>
               <a:t>Global expansion</a:t>
             </a:r>
@@ -22638,6 +23320,8 @@
                   <a:srgbClr val="2C3A4B"/>
                 </a:solidFill>
                 <a:latin typeface="Segoe UI"/>
+                <a:ea typeface="Segoe UI"/>
+                <a:cs typeface="Segoe UI"/>
               </a:rPr>
               <a:t>▸  More English-speaking markets</a:t>
             </a:r>
@@ -22671,6 +23355,8 @@
                   <a:srgbClr val="2C3A4B"/>
                 </a:solidFill>
                 <a:latin typeface="Segoe UI"/>
+                <a:ea typeface="Segoe UI"/>
+                <a:cs typeface="Segoe UI"/>
               </a:rPr>
               <a:t>▸  Localized products</a:t>
             </a:r>
@@ -22704,6 +23390,8 @@
                   <a:srgbClr val="2C3A4B"/>
                 </a:solidFill>
                 <a:latin typeface="Segoe UI"/>
+                <a:ea typeface="Segoe UI"/>
+                <a:cs typeface="Segoe UI"/>
               </a:rPr>
               <a:t>▸  Global partnerships</a:t>
             </a:r>
@@ -22737,6 +23425,8 @@
                   <a:srgbClr val="2C3A4B"/>
                 </a:solidFill>
                 <a:latin typeface="Segoe UI"/>
+                <a:ea typeface="Segoe UI"/>
+                <a:cs typeface="Segoe UI"/>
               </a:rPr>
               <a:t>▸  Employer ecosystem</a:t>
             </a:r>
@@ -22770,6 +23460,8 @@
                   <a:srgbClr val="2C3A4B"/>
                 </a:solidFill>
                 <a:latin typeface="Segoe UI"/>
+                <a:ea typeface="Segoe UI"/>
+                <a:cs typeface="Segoe UI"/>
               </a:rPr>
               <a:t>▸  Marketplace capabilities</a:t>
             </a:r>
@@ -22803,6 +23495,8 @@
                   <a:srgbClr val="2C3A4B"/>
                 </a:solidFill>
                 <a:latin typeface="Segoe UI"/>
+                <a:ea typeface="Segoe UI"/>
+                <a:cs typeface="Segoe UI"/>
               </a:rPr>
               <a:t>▸  Central America expansion</a:t>
             </a:r>
@@ -22965,6 +23659,8 @@
                   <a:srgbClr val="5E6E80"/>
                 </a:solidFill>
                 <a:latin typeface="Segoe UI"/>
+                <a:ea typeface="Segoe UI"/>
+                <a:cs typeface="Segoe UI"/>
               </a:rPr>
               <a:t>51 CAREERS   ·   CONFIDENTIAL INVESTOR PRESENTATION</a:t>
             </a:r>
@@ -22998,6 +23694,8 @@
                   <a:srgbClr val="5E6E80"/>
                 </a:solidFill>
                 <a:latin typeface="Segoe UI"/>
+                <a:ea typeface="Segoe UI"/>
+                <a:cs typeface="Segoe UI"/>
               </a:rPr>
               <a:t>22</a:t>
             </a:r>
@@ -23038,8 +23736,8 @@
         </p:nvSpPr>
         <p:spPr>
           <a:xfrm>
-            <a:off x="502920" y="201168"/>
-            <a:ext cx="11183112" cy="219456"/>
+            <a:off x="502920" y="182880"/>
+            <a:ext cx="11183112" cy="201168"/>
           </a:xfrm>
           <a:prstGeom prst="rect">
             <a:avLst/>
@@ -23057,6 +23755,8 @@
                   <a:srgbClr val="0A6B63"/>
                 </a:solidFill>
                 <a:latin typeface="Segoe UI"/>
+                <a:ea typeface="Segoe UI"/>
+                <a:cs typeface="Segoe UI"/>
               </a:rPr>
               <a:t>21  ·  THREE-YEAR FINANCIAL MODEL</a:t>
             </a:r>
@@ -23071,8 +23771,8 @@
         </p:nvSpPr>
         <p:spPr>
           <a:xfrm>
-            <a:off x="502920" y="402336"/>
-            <a:ext cx="11183112" cy="438912"/>
+            <a:off x="502920" y="365760"/>
+            <a:ext cx="11183112" cy="457200"/>
           </a:xfrm>
           <a:prstGeom prst="rect">
             <a:avLst/>
@@ -23090,6 +23790,8 @@
                   <a:srgbClr val="0B1F33"/>
                 </a:solidFill>
                 <a:latin typeface="Georgia"/>
+                <a:ea typeface="Georgia"/>
+                <a:cs typeface="Georgia"/>
               </a:rPr>
               <a:t>Users, Revenue, and Profitability</a:t>
             </a:r>
@@ -23104,8 +23806,8 @@
         </p:nvSpPr>
         <p:spPr>
           <a:xfrm>
-            <a:off x="502920" y="841248"/>
-            <a:ext cx="11183112" cy="256032"/>
+            <a:off x="502920" y="822960"/>
+            <a:ext cx="11183112" cy="237744"/>
           </a:xfrm>
           <a:prstGeom prst="rect">
             <a:avLst/>
@@ -23123,6 +23825,8 @@
                   <a:srgbClr val="5E6E80"/>
                 </a:solidFill>
                 <a:latin typeface="Segoe UI"/>
+                <a:ea typeface="Segoe UI"/>
+                <a:cs typeface="Segoe UI"/>
               </a:rPr>
               <a:t>Illustrative 2027E–2029E operating plan. Figures in US$.</a:t>
             </a:r>
@@ -23244,6 +23948,8 @@
                   <a:srgbClr val="0A6B63"/>
                 </a:solidFill>
                 <a:latin typeface="Segoe UI"/>
+                <a:ea typeface="Segoe UI"/>
+                <a:cs typeface="Segoe UI"/>
               </a:rPr>
               <a:t>USERS</a:t>
             </a:r>
@@ -23277,6 +23983,8 @@
                   <a:srgbClr val="5E6E80"/>
                 </a:solidFill>
                 <a:latin typeface="Segoe UI"/>
+                <a:ea typeface="Segoe UI"/>
+                <a:cs typeface="Segoe UI"/>
               </a:rPr>
               <a:t>2027E</a:t>
             </a:r>
@@ -23310,6 +24018,8 @@
                   <a:srgbClr val="5E6E80"/>
                 </a:solidFill>
                 <a:latin typeface="Segoe UI"/>
+                <a:ea typeface="Segoe UI"/>
+                <a:cs typeface="Segoe UI"/>
               </a:rPr>
               <a:t>2028E</a:t>
             </a:r>
@@ -23343,6 +24053,8 @@
                   <a:srgbClr val="5E6E80"/>
                 </a:solidFill>
                 <a:latin typeface="Segoe UI"/>
+                <a:ea typeface="Segoe UI"/>
+                <a:cs typeface="Segoe UI"/>
               </a:rPr>
               <a:t>2029E</a:t>
             </a:r>
@@ -23419,6 +24131,8 @@
                   <a:srgbClr val="5E6E80"/>
                 </a:solidFill>
                 <a:latin typeface="Segoe UI"/>
+                <a:ea typeface="Segoe UI"/>
+                <a:cs typeface="Segoe UI"/>
               </a:rPr>
               <a:t>Users</a:t>
             </a:r>
@@ -23452,6 +24166,8 @@
                   <a:srgbClr val="0B1F33"/>
                 </a:solidFill>
                 <a:latin typeface="Georgia"/>
+                <a:ea typeface="Georgia"/>
+                <a:cs typeface="Georgia"/>
               </a:rPr>
               <a:t>1.0M</a:t>
             </a:r>
@@ -23485,6 +24201,8 @@
                   <a:srgbClr val="0B1F33"/>
                 </a:solidFill>
                 <a:latin typeface="Georgia"/>
+                <a:ea typeface="Georgia"/>
+                <a:cs typeface="Georgia"/>
               </a:rPr>
               <a:t>3.0M</a:t>
             </a:r>
@@ -23518,6 +24236,8 @@
                   <a:srgbClr val="0B1F33"/>
                 </a:solidFill>
                 <a:latin typeface="Georgia"/>
+                <a:ea typeface="Georgia"/>
+                <a:cs typeface="Georgia"/>
               </a:rPr>
               <a:t>7.0M</a:t>
             </a:r>
@@ -23551,6 +24271,8 @@
                   <a:srgbClr val="5E6E80"/>
                 </a:solidFill>
                 <a:latin typeface="Segoe UI"/>
+                <a:ea typeface="Segoe UI"/>
+                <a:cs typeface="Segoe UI"/>
               </a:rPr>
               <a:t>Registered users</a:t>
             </a:r>
@@ -23584,6 +24306,8 @@
                   <a:srgbClr val="0B1F33"/>
                 </a:solidFill>
                 <a:latin typeface="Georgia"/>
+                <a:ea typeface="Georgia"/>
+                <a:cs typeface="Georgia"/>
               </a:rPr>
               <a:t>300K</a:t>
             </a:r>
@@ -23617,6 +24341,8 @@
                   <a:srgbClr val="0B1F33"/>
                 </a:solidFill>
                 <a:latin typeface="Georgia"/>
+                <a:ea typeface="Georgia"/>
+                <a:cs typeface="Georgia"/>
               </a:rPr>
               <a:t>1.0M</a:t>
             </a:r>
@@ -23650,6 +24376,8 @@
                   <a:srgbClr val="0B1F33"/>
                 </a:solidFill>
                 <a:latin typeface="Georgia"/>
+                <a:ea typeface="Georgia"/>
+                <a:cs typeface="Georgia"/>
               </a:rPr>
               <a:t>2.5M</a:t>
             </a:r>
@@ -23683,6 +24411,8 @@
                   <a:srgbClr val="5E6E80"/>
                 </a:solidFill>
                 <a:latin typeface="Segoe UI"/>
+                <a:ea typeface="Segoe UI"/>
+                <a:cs typeface="Segoe UI"/>
               </a:rPr>
               <a:t>Monthly active users</a:t>
             </a:r>
@@ -23716,6 +24446,8 @@
                   <a:srgbClr val="0B1F33"/>
                 </a:solidFill>
                 <a:latin typeface="Georgia"/>
+                <a:ea typeface="Georgia"/>
+                <a:cs typeface="Georgia"/>
               </a:rPr>
               <a:t>150K</a:t>
             </a:r>
@@ -23749,6 +24481,8 @@
                   <a:srgbClr val="0B1F33"/>
                 </a:solidFill>
                 <a:latin typeface="Georgia"/>
+                <a:ea typeface="Georgia"/>
+                <a:cs typeface="Georgia"/>
               </a:rPr>
               <a:t>500K</a:t>
             </a:r>
@@ -23782,6 +24516,8 @@
                   <a:srgbClr val="0B1F33"/>
                 </a:solidFill>
                 <a:latin typeface="Georgia"/>
+                <a:ea typeface="Georgia"/>
+                <a:cs typeface="Georgia"/>
               </a:rPr>
               <a:t>1.25M</a:t>
             </a:r>
@@ -23815,6 +24551,8 @@
                   <a:srgbClr val="5E6E80"/>
                 </a:solidFill>
                 <a:latin typeface="Segoe UI"/>
+                <a:ea typeface="Segoe UI"/>
+                <a:cs typeface="Segoe UI"/>
               </a:rPr>
               <a:t>Paid users</a:t>
             </a:r>
@@ -23848,6 +24586,8 @@
                   <a:srgbClr val="0B1F33"/>
                 </a:solidFill>
                 <a:latin typeface="Georgia"/>
+                <a:ea typeface="Georgia"/>
+                <a:cs typeface="Georgia"/>
               </a:rPr>
               <a:t>15K</a:t>
             </a:r>
@@ -23881,6 +24621,8 @@
                   <a:srgbClr val="0B1F33"/>
                 </a:solidFill>
                 <a:latin typeface="Georgia"/>
+                <a:ea typeface="Georgia"/>
+                <a:cs typeface="Georgia"/>
               </a:rPr>
               <a:t>60K</a:t>
             </a:r>
@@ -23914,6 +24656,8 @@
                   <a:srgbClr val="0B1F33"/>
                 </a:solidFill>
                 <a:latin typeface="Georgia"/>
+                <a:ea typeface="Georgia"/>
+                <a:cs typeface="Georgia"/>
               </a:rPr>
               <a:t>180K</a:t>
             </a:r>
@@ -23947,6 +24691,8 @@
                   <a:srgbClr val="5E6E80"/>
                 </a:solidFill>
                 <a:latin typeface="Segoe UI"/>
+                <a:ea typeface="Segoe UI"/>
+                <a:cs typeface="Segoe UI"/>
               </a:rPr>
               <a:t>Paid conversion</a:t>
             </a:r>
@@ -23980,6 +24726,8 @@
                   <a:srgbClr val="0B1F33"/>
                 </a:solidFill>
                 <a:latin typeface="Georgia"/>
+                <a:ea typeface="Georgia"/>
+                <a:cs typeface="Georgia"/>
               </a:rPr>
               <a:t>5.0%</a:t>
             </a:r>
@@ -24013,6 +24761,8 @@
                   <a:srgbClr val="0B1F33"/>
                 </a:solidFill>
                 <a:latin typeface="Georgia"/>
+                <a:ea typeface="Georgia"/>
+                <a:cs typeface="Georgia"/>
               </a:rPr>
               <a:t>6.0%</a:t>
             </a:r>
@@ -24046,6 +24796,8 @@
                   <a:srgbClr val="0B1F33"/>
                 </a:solidFill>
                 <a:latin typeface="Georgia"/>
+                <a:ea typeface="Georgia"/>
+                <a:cs typeface="Georgia"/>
               </a:rPr>
               <a:t>7.2%</a:t>
             </a:r>
@@ -24079,6 +24831,8 @@
                   <a:srgbClr val="5E6E80"/>
                 </a:solidFill>
                 <a:latin typeface="Segoe UI"/>
+                <a:ea typeface="Segoe UI"/>
+                <a:cs typeface="Segoe UI"/>
               </a:rPr>
               <a:t>MAU / registered</a:t>
             </a:r>
@@ -24112,6 +24866,8 @@
                   <a:srgbClr val="0B1F33"/>
                 </a:solidFill>
                 <a:latin typeface="Georgia"/>
+                <a:ea typeface="Georgia"/>
+                <a:cs typeface="Georgia"/>
               </a:rPr>
               <a:t>50%</a:t>
             </a:r>
@@ -24145,6 +24901,8 @@
                   <a:srgbClr val="0B1F33"/>
                 </a:solidFill>
                 <a:latin typeface="Georgia"/>
+                <a:ea typeface="Georgia"/>
+                <a:cs typeface="Georgia"/>
               </a:rPr>
               <a:t>50%</a:t>
             </a:r>
@@ -24178,6 +24936,8 @@
                   <a:srgbClr val="0B1F33"/>
                 </a:solidFill>
                 <a:latin typeface="Georgia"/>
+                <a:ea typeface="Georgia"/>
+                <a:cs typeface="Georgia"/>
               </a:rPr>
               <a:t>50%</a:t>
             </a:r>
@@ -24299,6 +25059,8 @@
                   <a:srgbClr val="0A6B63"/>
                 </a:solidFill>
                 <a:latin typeface="Segoe UI"/>
+                <a:ea typeface="Segoe UI"/>
+                <a:cs typeface="Segoe UI"/>
               </a:rPr>
               <a:t>REVENUE</a:t>
             </a:r>
@@ -24332,6 +25094,8 @@
                   <a:srgbClr val="5E6E80"/>
                 </a:solidFill>
                 <a:latin typeface="Segoe UI"/>
+                <a:ea typeface="Segoe UI"/>
+                <a:cs typeface="Segoe UI"/>
               </a:rPr>
               <a:t>2027E</a:t>
             </a:r>
@@ -24365,6 +25129,8 @@
                   <a:srgbClr val="5E6E80"/>
                 </a:solidFill>
                 <a:latin typeface="Segoe UI"/>
+                <a:ea typeface="Segoe UI"/>
+                <a:cs typeface="Segoe UI"/>
               </a:rPr>
               <a:t>2028E</a:t>
             </a:r>
@@ -24398,6 +25164,8 @@
                   <a:srgbClr val="5E6E80"/>
                 </a:solidFill>
                 <a:latin typeface="Segoe UI"/>
+                <a:ea typeface="Segoe UI"/>
+                <a:cs typeface="Segoe UI"/>
               </a:rPr>
               <a:t>2029E</a:t>
             </a:r>
@@ -24431,6 +25199,8 @@
                   <a:srgbClr val="5E6E80"/>
                 </a:solidFill>
                 <a:latin typeface="Segoe UI"/>
+                <a:ea typeface="Segoe UI"/>
+                <a:cs typeface="Segoe UI"/>
               </a:rPr>
               <a:t>AI revenue</a:t>
             </a:r>
@@ -24464,6 +25234,8 @@
                   <a:srgbClr val="0B1F33"/>
                 </a:solidFill>
                 <a:latin typeface="Georgia"/>
+                <a:ea typeface="Georgia"/>
+                <a:cs typeface="Georgia"/>
               </a:rPr>
               <a:t>$0.70M</a:t>
             </a:r>
@@ -24497,6 +25269,8 @@
                   <a:srgbClr val="0B1F33"/>
                 </a:solidFill>
                 <a:latin typeface="Georgia"/>
+                <a:ea typeface="Georgia"/>
+                <a:cs typeface="Georgia"/>
               </a:rPr>
               <a:t>$2.40M</a:t>
             </a:r>
@@ -24530,6 +25304,8 @@
                   <a:srgbClr val="0B1F33"/>
                 </a:solidFill>
                 <a:latin typeface="Georgia"/>
+                <a:ea typeface="Georgia"/>
+                <a:cs typeface="Georgia"/>
               </a:rPr>
               <a:t>$8.40M</a:t>
             </a:r>
@@ -24563,6 +25339,8 @@
                   <a:srgbClr val="5E6E80"/>
                 </a:solidFill>
                 <a:latin typeface="Segoe UI"/>
+                <a:ea typeface="Segoe UI"/>
+                <a:cs typeface="Segoe UI"/>
               </a:rPr>
               <a:t>Career services</a:t>
             </a:r>
@@ -24596,6 +25374,8 @@
                   <a:srgbClr val="0B1F33"/>
                 </a:solidFill>
                 <a:latin typeface="Georgia"/>
+                <a:ea typeface="Georgia"/>
+                <a:cs typeface="Georgia"/>
               </a:rPr>
               <a:t>$0.50M</a:t>
             </a:r>
@@ -24629,6 +25409,8 @@
                   <a:srgbClr val="0B1F33"/>
                 </a:solidFill>
                 <a:latin typeface="Georgia"/>
+                <a:ea typeface="Georgia"/>
+                <a:cs typeface="Georgia"/>
               </a:rPr>
               <a:t>$1.60M</a:t>
             </a:r>
@@ -24662,6 +25444,8 @@
                   <a:srgbClr val="0B1F33"/>
                 </a:solidFill>
                 <a:latin typeface="Georgia"/>
+                <a:ea typeface="Georgia"/>
+                <a:cs typeface="Georgia"/>
               </a:rPr>
               <a:t>$5.60M</a:t>
             </a:r>
@@ -24695,6 +25479,8 @@
                   <a:srgbClr val="5E6E80"/>
                 </a:solidFill>
                 <a:latin typeface="Segoe UI"/>
+                <a:ea typeface="Segoe UI"/>
+                <a:cs typeface="Segoe UI"/>
               </a:rPr>
               <a:t>Commission</a:t>
             </a:r>
@@ -24728,6 +25514,8 @@
                   <a:srgbClr val="0B1F33"/>
                 </a:solidFill>
                 <a:latin typeface="Georgia"/>
+                <a:ea typeface="Georgia"/>
+                <a:cs typeface="Georgia"/>
               </a:rPr>
               <a:t>$0.30M</a:t>
             </a:r>
@@ -24761,6 +25549,8 @@
                   <a:srgbClr val="0B1F33"/>
                 </a:solidFill>
                 <a:latin typeface="Georgia"/>
+                <a:ea typeface="Georgia"/>
+                <a:cs typeface="Georgia"/>
               </a:rPr>
               <a:t>$1.20M</a:t>
             </a:r>
@@ -24794,6 +25584,8 @@
                   <a:srgbClr val="0B1F33"/>
                 </a:solidFill>
                 <a:latin typeface="Georgia"/>
+                <a:ea typeface="Georgia"/>
+                <a:cs typeface="Georgia"/>
               </a:rPr>
               <a:t>$4.20M</a:t>
             </a:r>
@@ -24827,6 +25619,8 @@
                   <a:srgbClr val="5E6E80"/>
                 </a:solidFill>
                 <a:latin typeface="Segoe UI"/>
+                <a:ea typeface="Segoe UI"/>
+                <a:cs typeface="Segoe UI"/>
               </a:rPr>
               <a:t>Advertising</a:t>
             </a:r>
@@ -24860,6 +25654,8 @@
                   <a:srgbClr val="0B1F33"/>
                 </a:solidFill>
                 <a:latin typeface="Georgia"/>
+                <a:ea typeface="Georgia"/>
+                <a:cs typeface="Georgia"/>
               </a:rPr>
               <a:t>$0.20M</a:t>
             </a:r>
@@ -24893,6 +25689,8 @@
                   <a:srgbClr val="0B1F33"/>
                 </a:solidFill>
                 <a:latin typeface="Georgia"/>
+                <a:ea typeface="Georgia"/>
+                <a:cs typeface="Georgia"/>
               </a:rPr>
               <a:t>$0.80M</a:t>
             </a:r>
@@ -24926,6 +25724,8 @@
                   <a:srgbClr val="0B1F33"/>
                 </a:solidFill>
                 <a:latin typeface="Georgia"/>
+                <a:ea typeface="Georgia"/>
+                <a:cs typeface="Georgia"/>
               </a:rPr>
               <a:t>$2.80M</a:t>
             </a:r>
@@ -24959,6 +25759,8 @@
                   <a:srgbClr val="5E6E80"/>
                 </a:solidFill>
                 <a:latin typeface="Segoe UI"/>
+                <a:ea typeface="Segoe UI"/>
+                <a:cs typeface="Segoe UI"/>
               </a:rPr>
               <a:t>B2B revenue</a:t>
             </a:r>
@@ -24992,6 +25794,8 @@
                   <a:srgbClr val="0B1F33"/>
                 </a:solidFill>
                 <a:latin typeface="Georgia"/>
+                <a:ea typeface="Georgia"/>
+                <a:cs typeface="Georgia"/>
               </a:rPr>
               <a:t>$0.30M</a:t>
             </a:r>
@@ -25025,6 +25829,8 @@
                   <a:srgbClr val="0B1F33"/>
                 </a:solidFill>
                 <a:latin typeface="Georgia"/>
+                <a:ea typeface="Georgia"/>
+                <a:cs typeface="Georgia"/>
               </a:rPr>
               <a:t>$2.00M</a:t>
             </a:r>
@@ -25058,6 +25864,8 @@
                   <a:srgbClr val="0B1F33"/>
                 </a:solidFill>
                 <a:latin typeface="Georgia"/>
+                <a:ea typeface="Georgia"/>
+                <a:cs typeface="Georgia"/>
               </a:rPr>
               <a:t>$7.00M</a:t>
             </a:r>
@@ -25134,6 +25942,8 @@
                   <a:srgbClr val="5E6E80"/>
                 </a:solidFill>
                 <a:latin typeface="Segoe UI"/>
+                <a:ea typeface="Segoe UI"/>
+                <a:cs typeface="Segoe UI"/>
               </a:rPr>
               <a:t>Total revenue</a:t>
             </a:r>
@@ -25167,6 +25977,8 @@
                   <a:srgbClr val="0B1F33"/>
                 </a:solidFill>
                 <a:latin typeface="Georgia"/>
+                <a:ea typeface="Georgia"/>
+                <a:cs typeface="Georgia"/>
               </a:rPr>
               <a:t>$2.00M</a:t>
             </a:r>
@@ -25200,6 +26012,8 @@
                   <a:srgbClr val="0B1F33"/>
                 </a:solidFill>
                 <a:latin typeface="Georgia"/>
+                <a:ea typeface="Georgia"/>
+                <a:cs typeface="Georgia"/>
               </a:rPr>
               <a:t>$8.00M</a:t>
             </a:r>
@@ -25233,6 +26047,8 @@
                   <a:srgbClr val="0B1F33"/>
                 </a:solidFill>
                 <a:latin typeface="Georgia"/>
+                <a:ea typeface="Georgia"/>
+                <a:cs typeface="Georgia"/>
               </a:rPr>
               <a:t>$28.00M</a:t>
             </a:r>
@@ -25354,6 +26170,8 @@
                   <a:srgbClr val="0A6B63"/>
                 </a:solidFill>
                 <a:latin typeface="Segoe UI"/>
+                <a:ea typeface="Segoe UI"/>
+                <a:cs typeface="Segoe UI"/>
               </a:rPr>
               <a:t>PROFITABILITY</a:t>
             </a:r>
@@ -25387,6 +26205,8 @@
                   <a:srgbClr val="5E6E80"/>
                 </a:solidFill>
                 <a:latin typeface="Segoe UI"/>
+                <a:ea typeface="Segoe UI"/>
+                <a:cs typeface="Segoe UI"/>
               </a:rPr>
               <a:t>2027E</a:t>
             </a:r>
@@ -25420,6 +26240,8 @@
                   <a:srgbClr val="5E6E80"/>
                 </a:solidFill>
                 <a:latin typeface="Segoe UI"/>
+                <a:ea typeface="Segoe UI"/>
+                <a:cs typeface="Segoe UI"/>
               </a:rPr>
               <a:t>2028E</a:t>
             </a:r>
@@ -25453,6 +26275,8 @@
                   <a:srgbClr val="5E6E80"/>
                 </a:solidFill>
                 <a:latin typeface="Segoe UI"/>
+                <a:ea typeface="Segoe UI"/>
+                <a:cs typeface="Segoe UI"/>
               </a:rPr>
               <a:t>2029E</a:t>
             </a:r>
@@ -25486,6 +26310,8 @@
                   <a:srgbClr val="5E6E80"/>
                 </a:solidFill>
                 <a:latin typeface="Segoe UI"/>
+                <a:ea typeface="Segoe UI"/>
+                <a:cs typeface="Segoe UI"/>
               </a:rPr>
               <a:t>Gross margin</a:t>
             </a:r>
@@ -25519,6 +26345,8 @@
                   <a:srgbClr val="0B1F33"/>
                 </a:solidFill>
                 <a:latin typeface="Georgia"/>
+                <a:ea typeface="Georgia"/>
+                <a:cs typeface="Georgia"/>
               </a:rPr>
               <a:t>65%</a:t>
             </a:r>
@@ -25552,6 +26380,8 @@
                   <a:srgbClr val="0B1F33"/>
                 </a:solidFill>
                 <a:latin typeface="Georgia"/>
+                <a:ea typeface="Georgia"/>
+                <a:cs typeface="Georgia"/>
               </a:rPr>
               <a:t>70%</a:t>
             </a:r>
@@ -25585,6 +26415,8 @@
                   <a:srgbClr val="0B1F33"/>
                 </a:solidFill>
                 <a:latin typeface="Georgia"/>
+                <a:ea typeface="Georgia"/>
+                <a:cs typeface="Georgia"/>
               </a:rPr>
               <a:t>75%</a:t>
             </a:r>
@@ -25618,6 +26450,8 @@
                   <a:srgbClr val="5E6E80"/>
                 </a:solidFill>
                 <a:latin typeface="Segoe UI"/>
+                <a:ea typeface="Segoe UI"/>
+                <a:cs typeface="Segoe UI"/>
               </a:rPr>
               <a:t>Gross profit</a:t>
             </a:r>
@@ -25651,6 +26485,8 @@
                   <a:srgbClr val="0B1F33"/>
                 </a:solidFill>
                 <a:latin typeface="Georgia"/>
+                <a:ea typeface="Georgia"/>
+                <a:cs typeface="Georgia"/>
               </a:rPr>
               <a:t>$1.30M</a:t>
             </a:r>
@@ -25684,6 +26520,8 @@
                   <a:srgbClr val="0B1F33"/>
                 </a:solidFill>
                 <a:latin typeface="Georgia"/>
+                <a:ea typeface="Georgia"/>
+                <a:cs typeface="Georgia"/>
               </a:rPr>
               <a:t>$5.60M</a:t>
             </a:r>
@@ -25717,6 +26555,8 @@
                   <a:srgbClr val="0B1F33"/>
                 </a:solidFill>
                 <a:latin typeface="Georgia"/>
+                <a:ea typeface="Georgia"/>
+                <a:cs typeface="Georgia"/>
               </a:rPr>
               <a:t>$21.00M</a:t>
             </a:r>
@@ -25750,6 +26590,8 @@
                   <a:srgbClr val="5E6E80"/>
                 </a:solidFill>
                 <a:latin typeface="Segoe UI"/>
+                <a:ea typeface="Segoe UI"/>
+                <a:cs typeface="Segoe UI"/>
               </a:rPr>
               <a:t>EBITDA margin</a:t>
             </a:r>
@@ -25783,6 +26625,8 @@
                   <a:srgbClr val="0B1F33"/>
                 </a:solidFill>
                 <a:latin typeface="Georgia"/>
+                <a:ea typeface="Georgia"/>
+                <a:cs typeface="Georgia"/>
               </a:rPr>
               <a:t>–50%</a:t>
             </a:r>
@@ -25816,6 +26660,8 @@
                   <a:srgbClr val="0B1F33"/>
                 </a:solidFill>
                 <a:latin typeface="Georgia"/>
+                <a:ea typeface="Georgia"/>
+                <a:cs typeface="Georgia"/>
               </a:rPr>
               <a:t>–15%</a:t>
             </a:r>
@@ -25849,6 +26695,8 @@
                   <a:srgbClr val="0B1F33"/>
                 </a:solidFill>
                 <a:latin typeface="Georgia"/>
+                <a:ea typeface="Georgia"/>
+                <a:cs typeface="Georgia"/>
               </a:rPr>
               <a:t>15%</a:t>
             </a:r>
@@ -25882,6 +26730,8 @@
                   <a:srgbClr val="5E6E80"/>
                 </a:solidFill>
                 <a:latin typeface="Segoe UI"/>
+                <a:ea typeface="Segoe UI"/>
+                <a:cs typeface="Segoe UI"/>
               </a:rPr>
               <a:t>EBITDA</a:t>
             </a:r>
@@ -25915,6 +26765,8 @@
                   <a:srgbClr val="0B1F33"/>
                 </a:solidFill>
                 <a:latin typeface="Georgia"/>
+                <a:ea typeface="Georgia"/>
+                <a:cs typeface="Georgia"/>
               </a:rPr>
               <a:t>–$1.00M</a:t>
             </a:r>
@@ -25948,6 +26800,8 @@
                   <a:srgbClr val="0B1F33"/>
                 </a:solidFill>
                 <a:latin typeface="Georgia"/>
+                <a:ea typeface="Georgia"/>
+                <a:cs typeface="Georgia"/>
               </a:rPr>
               <a:t>–$1.20M</a:t>
             </a:r>
@@ -25981,6 +26835,8 @@
                   <a:srgbClr val="0B1F33"/>
                 </a:solidFill>
                 <a:latin typeface="Georgia"/>
+                <a:ea typeface="Georgia"/>
+                <a:cs typeface="Georgia"/>
               </a:rPr>
               <a:t>$4.20M</a:t>
             </a:r>
@@ -26057,6 +26913,8 @@
                   <a:srgbClr val="5E6E80"/>
                 </a:solidFill>
                 <a:latin typeface="Segoe UI"/>
+                <a:ea typeface="Segoe UI"/>
+                <a:cs typeface="Segoe UI"/>
               </a:rPr>
               <a:t>Profitability</a:t>
             </a:r>
@@ -26090,6 +26948,8 @@
                   <a:srgbClr val="0B1F33"/>
                 </a:solidFill>
                 <a:latin typeface="Georgia"/>
+                <a:ea typeface="Georgia"/>
+                <a:cs typeface="Georgia"/>
               </a:rPr>
               <a:t>Loss</a:t>
             </a:r>
@@ -26123,6 +26983,8 @@
                   <a:srgbClr val="0B1F33"/>
                 </a:solidFill>
                 <a:latin typeface="Georgia"/>
+                <a:ea typeface="Georgia"/>
+                <a:cs typeface="Georgia"/>
               </a:rPr>
               <a:t>Loss</a:t>
             </a:r>
@@ -26156,6 +27018,8 @@
                   <a:srgbClr val="0A6B63"/>
                 </a:solidFill>
                 <a:latin typeface="Georgia"/>
+                <a:ea typeface="Georgia"/>
+                <a:cs typeface="Georgia"/>
               </a:rPr>
               <a:t>Profitable</a:t>
             </a:r>
@@ -26189,6 +27053,8 @@
                   <a:srgbClr val="5E6E80"/>
                 </a:solidFill>
                 <a:latin typeface="Segoe UI"/>
+                <a:ea typeface="Segoe UI"/>
+                <a:cs typeface="Segoe UI"/>
               </a:rPr>
               <a:t>Management projections for discussion. Not a forecast. Paid conversion is paid users / registered users.</a:t>
             </a:r>
@@ -26351,6 +27217,8 @@
                   <a:srgbClr val="5E6E80"/>
                 </a:solidFill>
                 <a:latin typeface="Segoe UI"/>
+                <a:ea typeface="Segoe UI"/>
+                <a:cs typeface="Segoe UI"/>
               </a:rPr>
               <a:t>51 CAREERS   ·   CONFIDENTIAL INVESTOR PRESENTATION</a:t>
             </a:r>
@@ -26384,6 +27252,8 @@
                   <a:srgbClr val="5E6E80"/>
                 </a:solidFill>
                 <a:latin typeface="Segoe UI"/>
+                <a:ea typeface="Segoe UI"/>
+                <a:cs typeface="Segoe UI"/>
               </a:rPr>
               <a:t>23</a:t>
             </a:r>
@@ -26424,8 +27294,8 @@
         </p:nvSpPr>
         <p:spPr>
           <a:xfrm>
-            <a:off x="502920" y="201168"/>
-            <a:ext cx="11183112" cy="219456"/>
+            <a:off x="502920" y="182880"/>
+            <a:ext cx="11183112" cy="201168"/>
           </a:xfrm>
           <a:prstGeom prst="rect">
             <a:avLst/>
@@ -26443,6 +27313,8 @@
                   <a:srgbClr val="0A6B63"/>
                 </a:solidFill>
                 <a:latin typeface="Segoe UI"/>
+                <a:ea typeface="Segoe UI"/>
+                <a:cs typeface="Segoe UI"/>
               </a:rPr>
               <a:t>22  ·  INVESTMENT OPPORTUNITY</a:t>
             </a:r>
@@ -26457,25 +27329,27 @@
         </p:nvSpPr>
         <p:spPr>
           <a:xfrm>
-            <a:off x="502920" y="402336"/>
-            <a:ext cx="11183112" cy="438912"/>
-          </a:xfrm>
-          <a:prstGeom prst="rect">
-            <a:avLst/>
-          </a:prstGeom>
-          <a:noFill/>
-        </p:spPr>
-        <p:txBody>
-          <a:bodyPr wrap="square" anchor="t"/>
-          <a:lstStyle/>
-          <a:p>
-            <a:pPr algn="l"/>
-            <a:r>
-              <a:rPr sz="2400" b="1" i="0">
+            <a:off x="502920" y="365760"/>
+            <a:ext cx="11183112" cy="457200"/>
+          </a:xfrm>
+          <a:prstGeom prst="rect">
+            <a:avLst/>
+          </a:prstGeom>
+          <a:noFill/>
+        </p:spPr>
+        <p:txBody>
+          <a:bodyPr wrap="square" anchor="t"/>
+          <a:lstStyle/>
+          <a:p>
+            <a:pPr algn="l"/>
+            <a:r>
+              <a:rPr sz="2000" b="1" i="0">
                 <a:solidFill>
                   <a:srgbClr val="0B1F33"/>
                 </a:solidFill>
                 <a:latin typeface="Georgia"/>
+                <a:ea typeface="Georgia"/>
+                <a:cs typeface="Georgia"/>
               </a:rPr>
               <a:t>The Next Generation of Career Services Will Be AI + Human + Platform</a:t>
             </a:r>
@@ -26554,6 +27428,8 @@
                   <a:srgbClr val="0B1F33"/>
                 </a:solidFill>
                 <a:latin typeface="Georgia"/>
+                <a:ea typeface="Georgia"/>
+                <a:cs typeface="Georgia"/>
               </a:rPr>
               <a:t>Generative AI</a:t>
             </a:r>
@@ -26587,6 +27463,8 @@
                   <a:srgbClr val="2C3A4B"/>
                 </a:solidFill>
                 <a:latin typeface="Segoe UI"/>
+                <a:ea typeface="Segoe UI"/>
+                <a:cs typeface="Segoe UI"/>
               </a:rPr>
               <a:t>Professional content creation is now cheap, fast, and widely adopted.</a:t>
             </a:r>
@@ -26665,6 +27543,8 @@
                   <a:srgbClr val="0B1F33"/>
                 </a:solidFill>
                 <a:latin typeface="Georgia"/>
+                <a:ea typeface="Georgia"/>
+                <a:cs typeface="Georgia"/>
               </a:rPr>
               <a:t>Global employment</a:t>
             </a:r>
@@ -26698,6 +27578,8 @@
                   <a:srgbClr val="2C3A4B"/>
                 </a:solidFill>
                 <a:latin typeface="Segoe UI"/>
+                <a:ea typeface="Segoe UI"/>
+                <a:cs typeface="Segoe UI"/>
               </a:rPr>
               <a:t>Talent is mobile. English-language careers travel across markets.</a:t>
             </a:r>
@@ -26776,6 +27658,8 @@
                   <a:srgbClr val="0B1F33"/>
                 </a:solidFill>
                 <a:latin typeface="Georgia"/>
+                <a:ea typeface="Georgia"/>
+                <a:cs typeface="Georgia"/>
               </a:rPr>
               <a:t>Career services</a:t>
             </a:r>
@@ -26809,6 +27693,8 @@
                   <a:srgbClr val="2C3A4B"/>
                 </a:solidFill>
                 <a:latin typeface="Segoe UI"/>
+                <a:ea typeface="Segoe UI"/>
+                <a:cs typeface="Segoe UI"/>
               </a:rPr>
               <a:t>Advice is still manual, expensive, and hard to scale.</a:t>
             </a:r>
@@ -26887,6 +27773,8 @@
                   <a:srgbClr val="0B1F33"/>
                 </a:solidFill>
                 <a:latin typeface="Georgia"/>
+                <a:ea typeface="Georgia"/>
+                <a:cs typeface="Georgia"/>
               </a:rPr>
               <a:t>Digital user acquisition</a:t>
             </a:r>
@@ -26920,6 +27808,8 @@
                   <a:srgbClr val="2C3A4B"/>
                 </a:solidFill>
                 <a:latin typeface="Segoe UI"/>
+                <a:ea typeface="Segoe UI"/>
+                <a:cs typeface="Segoe UI"/>
               </a:rPr>
               <a:t>A free AI Resume is a low-friction, global top-of-funnel.</a:t>
             </a:r>
@@ -26998,6 +27888,8 @@
                   <a:srgbClr val="0A6B63"/>
                 </a:solidFill>
                 <a:latin typeface="Segoe UI"/>
+                <a:ea typeface="Segoe UI"/>
+                <a:cs typeface="Segoe UI"/>
               </a:rPr>
               <a:t>THE OPPORTUNITY</a:t>
             </a:r>
@@ -27031,6 +27923,8 @@
                   <a:srgbClr val="FFFFFF"/>
                 </a:solidFill>
                 <a:latin typeface="Georgia"/>
+                <a:ea typeface="Georgia"/>
+                <a:cs typeface="Georgia"/>
               </a:rPr>
               <a:t>The next generation of career services will be AI + human + platform. The AI Resume is the entry point; the ambition is the global AI career platform.</a:t>
             </a:r>
@@ -27193,6 +28087,8 @@
                   <a:srgbClr val="5E6E80"/>
                 </a:solidFill>
                 <a:latin typeface="Segoe UI"/>
+                <a:ea typeface="Segoe UI"/>
+                <a:cs typeface="Segoe UI"/>
               </a:rPr>
               <a:t>51 CAREERS   ·   CONFIDENTIAL INVESTOR PRESENTATION</a:t>
             </a:r>
@@ -27226,6 +28122,8 @@
                   <a:srgbClr val="5E6E80"/>
                 </a:solidFill>
                 <a:latin typeface="Segoe UI"/>
+                <a:ea typeface="Segoe UI"/>
+                <a:cs typeface="Segoe UI"/>
               </a:rPr>
               <a:t>24</a:t>
             </a:r>
@@ -27266,8 +28164,8 @@
         </p:nvSpPr>
         <p:spPr>
           <a:xfrm>
-            <a:off x="502920" y="201168"/>
-            <a:ext cx="11183112" cy="219456"/>
+            <a:off x="502920" y="182880"/>
+            <a:ext cx="11183112" cy="201168"/>
           </a:xfrm>
           <a:prstGeom prst="rect">
             <a:avLst/>
@@ -27285,6 +28183,8 @@
                   <a:srgbClr val="0A6B63"/>
                 </a:solidFill>
                 <a:latin typeface="Segoe UI"/>
+                <a:ea typeface="Segoe UI"/>
+                <a:cs typeface="Segoe UI"/>
               </a:rPr>
               <a:t>23  ·  FINANCING</a:t>
             </a:r>
@@ -27299,8 +28199,8 @@
         </p:nvSpPr>
         <p:spPr>
           <a:xfrm>
-            <a:off x="502920" y="402336"/>
-            <a:ext cx="11183112" cy="438912"/>
+            <a:off x="502920" y="365760"/>
+            <a:ext cx="11183112" cy="457200"/>
           </a:xfrm>
           <a:prstGeom prst="rect">
             <a:avLst/>
@@ -27318,6 +28218,8 @@
                   <a:srgbClr val="0B1F33"/>
                 </a:solidFill>
                 <a:latin typeface="Georgia"/>
+                <a:ea typeface="Georgia"/>
+                <a:cs typeface="Georgia"/>
               </a:rPr>
               <a:t>Current Financing Round</a:t>
             </a:r>
@@ -27439,6 +28341,8 @@
                   <a:srgbClr val="0A6B63"/>
                 </a:solidFill>
                 <a:latin typeface="Segoe UI"/>
+                <a:ea typeface="Segoe UI"/>
+                <a:cs typeface="Segoe UI"/>
               </a:rPr>
               <a:t>RAISE</a:t>
             </a:r>
@@ -27472,6 +28376,8 @@
                   <a:srgbClr val="0B1F33"/>
                 </a:solidFill>
                 <a:latin typeface="Georgia"/>
+                <a:ea typeface="Georgia"/>
+                <a:cs typeface="Georgia"/>
               </a:rPr>
               <a:t>RMB 20 million</a:t>
             </a:r>
@@ -27505,6 +28411,8 @@
                   <a:srgbClr val="5E6E80"/>
                 </a:solidFill>
                 <a:latin typeface="Segoe UI"/>
+                <a:ea typeface="Segoe UI"/>
+                <a:cs typeface="Segoe UI"/>
               </a:rPr>
               <a:t>≈ US$2.97 million</a:t>
             </a:r>
@@ -27626,6 +28534,8 @@
                   <a:srgbClr val="0A6B63"/>
                 </a:solidFill>
                 <a:latin typeface="Segoe UI"/>
+                <a:ea typeface="Segoe UI"/>
+                <a:cs typeface="Segoe UI"/>
               </a:rPr>
               <a:t>PRE-MONEY</a:t>
             </a:r>
@@ -27659,6 +28569,8 @@
                   <a:srgbClr val="0B1F33"/>
                 </a:solidFill>
                 <a:latin typeface="Georgia"/>
+                <a:ea typeface="Georgia"/>
+                <a:cs typeface="Georgia"/>
               </a:rPr>
               <a:t>RMB 180 million</a:t>
             </a:r>
@@ -27692,6 +28604,8 @@
                   <a:srgbClr val="5E6E80"/>
                 </a:solidFill>
                 <a:latin typeface="Segoe UI"/>
+                <a:ea typeface="Segoe UI"/>
+                <a:cs typeface="Segoe UI"/>
               </a:rPr>
               <a:t>≈ US$26.7 million</a:t>
             </a:r>
@@ -27813,6 +28727,8 @@
                   <a:srgbClr val="0A6B63"/>
                 </a:solidFill>
                 <a:latin typeface="Segoe UI"/>
+                <a:ea typeface="Segoe UI"/>
+                <a:cs typeface="Segoe UI"/>
               </a:rPr>
               <a:t>POST-MONEY</a:t>
             </a:r>
@@ -27846,6 +28762,8 @@
                   <a:srgbClr val="0B1F33"/>
                 </a:solidFill>
                 <a:latin typeface="Georgia"/>
+                <a:ea typeface="Georgia"/>
+                <a:cs typeface="Georgia"/>
               </a:rPr>
               <a:t>RMB 200 million</a:t>
             </a:r>
@@ -27879,6 +28797,8 @@
                   <a:srgbClr val="5E6E80"/>
                 </a:solidFill>
                 <a:latin typeface="Segoe UI"/>
+                <a:ea typeface="Segoe UI"/>
+                <a:cs typeface="Segoe UI"/>
               </a:rPr>
               <a:t>≈ US$29.7 million</a:t>
             </a:r>
@@ -28000,6 +28920,8 @@
                   <a:srgbClr val="0A6B63"/>
                 </a:solidFill>
                 <a:latin typeface="Segoe UI"/>
+                <a:ea typeface="Segoe UI"/>
+                <a:cs typeface="Segoe UI"/>
               </a:rPr>
               <a:t>EQUITY OFFERED</a:t>
             </a:r>
@@ -28033,6 +28955,8 @@
                   <a:srgbClr val="0B1F33"/>
                 </a:solidFill>
                 <a:latin typeface="Georgia"/>
+                <a:ea typeface="Georgia"/>
+                <a:cs typeface="Georgia"/>
               </a:rPr>
               <a:t>10%</a:t>
             </a:r>
@@ -28066,6 +28990,8 @@
                   <a:srgbClr val="5E6E80"/>
                 </a:solidFill>
                 <a:latin typeface="Segoe UI"/>
+                <a:ea typeface="Segoe UI"/>
+                <a:cs typeface="Segoe UI"/>
               </a:rPr>
               <a:t>Primary preferred</a:t>
             </a:r>
@@ -28187,6 +29113,8 @@
                   <a:srgbClr val="0A6B63"/>
                 </a:solidFill>
                 <a:latin typeface="Segoe UI"/>
+                <a:ea typeface="Segoe UI"/>
+                <a:cs typeface="Segoe UI"/>
               </a:rPr>
               <a:t>STRUCTURE</a:t>
             </a:r>
@@ -28220,6 +29148,8 @@
                   <a:srgbClr val="0B1F33"/>
                 </a:solidFill>
                 <a:latin typeface="Georgia"/>
+                <a:ea typeface="Georgia"/>
+                <a:cs typeface="Georgia"/>
               </a:rPr>
               <a:t>Preferred equity</a:t>
             </a:r>
@@ -28253,6 +29183,8 @@
                   <a:srgbClr val="5E6E80"/>
                 </a:solidFill>
                 <a:latin typeface="Segoe UI"/>
+                <a:ea typeface="Segoe UI"/>
+                <a:cs typeface="Segoe UI"/>
               </a:rPr>
               <a:t>Indicative; subject to docs</a:t>
             </a:r>
@@ -28374,6 +29306,8 @@
                   <a:srgbClr val="0A6B63"/>
                 </a:solidFill>
                 <a:latin typeface="Segoe UI"/>
+                <a:ea typeface="Segoe UI"/>
+                <a:cs typeface="Segoe UI"/>
               </a:rPr>
               <a:t>USE OF CAPITAL</a:t>
             </a:r>
@@ -28407,6 +29341,8 @@
                   <a:srgbClr val="0B1F33"/>
                 </a:solidFill>
                 <a:latin typeface="Georgia"/>
+                <a:ea typeface="Georgia"/>
+                <a:cs typeface="Georgia"/>
               </a:rPr>
               <a:t>Product, users, global GTM</a:t>
             </a:r>
@@ -28440,6 +29376,8 @@
                   <a:srgbClr val="5E6E80"/>
                 </a:solidFill>
                 <a:latin typeface="Segoe UI"/>
+                <a:ea typeface="Segoe UI"/>
+                <a:cs typeface="Segoe UI"/>
               </a:rPr>
               <a:t>Monetization + ecosystem</a:t>
             </a:r>
@@ -28518,6 +29456,8 @@
                   <a:srgbClr val="2C3A4B"/>
                 </a:solidFill>
                 <a:latin typeface="Segoe UI"/>
+                <a:ea typeface="Segoe UI"/>
+                <a:cs typeface="Segoe UI"/>
               </a:rPr>
               <a:t>Capital will be used to build the product, acquire users, expand globally, build monetization, and develop the career ecosystem.</a:t>
             </a:r>
@@ -28680,6 +29620,8 @@
                   <a:srgbClr val="5E6E80"/>
                 </a:solidFill>
                 <a:latin typeface="Segoe UI"/>
+                <a:ea typeface="Segoe UI"/>
+                <a:cs typeface="Segoe UI"/>
               </a:rPr>
               <a:t>51 CAREERS   ·   CONFIDENTIAL INVESTOR PRESENTATION</a:t>
             </a:r>
@@ -28713,6 +29655,8 @@
                   <a:srgbClr val="5E6E80"/>
                 </a:solidFill>
                 <a:latin typeface="Segoe UI"/>
+                <a:ea typeface="Segoe UI"/>
+                <a:cs typeface="Segoe UI"/>
               </a:rPr>
               <a:t>25</a:t>
             </a:r>
@@ -28753,8 +29697,8 @@
         </p:nvSpPr>
         <p:spPr>
           <a:xfrm>
-            <a:off x="502920" y="201168"/>
-            <a:ext cx="11183112" cy="219456"/>
+            <a:off x="502920" y="182880"/>
+            <a:ext cx="11183112" cy="201168"/>
           </a:xfrm>
           <a:prstGeom prst="rect">
             <a:avLst/>
@@ -28772,6 +29716,8 @@
                   <a:srgbClr val="0A6B63"/>
                 </a:solidFill>
                 <a:latin typeface="Segoe UI"/>
+                <a:ea typeface="Segoe UI"/>
+                <a:cs typeface="Segoe UI"/>
               </a:rPr>
               <a:t>RMB 20M  →  WHAT INVESTORS GET</a:t>
             </a:r>
@@ -28786,8 +29732,8 @@
         </p:nvSpPr>
         <p:spPr>
           <a:xfrm>
-            <a:off x="502920" y="402336"/>
-            <a:ext cx="11183112" cy="438912"/>
+            <a:off x="502920" y="365760"/>
+            <a:ext cx="11183112" cy="457200"/>
           </a:xfrm>
           <a:prstGeom prst="rect">
             <a:avLst/>
@@ -28805,6 +29751,8 @@
                   <a:srgbClr val="0B1F33"/>
                 </a:solidFill>
                 <a:latin typeface="Georgia"/>
+                <a:ea typeface="Georgia"/>
+                <a:cs typeface="Georgia"/>
               </a:rPr>
               <a:t>12–18 month targets this round is designed to fund</a:t>
             </a:r>
@@ -28883,6 +29831,8 @@
                   <a:srgbClr val="0A6B63"/>
                 </a:solidFill>
                 <a:latin typeface="Georgia"/>
+                <a:ea typeface="Georgia"/>
+                <a:cs typeface="Georgia"/>
               </a:rPr>
               <a:t>01</a:t>
             </a:r>
@@ -28916,6 +29866,8 @@
                   <a:srgbClr val="0B1F33"/>
                 </a:solidFill>
                 <a:latin typeface="Segoe UI"/>
+                <a:ea typeface="Segoe UI"/>
+                <a:cs typeface="Segoe UI"/>
               </a:rPr>
               <a:t>Public launch</a:t>
             </a:r>
@@ -28949,6 +29901,8 @@
                   <a:srgbClr val="2C3A4B"/>
                 </a:solidFill>
                 <a:latin typeface="Segoe UI"/>
+                <a:ea typeface="Segoe UI"/>
+                <a:cs typeface="Segoe UI"/>
               </a:rPr>
               <a:t>AI Resume live for users in China and the U.S.</a:t>
             </a:r>
@@ -29027,6 +29981,8 @@
                   <a:srgbClr val="0A6B63"/>
                 </a:solidFill>
                 <a:latin typeface="Georgia"/>
+                <a:ea typeface="Georgia"/>
+                <a:cs typeface="Georgia"/>
               </a:rPr>
               <a:t>02</a:t>
             </a:r>
@@ -29060,6 +30016,8 @@
                   <a:srgbClr val="0B1F33"/>
                 </a:solidFill>
                 <a:latin typeface="Segoe UI"/>
+                <a:ea typeface="Segoe UI"/>
+                <a:cs typeface="Segoe UI"/>
               </a:rPr>
               <a:t>50–100k users</a:t>
             </a:r>
@@ -29093,6 +30051,8 @@
                   <a:srgbClr val="2C3A4B"/>
                 </a:solidFill>
                 <a:latin typeface="Segoe UI"/>
+                <a:ea typeface="Segoe UI"/>
+                <a:cs typeface="Segoe UI"/>
               </a:rPr>
               <a:t>Registered users; funnel instrumented end-to-end.</a:t>
             </a:r>
@@ -29171,6 +30131,8 @@
                   <a:srgbClr val="0A6B63"/>
                 </a:solidFill>
                 <a:latin typeface="Georgia"/>
+                <a:ea typeface="Georgia"/>
+                <a:cs typeface="Georgia"/>
               </a:rPr>
               <a:t>03</a:t>
             </a:r>
@@ -29204,6 +30166,8 @@
                   <a:srgbClr val="0B1F33"/>
                 </a:solidFill>
                 <a:latin typeface="Segoe UI"/>
+                <a:ea typeface="Segoe UI"/>
+                <a:cs typeface="Segoe UI"/>
               </a:rPr>
               <a:t>Blind A/B tests</a:t>
             </a:r>
@@ -29237,6 +30201,8 @@
                   <a:srgbClr val="2C3A4B"/>
                 </a:solidFill>
                 <a:latin typeface="Segoe UI"/>
+                <a:ea typeface="Segoe UI"/>
+                <a:cs typeface="Segoe UI"/>
               </a:rPr>
               <a:t>Statistically meaningful quality vs. general-purpose models.</a:t>
             </a:r>
@@ -29315,6 +30281,8 @@
                   <a:srgbClr val="0A6B63"/>
                 </a:solidFill>
                 <a:latin typeface="Georgia"/>
+                <a:ea typeface="Georgia"/>
+                <a:cs typeface="Georgia"/>
               </a:rPr>
               <a:t>04</a:t>
             </a:r>
@@ -29348,6 +30316,8 @@
                   <a:srgbClr val="0B1F33"/>
                 </a:solidFill>
                 <a:latin typeface="Segoe UI"/>
+                <a:ea typeface="Segoe UI"/>
+                <a:cs typeface="Segoe UI"/>
               </a:rPr>
               <a:t>Unit economics</a:t>
             </a:r>
@@ -29381,6 +30351,8 @@
                   <a:srgbClr val="2C3A4B"/>
                 </a:solidFill>
                 <a:latin typeface="Segoe UI"/>
+                <a:ea typeface="Segoe UI"/>
+                <a:cs typeface="Segoe UI"/>
               </a:rPr>
               <a:t>CAC, conversion, ARPU, and payback benchmarks.</a:t>
             </a:r>
@@ -29459,6 +30431,8 @@
                   <a:srgbClr val="0A6B63"/>
                 </a:solidFill>
                 <a:latin typeface="Georgia"/>
+                <a:ea typeface="Georgia"/>
+                <a:cs typeface="Georgia"/>
               </a:rPr>
               <a:t>05</a:t>
             </a:r>
@@ -29492,6 +30466,8 @@
                   <a:srgbClr val="0B1F33"/>
                 </a:solidFill>
                 <a:latin typeface="Segoe UI"/>
+                <a:ea typeface="Segoe UI"/>
+                <a:cs typeface="Segoe UI"/>
               </a:rPr>
               <a:t>U.S. acquisition</a:t>
             </a:r>
@@ -29525,6 +30501,8 @@
                   <a:srgbClr val="2C3A4B"/>
                 </a:solidFill>
                 <a:latin typeface="Segoe UI"/>
+                <a:ea typeface="Segoe UI"/>
+                <a:cs typeface="Segoe UI"/>
               </a:rPr>
               <a:t>Paid digital + university/offline channels operating.</a:t>
             </a:r>
@@ -29603,6 +30581,8 @@
                   <a:srgbClr val="0A6B63"/>
                 </a:solidFill>
                 <a:latin typeface="Georgia"/>
+                <a:ea typeface="Georgia"/>
+                <a:cs typeface="Georgia"/>
               </a:rPr>
               <a:t>06</a:t>
             </a:r>
@@ -29636,6 +30616,8 @@
                   <a:srgbClr val="0B1F33"/>
                 </a:solidFill>
                 <a:latin typeface="Segoe UI"/>
+                <a:ea typeface="Segoe UI"/>
+                <a:cs typeface="Segoe UI"/>
               </a:rPr>
               <a:t>First paid cohort</a:t>
             </a:r>
@@ -29669,6 +30651,8 @@
                   <a:srgbClr val="2C3A4B"/>
                 </a:solidFill>
                 <a:latin typeface="Segoe UI"/>
+                <a:ea typeface="Segoe UI"/>
+                <a:cs typeface="Segoe UI"/>
               </a:rPr>
               <a:t>AI subscriptions and career-services attach live.</a:t>
             </a:r>
@@ -29747,6 +30731,8 @@
                   <a:srgbClr val="0A6B63"/>
                 </a:solidFill>
                 <a:latin typeface="Georgia"/>
+                <a:ea typeface="Georgia"/>
+                <a:cs typeface="Georgia"/>
               </a:rPr>
               <a:t>07</a:t>
             </a:r>
@@ -29780,6 +30766,8 @@
                   <a:srgbClr val="0B1F33"/>
                 </a:solidFill>
                 <a:latin typeface="Segoe UI"/>
+                <a:ea typeface="Segoe UI"/>
+                <a:cs typeface="Segoe UI"/>
               </a:rPr>
               <a:t>B2B pipeline</a:t>
             </a:r>
@@ -29813,6 +30801,8 @@
                   <a:srgbClr val="2C3A4B"/>
                 </a:solidFill>
                 <a:latin typeface="Segoe UI"/>
+                <a:ea typeface="Segoe UI"/>
+                <a:cs typeface="Segoe UI"/>
               </a:rPr>
               <a:t>Employer and education-partner conversations in market.</a:t>
             </a:r>
@@ -29891,6 +30881,8 @@
                   <a:srgbClr val="0A6B63"/>
                 </a:solidFill>
                 <a:latin typeface="Georgia"/>
+                <a:ea typeface="Georgia"/>
+                <a:cs typeface="Georgia"/>
               </a:rPr>
               <a:t>08</a:t>
             </a:r>
@@ -29924,6 +30916,8 @@
                   <a:srgbClr val="0B1F33"/>
                 </a:solidFill>
                 <a:latin typeface="Segoe UI"/>
+                <a:ea typeface="Segoe UI"/>
+                <a:cs typeface="Segoe UI"/>
               </a:rPr>
               <a:t>Next-round pack</a:t>
             </a:r>
@@ -29957,6 +30951,8 @@
                   <a:srgbClr val="2C3A4B"/>
                 </a:solidFill>
                 <a:latin typeface="Segoe UI"/>
+                <a:ea typeface="Segoe UI"/>
+                <a:cs typeface="Segoe UI"/>
               </a:rPr>
               <a:t>Traction, model, and data room ready for the following raise.</a:t>
             </a:r>
@@ -30035,6 +31031,8 @@
                   <a:srgbClr val="FFFFFF"/>
                 </a:solidFill>
                 <a:latin typeface="Segoe UI"/>
+                <a:ea typeface="Segoe UI"/>
+                <a:cs typeface="Segoe UI"/>
               </a:rPr>
               <a:t>RMB 20M  →  product + users + benchmarks  →  revenue  →  next round  →  valuation step-up.</a:t>
             </a:r>
@@ -30197,6 +31195,8 @@
                   <a:srgbClr val="5E6E80"/>
                 </a:solidFill>
                 <a:latin typeface="Segoe UI"/>
+                <a:ea typeface="Segoe UI"/>
+                <a:cs typeface="Segoe UI"/>
               </a:rPr>
               <a:t>51 CAREERS   ·   CONFIDENTIAL INVESTOR PRESENTATION</a:t>
             </a:r>
@@ -30230,6 +31230,8 @@
                   <a:srgbClr val="5E6E80"/>
                 </a:solidFill>
                 <a:latin typeface="Segoe UI"/>
+                <a:ea typeface="Segoe UI"/>
+                <a:cs typeface="Segoe UI"/>
               </a:rPr>
               <a:t>26</a:t>
             </a:r>
@@ -30375,6 +31377,8 @@
                   <a:srgbClr val="0A6B63"/>
                 </a:solidFill>
                 <a:latin typeface="Segoe UI"/>
+                <a:ea typeface="Segoe UI"/>
+                <a:cs typeface="Segoe UI"/>
               </a:rPr>
               <a:t>24  ·  VISION</a:t>
             </a:r>
@@ -30408,6 +31412,8 @@
                   <a:srgbClr val="FFFFFF"/>
                 </a:solidFill>
                 <a:latin typeface="Georgia"/>
+                <a:ea typeface="Georgia"/>
+                <a:cs typeface="Georgia"/>
               </a:rPr>
               <a:t>We are not building another AI resume tool.</a:t>
             </a:r>
@@ -30441,6 +31447,8 @@
                   <a:srgbClr val="0A6B63"/>
                 </a:solidFill>
                 <a:latin typeface="Georgia"/>
+                <a:ea typeface="Georgia"/>
+                <a:cs typeface="Georgia"/>
               </a:rPr>
               <a:t>We are building the Global AI Career Platform.</a:t>
             </a:r>
@@ -30474,6 +31482,8 @@
                   <a:srgbClr val="D7EBE8"/>
                 </a:solidFill>
                 <a:latin typeface="Segoe UI"/>
+                <a:ea typeface="Segoe UI"/>
+                <a:cs typeface="Segoe UI"/>
               </a:rPr>
               <a:t>AI   ×   Career   ×   Talent   ×   Opportunity</a:t>
             </a:r>
@@ -30507,6 +31517,8 @@
                   <a:srgbClr val="FFFFFF"/>
                 </a:solidFill>
                 <a:latin typeface="Georgia"/>
+                <a:ea typeface="Georgia"/>
+                <a:cs typeface="Georgia"/>
               </a:rPr>
               <a:t>51 CAREERS</a:t>
             </a:r>
@@ -30583,6 +31595,8 @@
                   <a:srgbClr val="D7EBE8"/>
                 </a:solidFill>
                 <a:latin typeface="Segoe UI"/>
+                <a:ea typeface="Segoe UI"/>
+                <a:cs typeface="Segoe UI"/>
               </a:rPr>
               <a:t>CHINA R&amp;D   ·   U.S. COMMERCIALIZATION   ·   GLOBAL DISTRIBUTION</a:t>
             </a:r>
@@ -30616,6 +31630,8 @@
                   <a:srgbClr val="6B7C8F"/>
                 </a:solidFill>
                 <a:latin typeface="Segoe UI"/>
+                <a:ea typeface="Segoe UI"/>
+                <a:cs typeface="Segoe UI"/>
               </a:rPr>
               <a:t>51 CAREERS   ·   CONFIDENTIAL   ·   27</a:t>
             </a:r>
@@ -30656,8 +31672,8 @@
         </p:nvSpPr>
         <p:spPr>
           <a:xfrm>
-            <a:off x="502920" y="201168"/>
-            <a:ext cx="11183112" cy="219456"/>
+            <a:off x="502920" y="182880"/>
+            <a:ext cx="11183112" cy="201168"/>
           </a:xfrm>
           <a:prstGeom prst="rect">
             <a:avLst/>
@@ -30675,6 +31691,8 @@
                   <a:srgbClr val="0A6B63"/>
                 </a:solidFill>
                 <a:latin typeface="Segoe UI"/>
+                <a:ea typeface="Segoe UI"/>
+                <a:cs typeface="Segoe UI"/>
               </a:rPr>
               <a:t>02  ·  THE PROBLEM</a:t>
             </a:r>
@@ -30689,8 +31707,8 @@
         </p:nvSpPr>
         <p:spPr>
           <a:xfrm>
-            <a:off x="502920" y="402336"/>
-            <a:ext cx="11183112" cy="438912"/>
+            <a:off x="502920" y="365760"/>
+            <a:ext cx="11183112" cy="457200"/>
           </a:xfrm>
           <a:prstGeom prst="rect">
             <a:avLst/>
@@ -30708,6 +31726,8 @@
                   <a:srgbClr val="0B1F33"/>
                 </a:solidFill>
                 <a:latin typeface="Georgia"/>
+                <a:ea typeface="Georgia"/>
+                <a:cs typeface="Georgia"/>
               </a:rPr>
               <a:t>Job Seeking Is Still Highly Inefficient</a:t>
             </a:r>
@@ -30722,8 +31742,8 @@
         </p:nvSpPr>
         <p:spPr>
           <a:xfrm>
-            <a:off x="502920" y="841248"/>
-            <a:ext cx="11183112" cy="256032"/>
+            <a:off x="502920" y="822960"/>
+            <a:ext cx="11183112" cy="237744"/>
           </a:xfrm>
           <a:prstGeom prst="rect">
             <a:avLst/>
@@ -30741,6 +31761,8 @@
                   <a:srgbClr val="5E6E80"/>
                 </a:solidFill>
                 <a:latin typeface="Segoe UI"/>
+                <a:ea typeface="Segoe UI"/>
+                <a:cs typeface="Segoe UI"/>
               </a:rPr>
               <a:t>For millions of candidates the process remains fragmented, expensive, and low-signal.</a:t>
             </a:r>
@@ -30862,6 +31884,8 @@
                   <a:srgbClr val="0A6B63"/>
                 </a:solidFill>
                 <a:latin typeface="Georgia"/>
+                <a:ea typeface="Georgia"/>
+                <a:cs typeface="Georgia"/>
               </a:rPr>
               <a:t>01</a:t>
             </a:r>
@@ -30895,6 +31919,8 @@
                   <a:srgbClr val="0B1F33"/>
                 </a:solidFill>
                 <a:latin typeface="Segoe UI"/>
+                <a:ea typeface="Segoe UI"/>
+                <a:cs typeface="Segoe UI"/>
               </a:rPr>
               <a:t>Resume Quality</a:t>
             </a:r>
@@ -30928,6 +31954,8 @@
                   <a:srgbClr val="2C3A4B"/>
                 </a:solidFill>
                 <a:latin typeface="Segoe UI"/>
+                <a:ea typeface="Segoe UI"/>
+                <a:cs typeface="Segoe UI"/>
               </a:rPr>
               <a:t>Most candidates struggle to communicate experience in a professional, results-oriented way.</a:t>
             </a:r>
@@ -31049,6 +32077,8 @@
                   <a:srgbClr val="0A6B63"/>
                 </a:solidFill>
                 <a:latin typeface="Georgia"/>
+                <a:ea typeface="Georgia"/>
+                <a:cs typeface="Georgia"/>
               </a:rPr>
               <a:t>02</a:t>
             </a:r>
@@ -31082,6 +32112,8 @@
                   <a:srgbClr val="0B1F33"/>
                 </a:solidFill>
                 <a:latin typeface="Segoe UI"/>
+                <a:ea typeface="Segoe UI"/>
+                <a:cs typeface="Segoe UI"/>
               </a:rPr>
               <a:t>Quantification</a:t>
             </a:r>
@@ -31115,6 +32147,8 @@
                   <a:srgbClr val="2C3A4B"/>
                 </a:solidFill>
                 <a:latin typeface="Segoe UI"/>
+                <a:ea typeface="Segoe UI"/>
+                <a:cs typeface="Segoe UI"/>
               </a:rPr>
               <a:t>People describe responsibilities rather than measurable achievements.</a:t>
             </a:r>
@@ -31236,6 +32270,8 @@
                   <a:srgbClr val="0A6B63"/>
                 </a:solidFill>
                 <a:latin typeface="Georgia"/>
+                <a:ea typeface="Georgia"/>
+                <a:cs typeface="Georgia"/>
               </a:rPr>
               <a:t>03</a:t>
             </a:r>
@@ -31269,6 +32305,8 @@
                   <a:srgbClr val="0B1F33"/>
                 </a:solidFill>
                 <a:latin typeface="Segoe UI"/>
+                <a:ea typeface="Segoe UI"/>
+                <a:cs typeface="Segoe UI"/>
               </a:rPr>
               <a:t>Personalization</a:t>
             </a:r>
@@ -31302,6 +32340,8 @@
                   <a:srgbClr val="2C3A4B"/>
                 </a:solidFill>
                 <a:latin typeface="Segoe UI"/>
+                <a:ea typeface="Segoe UI"/>
+                <a:cs typeface="Segoe UI"/>
               </a:rPr>
               <a:t>One generic resume rarely works across jobs and employers.</a:t>
             </a:r>
@@ -31423,6 +32463,8 @@
                   <a:srgbClr val="0A6B63"/>
                 </a:solidFill>
                 <a:latin typeface="Georgia"/>
+                <a:ea typeface="Georgia"/>
+                <a:cs typeface="Georgia"/>
               </a:rPr>
               <a:t>04</a:t>
             </a:r>
@@ -31456,6 +32498,8 @@
                   <a:srgbClr val="0B1F33"/>
                 </a:solidFill>
                 <a:latin typeface="Segoe UI"/>
+                <a:ea typeface="Segoe UI"/>
+                <a:cs typeface="Segoe UI"/>
               </a:rPr>
               <a:t>Job Matching</a:t>
             </a:r>
@@ -31489,6 +32533,8 @@
                   <a:srgbClr val="2C3A4B"/>
                 </a:solidFill>
                 <a:latin typeface="Segoe UI"/>
+                <a:ea typeface="Segoe UI"/>
+                <a:cs typeface="Segoe UI"/>
               </a:rPr>
               <a:t>Candidates apply without a clear view of actual fit.</a:t>
             </a:r>
@@ -31610,6 +32656,8 @@
                   <a:srgbClr val="0A6B63"/>
                 </a:solidFill>
                 <a:latin typeface="Georgia"/>
+                <a:ea typeface="Georgia"/>
+                <a:cs typeface="Georgia"/>
               </a:rPr>
               <a:t>05</a:t>
             </a:r>
@@ -31643,6 +32691,8 @@
                   <a:srgbClr val="0B1F33"/>
                 </a:solidFill>
                 <a:latin typeface="Segoe UI"/>
+                <a:ea typeface="Segoe UI"/>
+                <a:cs typeface="Segoe UI"/>
               </a:rPr>
               <a:t>Career Guidance</a:t>
             </a:r>
@@ -31676,6 +32726,8 @@
                   <a:srgbClr val="2C3A4B"/>
                 </a:solidFill>
                 <a:latin typeface="Segoe UI"/>
+                <a:ea typeface="Segoe UI"/>
+                <a:cs typeface="Segoe UI"/>
               </a:rPr>
               <a:t>Professional advice remains expensive and consultant-dependent.</a:t>
             </a:r>
@@ -31754,6 +32806,8 @@
                   <a:srgbClr val="0A6B63"/>
                 </a:solidFill>
                 <a:latin typeface="Segoe UI"/>
+                <a:ea typeface="Segoe UI"/>
+                <a:cs typeface="Segoe UI"/>
               </a:rPr>
               <a:t>THE RESULT</a:t>
             </a:r>
@@ -31787,6 +32841,8 @@
                   <a:srgbClr val="FFFFFF"/>
                 </a:solidFill>
                 <a:latin typeface="Segoe UI"/>
+                <a:ea typeface="Segoe UI"/>
+                <a:cs typeface="Segoe UI"/>
               </a:rPr>
               <a:t>Low-quality applications  →  Low interview rates  →  Long job searches  →  High frustration</a:t>
             </a:r>
@@ -31949,6 +33005,8 @@
                   <a:srgbClr val="5E6E80"/>
                 </a:solidFill>
                 <a:latin typeface="Segoe UI"/>
+                <a:ea typeface="Segoe UI"/>
+                <a:cs typeface="Segoe UI"/>
               </a:rPr>
               <a:t>51 CAREERS   ·   CONFIDENTIAL INVESTOR PRESENTATION</a:t>
             </a:r>
@@ -31982,6 +33040,8 @@
                   <a:srgbClr val="5E6E80"/>
                 </a:solidFill>
                 <a:latin typeface="Segoe UI"/>
+                <a:ea typeface="Segoe UI"/>
+                <a:cs typeface="Segoe UI"/>
               </a:rPr>
               <a:t>3</a:t>
             </a:r>
@@ -32022,8 +33082,8 @@
         </p:nvSpPr>
         <p:spPr>
           <a:xfrm>
-            <a:off x="502920" y="201168"/>
-            <a:ext cx="11183112" cy="219456"/>
+            <a:off x="502920" y="182880"/>
+            <a:ext cx="11183112" cy="201168"/>
           </a:xfrm>
           <a:prstGeom prst="rect">
             <a:avLst/>
@@ -32041,6 +33101,8 @@
                   <a:srgbClr val="0A6B63"/>
                 </a:solidFill>
                 <a:latin typeface="Segoe UI"/>
+                <a:ea typeface="Segoe UI"/>
+                <a:cs typeface="Segoe UI"/>
               </a:rPr>
               <a:t>03  ·  THE OPPORTUNITY</a:t>
             </a:r>
@@ -32055,8 +33117,8 @@
         </p:nvSpPr>
         <p:spPr>
           <a:xfrm>
-            <a:off x="502920" y="402336"/>
-            <a:ext cx="11183112" cy="438912"/>
+            <a:off x="502920" y="365760"/>
+            <a:ext cx="11183112" cy="457200"/>
           </a:xfrm>
           <a:prstGeom prst="rect">
             <a:avLst/>
@@ -32074,6 +33136,8 @@
                   <a:srgbClr val="0B1F33"/>
                 </a:solidFill>
                 <a:latin typeface="Georgia"/>
+                <a:ea typeface="Georgia"/>
+                <a:cs typeface="Georgia"/>
               </a:rPr>
               <a:t>AI Is Reshaping the Career Services Industry</a:t>
             </a:r>
@@ -32088,8 +33152,8 @@
         </p:nvSpPr>
         <p:spPr>
           <a:xfrm>
-            <a:off x="502920" y="841248"/>
-            <a:ext cx="11183112" cy="256032"/>
+            <a:off x="502920" y="822960"/>
+            <a:ext cx="11183112" cy="237744"/>
           </a:xfrm>
           <a:prstGeom prst="rect">
             <a:avLst/>
@@ -32107,6 +33171,8 @@
                   <a:srgbClr val="5E6E80"/>
                 </a:solidFill>
                 <a:latin typeface="Segoe UI"/>
+                <a:ea typeface="Segoe UI"/>
+                <a:cs typeface="Segoe UI"/>
               </a:rPr>
               <a:t>Generative AI has changed how people create, communicate, and consume professional information.</a:t>
             </a:r>
@@ -32228,6 +33294,8 @@
                   <a:srgbClr val="8A6D3B"/>
                 </a:solidFill>
                 <a:latin typeface="Segoe UI"/>
+                <a:ea typeface="Segoe UI"/>
+                <a:cs typeface="Segoe UI"/>
               </a:rPr>
               <a:t>TRADITIONAL MODEL  ·  HUMAN CONSULTANT</a:t>
             </a:r>
@@ -32261,6 +33329,8 @@
                   <a:srgbClr val="2C3A4B"/>
                 </a:solidFill>
                 <a:latin typeface="Segoe UI"/>
+                <a:ea typeface="Segoe UI"/>
+                <a:cs typeface="Segoe UI"/>
               </a:rPr>
               <a:t>→   Manual analysis</a:t>
             </a:r>
@@ -32294,6 +33364,8 @@
                   <a:srgbClr val="2C3A4B"/>
                 </a:solidFill>
                 <a:latin typeface="Segoe UI"/>
+                <a:ea typeface="Segoe UI"/>
+                <a:cs typeface="Segoe UI"/>
               </a:rPr>
               <a:t>→   Manual resume writing</a:t>
             </a:r>
@@ -32327,6 +33399,8 @@
                   <a:srgbClr val="2C3A4B"/>
                 </a:solidFill>
                 <a:latin typeface="Segoe UI"/>
+                <a:ea typeface="Segoe UI"/>
+                <a:cs typeface="Segoe UI"/>
               </a:rPr>
               <a:t>→   Manual job search</a:t>
             </a:r>
@@ -32360,6 +33434,8 @@
                   <a:srgbClr val="2C3A4B"/>
                 </a:solidFill>
                 <a:latin typeface="Segoe UI"/>
+                <a:ea typeface="Segoe UI"/>
+                <a:cs typeface="Segoe UI"/>
               </a:rPr>
               <a:t>→   High cost</a:t>
             </a:r>
@@ -32393,6 +33469,8 @@
                   <a:srgbClr val="2C3A4B"/>
                 </a:solidFill>
                 <a:latin typeface="Segoe UI"/>
+                <a:ea typeface="Segoe UI"/>
+                <a:cs typeface="Segoe UI"/>
               </a:rPr>
               <a:t>→   Limited scalability</a:t>
             </a:r>
@@ -32514,6 +33592,8 @@
                   <a:srgbClr val="0A6B63"/>
                 </a:solidFill>
                 <a:latin typeface="Segoe UI"/>
+                <a:ea typeface="Segoe UI"/>
+                <a:cs typeface="Segoe UI"/>
               </a:rPr>
               <a:t>AI-ENABLED MODEL  ·  CAREER PLATFORM</a:t>
             </a:r>
@@ -32547,6 +33627,8 @@
                   <a:srgbClr val="0B1F33"/>
                 </a:solidFill>
                 <a:latin typeface="Segoe UI"/>
+                <a:ea typeface="Segoe UI"/>
+                <a:cs typeface="Segoe UI"/>
               </a:rPr>
               <a:t>→   Automated career analysis</a:t>
             </a:r>
@@ -32580,6 +33662,8 @@
                   <a:srgbClr val="0B1F33"/>
                 </a:solidFill>
                 <a:latin typeface="Segoe UI"/>
+                <a:ea typeface="Segoe UI"/>
+                <a:cs typeface="Segoe UI"/>
               </a:rPr>
               <a:t>→   AI resume generation</a:t>
             </a:r>
@@ -32613,6 +33697,8 @@
                   <a:srgbClr val="0B1F33"/>
                 </a:solidFill>
                 <a:latin typeface="Segoe UI"/>
+                <a:ea typeface="Segoe UI"/>
+                <a:cs typeface="Segoe UI"/>
               </a:rPr>
               <a:t>→   Job matching</a:t>
             </a:r>
@@ -32646,6 +33732,8 @@
                   <a:srgbClr val="0B1F33"/>
                 </a:solidFill>
                 <a:latin typeface="Segoe UI"/>
+                <a:ea typeface="Segoe UI"/>
+                <a:cs typeface="Segoe UI"/>
               </a:rPr>
               <a:t>→   Continuous optimization</a:t>
             </a:r>
@@ -32679,6 +33767,8 @@
                   <a:srgbClr val="0B1F33"/>
                 </a:solidFill>
                 <a:latin typeface="Segoe UI"/>
+                <a:ea typeface="Segoe UI"/>
+                <a:cs typeface="Segoe UI"/>
               </a:rPr>
               <a:t>→   Global scalability</a:t>
             </a:r>
@@ -32757,6 +33847,8 @@
                   <a:srgbClr val="FFFFFF"/>
                 </a:solidFill>
                 <a:latin typeface="Segoe UI"/>
+                <a:ea typeface="Segoe UI"/>
+                <a:cs typeface="Segoe UI"/>
               </a:rPr>
               <a:t>OUR OPPORTUNITY</a:t>
             </a:r>
@@ -32790,6 +33882,8 @@
                   <a:srgbClr val="FFFFFF"/>
                 </a:solidFill>
                 <a:latin typeface="Georgia"/>
+                <a:ea typeface="Georgia"/>
+                <a:cs typeface="Georgia"/>
               </a:rPr>
               <a:t>Transform high-cost, labor-intensive career services into a scalable AI-powered platform.</a:t>
             </a:r>
@@ -32952,6 +34046,8 @@
                   <a:srgbClr val="5E6E80"/>
                 </a:solidFill>
                 <a:latin typeface="Segoe UI"/>
+                <a:ea typeface="Segoe UI"/>
+                <a:cs typeface="Segoe UI"/>
               </a:rPr>
               <a:t>51 CAREERS   ·   CONFIDENTIAL INVESTOR PRESENTATION</a:t>
             </a:r>
@@ -32985,6 +34081,8 @@
                   <a:srgbClr val="5E6E80"/>
                 </a:solidFill>
                 <a:latin typeface="Segoe UI"/>
+                <a:ea typeface="Segoe UI"/>
+                <a:cs typeface="Segoe UI"/>
               </a:rPr>
               <a:t>4</a:t>
             </a:r>
@@ -33025,8 +34123,8 @@
         </p:nvSpPr>
         <p:spPr>
           <a:xfrm>
-            <a:off x="502920" y="201168"/>
-            <a:ext cx="11183112" cy="219456"/>
+            <a:off x="502920" y="182880"/>
+            <a:ext cx="11183112" cy="201168"/>
           </a:xfrm>
           <a:prstGeom prst="rect">
             <a:avLst/>
@@ -33044,6 +34142,8 @@
                   <a:srgbClr val="0A6B63"/>
                 </a:solidFill>
                 <a:latin typeface="Segoe UI"/>
+                <a:ea typeface="Segoe UI"/>
+                <a:cs typeface="Segoe UI"/>
               </a:rPr>
               <a:t>04  ·  WHY NOW</a:t>
             </a:r>
@@ -33058,8 +34158,8 @@
         </p:nvSpPr>
         <p:spPr>
           <a:xfrm>
-            <a:off x="502920" y="402336"/>
-            <a:ext cx="11183112" cy="438912"/>
+            <a:off x="502920" y="365760"/>
+            <a:ext cx="11183112" cy="457200"/>
           </a:xfrm>
           <a:prstGeom prst="rect">
             <a:avLst/>
@@ -33077,6 +34177,8 @@
                   <a:srgbClr val="0B1F33"/>
                 </a:solidFill>
                 <a:latin typeface="Georgia"/>
+                <a:ea typeface="Georgia"/>
+                <a:cs typeface="Georgia"/>
               </a:rPr>
               <a:t>Three Structural Trends Are Converging</a:t>
             </a:r>
@@ -33085,7 +34187,42 @@
       </p:sp>
       <p:sp>
         <p:nvSpPr>
-          <p:cNvPr id="4" name="Rounded Rectangle 3"/>
+          <p:cNvPr id="4" name="TextBox 3"/>
+          <p:cNvSpPr txBox="1"/>
+          <p:nvPr/>
+        </p:nvSpPr>
+        <p:spPr>
+          <a:xfrm>
+            <a:off x="502920" y="822960"/>
+            <a:ext cx="11183112" cy="237744"/>
+          </a:xfrm>
+          <a:prstGeom prst="rect">
+            <a:avLst/>
+          </a:prstGeom>
+          <a:noFill/>
+        </p:spPr>
+        <p:txBody>
+          <a:bodyPr wrap="square" anchor="t"/>
+          <a:lstStyle/>
+          <a:p>
+            <a:pPr algn="l"/>
+            <a:r>
+              <a:rPr sz="1300" b="0" i="0">
+                <a:solidFill>
+                  <a:srgbClr val="5E6E80"/>
+                </a:solidFill>
+                <a:latin typeface="Segoe UI"/>
+                <a:ea typeface="Segoe UI"/>
+                <a:cs typeface="Segoe UI"/>
+              </a:rPr>
+              <a:t>AI adoption, data-driven hiring, and fragmented career services are moving at the same time.</a:t>
+            </a:r>
+          </a:p>
+        </p:txBody>
+      </p:sp>
+      <p:sp>
+        <p:nvSpPr>
+          <p:cNvPr id="5" name="Rounded Rectangle 4"/>
           <p:cNvSpPr/>
           <p:nvPr/>
         </p:nvSpPr>
@@ -33130,7 +34267,7 @@
       </p:sp>
       <p:sp>
         <p:nvSpPr>
-          <p:cNvPr id="5" name="Rectangle 4"/>
+          <p:cNvPr id="6" name="Rectangle 5"/>
           <p:cNvSpPr/>
           <p:nvPr/>
         </p:nvSpPr>
@@ -33173,47 +34310,49 @@
       </p:sp>
       <p:sp>
         <p:nvSpPr>
-          <p:cNvPr id="6" name="TextBox 5"/>
-          <p:cNvSpPr txBox="1"/>
-          <p:nvPr/>
-        </p:nvSpPr>
-        <p:spPr>
-          <a:xfrm>
-            <a:off x="722376" y="1353312"/>
-            <a:ext cx="3145536" cy="640080"/>
-          </a:xfrm>
-          <a:prstGeom prst="rect">
-            <a:avLst/>
-          </a:prstGeom>
-          <a:noFill/>
-        </p:spPr>
-        <p:txBody>
-          <a:bodyPr wrap="square" anchor="t"/>
-          <a:lstStyle/>
-          <a:p>
-            <a:pPr algn="l"/>
-            <a:r>
-              <a:rPr sz="3600" b="1" i="0">
+          <p:cNvPr id="7" name="TextBox 6"/>
+          <p:cNvSpPr txBox="1"/>
+          <p:nvPr/>
+        </p:nvSpPr>
+        <p:spPr>
+          <a:xfrm>
+            <a:off x="722376" y="1335024"/>
+            <a:ext cx="3145536" cy="384048"/>
+          </a:xfrm>
+          <a:prstGeom prst="rect">
+            <a:avLst/>
+          </a:prstGeom>
+          <a:noFill/>
+        </p:spPr>
+        <p:txBody>
+          <a:bodyPr wrap="square" anchor="t"/>
+          <a:lstStyle/>
+          <a:p>
+            <a:pPr algn="l"/>
+            <a:r>
+              <a:rPr sz="2000" b="1" i="0">
                 <a:solidFill>
                   <a:srgbClr val="0A6B63"/>
                 </a:solidFill>
                 <a:latin typeface="Georgia"/>
-              </a:rPr>
-              <a:t>1</a:t>
-            </a:r>
-          </a:p>
-        </p:txBody>
-      </p:sp>
-      <p:sp>
-        <p:nvSpPr>
-          <p:cNvPr id="7" name="TextBox 6"/>
-          <p:cNvSpPr txBox="1"/>
-          <p:nvPr/>
-        </p:nvSpPr>
-        <p:spPr>
-          <a:xfrm>
-            <a:off x="722376" y="2029968"/>
-            <a:ext cx="3145536" cy="1051560"/>
+                <a:ea typeface="Georgia"/>
+                <a:cs typeface="Georgia"/>
+              </a:rPr>
+              <a:t>01</a:t>
+            </a:r>
+          </a:p>
+        </p:txBody>
+      </p:sp>
+      <p:sp>
+        <p:nvSpPr>
+          <p:cNvPr id="8" name="TextBox 7"/>
+          <p:cNvSpPr txBox="1"/>
+          <p:nvPr/>
+        </p:nvSpPr>
+        <p:spPr>
+          <a:xfrm>
+            <a:off x="722376" y="1755648"/>
+            <a:ext cx="3145536" cy="1005840"/>
           </a:xfrm>
           <a:prstGeom prst="rect">
             <a:avLst/>
@@ -33230,7 +34369,9 @@
                 <a:solidFill>
                   <a:srgbClr val="0B1F33"/>
                 </a:solidFill>
-                <a:latin typeface="Segoe UI"/>
+                <a:latin typeface="Georgia"/>
+                <a:ea typeface="Georgia"/>
+                <a:cs typeface="Georgia"/>
               </a:rPr>
               <a:t>Generative AI has reached mass adoption</a:t>
             </a:r>
@@ -33239,14 +34380,14 @@
       </p:sp>
       <p:sp>
         <p:nvSpPr>
-          <p:cNvPr id="8" name="TextBox 7"/>
-          <p:cNvSpPr txBox="1"/>
-          <p:nvPr/>
-        </p:nvSpPr>
-        <p:spPr>
-          <a:xfrm>
-            <a:off x="722376" y="3154680"/>
-            <a:ext cx="3145536" cy="1691640"/>
+          <p:cNvPr id="9" name="TextBox 8"/>
+          <p:cNvSpPr txBox="1"/>
+          <p:nvPr/>
+        </p:nvSpPr>
+        <p:spPr>
+          <a:xfrm>
+            <a:off x="722376" y="2834640"/>
+            <a:ext cx="3145536" cy="2011680"/>
           </a:xfrm>
           <a:prstGeom prst="rect">
             <a:avLst/>
@@ -33264,6 +34405,8 @@
                   <a:srgbClr val="2C3A4B"/>
                 </a:solidFill>
                 <a:latin typeface="Segoe UI"/>
+                <a:ea typeface="Segoe UI"/>
+                <a:cs typeface="Segoe UI"/>
               </a:rPr>
               <a:t>Consumers are increasingly comfortable using AI for professional and personal tasks. That adoption is the distribution opening for an AI career product.</a:t>
             </a:r>
@@ -33272,7 +34415,7 @@
       </p:sp>
       <p:sp>
         <p:nvSpPr>
-          <p:cNvPr id="9" name="Rounded Rectangle 8"/>
+          <p:cNvPr id="10" name="Rounded Rectangle 9"/>
           <p:cNvSpPr/>
           <p:nvPr/>
         </p:nvSpPr>
@@ -33317,7 +34460,7 @@
       </p:sp>
       <p:sp>
         <p:nvSpPr>
-          <p:cNvPr id="10" name="Rectangle 9"/>
+          <p:cNvPr id="11" name="Rectangle 10"/>
           <p:cNvSpPr/>
           <p:nvPr/>
         </p:nvSpPr>
@@ -33360,47 +34503,49 @@
       </p:sp>
       <p:sp>
         <p:nvSpPr>
-          <p:cNvPr id="11" name="TextBox 10"/>
-          <p:cNvSpPr txBox="1"/>
-          <p:nvPr/>
-        </p:nvSpPr>
-        <p:spPr>
-          <a:xfrm>
-            <a:off x="4453128" y="1353312"/>
-            <a:ext cx="3145536" cy="640080"/>
-          </a:xfrm>
-          <a:prstGeom prst="rect">
-            <a:avLst/>
-          </a:prstGeom>
-          <a:noFill/>
-        </p:spPr>
-        <p:txBody>
-          <a:bodyPr wrap="square" anchor="t"/>
-          <a:lstStyle/>
-          <a:p>
-            <a:pPr algn="l"/>
-            <a:r>
-              <a:rPr sz="3600" b="1" i="0">
+          <p:cNvPr id="12" name="TextBox 11"/>
+          <p:cNvSpPr txBox="1"/>
+          <p:nvPr/>
+        </p:nvSpPr>
+        <p:spPr>
+          <a:xfrm>
+            <a:off x="4453128" y="1335024"/>
+            <a:ext cx="3145536" cy="384048"/>
+          </a:xfrm>
+          <a:prstGeom prst="rect">
+            <a:avLst/>
+          </a:prstGeom>
+          <a:noFill/>
+        </p:spPr>
+        <p:txBody>
+          <a:bodyPr wrap="square" anchor="t"/>
+          <a:lstStyle/>
+          <a:p>
+            <a:pPr algn="l"/>
+            <a:r>
+              <a:rPr sz="2000" b="1" i="0">
                 <a:solidFill>
                   <a:srgbClr val="0A6B63"/>
                 </a:solidFill>
                 <a:latin typeface="Georgia"/>
-              </a:rPr>
-              <a:t>2</a:t>
-            </a:r>
-          </a:p>
-        </p:txBody>
-      </p:sp>
-      <p:sp>
-        <p:nvSpPr>
-          <p:cNvPr id="12" name="TextBox 11"/>
-          <p:cNvSpPr txBox="1"/>
-          <p:nvPr/>
-        </p:nvSpPr>
-        <p:spPr>
-          <a:xfrm>
-            <a:off x="4453128" y="2029968"/>
-            <a:ext cx="3145536" cy="1051560"/>
+                <a:ea typeface="Georgia"/>
+                <a:cs typeface="Georgia"/>
+              </a:rPr>
+              <a:t>02</a:t>
+            </a:r>
+          </a:p>
+        </p:txBody>
+      </p:sp>
+      <p:sp>
+        <p:nvSpPr>
+          <p:cNvPr id="13" name="TextBox 12"/>
+          <p:cNvSpPr txBox="1"/>
+          <p:nvPr/>
+        </p:nvSpPr>
+        <p:spPr>
+          <a:xfrm>
+            <a:off x="4453128" y="1755648"/>
+            <a:ext cx="3145536" cy="1005840"/>
           </a:xfrm>
           <a:prstGeom prst="rect">
             <a:avLst/>
@@ -33417,7 +34562,9 @@
                 <a:solidFill>
                   <a:srgbClr val="0B1F33"/>
                 </a:solidFill>
-                <a:latin typeface="Segoe UI"/>
+                <a:latin typeface="Georgia"/>
+                <a:ea typeface="Georgia"/>
+                <a:cs typeface="Georgia"/>
               </a:rPr>
               <a:t>Recruiting is becoming more data-driven</a:t>
             </a:r>
@@ -33426,14 +34573,14 @@
       </p:sp>
       <p:sp>
         <p:nvSpPr>
-          <p:cNvPr id="13" name="TextBox 12"/>
-          <p:cNvSpPr txBox="1"/>
-          <p:nvPr/>
-        </p:nvSpPr>
-        <p:spPr>
-          <a:xfrm>
-            <a:off x="4453128" y="3154680"/>
-            <a:ext cx="3145536" cy="1691640"/>
+          <p:cNvPr id="14" name="TextBox 13"/>
+          <p:cNvSpPr txBox="1"/>
+          <p:nvPr/>
+        </p:nvSpPr>
+        <p:spPr>
+          <a:xfrm>
+            <a:off x="4453128" y="2834640"/>
+            <a:ext cx="3145536" cy="2011680"/>
           </a:xfrm>
           <a:prstGeom prst="rect">
             <a:avLst/>
@@ -33451,6 +34598,8 @@
                   <a:srgbClr val="2C3A4B"/>
                 </a:solidFill>
                 <a:latin typeface="Segoe UI"/>
+                <a:ea typeface="Segoe UI"/>
+                <a:cs typeface="Segoe UI"/>
               </a:rPr>
               <a:t>Employers rely on structured information, keywords, measurable achievements, and automated screening. Candidates need a product that writes to that standard.</a:t>
             </a:r>
@@ -33459,7 +34608,7 @@
       </p:sp>
       <p:sp>
         <p:nvSpPr>
-          <p:cNvPr id="14" name="Rounded Rectangle 13"/>
+          <p:cNvPr id="15" name="Rounded Rectangle 14"/>
           <p:cNvSpPr/>
           <p:nvPr/>
         </p:nvSpPr>
@@ -33504,7 +34653,7 @@
       </p:sp>
       <p:sp>
         <p:nvSpPr>
-          <p:cNvPr id="15" name="Rectangle 14"/>
+          <p:cNvPr id="16" name="Rectangle 15"/>
           <p:cNvSpPr/>
           <p:nvPr/>
         </p:nvSpPr>
@@ -33547,47 +34696,49 @@
       </p:sp>
       <p:sp>
         <p:nvSpPr>
-          <p:cNvPr id="16" name="TextBox 15"/>
-          <p:cNvSpPr txBox="1"/>
-          <p:nvPr/>
-        </p:nvSpPr>
-        <p:spPr>
-          <a:xfrm>
-            <a:off x="8183880" y="1353312"/>
-            <a:ext cx="3145536" cy="640080"/>
-          </a:xfrm>
-          <a:prstGeom prst="rect">
-            <a:avLst/>
-          </a:prstGeom>
-          <a:noFill/>
-        </p:spPr>
-        <p:txBody>
-          <a:bodyPr wrap="square" anchor="t"/>
-          <a:lstStyle/>
-          <a:p>
-            <a:pPr algn="l"/>
-            <a:r>
-              <a:rPr sz="3600" b="1" i="0">
+          <p:cNvPr id="17" name="TextBox 16"/>
+          <p:cNvSpPr txBox="1"/>
+          <p:nvPr/>
+        </p:nvSpPr>
+        <p:spPr>
+          <a:xfrm>
+            <a:off x="8183880" y="1335024"/>
+            <a:ext cx="3145536" cy="384048"/>
+          </a:xfrm>
+          <a:prstGeom prst="rect">
+            <a:avLst/>
+          </a:prstGeom>
+          <a:noFill/>
+        </p:spPr>
+        <p:txBody>
+          <a:bodyPr wrap="square" anchor="t"/>
+          <a:lstStyle/>
+          <a:p>
+            <a:pPr algn="l"/>
+            <a:r>
+              <a:rPr sz="2000" b="1" i="0">
                 <a:solidFill>
                   <a:srgbClr val="0A6B63"/>
                 </a:solidFill>
                 <a:latin typeface="Georgia"/>
-              </a:rPr>
-              <a:t>3</a:t>
-            </a:r>
-          </a:p>
-        </p:txBody>
-      </p:sp>
-      <p:sp>
-        <p:nvSpPr>
-          <p:cNvPr id="17" name="TextBox 16"/>
-          <p:cNvSpPr txBox="1"/>
-          <p:nvPr/>
-        </p:nvSpPr>
-        <p:spPr>
-          <a:xfrm>
-            <a:off x="8183880" y="2029968"/>
-            <a:ext cx="3145536" cy="1051560"/>
+                <a:ea typeface="Georgia"/>
+                <a:cs typeface="Georgia"/>
+              </a:rPr>
+              <a:t>03</a:t>
+            </a:r>
+          </a:p>
+        </p:txBody>
+      </p:sp>
+      <p:sp>
+        <p:nvSpPr>
+          <p:cNvPr id="18" name="TextBox 17"/>
+          <p:cNvSpPr txBox="1"/>
+          <p:nvPr/>
+        </p:nvSpPr>
+        <p:spPr>
+          <a:xfrm>
+            <a:off x="8183880" y="1755648"/>
+            <a:ext cx="3145536" cy="1005840"/>
           </a:xfrm>
           <a:prstGeom prst="rect">
             <a:avLst/>
@@ -33604,7 +34755,9 @@
                 <a:solidFill>
                   <a:srgbClr val="0B1F33"/>
                 </a:solidFill>
-                <a:latin typeface="Segoe UI"/>
+                <a:latin typeface="Georgia"/>
+                <a:ea typeface="Georgia"/>
+                <a:cs typeface="Georgia"/>
               </a:rPr>
               <a:t>Career services remain fragmented</a:t>
             </a:r>
@@ -33613,14 +34766,14 @@
       </p:sp>
       <p:sp>
         <p:nvSpPr>
-          <p:cNvPr id="18" name="TextBox 17"/>
-          <p:cNvSpPr txBox="1"/>
-          <p:nvPr/>
-        </p:nvSpPr>
-        <p:spPr>
-          <a:xfrm>
-            <a:off x="8183880" y="3154680"/>
-            <a:ext cx="3145536" cy="1691640"/>
+          <p:cNvPr id="19" name="TextBox 18"/>
+          <p:cNvSpPr txBox="1"/>
+          <p:nvPr/>
+        </p:nvSpPr>
+        <p:spPr>
+          <a:xfrm>
+            <a:off x="8183880" y="2834640"/>
+            <a:ext cx="3145536" cy="2011680"/>
           </a:xfrm>
           <a:prstGeom prst="rect">
             <a:avLst/>
@@ -33638,6 +34791,8 @@
                   <a:srgbClr val="2C3A4B"/>
                 </a:solidFill>
                 <a:latin typeface="Segoe UI"/>
+                <a:ea typeface="Segoe UI"/>
+                <a:cs typeface="Segoe UI"/>
               </a:rPr>
               <a:t>The industry is still dependent on manual services and fragmented providers. That gap is the opening for a scalable AI + human platform.</a:t>
             </a:r>
@@ -33646,7 +34801,7 @@
       </p:sp>
       <p:sp>
         <p:nvSpPr>
-          <p:cNvPr id="19" name="Rounded Rectangle 18"/>
+          <p:cNvPr id="20" name="Rounded Rectangle 19"/>
           <p:cNvSpPr/>
           <p:nvPr/>
         </p:nvSpPr>
@@ -33691,7 +34846,7 @@
       </p:sp>
       <p:sp>
         <p:nvSpPr>
-          <p:cNvPr id="20" name="TextBox 19"/>
+          <p:cNvPr id="21" name="TextBox 20"/>
           <p:cNvSpPr txBox="1"/>
           <p:nvPr/>
         </p:nvSpPr>
@@ -33716,6 +34871,8 @@
                   <a:srgbClr val="0A6B63"/>
                 </a:solidFill>
                 <a:latin typeface="Segoe UI"/>
+                <a:ea typeface="Segoe UI"/>
+                <a:cs typeface="Segoe UI"/>
               </a:rPr>
               <a:t>51 CAREERS SITS AT THE INTERSECTION</a:t>
             </a:r>
@@ -33724,7 +34881,7 @@
       </p:sp>
       <p:sp>
         <p:nvSpPr>
-          <p:cNvPr id="21" name="TextBox 20"/>
+          <p:cNvPr id="22" name="TextBox 21"/>
           <p:cNvSpPr txBox="1"/>
           <p:nvPr/>
         </p:nvSpPr>
@@ -33749,6 +34906,8 @@
                   <a:srgbClr val="FFFFFF"/>
                 </a:solidFill>
                 <a:latin typeface="Georgia"/>
+                <a:ea typeface="Georgia"/>
+                <a:cs typeface="Georgia"/>
               </a:rPr>
               <a:t>AI   ×   Employment   ×   Career Services</a:t>
             </a:r>
@@ -33757,7 +34916,7 @@
       </p:sp>
       <p:sp>
         <p:nvSpPr>
-          <p:cNvPr id="22" name="Rectangle 21"/>
+          <p:cNvPr id="23" name="Rectangle 22"/>
           <p:cNvSpPr/>
           <p:nvPr/>
         </p:nvSpPr>
@@ -33800,7 +34959,7 @@
       </p:sp>
       <p:sp>
         <p:nvSpPr>
-          <p:cNvPr id="23" name="Rectangle 22"/>
+          <p:cNvPr id="24" name="Rectangle 23"/>
           <p:cNvSpPr/>
           <p:nvPr/>
         </p:nvSpPr>
@@ -33843,7 +35002,7 @@
       </p:sp>
       <p:sp>
         <p:nvSpPr>
-          <p:cNvPr id="24" name="Rectangle 23"/>
+          <p:cNvPr id="25" name="Rectangle 24"/>
           <p:cNvSpPr/>
           <p:nvPr/>
         </p:nvSpPr>
@@ -33886,7 +35045,7 @@
       </p:sp>
       <p:sp>
         <p:nvSpPr>
-          <p:cNvPr id="25" name="TextBox 24"/>
+          <p:cNvPr id="26" name="TextBox 25"/>
           <p:cNvSpPr txBox="1"/>
           <p:nvPr/>
         </p:nvSpPr>
@@ -33911,6 +35070,8 @@
                   <a:srgbClr val="5E6E80"/>
                 </a:solidFill>
                 <a:latin typeface="Segoe UI"/>
+                <a:ea typeface="Segoe UI"/>
+                <a:cs typeface="Segoe UI"/>
               </a:rPr>
               <a:t>51 CAREERS   ·   CONFIDENTIAL INVESTOR PRESENTATION</a:t>
             </a:r>
@@ -33919,7 +35080,7 @@
       </p:sp>
       <p:sp>
         <p:nvSpPr>
-          <p:cNvPr id="26" name="TextBox 25"/>
+          <p:cNvPr id="27" name="TextBox 26"/>
           <p:cNvSpPr txBox="1"/>
           <p:nvPr/>
         </p:nvSpPr>
@@ -33944,6 +35105,8 @@
                   <a:srgbClr val="5E6E80"/>
                 </a:solidFill>
                 <a:latin typeface="Segoe UI"/>
+                <a:ea typeface="Segoe UI"/>
+                <a:cs typeface="Segoe UI"/>
               </a:rPr>
               <a:t>5</a:t>
             </a:r>
@@ -33984,8 +35147,8 @@
         </p:nvSpPr>
         <p:spPr>
           <a:xfrm>
-            <a:off x="502920" y="201168"/>
-            <a:ext cx="11183112" cy="219456"/>
+            <a:off x="502920" y="182880"/>
+            <a:ext cx="11183112" cy="201168"/>
           </a:xfrm>
           <a:prstGeom prst="rect">
             <a:avLst/>
@@ -34003,6 +35166,8 @@
                   <a:srgbClr val="0A6B63"/>
                 </a:solidFill>
                 <a:latin typeface="Segoe UI"/>
+                <a:ea typeface="Segoe UI"/>
+                <a:cs typeface="Segoe UI"/>
               </a:rPr>
               <a:t>MARKET SIZE</a:t>
             </a:r>
@@ -34017,25 +35182,27 @@
         </p:nvSpPr>
         <p:spPr>
           <a:xfrm>
-            <a:off x="502920" y="402336"/>
-            <a:ext cx="11183112" cy="438912"/>
-          </a:xfrm>
-          <a:prstGeom prst="rect">
-            <a:avLst/>
-          </a:prstGeom>
-          <a:noFill/>
-        </p:spPr>
-        <p:txBody>
-          <a:bodyPr wrap="square" anchor="t"/>
-          <a:lstStyle/>
-          <a:p>
-            <a:pPr algn="l"/>
-            <a:r>
-              <a:rPr sz="2400" b="1" i="0">
+            <a:off x="502920" y="365760"/>
+            <a:ext cx="11183112" cy="457200"/>
+          </a:xfrm>
+          <a:prstGeom prst="rect">
+            <a:avLst/>
+          </a:prstGeom>
+          <a:noFill/>
+        </p:spPr>
+        <p:txBody>
+          <a:bodyPr wrap="square" anchor="t"/>
+          <a:lstStyle/>
+          <a:p>
+            <a:pPr algn="l"/>
+            <a:r>
+              <a:rPr sz="2000" b="1" i="0">
                 <a:solidFill>
                   <a:srgbClr val="0B1F33"/>
                 </a:solidFill>
                 <a:latin typeface="Georgia"/>
+                <a:ea typeface="Georgia"/>
+                <a:cs typeface="Georgia"/>
               </a:rPr>
               <a:t>TAM  →  SAM  →  SOM  →  Three-Year Revenue Opportunity</a:t>
             </a:r>
@@ -34050,8 +35217,8 @@
         </p:nvSpPr>
         <p:spPr>
           <a:xfrm>
-            <a:off x="502920" y="841248"/>
-            <a:ext cx="11183112" cy="256032"/>
+            <a:off x="502920" y="822960"/>
+            <a:ext cx="11183112" cy="237744"/>
           </a:xfrm>
           <a:prstGeom prst="rect">
             <a:avLst/>
@@ -34069,6 +35236,8 @@
                   <a:srgbClr val="5E6E80"/>
                 </a:solidFill>
                 <a:latin typeface="Segoe UI"/>
+                <a:ea typeface="Segoe UI"/>
+                <a:cs typeface="Segoe UI"/>
               </a:rPr>
               <a:t>From global job seekers to paid AI career users. Illustrative, for discussion.</a:t>
             </a:r>
@@ -34190,6 +35359,8 @@
                   <a:srgbClr val="0A6B63"/>
                 </a:solidFill>
                 <a:latin typeface="Segoe UI"/>
+                <a:ea typeface="Segoe UI"/>
+                <a:cs typeface="Segoe UI"/>
               </a:rPr>
               <a:t>TAM</a:t>
             </a:r>
@@ -34223,6 +35394,8 @@
                   <a:srgbClr val="0B1F33"/>
                 </a:solidFill>
                 <a:latin typeface="Georgia"/>
+                <a:ea typeface="Georgia"/>
+                <a:cs typeface="Georgia"/>
               </a:rPr>
               <a:t>US$200B+</a:t>
             </a:r>
@@ -34256,6 +35429,8 @@
                   <a:srgbClr val="14283C"/>
                 </a:solidFill>
                 <a:latin typeface="Segoe UI"/>
+                <a:ea typeface="Segoe UI"/>
+                <a:cs typeface="Segoe UI"/>
               </a:rPr>
               <a:t>RMB 1.35 trillion+</a:t>
             </a:r>
@@ -34289,6 +35464,8 @@
                   <a:srgbClr val="2C3A4B"/>
                 </a:solidFill>
                 <a:latin typeface="Segoe UI"/>
+                <a:ea typeface="Segoe UI"/>
+                <a:cs typeface="Segoe UI"/>
               </a:rPr>
               <a:t>Global recruitment, talent-acquisition, and career-development spend.</a:t>
             </a:r>
@@ -34410,6 +35587,8 @@
                   <a:srgbClr val="0A6B63"/>
                 </a:solidFill>
                 <a:latin typeface="Segoe UI"/>
+                <a:ea typeface="Segoe UI"/>
+                <a:cs typeface="Segoe UI"/>
               </a:rPr>
               <a:t>SAM</a:t>
             </a:r>
@@ -34443,6 +35622,8 @@
                   <a:srgbClr val="0B1F33"/>
                 </a:solidFill>
                 <a:latin typeface="Georgia"/>
+                <a:ea typeface="Georgia"/>
+                <a:cs typeface="Georgia"/>
               </a:rPr>
               <a:t>US$30B+</a:t>
             </a:r>
@@ -34476,6 +35657,8 @@
                   <a:srgbClr val="14283C"/>
                 </a:solidFill>
                 <a:latin typeface="Segoe UI"/>
+                <a:ea typeface="Segoe UI"/>
+                <a:cs typeface="Segoe UI"/>
               </a:rPr>
               <a:t>RMB 200 billion+</a:t>
             </a:r>
@@ -34509,6 +35692,8 @@
                   <a:srgbClr val="2C3A4B"/>
                 </a:solidFill>
                 <a:latin typeface="Segoe UI"/>
+                <a:ea typeface="Segoe UI"/>
+                <a:cs typeface="Segoe UI"/>
               </a:rPr>
               <a:t>Digital / AI-enabled hiring tools, resume products, and online career preparation.</a:t>
             </a:r>
@@ -34630,6 +35815,8 @@
                   <a:srgbClr val="0A6B63"/>
                 </a:solidFill>
                 <a:latin typeface="Segoe UI"/>
+                <a:ea typeface="Segoe UI"/>
+                <a:cs typeface="Segoe UI"/>
               </a:rPr>
               <a:t>SOM</a:t>
             </a:r>
@@ -34663,6 +35850,8 @@
                   <a:srgbClr val="0B1F33"/>
                 </a:solidFill>
                 <a:latin typeface="Georgia"/>
+                <a:ea typeface="Georgia"/>
+                <a:cs typeface="Georgia"/>
               </a:rPr>
               <a:t>US$1.5B+</a:t>
             </a:r>
@@ -34696,6 +35885,8 @@
                   <a:srgbClr val="14283C"/>
                 </a:solidFill>
                 <a:latin typeface="Segoe UI"/>
+                <a:ea typeface="Segoe UI"/>
+                <a:cs typeface="Segoe UI"/>
               </a:rPr>
               <a:t>RMB 10 billion+</a:t>
             </a:r>
@@ -34729,6 +35920,8 @@
                   <a:srgbClr val="2C3A4B"/>
                 </a:solidFill>
                 <a:latin typeface="Segoe UI"/>
+                <a:ea typeface="Segoe UI"/>
+                <a:cs typeface="Segoe UI"/>
               </a:rPr>
               <a:t>AI resume &amp; career-assistant demand in initial markets: China, U.S., and English-speaking Asia.</a:t>
             </a:r>
@@ -34850,6 +36043,8 @@
                   <a:srgbClr val="0A6B63"/>
                 </a:solidFill>
                 <a:latin typeface="Segoe UI"/>
+                <a:ea typeface="Segoe UI"/>
+                <a:cs typeface="Segoe UI"/>
               </a:rPr>
               <a:t>51 CAREERS  ·  ILLUSTRATIVE 3-YEAR REVENUE OPPORTUNITY</a:t>
             </a:r>
@@ -34883,6 +36078,8 @@
                   <a:srgbClr val="5E6E80"/>
                 </a:solidFill>
                 <a:latin typeface="Segoe UI"/>
+                <a:ea typeface="Segoe UI"/>
+                <a:cs typeface="Segoe UI"/>
               </a:rPr>
               <a:t>2027E</a:t>
             </a:r>
@@ -34916,8 +36113,10 @@
                   <a:srgbClr val="0B1F33"/>
                 </a:solidFill>
                 <a:latin typeface="Georgia"/>
-              </a:rPr>
-              <a:t>US$  2.0M</a:t>
+                <a:ea typeface="Georgia"/>
+                <a:cs typeface="Georgia"/>
+              </a:rPr>
+              <a:t>US$ 2.0M</a:t>
             </a:r>
           </a:p>
         </p:txBody>
@@ -34949,8 +36148,10 @@
                   <a:srgbClr val="5E6E80"/>
                 </a:solidFill>
                 <a:latin typeface="Segoe UI"/>
-              </a:rPr>
-              <a:t>≈  RMB  13.5M</a:t>
+                <a:ea typeface="Segoe UI"/>
+                <a:cs typeface="Segoe UI"/>
+              </a:rPr>
+              <a:t>≈ RMB 13.5M</a:t>
             </a:r>
           </a:p>
         </p:txBody>
@@ -34982,6 +36183,8 @@
                   <a:srgbClr val="5E6E80"/>
                 </a:solidFill>
                 <a:latin typeface="Segoe UI"/>
+                <a:ea typeface="Segoe UI"/>
+                <a:cs typeface="Segoe UI"/>
               </a:rPr>
               <a:t>2028E</a:t>
             </a:r>
@@ -35015,8 +36218,10 @@
                   <a:srgbClr val="0B1F33"/>
                 </a:solidFill>
                 <a:latin typeface="Georgia"/>
-              </a:rPr>
-              <a:t>US$  8.0M</a:t>
+                <a:ea typeface="Georgia"/>
+                <a:cs typeface="Georgia"/>
+              </a:rPr>
+              <a:t>US$ 8.0M</a:t>
             </a:r>
           </a:p>
         </p:txBody>
@@ -35048,8 +36253,10 @@
                   <a:srgbClr val="5E6E80"/>
                 </a:solidFill>
                 <a:latin typeface="Segoe UI"/>
-              </a:rPr>
-              <a:t>≈  RMB  53.8M</a:t>
+                <a:ea typeface="Segoe UI"/>
+                <a:cs typeface="Segoe UI"/>
+              </a:rPr>
+              <a:t>≈ RMB 53.8M</a:t>
             </a:r>
           </a:p>
         </p:txBody>
@@ -35081,6 +36288,8 @@
                   <a:srgbClr val="5E6E80"/>
                 </a:solidFill>
                 <a:latin typeface="Segoe UI"/>
+                <a:ea typeface="Segoe UI"/>
+                <a:cs typeface="Segoe UI"/>
               </a:rPr>
               <a:t>2029E</a:t>
             </a:r>
@@ -35114,8 +36323,10 @@
                   <a:srgbClr val="0B1F33"/>
                 </a:solidFill>
                 <a:latin typeface="Georgia"/>
-              </a:rPr>
-              <a:t>US$  28.0M</a:t>
+                <a:ea typeface="Georgia"/>
+                <a:cs typeface="Georgia"/>
+              </a:rPr>
+              <a:t>US$ 28.0M</a:t>
             </a:r>
           </a:p>
         </p:txBody>
@@ -35147,8 +36358,10 @@
                   <a:srgbClr val="5E6E80"/>
                 </a:solidFill>
                 <a:latin typeface="Segoe UI"/>
-              </a:rPr>
-              <a:t>≈  RMB  188M</a:t>
+                <a:ea typeface="Segoe UI"/>
+                <a:cs typeface="Segoe UI"/>
+              </a:rPr>
+              <a:t>≈ RMB 188.4M</a:t>
             </a:r>
           </a:p>
         </p:txBody>
@@ -35180,6 +36393,8 @@
                   <a:srgbClr val="5E6E80"/>
                 </a:solidFill>
                 <a:latin typeface="Segoe UI"/>
+                <a:ea typeface="Segoe UI"/>
+                <a:cs typeface="Segoe UI"/>
               </a:rPr>
               <a:t>Logic: global job seekers → addressable AI Resume users → paid conversion → stacked revenue (AI + services + commission + B2B + ads).</a:t>
             </a:r>
@@ -35342,6 +36557,8 @@
                   <a:srgbClr val="5E6E80"/>
                 </a:solidFill>
                 <a:latin typeface="Segoe UI"/>
+                <a:ea typeface="Segoe UI"/>
+                <a:cs typeface="Segoe UI"/>
               </a:rPr>
               <a:t>51 CAREERS   ·   CONFIDENTIAL INVESTOR PRESENTATION</a:t>
             </a:r>
@@ -35375,6 +36592,8 @@
                   <a:srgbClr val="5E6E80"/>
                 </a:solidFill>
                 <a:latin typeface="Segoe UI"/>
+                <a:ea typeface="Segoe UI"/>
+                <a:cs typeface="Segoe UI"/>
               </a:rPr>
               <a:t>6</a:t>
             </a:r>
@@ -35415,8 +36634,8 @@
         </p:nvSpPr>
         <p:spPr>
           <a:xfrm>
-            <a:off x="502920" y="201168"/>
-            <a:ext cx="11183112" cy="219456"/>
+            <a:off x="502920" y="182880"/>
+            <a:ext cx="11183112" cy="201168"/>
           </a:xfrm>
           <a:prstGeom prst="rect">
             <a:avLst/>
@@ -35434,6 +36653,8 @@
                   <a:srgbClr val="0A6B63"/>
                 </a:solidFill>
                 <a:latin typeface="Segoe UI"/>
+                <a:ea typeface="Segoe UI"/>
+                <a:cs typeface="Segoe UI"/>
               </a:rPr>
               <a:t>05  ·  OUR SOLUTION</a:t>
             </a:r>
@@ -35448,8 +36669,8 @@
         </p:nvSpPr>
         <p:spPr>
           <a:xfrm>
-            <a:off x="502920" y="402336"/>
-            <a:ext cx="11183112" cy="438912"/>
+            <a:off x="502920" y="365760"/>
+            <a:ext cx="11183112" cy="457200"/>
           </a:xfrm>
           <a:prstGeom prst="rect">
             <a:avLst/>
@@ -35467,6 +36688,8 @@
                   <a:srgbClr val="0B1F33"/>
                 </a:solidFill>
                 <a:latin typeface="Georgia"/>
+                <a:ea typeface="Georgia"/>
+                <a:cs typeface="Georgia"/>
               </a:rPr>
               <a:t>51 Careers AI Career Platform</a:t>
             </a:r>
@@ -35481,8 +36704,8 @@
         </p:nvSpPr>
         <p:spPr>
           <a:xfrm>
-            <a:off x="502920" y="841248"/>
-            <a:ext cx="11183112" cy="256032"/>
+            <a:off x="502920" y="822960"/>
+            <a:ext cx="11183112" cy="237744"/>
           </a:xfrm>
           <a:prstGeom prst="rect">
             <a:avLst/>
@@ -35500,6 +36723,8 @@
                   <a:srgbClr val="5E6E80"/>
                 </a:solidFill>
                 <a:latin typeface="Segoe UI"/>
+                <a:ea typeface="Segoe UI"/>
+                <a:cs typeface="Segoe UI"/>
               </a:rPr>
               <a:t>Not another AI writing tool — an AI-powered career infrastructure layer.</a:t>
             </a:r>
@@ -35621,6 +36846,8 @@
                   <a:srgbClr val="0A6B63"/>
                 </a:solidFill>
                 <a:latin typeface="Georgia"/>
+                <a:ea typeface="Georgia"/>
+                <a:cs typeface="Georgia"/>
               </a:rPr>
               <a:t>01</a:t>
             </a:r>
@@ -35654,6 +36881,8 @@
                   <a:srgbClr val="0B1F33"/>
                 </a:solidFill>
                 <a:latin typeface="Segoe UI"/>
+                <a:ea typeface="Segoe UI"/>
+                <a:cs typeface="Segoe UI"/>
               </a:rPr>
               <a:t>Understand professional experience</a:t>
             </a:r>
@@ -35775,6 +37004,8 @@
                   <a:srgbClr val="0A6B63"/>
                 </a:solidFill>
                 <a:latin typeface="Georgia"/>
+                <a:ea typeface="Georgia"/>
+                <a:cs typeface="Georgia"/>
               </a:rPr>
               <a:t>02</a:t>
             </a:r>
@@ -35808,6 +37039,8 @@
                   <a:srgbClr val="0B1F33"/>
                 </a:solidFill>
                 <a:latin typeface="Segoe UI"/>
+                <a:ea typeface="Segoe UI"/>
+                <a:cs typeface="Segoe UI"/>
               </a:rPr>
               <a:t>Build a stronger professional profile</a:t>
             </a:r>
@@ -35929,6 +37162,8 @@
                   <a:srgbClr val="0A6B63"/>
                 </a:solidFill>
                 <a:latin typeface="Georgia"/>
+                <a:ea typeface="Georgia"/>
+                <a:cs typeface="Georgia"/>
               </a:rPr>
               <a:t>03</a:t>
             </a:r>
@@ -35962,6 +37197,8 @@
                   <a:srgbClr val="0B1F33"/>
                 </a:solidFill>
                 <a:latin typeface="Segoe UI"/>
+                <a:ea typeface="Segoe UI"/>
+                <a:cs typeface="Segoe UI"/>
               </a:rPr>
               <a:t>Generate optimized resumes</a:t>
             </a:r>
@@ -36083,6 +37320,8 @@
                   <a:srgbClr val="0A6B63"/>
                 </a:solidFill>
                 <a:latin typeface="Georgia"/>
+                <a:ea typeface="Georgia"/>
+                <a:cs typeface="Georgia"/>
               </a:rPr>
               <a:t>04</a:t>
             </a:r>
@@ -36116,6 +37355,8 @@
                   <a:srgbClr val="0B1F33"/>
                 </a:solidFill>
                 <a:latin typeface="Segoe UI"/>
+                <a:ea typeface="Segoe UI"/>
+                <a:cs typeface="Segoe UI"/>
               </a:rPr>
               <a:t>Match with relevant opportunities</a:t>
             </a:r>
@@ -36237,6 +37478,8 @@
                   <a:srgbClr val="0A6B63"/>
                 </a:solidFill>
                 <a:latin typeface="Georgia"/>
+                <a:ea typeface="Georgia"/>
+                <a:cs typeface="Georgia"/>
               </a:rPr>
               <a:t>05</a:t>
             </a:r>
@@ -36270,6 +37513,8 @@
                   <a:srgbClr val="0B1F33"/>
                 </a:solidFill>
                 <a:latin typeface="Segoe UI"/>
+                <a:ea typeface="Segoe UI"/>
+                <a:cs typeface="Segoe UI"/>
               </a:rPr>
               <a:t>Prepare for interviews</a:t>
             </a:r>
@@ -36391,6 +37636,8 @@
                   <a:srgbClr val="0A6B63"/>
                 </a:solidFill>
                 <a:latin typeface="Georgia"/>
+                <a:ea typeface="Georgia"/>
+                <a:cs typeface="Georgia"/>
               </a:rPr>
               <a:t>06</a:t>
             </a:r>
@@ -36424,6 +37671,8 @@
                   <a:srgbClr val="0B1F33"/>
                 </a:solidFill>
                 <a:latin typeface="Segoe UI"/>
+                <a:ea typeface="Segoe UI"/>
+                <a:cs typeface="Segoe UI"/>
               </a:rPr>
               <a:t>Make better career decisions</a:t>
             </a:r>
@@ -36545,6 +37794,8 @@
                   <a:srgbClr val="0A6B63"/>
                 </a:solidFill>
                 <a:latin typeface="Georgia"/>
+                <a:ea typeface="Georgia"/>
+                <a:cs typeface="Georgia"/>
               </a:rPr>
               <a:t>07</a:t>
             </a:r>
@@ -36578,6 +37829,8 @@
                   <a:srgbClr val="0B1F33"/>
                 </a:solidFill>
                 <a:latin typeface="Segoe UI"/>
+                <a:ea typeface="Segoe UI"/>
+                <a:cs typeface="Segoe UI"/>
               </a:rPr>
               <a:t>Access professional services</a:t>
             </a:r>
@@ -36656,6 +37909,8 @@
                   <a:srgbClr val="0A6B63"/>
                 </a:solidFill>
                 <a:latin typeface="Segoe UI"/>
+                <a:ea typeface="Segoe UI"/>
+                <a:cs typeface="Segoe UI"/>
               </a:rPr>
               <a:t>STARTING POINT</a:t>
             </a:r>
@@ -36689,6 +37944,8 @@
                   <a:srgbClr val="FFFFFF"/>
                 </a:solidFill>
                 <a:latin typeface="Georgia"/>
+                <a:ea typeface="Georgia"/>
+                <a:cs typeface="Georgia"/>
               </a:rPr>
               <a:t>AI Resume</a:t>
             </a:r>
@@ -36722,6 +37979,8 @@
                   <a:srgbClr val="D7EBE8"/>
                 </a:solidFill>
                 <a:latin typeface="Segoe UI"/>
+                <a:ea typeface="Segoe UI"/>
+                <a:cs typeface="Segoe UI"/>
               </a:rPr>
               <a:t>The resume is the first touchpoint between the user and the 51 Careers ecosystem — the on-ramp to AI Career tools, services, matching, and the marketplace.
 One product. One profile. Multiple monetization paths across the career journey.</a:t>
@@ -36885,6 +38144,8 @@
                   <a:srgbClr val="5E6E80"/>
                 </a:solidFill>
                 <a:latin typeface="Segoe UI"/>
+                <a:ea typeface="Segoe UI"/>
+                <a:cs typeface="Segoe UI"/>
               </a:rPr>
               <a:t>51 CAREERS   ·   CONFIDENTIAL INVESTOR PRESENTATION</a:t>
             </a:r>
@@ -36918,6 +38179,8 @@
                   <a:srgbClr val="5E6E80"/>
                 </a:solidFill>
                 <a:latin typeface="Segoe UI"/>
+                <a:ea typeface="Segoe UI"/>
+                <a:cs typeface="Segoe UI"/>
               </a:rPr>
               <a:t>7</a:t>
             </a:r>
@@ -36958,8 +38221,8 @@
         </p:nvSpPr>
         <p:spPr>
           <a:xfrm>
-            <a:off x="502920" y="201168"/>
-            <a:ext cx="11183112" cy="219456"/>
+            <a:off x="502920" y="182880"/>
+            <a:ext cx="11183112" cy="201168"/>
           </a:xfrm>
           <a:prstGeom prst="rect">
             <a:avLst/>
@@ -36977,6 +38240,8 @@
                   <a:srgbClr val="0A6B63"/>
                 </a:solidFill>
                 <a:latin typeface="Segoe UI"/>
+                <a:ea typeface="Segoe UI"/>
+                <a:cs typeface="Segoe UI"/>
               </a:rPr>
               <a:t>06  ·  PRODUCT</a:t>
             </a:r>
@@ -36991,25 +38256,27 @@
         </p:nvSpPr>
         <p:spPr>
           <a:xfrm>
-            <a:off x="502920" y="402336"/>
-            <a:ext cx="11183112" cy="438912"/>
-          </a:xfrm>
-          <a:prstGeom prst="rect">
-            <a:avLst/>
-          </a:prstGeom>
-          <a:noFill/>
-        </p:spPr>
-        <p:txBody>
-          <a:bodyPr wrap="square" anchor="t"/>
-          <a:lstStyle/>
-          <a:p>
-            <a:pPr algn="l"/>
-            <a:r>
-              <a:rPr sz="2400" b="1" i="0">
+            <a:off x="502920" y="365760"/>
+            <a:ext cx="11183112" cy="457200"/>
+          </a:xfrm>
+          <a:prstGeom prst="rect">
+            <a:avLst/>
+          </a:prstGeom>
+          <a:noFill/>
+        </p:spPr>
+        <p:txBody>
+          <a:bodyPr wrap="square" anchor="t"/>
+          <a:lstStyle/>
+          <a:p>
+            <a:pPr algn="l"/>
+            <a:r>
+              <a:rPr sz="2000" b="1" i="0">
                 <a:solidFill>
                   <a:srgbClr val="0B1F33"/>
                 </a:solidFill>
                 <a:latin typeface="Georgia"/>
+                <a:ea typeface="Georgia"/>
+                <a:cs typeface="Georgia"/>
               </a:rPr>
               <a:t>From Career Experience to Quantified Professional Value</a:t>
             </a:r>
@@ -37131,6 +38398,8 @@
                   <a:srgbClr val="0A6B63"/>
                 </a:solidFill>
                 <a:latin typeface="Segoe UI"/>
+                <a:ea typeface="Segoe UI"/>
+                <a:cs typeface="Segoe UI"/>
               </a:rPr>
               <a:t>USERS PROVIDE</a:t>
             </a:r>
@@ -37164,6 +38433,8 @@
                   <a:srgbClr val="0B1F33"/>
                 </a:solidFill>
                 <a:latin typeface="Segoe UI"/>
+                <a:ea typeface="Segoe UI"/>
+                <a:cs typeface="Segoe UI"/>
               </a:rPr>
               <a:t>▸  Education</a:t>
             </a:r>
@@ -37197,6 +38468,8 @@
                   <a:srgbClr val="0B1F33"/>
                 </a:solidFill>
                 <a:latin typeface="Segoe UI"/>
+                <a:ea typeface="Segoe UI"/>
+                <a:cs typeface="Segoe UI"/>
               </a:rPr>
               <a:t>▸  Work experience</a:t>
             </a:r>
@@ -37230,6 +38503,8 @@
                   <a:srgbClr val="0B1F33"/>
                 </a:solidFill>
                 <a:latin typeface="Segoe UI"/>
+                <a:ea typeface="Segoe UI"/>
+                <a:cs typeface="Segoe UI"/>
               </a:rPr>
               <a:t>▸  Projects</a:t>
             </a:r>
@@ -37263,6 +38538,8 @@
                   <a:srgbClr val="0B1F33"/>
                 </a:solidFill>
                 <a:latin typeface="Segoe UI"/>
+                <a:ea typeface="Segoe UI"/>
+                <a:cs typeface="Segoe UI"/>
               </a:rPr>
               <a:t>▸  Skills</a:t>
             </a:r>
@@ -37296,6 +38573,8 @@
                   <a:srgbClr val="0B1F33"/>
                 </a:solidFill>
                 <a:latin typeface="Segoe UI"/>
+                <a:ea typeface="Segoe UI"/>
+                <a:cs typeface="Segoe UI"/>
               </a:rPr>
               <a:t>▸  Achievements</a:t>
             </a:r>
@@ -37329,6 +38608,8 @@
                   <a:srgbClr val="0B1F33"/>
                 </a:solidFill>
                 <a:latin typeface="Segoe UI"/>
+                <a:ea typeface="Segoe UI"/>
+                <a:cs typeface="Segoe UI"/>
               </a:rPr>
               <a:t>▸  Career goals</a:t>
             </a:r>
@@ -37362,6 +38643,8 @@
                   <a:srgbClr val="0B1F33"/>
                 </a:solidFill>
                 <a:latin typeface="Segoe UI"/>
+                <a:ea typeface="Segoe UI"/>
+                <a:cs typeface="Segoe UI"/>
               </a:rPr>
               <a:t>▸  Target job descriptions</a:t>
             </a:r>
@@ -37440,6 +38723,8 @@
                   <a:srgbClr val="0A6B63"/>
                 </a:solidFill>
                 <a:latin typeface="Segoe UI"/>
+                <a:ea typeface="Segoe UI"/>
+                <a:cs typeface="Segoe UI"/>
               </a:rPr>
               <a:t>OUR AI GENERATES</a:t>
             </a:r>
@@ -37477,6 +38762,8 @@
                   <a:srgbClr val="FFFFFF"/>
                 </a:solidFill>
                 <a:latin typeface="Georgia"/>
+                <a:ea typeface="Georgia"/>
+                <a:cs typeface="Georgia"/>
               </a:rPr>
               <a:t>Professional</a:t>
             </a:r>
@@ -37493,6 +38780,8 @@
                   <a:srgbClr val="FFFFFF"/>
                 </a:solidFill>
                 <a:latin typeface="Georgia"/>
+                <a:ea typeface="Georgia"/>
+                <a:cs typeface="Georgia"/>
               </a:rPr>
               <a:t>+  Quantified</a:t>
             </a:r>
@@ -37509,6 +38798,8 @@
                   <a:srgbClr val="FFFFFF"/>
                 </a:solidFill>
                 <a:latin typeface="Georgia"/>
+                <a:ea typeface="Georgia"/>
+                <a:cs typeface="Georgia"/>
               </a:rPr>
               <a:t>+  Job-specific</a:t>
             </a:r>
@@ -37521,6 +38812,8 @@
                   <a:srgbClr val="D7EBE8"/>
                 </a:solidFill>
                 <a:latin typeface="Segoe UI"/>
+                <a:ea typeface="Segoe UI"/>
+                <a:cs typeface="Segoe UI"/>
               </a:rPr>
               <a:t>resume content</a:t>
             </a:r>
@@ -37554,6 +38847,8 @@
                   <a:srgbClr val="D7EBE8"/>
                 </a:solidFill>
                 <a:latin typeface="Segoe UI"/>
+                <a:ea typeface="Segoe UI"/>
+                <a:cs typeface="Segoe UI"/>
               </a:rPr>
               <a:t>Optimized for ATS, role, employer, and geography — so one career profile can serve many applications.</a:t>
             </a:r>
@@ -37632,6 +38927,8 @@
                   <a:srgbClr val="0B1F33"/>
                 </a:solidFill>
                 <a:latin typeface="Segoe UI"/>
+                <a:ea typeface="Segoe UI"/>
+                <a:cs typeface="Segoe UI"/>
               </a:rPr>
               <a:t>AI Resume Generation</a:t>
             </a:r>
@@ -37710,6 +39007,8 @@
                   <a:srgbClr val="0B1F33"/>
                 </a:solidFill>
                 <a:latin typeface="Segoe UI"/>
+                <a:ea typeface="Segoe UI"/>
+                <a:cs typeface="Segoe UI"/>
               </a:rPr>
               <a:t>Resume Optimization</a:t>
             </a:r>
@@ -37788,6 +39087,8 @@
                   <a:srgbClr val="0B1F33"/>
                 </a:solidFill>
                 <a:latin typeface="Segoe UI"/>
+                <a:ea typeface="Segoe UI"/>
+                <a:cs typeface="Segoe UI"/>
               </a:rPr>
               <a:t>Job-Specific Customization</a:t>
             </a:r>
@@ -37866,6 +39167,8 @@
                   <a:srgbClr val="0B1F33"/>
                 </a:solidFill>
                 <a:latin typeface="Segoe UI"/>
+                <a:ea typeface="Segoe UI"/>
+                <a:cs typeface="Segoe UI"/>
               </a:rPr>
               <a:t>Achievement Quantification</a:t>
             </a:r>
@@ -37944,6 +39247,8 @@
                   <a:srgbClr val="0B1F33"/>
                 </a:solidFill>
                 <a:latin typeface="Segoe UI"/>
+                <a:ea typeface="Segoe UI"/>
+                <a:cs typeface="Segoe UI"/>
               </a:rPr>
               <a:t>ATS Optimization</a:t>
             </a:r>
@@ -38022,6 +39327,8 @@
                   <a:srgbClr val="0B1F33"/>
                 </a:solidFill>
                 <a:latin typeface="Segoe UI"/>
+                <a:ea typeface="Segoe UI"/>
+                <a:cs typeface="Segoe UI"/>
               </a:rPr>
               <a:t>Multiple Resume Versions</a:t>
             </a:r>
@@ -38100,6 +39407,8 @@
                   <a:srgbClr val="0B1F33"/>
                 </a:solidFill>
                 <a:latin typeface="Segoe UI"/>
+                <a:ea typeface="Segoe UI"/>
+                <a:cs typeface="Segoe UI"/>
               </a:rPr>
               <a:t>Cover Letter Generation</a:t>
             </a:r>
@@ -38178,6 +39487,8 @@
                   <a:srgbClr val="0B1F33"/>
                 </a:solidFill>
                 <a:latin typeface="Segoe UI"/>
+                <a:ea typeface="Segoe UI"/>
+                <a:cs typeface="Segoe UI"/>
               </a:rPr>
               <a:t>Career Profile Creation</a:t>
             </a:r>
@@ -38340,6 +39651,8 @@
                   <a:srgbClr val="5E6E80"/>
                 </a:solidFill>
                 <a:latin typeface="Segoe UI"/>
+                <a:ea typeface="Segoe UI"/>
+                <a:cs typeface="Segoe UI"/>
               </a:rPr>
               <a:t>51 CAREERS   ·   CONFIDENTIAL INVESTOR PRESENTATION</a:t>
             </a:r>
@@ -38373,6 +39686,8 @@
                   <a:srgbClr val="5E6E80"/>
                 </a:solidFill>
                 <a:latin typeface="Segoe UI"/>
+                <a:ea typeface="Segoe UI"/>
+                <a:cs typeface="Segoe UI"/>
               </a:rPr>
               <a:t>8</a:t>
             </a:r>
@@ -38413,8 +39728,8 @@
         </p:nvSpPr>
         <p:spPr>
           <a:xfrm>
-            <a:off x="502920" y="201168"/>
-            <a:ext cx="11183112" cy="219456"/>
+            <a:off x="502920" y="182880"/>
+            <a:ext cx="11183112" cy="201168"/>
           </a:xfrm>
           <a:prstGeom prst="rect">
             <a:avLst/>
@@ -38432,6 +39747,8 @@
                   <a:srgbClr val="0A6B63"/>
                 </a:solidFill>
                 <a:latin typeface="Segoe UI"/>
+                <a:ea typeface="Segoe UI"/>
+                <a:cs typeface="Segoe UI"/>
               </a:rPr>
               <a:t>07  ·  PRODUCT VALIDATION</a:t>
             </a:r>
@@ -38446,8 +39763,8 @@
         </p:nvSpPr>
         <p:spPr>
           <a:xfrm>
-            <a:off x="502920" y="402336"/>
-            <a:ext cx="11183112" cy="438912"/>
+            <a:off x="502920" y="365760"/>
+            <a:ext cx="11183112" cy="457200"/>
           </a:xfrm>
           <a:prstGeom prst="rect">
             <a:avLst/>
@@ -38465,6 +39782,8 @@
                   <a:srgbClr val="0B1F33"/>
                 </a:solidFill>
                 <a:latin typeface="Georgia"/>
+                <a:ea typeface="Georgia"/>
+                <a:cs typeface="Georgia"/>
               </a:rPr>
               <a:t>The Product Has Already Been Built and Tested</a:t>
             </a:r>
@@ -38543,6 +39862,8 @@
                   <a:srgbClr val="0A6B63"/>
                 </a:solidFill>
                 <a:latin typeface="Segoe UI"/>
+                <a:ea typeface="Segoe UI"/>
+                <a:cs typeface="Segoe UI"/>
               </a:rPr>
               <a:t>✓   Demo developed</a:t>
             </a:r>
@@ -38576,6 +39897,8 @@
                   <a:srgbClr val="2C3A4B"/>
                 </a:solidFill>
                 <a:latin typeface="Segoe UI"/>
+                <a:ea typeface="Segoe UI"/>
+                <a:cs typeface="Segoe UI"/>
               </a:rPr>
               <a:t>A working AI Resume product is available for demonstration.</a:t>
             </a:r>
@@ -38654,6 +39977,8 @@
                   <a:srgbClr val="0A6B63"/>
                 </a:solidFill>
                 <a:latin typeface="Segoe UI"/>
+                <a:ea typeface="Segoe UI"/>
+                <a:cs typeface="Segoe UI"/>
               </a:rPr>
               <a:t>✓   Initial testing completed</a:t>
             </a:r>
@@ -38687,6 +40012,8 @@
                   <a:srgbClr val="2C3A4B"/>
                 </a:solidFill>
                 <a:latin typeface="Segoe UI"/>
+                <a:ea typeface="Segoe UI"/>
+                <a:cs typeface="Segoe UI"/>
               </a:rPr>
               <a:t>Early users and internal reviews show promising quality.</a:t>
             </a:r>
@@ -38765,6 +40092,8 @@
                   <a:srgbClr val="0A6B63"/>
                 </a:solidFill>
                 <a:latin typeface="Segoe UI"/>
+                <a:ea typeface="Segoe UI"/>
+                <a:cs typeface="Segoe UI"/>
               </a:rPr>
               <a:t>✓   Internal benchmark testing</a:t>
             </a:r>
@@ -38798,6 +40127,8 @@
                   <a:srgbClr val="2C3A4B"/>
                 </a:solidFill>
                 <a:latin typeface="Segoe UI"/>
+                <a:ea typeface="Segoe UI"/>
+                <a:cs typeface="Segoe UI"/>
               </a:rPr>
               <a:t>Compared against direct outputs from leading general-purpose AI models.</a:t>
             </a:r>
@@ -38831,6 +40162,8 @@
                   <a:srgbClr val="0A6B63"/>
                 </a:solidFill>
                 <a:latin typeface="Segoe UI"/>
+                <a:ea typeface="Segoe UI"/>
+                <a:cs typeface="Segoe UI"/>
               </a:rPr>
               <a:t>INITIAL TESTING INDICATES STRONGER PERFORMANCE IN</a:t>
             </a:r>
@@ -38909,6 +40242,8 @@
                   <a:srgbClr val="0B1F33"/>
                 </a:solidFill>
                 <a:latin typeface="Segoe UI"/>
+                <a:ea typeface="Segoe UI"/>
+                <a:cs typeface="Segoe UI"/>
               </a:rPr>
               <a:t>Professional positioning</a:t>
             </a:r>
@@ -38987,6 +40322,8 @@
                   <a:srgbClr val="0B1F33"/>
                 </a:solidFill>
                 <a:latin typeface="Segoe UI"/>
+                <a:ea typeface="Segoe UI"/>
+                <a:cs typeface="Segoe UI"/>
               </a:rPr>
               <a:t>Achievement quantification</a:t>
             </a:r>
@@ -39065,6 +40402,8 @@
                   <a:srgbClr val="0B1F33"/>
                 </a:solidFill>
                 <a:latin typeface="Segoe UI"/>
+                <a:ea typeface="Segoe UI"/>
+                <a:cs typeface="Segoe UI"/>
               </a:rPr>
               <a:t>Job relevance</a:t>
             </a:r>
@@ -39143,6 +40482,8 @@
                   <a:srgbClr val="0B1F33"/>
                 </a:solidFill>
                 <a:latin typeface="Segoe UI"/>
+                <a:ea typeface="Segoe UI"/>
+                <a:cs typeface="Segoe UI"/>
               </a:rPr>
               <a:t>Career-experience extraction</a:t>
             </a:r>
@@ -39221,6 +40562,8 @@
                   <a:srgbClr val="0B1F33"/>
                 </a:solidFill>
                 <a:latin typeface="Segoe UI"/>
+                <a:ea typeface="Segoe UI"/>
+                <a:cs typeface="Segoe UI"/>
               </a:rPr>
               <a:t>Resume structure</a:t>
             </a:r>
@@ -39299,6 +40642,8 @@
                   <a:srgbClr val="0A6B63"/>
                 </a:solidFill>
                 <a:latin typeface="Segoe UI"/>
+                <a:ea typeface="Segoe UI"/>
+                <a:cs typeface="Segoe UI"/>
               </a:rPr>
               <a:t>IMPORTANT NOTE</a:t>
             </a:r>
@@ -39332,6 +40677,8 @@
                   <a:srgbClr val="2C3A4B"/>
                 </a:solidFill>
                 <a:latin typeface="Segoe UI"/>
+                <a:ea typeface="Segoe UI"/>
+                <a:cs typeface="Segoe UI"/>
               </a:rPr>
               <a:t>Current results are based on internal testing. The next stage is larger-scale, structured, blind A/B testing to establish statistically meaningful benchmarks versus general-purpose models.</a:t>
             </a:r>
@@ -39494,6 +40841,8 @@
                   <a:srgbClr val="5E6E80"/>
                 </a:solidFill>
                 <a:latin typeface="Segoe UI"/>
+                <a:ea typeface="Segoe UI"/>
+                <a:cs typeface="Segoe UI"/>
               </a:rPr>
               <a:t>51 CAREERS   ·   CONFIDENTIAL INVESTOR PRESENTATION</a:t>
             </a:r>
@@ -39527,6 +40876,8 @@
                   <a:srgbClr val="5E6E80"/>
                 </a:solidFill>
                 <a:latin typeface="Segoe UI"/>
+                <a:ea typeface="Segoe UI"/>
+                <a:cs typeface="Segoe UI"/>
               </a:rPr>
               <a:t>9</a:t>
             </a:r>

--- a/51Careers_Addition.pptx
+++ b/51Careers_Addition.pptx
@@ -35196,7 +35196,7 @@
           <a:p>
             <a:pPr algn="l"/>
             <a:r>
-              <a:rPr sz="2000" b="1" i="0">
+              <a:rPr sz="2400" b="1" i="0">
                 <a:solidFill>
                   <a:srgbClr val="0B1F33"/>
                 </a:solidFill>
@@ -35204,7 +35204,7 @@
                 <a:ea typeface="Georgia"/>
                 <a:cs typeface="Georgia"/>
               </a:rPr>
-              <a:t>TAM  →  SAM  →  SOM  →  Three-Year Revenue Opportunity</a:t>
+              <a:t>TAM  →  SAM  →  SOM  →  Three-Year Revenue</a:t>
             </a:r>
           </a:p>
         </p:txBody>
@@ -35340,8 +35340,8 @@
         </p:nvSpPr>
         <p:spPr>
           <a:xfrm>
-            <a:off x="704088" y="1316736"/>
-            <a:ext cx="3182112" cy="237744"/>
+            <a:off x="704088" y="1280160"/>
+            <a:ext cx="3182112" cy="256032"/>
           </a:xfrm>
           <a:prstGeom prst="rect">
             <a:avLst/>
@@ -35357,47 +35357,47 @@
               <a:rPr sz="1300" b="1" i="0">
                 <a:solidFill>
                   <a:srgbClr val="0A6B63"/>
-                </a:solidFill>
-                <a:latin typeface="Segoe UI"/>
-                <a:ea typeface="Segoe UI"/>
-                <a:cs typeface="Segoe UI"/>
-              </a:rPr>
-              <a:t>TAM</a:t>
-            </a:r>
-          </a:p>
-        </p:txBody>
-      </p:sp>
-      <p:sp>
-        <p:nvSpPr>
-          <p:cNvPr id="8" name="TextBox 7"/>
-          <p:cNvSpPr txBox="1"/>
-          <p:nvPr/>
-        </p:nvSpPr>
-        <p:spPr>
-          <a:xfrm>
-            <a:off x="704088" y="1609344"/>
-            <a:ext cx="3182112" cy="530352"/>
-          </a:xfrm>
-          <a:prstGeom prst="rect">
-            <a:avLst/>
-          </a:prstGeom>
-          <a:noFill/>
-        </p:spPr>
-        <p:txBody>
-          <a:bodyPr wrap="square" anchor="t"/>
-          <a:lstStyle/>
-          <a:p>
-            <a:pPr algn="l"/>
-            <a:r>
-              <a:rPr sz="3000" b="1" i="0">
-                <a:solidFill>
-                  <a:srgbClr val="0B1F33"/>
                 </a:solidFill>
                 <a:latin typeface="Georgia"/>
                 <a:ea typeface="Georgia"/>
                 <a:cs typeface="Georgia"/>
               </a:rPr>
-              <a:t>US$200B+</a:t>
+              <a:t>01   ·   TAM</a:t>
+            </a:r>
+          </a:p>
+        </p:txBody>
+      </p:sp>
+      <p:sp>
+        <p:nvSpPr>
+          <p:cNvPr id="8" name="TextBox 7"/>
+          <p:cNvSpPr txBox="1"/>
+          <p:nvPr/>
+        </p:nvSpPr>
+        <p:spPr>
+          <a:xfrm>
+            <a:off x="704088" y="1591056"/>
+            <a:ext cx="3182112" cy="530352"/>
+          </a:xfrm>
+          <a:prstGeom prst="rect">
+            <a:avLst/>
+          </a:prstGeom>
+          <a:noFill/>
+        </p:spPr>
+        <p:txBody>
+          <a:bodyPr wrap="square" anchor="t"/>
+          <a:lstStyle/>
+          <a:p>
+            <a:pPr algn="l"/>
+            <a:r>
+              <a:rPr sz="2800" b="1" i="0">
+                <a:solidFill>
+                  <a:srgbClr val="0B1F33"/>
+                </a:solidFill>
+                <a:latin typeface="Georgia"/>
+                <a:ea typeface="Georgia"/>
+                <a:cs typeface="Georgia"/>
+              </a:rPr>
+              <a:t>US$ 200B+</a:t>
             </a:r>
           </a:p>
         </p:txBody>
@@ -35410,7 +35410,7 @@
         </p:nvSpPr>
         <p:spPr>
           <a:xfrm>
-            <a:off x="704088" y="2176272"/>
+            <a:off x="704088" y="2157984"/>
             <a:ext cx="3182112" cy="274320"/>
           </a:xfrm>
           <a:prstGeom prst="rect">
@@ -35428,11 +35428,11 @@
                 <a:solidFill>
                   <a:srgbClr val="14283C"/>
                 </a:solidFill>
-                <a:latin typeface="Segoe UI"/>
-                <a:ea typeface="Segoe UI"/>
-                <a:cs typeface="Segoe UI"/>
-              </a:rPr>
-              <a:t>RMB 1.35 trillion+</a:t>
+                <a:latin typeface="Georgia"/>
+                <a:ea typeface="Georgia"/>
+                <a:cs typeface="Georgia"/>
+              </a:rPr>
+              <a:t>RMB 1.35T+</a:t>
             </a:r>
           </a:p>
         </p:txBody>
@@ -35445,7 +35445,7 @@
         </p:nvSpPr>
         <p:spPr>
           <a:xfrm>
-            <a:off x="704088" y="2523744"/>
+            <a:off x="704088" y="2505456"/>
             <a:ext cx="3182112" cy="1371600"/>
           </a:xfrm>
           <a:prstGeom prst="rect">
@@ -35568,8 +35568,8 @@
         </p:nvSpPr>
         <p:spPr>
           <a:xfrm>
-            <a:off x="4434840" y="1316736"/>
-            <a:ext cx="3182112" cy="237744"/>
+            <a:off x="4434840" y="1280160"/>
+            <a:ext cx="3182112" cy="256032"/>
           </a:xfrm>
           <a:prstGeom prst="rect">
             <a:avLst/>
@@ -35585,47 +35585,47 @@
               <a:rPr sz="1300" b="1" i="0">
                 <a:solidFill>
                   <a:srgbClr val="0A6B63"/>
-                </a:solidFill>
-                <a:latin typeface="Segoe UI"/>
-                <a:ea typeface="Segoe UI"/>
-                <a:cs typeface="Segoe UI"/>
-              </a:rPr>
-              <a:t>SAM</a:t>
-            </a:r>
-          </a:p>
-        </p:txBody>
-      </p:sp>
-      <p:sp>
-        <p:nvSpPr>
-          <p:cNvPr id="14" name="TextBox 13"/>
-          <p:cNvSpPr txBox="1"/>
-          <p:nvPr/>
-        </p:nvSpPr>
-        <p:spPr>
-          <a:xfrm>
-            <a:off x="4434840" y="1609344"/>
-            <a:ext cx="3182112" cy="530352"/>
-          </a:xfrm>
-          <a:prstGeom prst="rect">
-            <a:avLst/>
-          </a:prstGeom>
-          <a:noFill/>
-        </p:spPr>
-        <p:txBody>
-          <a:bodyPr wrap="square" anchor="t"/>
-          <a:lstStyle/>
-          <a:p>
-            <a:pPr algn="l"/>
-            <a:r>
-              <a:rPr sz="3000" b="1" i="0">
-                <a:solidFill>
-                  <a:srgbClr val="0B1F33"/>
                 </a:solidFill>
                 <a:latin typeface="Georgia"/>
                 <a:ea typeface="Georgia"/>
                 <a:cs typeface="Georgia"/>
               </a:rPr>
-              <a:t>US$30B+</a:t>
+              <a:t>02   ·   SAM</a:t>
+            </a:r>
+          </a:p>
+        </p:txBody>
+      </p:sp>
+      <p:sp>
+        <p:nvSpPr>
+          <p:cNvPr id="14" name="TextBox 13"/>
+          <p:cNvSpPr txBox="1"/>
+          <p:nvPr/>
+        </p:nvSpPr>
+        <p:spPr>
+          <a:xfrm>
+            <a:off x="4434840" y="1591056"/>
+            <a:ext cx="3182112" cy="530352"/>
+          </a:xfrm>
+          <a:prstGeom prst="rect">
+            <a:avLst/>
+          </a:prstGeom>
+          <a:noFill/>
+        </p:spPr>
+        <p:txBody>
+          <a:bodyPr wrap="square" anchor="t"/>
+          <a:lstStyle/>
+          <a:p>
+            <a:pPr algn="l"/>
+            <a:r>
+              <a:rPr sz="2800" b="1" i="0">
+                <a:solidFill>
+                  <a:srgbClr val="0B1F33"/>
+                </a:solidFill>
+                <a:latin typeface="Georgia"/>
+                <a:ea typeface="Georgia"/>
+                <a:cs typeface="Georgia"/>
+              </a:rPr>
+              <a:t>US$ 30B+</a:t>
             </a:r>
           </a:p>
         </p:txBody>
@@ -35638,7 +35638,7 @@
         </p:nvSpPr>
         <p:spPr>
           <a:xfrm>
-            <a:off x="4434840" y="2176272"/>
+            <a:off x="4434840" y="2157984"/>
             <a:ext cx="3182112" cy="274320"/>
           </a:xfrm>
           <a:prstGeom prst="rect">
@@ -35656,11 +35656,11 @@
                 <a:solidFill>
                   <a:srgbClr val="14283C"/>
                 </a:solidFill>
-                <a:latin typeface="Segoe UI"/>
-                <a:ea typeface="Segoe UI"/>
-                <a:cs typeface="Segoe UI"/>
-              </a:rPr>
-              <a:t>RMB 200 billion+</a:t>
+                <a:latin typeface="Georgia"/>
+                <a:ea typeface="Georgia"/>
+                <a:cs typeface="Georgia"/>
+              </a:rPr>
+              <a:t>RMB 200B+</a:t>
             </a:r>
           </a:p>
         </p:txBody>
@@ -35673,7 +35673,7 @@
         </p:nvSpPr>
         <p:spPr>
           <a:xfrm>
-            <a:off x="4434840" y="2523744"/>
+            <a:off x="4434840" y="2505456"/>
             <a:ext cx="3182112" cy="1371600"/>
           </a:xfrm>
           <a:prstGeom prst="rect">
@@ -35796,8 +35796,8 @@
         </p:nvSpPr>
         <p:spPr>
           <a:xfrm>
-            <a:off x="8165592" y="1316736"/>
-            <a:ext cx="3182112" cy="237744"/>
+            <a:off x="8165592" y="1280160"/>
+            <a:ext cx="3182112" cy="256032"/>
           </a:xfrm>
           <a:prstGeom prst="rect">
             <a:avLst/>
@@ -35813,47 +35813,47 @@
               <a:rPr sz="1300" b="1" i="0">
                 <a:solidFill>
                   <a:srgbClr val="0A6B63"/>
-                </a:solidFill>
-                <a:latin typeface="Segoe UI"/>
-                <a:ea typeface="Segoe UI"/>
-                <a:cs typeface="Segoe UI"/>
-              </a:rPr>
-              <a:t>SOM</a:t>
-            </a:r>
-          </a:p>
-        </p:txBody>
-      </p:sp>
-      <p:sp>
-        <p:nvSpPr>
-          <p:cNvPr id="20" name="TextBox 19"/>
-          <p:cNvSpPr txBox="1"/>
-          <p:nvPr/>
-        </p:nvSpPr>
-        <p:spPr>
-          <a:xfrm>
-            <a:off x="8165592" y="1609344"/>
-            <a:ext cx="3182112" cy="530352"/>
-          </a:xfrm>
-          <a:prstGeom prst="rect">
-            <a:avLst/>
-          </a:prstGeom>
-          <a:noFill/>
-        </p:spPr>
-        <p:txBody>
-          <a:bodyPr wrap="square" anchor="t"/>
-          <a:lstStyle/>
-          <a:p>
-            <a:pPr algn="l"/>
-            <a:r>
-              <a:rPr sz="3000" b="1" i="0">
-                <a:solidFill>
-                  <a:srgbClr val="0B1F33"/>
                 </a:solidFill>
                 <a:latin typeface="Georgia"/>
                 <a:ea typeface="Georgia"/>
                 <a:cs typeface="Georgia"/>
               </a:rPr>
-              <a:t>US$1.5B+</a:t>
+              <a:t>03   ·   SOM</a:t>
+            </a:r>
+          </a:p>
+        </p:txBody>
+      </p:sp>
+      <p:sp>
+        <p:nvSpPr>
+          <p:cNvPr id="20" name="TextBox 19"/>
+          <p:cNvSpPr txBox="1"/>
+          <p:nvPr/>
+        </p:nvSpPr>
+        <p:spPr>
+          <a:xfrm>
+            <a:off x="8165592" y="1591056"/>
+            <a:ext cx="3182112" cy="530352"/>
+          </a:xfrm>
+          <a:prstGeom prst="rect">
+            <a:avLst/>
+          </a:prstGeom>
+          <a:noFill/>
+        </p:spPr>
+        <p:txBody>
+          <a:bodyPr wrap="square" anchor="t"/>
+          <a:lstStyle/>
+          <a:p>
+            <a:pPr algn="l"/>
+            <a:r>
+              <a:rPr sz="2800" b="1" i="0">
+                <a:solidFill>
+                  <a:srgbClr val="0B1F33"/>
+                </a:solidFill>
+                <a:latin typeface="Georgia"/>
+                <a:ea typeface="Georgia"/>
+                <a:cs typeface="Georgia"/>
+              </a:rPr>
+              <a:t>US$ 1.5B+</a:t>
             </a:r>
           </a:p>
         </p:txBody>
@@ -35866,7 +35866,7 @@
         </p:nvSpPr>
         <p:spPr>
           <a:xfrm>
-            <a:off x="8165592" y="2176272"/>
+            <a:off x="8165592" y="2157984"/>
             <a:ext cx="3182112" cy="274320"/>
           </a:xfrm>
           <a:prstGeom prst="rect">
@@ -35884,11 +35884,11 @@
                 <a:solidFill>
                   <a:srgbClr val="14283C"/>
                 </a:solidFill>
-                <a:latin typeface="Segoe UI"/>
-                <a:ea typeface="Segoe UI"/>
-                <a:cs typeface="Segoe UI"/>
-              </a:rPr>
-              <a:t>RMB 10 billion+</a:t>
+                <a:latin typeface="Georgia"/>
+                <a:ea typeface="Georgia"/>
+                <a:cs typeface="Georgia"/>
+              </a:rPr>
+              <a:t>RMB 10B+</a:t>
             </a:r>
           </a:p>
         </p:txBody>
@@ -35901,7 +35901,7 @@
         </p:nvSpPr>
         <p:spPr>
           <a:xfrm>
-            <a:off x="8165592" y="2523744"/>
+            <a:off x="8165592" y="2505456"/>
             <a:ext cx="3182112" cy="1371600"/>
           </a:xfrm>
           <a:prstGeom prst="rect">
@@ -35923,7 +35923,7 @@
                 <a:ea typeface="Segoe UI"/>
                 <a:cs typeface="Segoe UI"/>
               </a:rPr>
-              <a:t>AI resume &amp; career-assistant demand in initial markets: China, U.S., and English-speaking Asia.</a:t>
+              <a:t>AI resume and career-assistant demand in initial markets: China, the U.S., and English-speaking Asia.</a:t>
             </a:r>
           </a:p>
         </p:txBody>
@@ -36024,8 +36024,8 @@
         </p:nvSpPr>
         <p:spPr>
           <a:xfrm>
-            <a:off x="777240" y="4370832"/>
-            <a:ext cx="10607040" cy="256032"/>
+            <a:off x="777240" y="4334256"/>
+            <a:ext cx="10607040" cy="237744"/>
           </a:xfrm>
           <a:prstGeom prst="rect">
             <a:avLst/>
@@ -36046,7 +36046,7 @@
                 <a:ea typeface="Segoe UI"/>
                 <a:cs typeface="Segoe UI"/>
               </a:rPr>
-              <a:t>51 CAREERS  ·  ILLUSTRATIVE 3-YEAR REVENUE OPPORTUNITY</a:t>
+              <a:t>51 CAREERS  ·  2027E–2029E REVENUE</a:t>
             </a:r>
           </a:p>
         </p:txBody>
@@ -36059,161 +36059,56 @@
         </p:nvSpPr>
         <p:spPr>
           <a:xfrm>
-            <a:off x="822960" y="4736592"/>
-            <a:ext cx="3291840" cy="219456"/>
-          </a:xfrm>
-          <a:prstGeom prst="rect">
-            <a:avLst/>
-          </a:prstGeom>
-          <a:noFill/>
-        </p:spPr>
-        <p:txBody>
-          <a:bodyPr wrap="square" anchor="t"/>
-          <a:lstStyle/>
-          <a:p>
-            <a:pPr algn="l"/>
-            <a:r>
-              <a:rPr sz="1200" b="1" i="0">
-                <a:solidFill>
-                  <a:srgbClr val="5E6E80"/>
-                </a:solidFill>
-                <a:latin typeface="Segoe UI"/>
-                <a:ea typeface="Segoe UI"/>
-                <a:cs typeface="Segoe UI"/>
-              </a:rPr>
-              <a:t>2027E</a:t>
-            </a:r>
-          </a:p>
-        </p:txBody>
-      </p:sp>
-      <p:sp>
-        <p:nvSpPr>
-          <p:cNvPr id="27" name="TextBox 26"/>
-          <p:cNvSpPr txBox="1"/>
-          <p:nvPr/>
-        </p:nvSpPr>
-        <p:spPr>
-          <a:xfrm>
-            <a:off x="822960" y="4956048"/>
-            <a:ext cx="3291840" cy="457200"/>
-          </a:xfrm>
-          <a:prstGeom prst="rect">
-            <a:avLst/>
-          </a:prstGeom>
-          <a:noFill/>
-        </p:spPr>
-        <p:txBody>
-          <a:bodyPr wrap="square" anchor="t"/>
-          <a:lstStyle/>
-          <a:p>
-            <a:pPr algn="l"/>
-            <a:r>
-              <a:rPr sz="2400" b="1" i="0">
-                <a:solidFill>
-                  <a:srgbClr val="0B1F33"/>
+            <a:off x="713232" y="4663440"/>
+            <a:ext cx="3383280" cy="219456"/>
+          </a:xfrm>
+          <a:prstGeom prst="rect">
+            <a:avLst/>
+          </a:prstGeom>
+          <a:noFill/>
+        </p:spPr>
+        <p:txBody>
+          <a:bodyPr wrap="square" anchor="t"/>
+          <a:lstStyle/>
+          <a:p>
+            <a:pPr algn="l"/>
+            <a:r>
+              <a:rPr sz="1300" b="1" i="0">
+                <a:solidFill>
+                  <a:srgbClr val="0A6B63"/>
                 </a:solidFill>
                 <a:latin typeface="Georgia"/>
                 <a:ea typeface="Georgia"/>
                 <a:cs typeface="Georgia"/>
               </a:rPr>
-              <a:t>US$ 2.0M</a:t>
-            </a:r>
-          </a:p>
-        </p:txBody>
-      </p:sp>
-      <p:sp>
-        <p:nvSpPr>
-          <p:cNvPr id="28" name="TextBox 27"/>
-          <p:cNvSpPr txBox="1"/>
-          <p:nvPr/>
-        </p:nvSpPr>
-        <p:spPr>
-          <a:xfrm>
-            <a:off x="822960" y="5440680"/>
-            <a:ext cx="3291840" cy="256032"/>
-          </a:xfrm>
-          <a:prstGeom prst="rect">
-            <a:avLst/>
-          </a:prstGeom>
-          <a:noFill/>
-        </p:spPr>
-        <p:txBody>
-          <a:bodyPr wrap="square" anchor="t"/>
-          <a:lstStyle/>
-          <a:p>
-            <a:pPr algn="l"/>
-            <a:r>
-              <a:rPr sz="1300" b="0" i="0">
-                <a:solidFill>
-                  <a:srgbClr val="5E6E80"/>
-                </a:solidFill>
-                <a:latin typeface="Segoe UI"/>
-                <a:ea typeface="Segoe UI"/>
-                <a:cs typeface="Segoe UI"/>
-              </a:rPr>
-              <a:t>≈ RMB 13.5M</a:t>
-            </a:r>
-          </a:p>
-        </p:txBody>
-      </p:sp>
-      <p:sp>
-        <p:nvSpPr>
-          <p:cNvPr id="29" name="TextBox 28"/>
-          <p:cNvSpPr txBox="1"/>
-          <p:nvPr/>
-        </p:nvSpPr>
-        <p:spPr>
-          <a:xfrm>
-            <a:off x="4480560" y="4736592"/>
-            <a:ext cx="3291840" cy="219456"/>
-          </a:xfrm>
-          <a:prstGeom prst="rect">
-            <a:avLst/>
-          </a:prstGeom>
-          <a:noFill/>
-        </p:spPr>
-        <p:txBody>
-          <a:bodyPr wrap="square" anchor="t"/>
-          <a:lstStyle/>
-          <a:p>
-            <a:pPr algn="l"/>
-            <a:r>
-              <a:rPr sz="1200" b="1" i="0">
-                <a:solidFill>
-                  <a:srgbClr val="5E6E80"/>
-                </a:solidFill>
-                <a:latin typeface="Segoe UI"/>
-                <a:ea typeface="Segoe UI"/>
-                <a:cs typeface="Segoe UI"/>
-              </a:rPr>
-              <a:t>2028E</a:t>
-            </a:r>
-          </a:p>
-        </p:txBody>
-      </p:sp>
-      <p:sp>
-        <p:nvSpPr>
-          <p:cNvPr id="30" name="TextBox 29"/>
-          <p:cNvSpPr txBox="1"/>
-          <p:nvPr/>
-        </p:nvSpPr>
-        <p:spPr>
-          <a:xfrm>
-            <a:off x="4480560" y="4956048"/>
-            <a:ext cx="3291840" cy="457200"/>
-          </a:xfrm>
-          <a:prstGeom prst="rect">
-            <a:avLst/>
-          </a:prstGeom>
-          <a:noFill/>
-        </p:spPr>
-        <p:txBody>
-          <a:bodyPr wrap="square" anchor="t"/>
-          <a:lstStyle/>
-          <a:p>
-            <a:pPr algn="l"/>
-            <a:r>
-              <a:rPr sz="2400" b="1" i="0">
+              <a:t>2027E</a:t>
+            </a:r>
+          </a:p>
+        </p:txBody>
+      </p:sp>
+      <p:sp>
+        <p:nvSpPr>
+          <p:cNvPr id="27" name="TextBox 26"/>
+          <p:cNvSpPr txBox="1"/>
+          <p:nvPr/>
+        </p:nvSpPr>
+        <p:spPr>
+          <a:xfrm>
+            <a:off x="713232" y="4901184"/>
+            <a:ext cx="3383280" cy="457200"/>
+          </a:xfrm>
+          <a:prstGeom prst="rect">
+            <a:avLst/>
+          </a:prstGeom>
+          <a:noFill/>
+        </p:spPr>
+        <p:txBody>
+          <a:bodyPr wrap="square" anchor="t"/>
+          <a:lstStyle/>
+          <a:p>
+            <a:pPr algn="l"/>
+            <a:r>
+              <a:rPr sz="2600" b="1" i="0">
                 <a:solidFill>
                   <a:srgbClr val="0B1F33"/>
                 </a:solidFill>
@@ -36221,111 +36116,216 @@
                 <a:ea typeface="Georgia"/>
                 <a:cs typeface="Georgia"/>
               </a:rPr>
-              <a:t>US$ 8.0M</a:t>
-            </a:r>
-          </a:p>
-        </p:txBody>
-      </p:sp>
-      <p:sp>
-        <p:nvSpPr>
-          <p:cNvPr id="31" name="TextBox 30"/>
-          <p:cNvSpPr txBox="1"/>
-          <p:nvPr/>
-        </p:nvSpPr>
-        <p:spPr>
-          <a:xfrm>
-            <a:off x="4480560" y="5440680"/>
-            <a:ext cx="3291840" cy="256032"/>
-          </a:xfrm>
-          <a:prstGeom prst="rect">
-            <a:avLst/>
-          </a:prstGeom>
-          <a:noFill/>
-        </p:spPr>
-        <p:txBody>
-          <a:bodyPr wrap="square" anchor="t"/>
-          <a:lstStyle/>
-          <a:p>
-            <a:pPr algn="l"/>
-            <a:r>
-              <a:rPr sz="1300" b="0" i="0">
+              <a:t>US$ 2.0M</a:t>
+            </a:r>
+          </a:p>
+        </p:txBody>
+      </p:sp>
+      <p:sp>
+        <p:nvSpPr>
+          <p:cNvPr id="28" name="TextBox 27"/>
+          <p:cNvSpPr txBox="1"/>
+          <p:nvPr/>
+        </p:nvSpPr>
+        <p:spPr>
+          <a:xfrm>
+            <a:off x="713232" y="5394960"/>
+            <a:ext cx="3383280" cy="256032"/>
+          </a:xfrm>
+          <a:prstGeom prst="rect">
+            <a:avLst/>
+          </a:prstGeom>
+          <a:noFill/>
+        </p:spPr>
+        <p:txBody>
+          <a:bodyPr wrap="square" anchor="t"/>
+          <a:lstStyle/>
+          <a:p>
+            <a:pPr algn="l"/>
+            <a:r>
+              <a:rPr sz="1400" b="0" i="0">
                 <a:solidFill>
                   <a:srgbClr val="5E6E80"/>
-                </a:solidFill>
-                <a:latin typeface="Segoe UI"/>
-                <a:ea typeface="Segoe UI"/>
-                <a:cs typeface="Segoe UI"/>
-              </a:rPr>
-              <a:t>≈ RMB 53.8M</a:t>
-            </a:r>
-          </a:p>
-        </p:txBody>
-      </p:sp>
-      <p:sp>
-        <p:nvSpPr>
-          <p:cNvPr id="32" name="TextBox 31"/>
-          <p:cNvSpPr txBox="1"/>
-          <p:nvPr/>
-        </p:nvSpPr>
-        <p:spPr>
-          <a:xfrm>
-            <a:off x="8138160" y="4736592"/>
-            <a:ext cx="3291840" cy="219456"/>
-          </a:xfrm>
-          <a:prstGeom prst="rect">
-            <a:avLst/>
-          </a:prstGeom>
-          <a:noFill/>
-        </p:spPr>
-        <p:txBody>
-          <a:bodyPr wrap="square" anchor="t"/>
-          <a:lstStyle/>
-          <a:p>
-            <a:pPr algn="l"/>
-            <a:r>
-              <a:rPr sz="1200" b="1" i="0">
-                <a:solidFill>
-                  <a:srgbClr val="5E6E80"/>
-                </a:solidFill>
-                <a:latin typeface="Segoe UI"/>
-                <a:ea typeface="Segoe UI"/>
-                <a:cs typeface="Segoe UI"/>
-              </a:rPr>
-              <a:t>2029E</a:t>
-            </a:r>
-          </a:p>
-        </p:txBody>
-      </p:sp>
-      <p:sp>
-        <p:nvSpPr>
-          <p:cNvPr id="33" name="TextBox 32"/>
-          <p:cNvSpPr txBox="1"/>
-          <p:nvPr/>
-        </p:nvSpPr>
-        <p:spPr>
-          <a:xfrm>
-            <a:off x="8138160" y="4956048"/>
-            <a:ext cx="3291840" cy="457200"/>
-          </a:xfrm>
-          <a:prstGeom prst="rect">
-            <a:avLst/>
-          </a:prstGeom>
-          <a:noFill/>
-        </p:spPr>
-        <p:txBody>
-          <a:bodyPr wrap="square" anchor="t"/>
-          <a:lstStyle/>
-          <a:p>
-            <a:pPr algn="l"/>
-            <a:r>
-              <a:rPr sz="2400" b="1" i="0">
-                <a:solidFill>
-                  <a:srgbClr val="0B1F33"/>
                 </a:solidFill>
                 <a:latin typeface="Georgia"/>
                 <a:ea typeface="Georgia"/>
                 <a:cs typeface="Georgia"/>
               </a:rPr>
+              <a:t>≈ RMB 13.5M</a:t>
+            </a:r>
+          </a:p>
+        </p:txBody>
+      </p:sp>
+      <p:sp>
+        <p:nvSpPr>
+          <p:cNvPr id="29" name="TextBox 28"/>
+          <p:cNvSpPr txBox="1"/>
+          <p:nvPr/>
+        </p:nvSpPr>
+        <p:spPr>
+          <a:xfrm>
+            <a:off x="4443984" y="4663440"/>
+            <a:ext cx="3383280" cy="219456"/>
+          </a:xfrm>
+          <a:prstGeom prst="rect">
+            <a:avLst/>
+          </a:prstGeom>
+          <a:noFill/>
+        </p:spPr>
+        <p:txBody>
+          <a:bodyPr wrap="square" anchor="t"/>
+          <a:lstStyle/>
+          <a:p>
+            <a:pPr algn="l"/>
+            <a:r>
+              <a:rPr sz="1300" b="1" i="0">
+                <a:solidFill>
+                  <a:srgbClr val="0A6B63"/>
+                </a:solidFill>
+                <a:latin typeface="Georgia"/>
+                <a:ea typeface="Georgia"/>
+                <a:cs typeface="Georgia"/>
+              </a:rPr>
+              <a:t>2028E</a:t>
+            </a:r>
+          </a:p>
+        </p:txBody>
+      </p:sp>
+      <p:sp>
+        <p:nvSpPr>
+          <p:cNvPr id="30" name="TextBox 29"/>
+          <p:cNvSpPr txBox="1"/>
+          <p:nvPr/>
+        </p:nvSpPr>
+        <p:spPr>
+          <a:xfrm>
+            <a:off x="4443984" y="4901184"/>
+            <a:ext cx="3383280" cy="457200"/>
+          </a:xfrm>
+          <a:prstGeom prst="rect">
+            <a:avLst/>
+          </a:prstGeom>
+          <a:noFill/>
+        </p:spPr>
+        <p:txBody>
+          <a:bodyPr wrap="square" anchor="t"/>
+          <a:lstStyle/>
+          <a:p>
+            <a:pPr algn="l"/>
+            <a:r>
+              <a:rPr sz="2600" b="1" i="0">
+                <a:solidFill>
+                  <a:srgbClr val="0B1F33"/>
+                </a:solidFill>
+                <a:latin typeface="Georgia"/>
+                <a:ea typeface="Georgia"/>
+                <a:cs typeface="Georgia"/>
+              </a:rPr>
+              <a:t>US$ 8.0M</a:t>
+            </a:r>
+          </a:p>
+        </p:txBody>
+      </p:sp>
+      <p:sp>
+        <p:nvSpPr>
+          <p:cNvPr id="31" name="TextBox 30"/>
+          <p:cNvSpPr txBox="1"/>
+          <p:nvPr/>
+        </p:nvSpPr>
+        <p:spPr>
+          <a:xfrm>
+            <a:off x="4443984" y="5394960"/>
+            <a:ext cx="3383280" cy="256032"/>
+          </a:xfrm>
+          <a:prstGeom prst="rect">
+            <a:avLst/>
+          </a:prstGeom>
+          <a:noFill/>
+        </p:spPr>
+        <p:txBody>
+          <a:bodyPr wrap="square" anchor="t"/>
+          <a:lstStyle/>
+          <a:p>
+            <a:pPr algn="l"/>
+            <a:r>
+              <a:rPr sz="1400" b="0" i="0">
+                <a:solidFill>
+                  <a:srgbClr val="5E6E80"/>
+                </a:solidFill>
+                <a:latin typeface="Georgia"/>
+                <a:ea typeface="Georgia"/>
+                <a:cs typeface="Georgia"/>
+              </a:rPr>
+              <a:t>≈ RMB 53.8M</a:t>
+            </a:r>
+          </a:p>
+        </p:txBody>
+      </p:sp>
+      <p:sp>
+        <p:nvSpPr>
+          <p:cNvPr id="32" name="TextBox 31"/>
+          <p:cNvSpPr txBox="1"/>
+          <p:nvPr/>
+        </p:nvSpPr>
+        <p:spPr>
+          <a:xfrm>
+            <a:off x="8174736" y="4663440"/>
+            <a:ext cx="3383280" cy="219456"/>
+          </a:xfrm>
+          <a:prstGeom prst="rect">
+            <a:avLst/>
+          </a:prstGeom>
+          <a:noFill/>
+        </p:spPr>
+        <p:txBody>
+          <a:bodyPr wrap="square" anchor="t"/>
+          <a:lstStyle/>
+          <a:p>
+            <a:pPr algn="l"/>
+            <a:r>
+              <a:rPr sz="1300" b="1" i="0">
+                <a:solidFill>
+                  <a:srgbClr val="0A6B63"/>
+                </a:solidFill>
+                <a:latin typeface="Georgia"/>
+                <a:ea typeface="Georgia"/>
+                <a:cs typeface="Georgia"/>
+              </a:rPr>
+              <a:t>2029E</a:t>
+            </a:r>
+          </a:p>
+        </p:txBody>
+      </p:sp>
+      <p:sp>
+        <p:nvSpPr>
+          <p:cNvPr id="33" name="TextBox 32"/>
+          <p:cNvSpPr txBox="1"/>
+          <p:nvPr/>
+        </p:nvSpPr>
+        <p:spPr>
+          <a:xfrm>
+            <a:off x="8174736" y="4901184"/>
+            <a:ext cx="3383280" cy="457200"/>
+          </a:xfrm>
+          <a:prstGeom prst="rect">
+            <a:avLst/>
+          </a:prstGeom>
+          <a:noFill/>
+        </p:spPr>
+        <p:txBody>
+          <a:bodyPr wrap="square" anchor="t"/>
+          <a:lstStyle/>
+          <a:p>
+            <a:pPr algn="l"/>
+            <a:r>
+              <a:rPr sz="2600" b="1" i="0">
+                <a:solidFill>
+                  <a:srgbClr val="0B1F33"/>
+                </a:solidFill>
+                <a:latin typeface="Georgia"/>
+                <a:ea typeface="Georgia"/>
+                <a:cs typeface="Georgia"/>
+              </a:rPr>
               <a:t>US$ 28.0M</a:t>
             </a:r>
           </a:p>
@@ -36339,27 +36339,27 @@
         </p:nvSpPr>
         <p:spPr>
           <a:xfrm>
-            <a:off x="8138160" y="5440680"/>
-            <a:ext cx="3291840" cy="256032"/>
-          </a:xfrm>
-          <a:prstGeom prst="rect">
-            <a:avLst/>
-          </a:prstGeom>
-          <a:noFill/>
-        </p:spPr>
-        <p:txBody>
-          <a:bodyPr wrap="square" anchor="t"/>
-          <a:lstStyle/>
-          <a:p>
-            <a:pPr algn="l"/>
-            <a:r>
-              <a:rPr sz="1300" b="0" i="0">
+            <a:off x="8174736" y="5394960"/>
+            <a:ext cx="3383280" cy="256032"/>
+          </a:xfrm>
+          <a:prstGeom prst="rect">
+            <a:avLst/>
+          </a:prstGeom>
+          <a:noFill/>
+        </p:spPr>
+        <p:txBody>
+          <a:bodyPr wrap="square" anchor="t"/>
+          <a:lstStyle/>
+          <a:p>
+            <a:pPr algn="l"/>
+            <a:r>
+              <a:rPr sz="1400" b="0" i="0">
                 <a:solidFill>
                   <a:srgbClr val="5E6E80"/>
                 </a:solidFill>
-                <a:latin typeface="Segoe UI"/>
-                <a:ea typeface="Segoe UI"/>
-                <a:cs typeface="Segoe UI"/>
+                <a:latin typeface="Georgia"/>
+                <a:ea typeface="Georgia"/>
+                <a:cs typeface="Georgia"/>
               </a:rPr>
               <a:t>≈ RMB 188.4M</a:t>
             </a:r>
@@ -36374,21 +36374,21 @@
         </p:nvSpPr>
         <p:spPr>
           <a:xfrm>
-            <a:off x="777240" y="5806440"/>
-            <a:ext cx="10607040" cy="292608"/>
-          </a:xfrm>
-          <a:prstGeom prst="rect">
-            <a:avLst/>
-          </a:prstGeom>
-          <a:noFill/>
-        </p:spPr>
-        <p:txBody>
-          <a:bodyPr wrap="square" anchor="t"/>
-          <a:lstStyle/>
-          <a:p>
-            <a:pPr algn="l"/>
-            <a:r>
-              <a:rPr sz="1000" b="0" i="0">
+            <a:off x="713232" y="5779008"/>
+            <a:ext cx="10698480" cy="329184"/>
+          </a:xfrm>
+          <a:prstGeom prst="rect">
+            <a:avLst/>
+          </a:prstGeom>
+          <a:noFill/>
+        </p:spPr>
+        <p:txBody>
+          <a:bodyPr wrap="square" anchor="t"/>
+          <a:lstStyle/>
+          <a:p>
+            <a:pPr algn="l"/>
+            <a:r>
+              <a:rPr sz="1200" b="0" i="0">
                 <a:solidFill>
                   <a:srgbClr val="5E6E80"/>
                 </a:solidFill>
@@ -36396,7 +36396,7 @@
                 <a:ea typeface="Segoe UI"/>
                 <a:cs typeface="Segoe UI"/>
               </a:rPr>
-              <a:t>Logic: global job seekers → addressable AI Resume users → paid conversion → stacked revenue (AI + services + commission + B2B + ads).</a:t>
+              <a:t>Logic: global job seekers  →  addressable AI Resume users  →  paid conversion  →  stacked revenue (AI + services + commission + B2B + ads).</a:t>
             </a:r>
           </a:p>
         </p:txBody>

--- a/51Careers_Addition.pptx
+++ b/51Careers_Addition.pptx
@@ -36740,7 +36740,7 @@
         <p:spPr>
           <a:xfrm>
             <a:off x="502920" y="1115568"/>
-            <a:ext cx="6949440" cy="658368"/>
+            <a:ext cx="6903720" cy="676656"/>
           </a:xfrm>
           <a:prstGeom prst="roundRect">
             <a:avLst>
@@ -36785,7 +36785,7 @@
         <p:spPr>
           <a:xfrm>
             <a:off x="502920" y="1115568"/>
-            <a:ext cx="73152" cy="658368"/>
+            <a:ext cx="73152" cy="676656"/>
           </a:xfrm>
           <a:prstGeom prst="rect">
             <a:avLst/>
@@ -36821,29 +36821,50 @@
       </p:sp>
       <p:sp>
         <p:nvSpPr>
-          <p:cNvPr id="7" name="TextBox 6"/>
-          <p:cNvSpPr txBox="1"/>
-          <p:nvPr/>
-        </p:nvSpPr>
-        <p:spPr>
-          <a:xfrm>
-            <a:off x="777240" y="1261872"/>
-            <a:ext cx="457200" cy="384048"/>
-          </a:xfrm>
-          <a:prstGeom prst="rect">
-            <a:avLst/>
-          </a:prstGeom>
-          <a:noFill/>
-        </p:spPr>
-        <p:txBody>
-          <a:bodyPr wrap="square" anchor="t"/>
-          <a:lstStyle/>
-          <a:p>
-            <a:pPr algn="l"/>
-            <a:r>
-              <a:rPr sz="1600" b="1" i="0">
-                <a:solidFill>
-                  <a:srgbClr val="0A6B63"/>
+          <p:cNvPr id="7" name="Rounded Rectangle 6"/>
+          <p:cNvSpPr/>
+          <p:nvPr/>
+        </p:nvSpPr>
+        <p:spPr>
+          <a:xfrm>
+            <a:off x="713232" y="1271016"/>
+            <a:ext cx="512064" cy="365760"/>
+          </a:xfrm>
+          <a:prstGeom prst="roundRect">
+            <a:avLst>
+              <a:gd name="adj" fmla="val 25000"/>
+            </a:avLst>
+          </a:prstGeom>
+          <a:solidFill>
+            <a:srgbClr val="0A6B63"/>
+          </a:solidFill>
+          <a:ln>
+            <a:noFill/>
+          </a:ln>
+        </p:spPr>
+        <p:style>
+          <a:lnRef idx="1">
+            <a:schemeClr val="accent1"/>
+          </a:lnRef>
+          <a:fillRef idx="3">
+            <a:schemeClr val="accent1"/>
+          </a:fillRef>
+          <a:effectRef idx="2">
+            <a:schemeClr val="accent1"/>
+          </a:effectRef>
+          <a:fontRef idx="minor">
+            <a:schemeClr val="lt1"/>
+          </a:fontRef>
+        </p:style>
+        <p:txBody>
+          <a:bodyPr rtlCol="0" anchor="ctr" wrap="square"/>
+          <a:lstStyle/>
+          <a:p>
+            <a:pPr algn="ctr"/>
+            <a:r>
+              <a:rPr sz="1300" b="1" i="0">
+                <a:solidFill>
+                  <a:srgbClr val="FFFFFF"/>
                 </a:solidFill>
                 <a:latin typeface="Georgia"/>
                 <a:ea typeface="Georgia"/>
@@ -36862,21 +36883,21 @@
         </p:nvSpPr>
         <p:spPr>
           <a:xfrm>
-            <a:off x="1325880" y="1261872"/>
-            <a:ext cx="5852160" cy="384048"/>
-          </a:xfrm>
-          <a:prstGeom prst="rect">
-            <a:avLst/>
-          </a:prstGeom>
-          <a:noFill/>
-        </p:spPr>
-        <p:txBody>
-          <a:bodyPr wrap="square" anchor="t"/>
-          <a:lstStyle/>
-          <a:p>
-            <a:pPr algn="l"/>
-            <a:r>
-              <a:rPr sz="1700" b="1" i="0">
+            <a:off x="1371600" y="1115568"/>
+            <a:ext cx="5852160" cy="676656"/>
+          </a:xfrm>
+          <a:prstGeom prst="rect">
+            <a:avLst/>
+          </a:prstGeom>
+          <a:noFill/>
+        </p:spPr>
+        <p:txBody>
+          <a:bodyPr wrap="square" anchor="ctr"/>
+          <a:lstStyle/>
+          <a:p>
+            <a:pPr algn="l"/>
+            <a:r>
+              <a:rPr sz="1600" b="1" i="0">
                 <a:solidFill>
                   <a:srgbClr val="0B1F33"/>
                 </a:solidFill>
@@ -36897,8 +36918,8 @@
         </p:nvSpPr>
         <p:spPr>
           <a:xfrm>
-            <a:off x="502920" y="1828800"/>
-            <a:ext cx="6949440" cy="658368"/>
+            <a:off x="502920" y="1865376"/>
+            <a:ext cx="6903720" cy="676656"/>
           </a:xfrm>
           <a:prstGeom prst="roundRect">
             <a:avLst>
@@ -36942,8 +36963,8 @@
         </p:nvSpPr>
         <p:spPr>
           <a:xfrm>
-            <a:off x="502920" y="1828800"/>
-            <a:ext cx="73152" cy="658368"/>
+            <a:off x="502920" y="1865376"/>
+            <a:ext cx="73152" cy="676656"/>
           </a:xfrm>
           <a:prstGeom prst="rect">
             <a:avLst/>
@@ -36979,29 +37000,50 @@
       </p:sp>
       <p:sp>
         <p:nvSpPr>
-          <p:cNvPr id="11" name="TextBox 10"/>
-          <p:cNvSpPr txBox="1"/>
-          <p:nvPr/>
-        </p:nvSpPr>
-        <p:spPr>
-          <a:xfrm>
-            <a:off x="777240" y="1975104"/>
-            <a:ext cx="457200" cy="384048"/>
-          </a:xfrm>
-          <a:prstGeom prst="rect">
-            <a:avLst/>
-          </a:prstGeom>
-          <a:noFill/>
-        </p:spPr>
-        <p:txBody>
-          <a:bodyPr wrap="square" anchor="t"/>
-          <a:lstStyle/>
-          <a:p>
-            <a:pPr algn="l"/>
-            <a:r>
-              <a:rPr sz="1600" b="1" i="0">
-                <a:solidFill>
-                  <a:srgbClr val="0A6B63"/>
+          <p:cNvPr id="11" name="Rounded Rectangle 10"/>
+          <p:cNvSpPr/>
+          <p:nvPr/>
+        </p:nvSpPr>
+        <p:spPr>
+          <a:xfrm>
+            <a:off x="713232" y="2020824"/>
+            <a:ext cx="512064" cy="365760"/>
+          </a:xfrm>
+          <a:prstGeom prst="roundRect">
+            <a:avLst>
+              <a:gd name="adj" fmla="val 25000"/>
+            </a:avLst>
+          </a:prstGeom>
+          <a:solidFill>
+            <a:srgbClr val="0A6B63"/>
+          </a:solidFill>
+          <a:ln>
+            <a:noFill/>
+          </a:ln>
+        </p:spPr>
+        <p:style>
+          <a:lnRef idx="1">
+            <a:schemeClr val="accent1"/>
+          </a:lnRef>
+          <a:fillRef idx="3">
+            <a:schemeClr val="accent1"/>
+          </a:fillRef>
+          <a:effectRef idx="2">
+            <a:schemeClr val="accent1"/>
+          </a:effectRef>
+          <a:fontRef idx="minor">
+            <a:schemeClr val="lt1"/>
+          </a:fontRef>
+        </p:style>
+        <p:txBody>
+          <a:bodyPr rtlCol="0" anchor="ctr" wrap="square"/>
+          <a:lstStyle/>
+          <a:p>
+            <a:pPr algn="ctr"/>
+            <a:r>
+              <a:rPr sz="1300" b="1" i="0">
+                <a:solidFill>
+                  <a:srgbClr val="FFFFFF"/>
                 </a:solidFill>
                 <a:latin typeface="Georgia"/>
                 <a:ea typeface="Georgia"/>
@@ -37020,21 +37062,21 @@
         </p:nvSpPr>
         <p:spPr>
           <a:xfrm>
-            <a:off x="1325880" y="1975104"/>
-            <a:ext cx="5852160" cy="384048"/>
-          </a:xfrm>
-          <a:prstGeom prst="rect">
-            <a:avLst/>
-          </a:prstGeom>
-          <a:noFill/>
-        </p:spPr>
-        <p:txBody>
-          <a:bodyPr wrap="square" anchor="t"/>
-          <a:lstStyle/>
-          <a:p>
-            <a:pPr algn="l"/>
-            <a:r>
-              <a:rPr sz="1700" b="1" i="0">
+            <a:off x="1371600" y="1865376"/>
+            <a:ext cx="5852160" cy="676656"/>
+          </a:xfrm>
+          <a:prstGeom prst="rect">
+            <a:avLst/>
+          </a:prstGeom>
+          <a:noFill/>
+        </p:spPr>
+        <p:txBody>
+          <a:bodyPr wrap="square" anchor="ctr"/>
+          <a:lstStyle/>
+          <a:p>
+            <a:pPr algn="l"/>
+            <a:r>
+              <a:rPr sz="1600" b="1" i="0">
                 <a:solidFill>
                   <a:srgbClr val="0B1F33"/>
                 </a:solidFill>
@@ -37055,8 +37097,8 @@
         </p:nvSpPr>
         <p:spPr>
           <a:xfrm>
-            <a:off x="502920" y="2542032"/>
-            <a:ext cx="6949440" cy="658368"/>
+            <a:off x="502920" y="2615184"/>
+            <a:ext cx="6903720" cy="676656"/>
           </a:xfrm>
           <a:prstGeom prst="roundRect">
             <a:avLst>
@@ -37100,8 +37142,8 @@
         </p:nvSpPr>
         <p:spPr>
           <a:xfrm>
-            <a:off x="502920" y="2542032"/>
-            <a:ext cx="73152" cy="658368"/>
+            <a:off x="502920" y="2615184"/>
+            <a:ext cx="73152" cy="676656"/>
           </a:xfrm>
           <a:prstGeom prst="rect">
             <a:avLst/>
@@ -37137,29 +37179,50 @@
       </p:sp>
       <p:sp>
         <p:nvSpPr>
-          <p:cNvPr id="15" name="TextBox 14"/>
-          <p:cNvSpPr txBox="1"/>
-          <p:nvPr/>
-        </p:nvSpPr>
-        <p:spPr>
-          <a:xfrm>
-            <a:off x="777240" y="2688336"/>
-            <a:ext cx="457200" cy="384048"/>
-          </a:xfrm>
-          <a:prstGeom prst="rect">
-            <a:avLst/>
-          </a:prstGeom>
-          <a:noFill/>
-        </p:spPr>
-        <p:txBody>
-          <a:bodyPr wrap="square" anchor="t"/>
-          <a:lstStyle/>
-          <a:p>
-            <a:pPr algn="l"/>
-            <a:r>
-              <a:rPr sz="1600" b="1" i="0">
-                <a:solidFill>
-                  <a:srgbClr val="0A6B63"/>
+          <p:cNvPr id="15" name="Rounded Rectangle 14"/>
+          <p:cNvSpPr/>
+          <p:nvPr/>
+        </p:nvSpPr>
+        <p:spPr>
+          <a:xfrm>
+            <a:off x="713232" y="2770632"/>
+            <a:ext cx="512064" cy="365760"/>
+          </a:xfrm>
+          <a:prstGeom prst="roundRect">
+            <a:avLst>
+              <a:gd name="adj" fmla="val 25000"/>
+            </a:avLst>
+          </a:prstGeom>
+          <a:solidFill>
+            <a:srgbClr val="0A6B63"/>
+          </a:solidFill>
+          <a:ln>
+            <a:noFill/>
+          </a:ln>
+        </p:spPr>
+        <p:style>
+          <a:lnRef idx="1">
+            <a:schemeClr val="accent1"/>
+          </a:lnRef>
+          <a:fillRef idx="3">
+            <a:schemeClr val="accent1"/>
+          </a:fillRef>
+          <a:effectRef idx="2">
+            <a:schemeClr val="accent1"/>
+          </a:effectRef>
+          <a:fontRef idx="minor">
+            <a:schemeClr val="lt1"/>
+          </a:fontRef>
+        </p:style>
+        <p:txBody>
+          <a:bodyPr rtlCol="0" anchor="ctr" wrap="square"/>
+          <a:lstStyle/>
+          <a:p>
+            <a:pPr algn="ctr"/>
+            <a:r>
+              <a:rPr sz="1300" b="1" i="0">
+                <a:solidFill>
+                  <a:srgbClr val="FFFFFF"/>
                 </a:solidFill>
                 <a:latin typeface="Georgia"/>
                 <a:ea typeface="Georgia"/>
@@ -37178,21 +37241,21 @@
         </p:nvSpPr>
         <p:spPr>
           <a:xfrm>
-            <a:off x="1325880" y="2688336"/>
-            <a:ext cx="5852160" cy="384048"/>
-          </a:xfrm>
-          <a:prstGeom prst="rect">
-            <a:avLst/>
-          </a:prstGeom>
-          <a:noFill/>
-        </p:spPr>
-        <p:txBody>
-          <a:bodyPr wrap="square" anchor="t"/>
-          <a:lstStyle/>
-          <a:p>
-            <a:pPr algn="l"/>
-            <a:r>
-              <a:rPr sz="1700" b="1" i="0">
+            <a:off x="1371600" y="2615184"/>
+            <a:ext cx="5852160" cy="676656"/>
+          </a:xfrm>
+          <a:prstGeom prst="rect">
+            <a:avLst/>
+          </a:prstGeom>
+          <a:noFill/>
+        </p:spPr>
+        <p:txBody>
+          <a:bodyPr wrap="square" anchor="ctr"/>
+          <a:lstStyle/>
+          <a:p>
+            <a:pPr algn="l"/>
+            <a:r>
+              <a:rPr sz="1600" b="1" i="0">
                 <a:solidFill>
                   <a:srgbClr val="0B1F33"/>
                 </a:solidFill>
@@ -37213,8 +37276,8 @@
         </p:nvSpPr>
         <p:spPr>
           <a:xfrm>
-            <a:off x="502920" y="3255264"/>
-            <a:ext cx="6949440" cy="658368"/>
+            <a:off x="502920" y="3364991"/>
+            <a:ext cx="6903720" cy="676656"/>
           </a:xfrm>
           <a:prstGeom prst="roundRect">
             <a:avLst>
@@ -37258,8 +37321,8 @@
         </p:nvSpPr>
         <p:spPr>
           <a:xfrm>
-            <a:off x="502920" y="3255264"/>
-            <a:ext cx="73152" cy="658368"/>
+            <a:off x="502920" y="3364991"/>
+            <a:ext cx="73152" cy="676656"/>
           </a:xfrm>
           <a:prstGeom prst="rect">
             <a:avLst/>
@@ -37295,29 +37358,50 @@
       </p:sp>
       <p:sp>
         <p:nvSpPr>
-          <p:cNvPr id="19" name="TextBox 18"/>
-          <p:cNvSpPr txBox="1"/>
-          <p:nvPr/>
-        </p:nvSpPr>
-        <p:spPr>
-          <a:xfrm>
-            <a:off x="777240" y="3401568"/>
-            <a:ext cx="457200" cy="384048"/>
-          </a:xfrm>
-          <a:prstGeom prst="rect">
-            <a:avLst/>
-          </a:prstGeom>
-          <a:noFill/>
-        </p:spPr>
-        <p:txBody>
-          <a:bodyPr wrap="square" anchor="t"/>
-          <a:lstStyle/>
-          <a:p>
-            <a:pPr algn="l"/>
-            <a:r>
-              <a:rPr sz="1600" b="1" i="0">
-                <a:solidFill>
-                  <a:srgbClr val="0A6B63"/>
+          <p:cNvPr id="19" name="Rounded Rectangle 18"/>
+          <p:cNvSpPr/>
+          <p:nvPr/>
+        </p:nvSpPr>
+        <p:spPr>
+          <a:xfrm>
+            <a:off x="713232" y="3520439"/>
+            <a:ext cx="512064" cy="365760"/>
+          </a:xfrm>
+          <a:prstGeom prst="roundRect">
+            <a:avLst>
+              <a:gd name="adj" fmla="val 25000"/>
+            </a:avLst>
+          </a:prstGeom>
+          <a:solidFill>
+            <a:srgbClr val="0A6B63"/>
+          </a:solidFill>
+          <a:ln>
+            <a:noFill/>
+          </a:ln>
+        </p:spPr>
+        <p:style>
+          <a:lnRef idx="1">
+            <a:schemeClr val="accent1"/>
+          </a:lnRef>
+          <a:fillRef idx="3">
+            <a:schemeClr val="accent1"/>
+          </a:fillRef>
+          <a:effectRef idx="2">
+            <a:schemeClr val="accent1"/>
+          </a:effectRef>
+          <a:fontRef idx="minor">
+            <a:schemeClr val="lt1"/>
+          </a:fontRef>
+        </p:style>
+        <p:txBody>
+          <a:bodyPr rtlCol="0" anchor="ctr" wrap="square"/>
+          <a:lstStyle/>
+          <a:p>
+            <a:pPr algn="ctr"/>
+            <a:r>
+              <a:rPr sz="1300" b="1" i="0">
+                <a:solidFill>
+                  <a:srgbClr val="FFFFFF"/>
                 </a:solidFill>
                 <a:latin typeface="Georgia"/>
                 <a:ea typeface="Georgia"/>
@@ -37336,21 +37420,21 @@
         </p:nvSpPr>
         <p:spPr>
           <a:xfrm>
-            <a:off x="1325880" y="3401568"/>
-            <a:ext cx="5852160" cy="384048"/>
-          </a:xfrm>
-          <a:prstGeom prst="rect">
-            <a:avLst/>
-          </a:prstGeom>
-          <a:noFill/>
-        </p:spPr>
-        <p:txBody>
-          <a:bodyPr wrap="square" anchor="t"/>
-          <a:lstStyle/>
-          <a:p>
-            <a:pPr algn="l"/>
-            <a:r>
-              <a:rPr sz="1700" b="1" i="0">
+            <a:off x="1371600" y="3364991"/>
+            <a:ext cx="5852160" cy="676656"/>
+          </a:xfrm>
+          <a:prstGeom prst="rect">
+            <a:avLst/>
+          </a:prstGeom>
+          <a:noFill/>
+        </p:spPr>
+        <p:txBody>
+          <a:bodyPr wrap="square" anchor="ctr"/>
+          <a:lstStyle/>
+          <a:p>
+            <a:pPr algn="l"/>
+            <a:r>
+              <a:rPr sz="1600" b="1" i="0">
                 <a:solidFill>
                   <a:srgbClr val="0B1F33"/>
                 </a:solidFill>
@@ -37371,8 +37455,8 @@
         </p:nvSpPr>
         <p:spPr>
           <a:xfrm>
-            <a:off x="502920" y="3968496"/>
-            <a:ext cx="6949440" cy="658368"/>
+            <a:off x="502920" y="4114800"/>
+            <a:ext cx="6903720" cy="676656"/>
           </a:xfrm>
           <a:prstGeom prst="roundRect">
             <a:avLst>
@@ -37416,8 +37500,8 @@
         </p:nvSpPr>
         <p:spPr>
           <a:xfrm>
-            <a:off x="502920" y="3968496"/>
-            <a:ext cx="73152" cy="658368"/>
+            <a:off x="502920" y="4114800"/>
+            <a:ext cx="73152" cy="676656"/>
           </a:xfrm>
           <a:prstGeom prst="rect">
             <a:avLst/>
@@ -37453,29 +37537,50 @@
       </p:sp>
       <p:sp>
         <p:nvSpPr>
-          <p:cNvPr id="23" name="TextBox 22"/>
-          <p:cNvSpPr txBox="1"/>
-          <p:nvPr/>
-        </p:nvSpPr>
-        <p:spPr>
-          <a:xfrm>
-            <a:off x="777240" y="4114800"/>
-            <a:ext cx="457200" cy="384048"/>
-          </a:xfrm>
-          <a:prstGeom prst="rect">
-            <a:avLst/>
-          </a:prstGeom>
-          <a:noFill/>
-        </p:spPr>
-        <p:txBody>
-          <a:bodyPr wrap="square" anchor="t"/>
-          <a:lstStyle/>
-          <a:p>
-            <a:pPr algn="l"/>
-            <a:r>
-              <a:rPr sz="1600" b="1" i="0">
-                <a:solidFill>
-                  <a:srgbClr val="0A6B63"/>
+          <p:cNvPr id="23" name="Rounded Rectangle 22"/>
+          <p:cNvSpPr/>
+          <p:nvPr/>
+        </p:nvSpPr>
+        <p:spPr>
+          <a:xfrm>
+            <a:off x="713232" y="4270248"/>
+            <a:ext cx="512064" cy="365760"/>
+          </a:xfrm>
+          <a:prstGeom prst="roundRect">
+            <a:avLst>
+              <a:gd name="adj" fmla="val 25000"/>
+            </a:avLst>
+          </a:prstGeom>
+          <a:solidFill>
+            <a:srgbClr val="0A6B63"/>
+          </a:solidFill>
+          <a:ln>
+            <a:noFill/>
+          </a:ln>
+        </p:spPr>
+        <p:style>
+          <a:lnRef idx="1">
+            <a:schemeClr val="accent1"/>
+          </a:lnRef>
+          <a:fillRef idx="3">
+            <a:schemeClr val="accent1"/>
+          </a:fillRef>
+          <a:effectRef idx="2">
+            <a:schemeClr val="accent1"/>
+          </a:effectRef>
+          <a:fontRef idx="minor">
+            <a:schemeClr val="lt1"/>
+          </a:fontRef>
+        </p:style>
+        <p:txBody>
+          <a:bodyPr rtlCol="0" anchor="ctr" wrap="square"/>
+          <a:lstStyle/>
+          <a:p>
+            <a:pPr algn="ctr"/>
+            <a:r>
+              <a:rPr sz="1300" b="1" i="0">
+                <a:solidFill>
+                  <a:srgbClr val="FFFFFF"/>
                 </a:solidFill>
                 <a:latin typeface="Georgia"/>
                 <a:ea typeface="Georgia"/>
@@ -37494,21 +37599,21 @@
         </p:nvSpPr>
         <p:spPr>
           <a:xfrm>
-            <a:off x="1325880" y="4114800"/>
-            <a:ext cx="5852160" cy="384048"/>
-          </a:xfrm>
-          <a:prstGeom prst="rect">
-            <a:avLst/>
-          </a:prstGeom>
-          <a:noFill/>
-        </p:spPr>
-        <p:txBody>
-          <a:bodyPr wrap="square" anchor="t"/>
-          <a:lstStyle/>
-          <a:p>
-            <a:pPr algn="l"/>
-            <a:r>
-              <a:rPr sz="1700" b="1" i="0">
+            <a:off x="1371600" y="4114800"/>
+            <a:ext cx="5852160" cy="676656"/>
+          </a:xfrm>
+          <a:prstGeom prst="rect">
+            <a:avLst/>
+          </a:prstGeom>
+          <a:noFill/>
+        </p:spPr>
+        <p:txBody>
+          <a:bodyPr wrap="square" anchor="ctr"/>
+          <a:lstStyle/>
+          <a:p>
+            <a:pPr algn="l"/>
+            <a:r>
+              <a:rPr sz="1600" b="1" i="0">
                 <a:solidFill>
                   <a:srgbClr val="0B1F33"/>
                 </a:solidFill>
@@ -37529,8 +37634,8 @@
         </p:nvSpPr>
         <p:spPr>
           <a:xfrm>
-            <a:off x="502920" y="4681728"/>
-            <a:ext cx="6949440" cy="658368"/>
+            <a:off x="502920" y="4864607"/>
+            <a:ext cx="6903720" cy="676656"/>
           </a:xfrm>
           <a:prstGeom prst="roundRect">
             <a:avLst>
@@ -37574,8 +37679,8 @@
         </p:nvSpPr>
         <p:spPr>
           <a:xfrm>
-            <a:off x="502920" y="4681728"/>
-            <a:ext cx="73152" cy="658368"/>
+            <a:off x="502920" y="4864607"/>
+            <a:ext cx="73152" cy="676656"/>
           </a:xfrm>
           <a:prstGeom prst="rect">
             <a:avLst/>
@@ -37611,29 +37716,50 @@
       </p:sp>
       <p:sp>
         <p:nvSpPr>
-          <p:cNvPr id="27" name="TextBox 26"/>
-          <p:cNvSpPr txBox="1"/>
-          <p:nvPr/>
-        </p:nvSpPr>
-        <p:spPr>
-          <a:xfrm>
-            <a:off x="777240" y="4828032"/>
-            <a:ext cx="457200" cy="384048"/>
-          </a:xfrm>
-          <a:prstGeom prst="rect">
-            <a:avLst/>
-          </a:prstGeom>
-          <a:noFill/>
-        </p:spPr>
-        <p:txBody>
-          <a:bodyPr wrap="square" anchor="t"/>
-          <a:lstStyle/>
-          <a:p>
-            <a:pPr algn="l"/>
-            <a:r>
-              <a:rPr sz="1600" b="1" i="0">
-                <a:solidFill>
-                  <a:srgbClr val="0A6B63"/>
+          <p:cNvPr id="27" name="Rounded Rectangle 26"/>
+          <p:cNvSpPr/>
+          <p:nvPr/>
+        </p:nvSpPr>
+        <p:spPr>
+          <a:xfrm>
+            <a:off x="713232" y="5020055"/>
+            <a:ext cx="512064" cy="365760"/>
+          </a:xfrm>
+          <a:prstGeom prst="roundRect">
+            <a:avLst>
+              <a:gd name="adj" fmla="val 25000"/>
+            </a:avLst>
+          </a:prstGeom>
+          <a:solidFill>
+            <a:srgbClr val="0A6B63"/>
+          </a:solidFill>
+          <a:ln>
+            <a:noFill/>
+          </a:ln>
+        </p:spPr>
+        <p:style>
+          <a:lnRef idx="1">
+            <a:schemeClr val="accent1"/>
+          </a:lnRef>
+          <a:fillRef idx="3">
+            <a:schemeClr val="accent1"/>
+          </a:fillRef>
+          <a:effectRef idx="2">
+            <a:schemeClr val="accent1"/>
+          </a:effectRef>
+          <a:fontRef idx="minor">
+            <a:schemeClr val="lt1"/>
+          </a:fontRef>
+        </p:style>
+        <p:txBody>
+          <a:bodyPr rtlCol="0" anchor="ctr" wrap="square"/>
+          <a:lstStyle/>
+          <a:p>
+            <a:pPr algn="ctr"/>
+            <a:r>
+              <a:rPr sz="1300" b="1" i="0">
+                <a:solidFill>
+                  <a:srgbClr val="FFFFFF"/>
                 </a:solidFill>
                 <a:latin typeface="Georgia"/>
                 <a:ea typeface="Georgia"/>
@@ -37652,21 +37778,21 @@
         </p:nvSpPr>
         <p:spPr>
           <a:xfrm>
-            <a:off x="1325880" y="4828032"/>
-            <a:ext cx="5852160" cy="384048"/>
-          </a:xfrm>
-          <a:prstGeom prst="rect">
-            <a:avLst/>
-          </a:prstGeom>
-          <a:noFill/>
-        </p:spPr>
-        <p:txBody>
-          <a:bodyPr wrap="square" anchor="t"/>
-          <a:lstStyle/>
-          <a:p>
-            <a:pPr algn="l"/>
-            <a:r>
-              <a:rPr sz="1700" b="1" i="0">
+            <a:off x="1371600" y="4864607"/>
+            <a:ext cx="5852160" cy="676656"/>
+          </a:xfrm>
+          <a:prstGeom prst="rect">
+            <a:avLst/>
+          </a:prstGeom>
+          <a:noFill/>
+        </p:spPr>
+        <p:txBody>
+          <a:bodyPr wrap="square" anchor="ctr"/>
+          <a:lstStyle/>
+          <a:p>
+            <a:pPr algn="l"/>
+            <a:r>
+              <a:rPr sz="1600" b="1" i="0">
                 <a:solidFill>
                   <a:srgbClr val="0B1F33"/>
                 </a:solidFill>
@@ -37687,8 +37813,8 @@
         </p:nvSpPr>
         <p:spPr>
           <a:xfrm>
-            <a:off x="502920" y="5394960"/>
-            <a:ext cx="6949440" cy="658368"/>
+            <a:off x="502920" y="5614416"/>
+            <a:ext cx="6903720" cy="676656"/>
           </a:xfrm>
           <a:prstGeom prst="roundRect">
             <a:avLst>
@@ -37732,8 +37858,8 @@
         </p:nvSpPr>
         <p:spPr>
           <a:xfrm>
-            <a:off x="502920" y="5394960"/>
-            <a:ext cx="73152" cy="658368"/>
+            <a:off x="502920" y="5614416"/>
+            <a:ext cx="73152" cy="676656"/>
           </a:xfrm>
           <a:prstGeom prst="rect">
             <a:avLst/>
@@ -37769,29 +37895,50 @@
       </p:sp>
       <p:sp>
         <p:nvSpPr>
-          <p:cNvPr id="31" name="TextBox 30"/>
-          <p:cNvSpPr txBox="1"/>
-          <p:nvPr/>
-        </p:nvSpPr>
-        <p:spPr>
-          <a:xfrm>
-            <a:off x="777240" y="5541264"/>
-            <a:ext cx="457200" cy="384048"/>
-          </a:xfrm>
-          <a:prstGeom prst="rect">
-            <a:avLst/>
-          </a:prstGeom>
-          <a:noFill/>
-        </p:spPr>
-        <p:txBody>
-          <a:bodyPr wrap="square" anchor="t"/>
-          <a:lstStyle/>
-          <a:p>
-            <a:pPr algn="l"/>
-            <a:r>
-              <a:rPr sz="1600" b="1" i="0">
-                <a:solidFill>
-                  <a:srgbClr val="0A6B63"/>
+          <p:cNvPr id="31" name="Rounded Rectangle 30"/>
+          <p:cNvSpPr/>
+          <p:nvPr/>
+        </p:nvSpPr>
+        <p:spPr>
+          <a:xfrm>
+            <a:off x="713232" y="5769864"/>
+            <a:ext cx="512064" cy="365760"/>
+          </a:xfrm>
+          <a:prstGeom prst="roundRect">
+            <a:avLst>
+              <a:gd name="adj" fmla="val 25000"/>
+            </a:avLst>
+          </a:prstGeom>
+          <a:solidFill>
+            <a:srgbClr val="0A6B63"/>
+          </a:solidFill>
+          <a:ln>
+            <a:noFill/>
+          </a:ln>
+        </p:spPr>
+        <p:style>
+          <a:lnRef idx="1">
+            <a:schemeClr val="accent1"/>
+          </a:lnRef>
+          <a:fillRef idx="3">
+            <a:schemeClr val="accent1"/>
+          </a:fillRef>
+          <a:effectRef idx="2">
+            <a:schemeClr val="accent1"/>
+          </a:effectRef>
+          <a:fontRef idx="minor">
+            <a:schemeClr val="lt1"/>
+          </a:fontRef>
+        </p:style>
+        <p:txBody>
+          <a:bodyPr rtlCol="0" anchor="ctr" wrap="square"/>
+          <a:lstStyle/>
+          <a:p>
+            <a:pPr algn="ctr"/>
+            <a:r>
+              <a:rPr sz="1300" b="1" i="0">
+                <a:solidFill>
+                  <a:srgbClr val="FFFFFF"/>
                 </a:solidFill>
                 <a:latin typeface="Georgia"/>
                 <a:ea typeface="Georgia"/>
@@ -37810,21 +37957,21 @@
         </p:nvSpPr>
         <p:spPr>
           <a:xfrm>
-            <a:off x="1325880" y="5541264"/>
-            <a:ext cx="5852160" cy="384048"/>
-          </a:xfrm>
-          <a:prstGeom prst="rect">
-            <a:avLst/>
-          </a:prstGeom>
-          <a:noFill/>
-        </p:spPr>
-        <p:txBody>
-          <a:bodyPr wrap="square" anchor="t"/>
-          <a:lstStyle/>
-          <a:p>
-            <a:pPr algn="l"/>
-            <a:r>
-              <a:rPr sz="1700" b="1" i="0">
+            <a:off x="1371600" y="5614416"/>
+            <a:ext cx="5852160" cy="676656"/>
+          </a:xfrm>
+          <a:prstGeom prst="rect">
+            <a:avLst/>
+          </a:prstGeom>
+          <a:noFill/>
+        </p:spPr>
+        <p:txBody>
+          <a:bodyPr wrap="square" anchor="ctr"/>
+          <a:lstStyle/>
+          <a:p>
+            <a:pPr algn="l"/>
+            <a:r>
+              <a:rPr sz="1600" b="1" i="0">
                 <a:solidFill>
                   <a:srgbClr val="0B1F33"/>
                 </a:solidFill>

--- a/51Careers_Addition.pptx
+++ b/51Careers_Addition.pptx
@@ -33477,7 +33477,7 @@
         <p:spPr>
           <a:xfrm>
             <a:off x="1024128" y="3703320"/>
-            <a:ext cx="3072384" cy="822960"/>
+            <a:ext cx="3072384" cy="868680"/>
           </a:xfrm>
           <a:prstGeom prst="rect">
             <a:avLst/>
@@ -33498,7 +33498,7 @@
                 <a:ea typeface="Georgia"/>
                 <a:cs typeface="Georgia"/>
               </a:rPr>
-              <a:t>info@51careers.com</a:t>
+              <a:t>rocky@helio.space</a:t>
             </a:r>
           </a:p>
         </p:txBody>
@@ -33621,7 +33621,7 @@
                 <a:ea typeface="Segoe UI"/>
                 <a:cs typeface="Segoe UI"/>
               </a:rPr>
-              <a:t>WEB</a:t>
+              <a:t>PHONE</a:t>
             </a:r>
           </a:p>
         </p:txBody>
@@ -33635,7 +33635,7 @@
         <p:spPr>
           <a:xfrm>
             <a:off x="4681728" y="3703320"/>
-            <a:ext cx="3072384" cy="822960"/>
+            <a:ext cx="3072384" cy="868680"/>
           </a:xfrm>
           <a:prstGeom prst="rect">
             <a:avLst/>
@@ -33656,7 +33656,7 @@
                 <a:ea typeface="Georgia"/>
                 <a:cs typeface="Georgia"/>
               </a:rPr>
-              <a:t>www.51careers.ai</a:t>
+              <a:t>19921169641</a:t>
             </a:r>
           </a:p>
         </p:txBody>
@@ -33779,7 +33779,7 @@
                 <a:ea typeface="Segoe UI"/>
                 <a:cs typeface="Segoe UI"/>
               </a:rPr>
-              <a:t>OFFICE</a:t>
+              <a:t>WEB</a:t>
             </a:r>
           </a:p>
         </p:txBody>
@@ -33793,7 +33793,7 @@
         <p:spPr>
           <a:xfrm>
             <a:off x="8339328" y="3703320"/>
-            <a:ext cx="3072384" cy="822960"/>
+            <a:ext cx="3072384" cy="868680"/>
           </a:xfrm>
           <a:prstGeom prst="rect">
             <a:avLst/>
@@ -33814,7 +33814,7 @@
                 <a:ea typeface="Georgia"/>
                 <a:cs typeface="Georgia"/>
               </a:rPr>
-              <a:t>48 Wall Street, 11th Floor</a:t>
+              <a:t>www.helio.space</a:t>
             </a:r>
           </a:p>
         </p:txBody>
@@ -33841,7 +33841,7 @@
           <a:p>
             <a:pPr algn="l"/>
             <a:r>
-              <a:rPr sz="1600" b="0" i="0">
+              <a:rPr sz="1400" b="0" i="0">
                 <a:solidFill>
                   <a:srgbClr val="D7EBE8"/>
                 </a:solidFill>
@@ -33849,7 +33849,7 @@
                 <a:ea typeface="Segoe UI"/>
                 <a:cs typeface="Segoe UI"/>
               </a:rPr>
-              <a:t>New York, NY 10005</a:t>
+              <a:t>info@helio.space   ·   (510) 545-2666   ·   2448 Sixth Street, Berkeley, CA 94710</a:t>
             </a:r>
           </a:p>
         </p:txBody>
@@ -33927,7 +33927,7 @@
                 <a:ea typeface="Segoe UI"/>
                 <a:cs typeface="Segoe UI"/>
               </a:rPr>
-              <a:t>51 CAREERS.AI   ·   ROCKY CHEN   ·   INFO@51CAREERS.COM</a:t>
+              <a:t>ROCKY CHEN   ·   ROCKY@HELIO.SPACE   ·   19921169641</a:t>
             </a:r>
           </a:p>
         </p:txBody>

--- a/51Careers_Addition.pptx
+++ b/51Careers_Addition.pptx
@@ -18866,7 +18866,7 @@
                 <a:ea typeface="Segoe UI"/>
                 <a:cs typeface="Segoe UI"/>
               </a:rPr>
-              <a:t>Founder-led. Globally distributed. Full biographies available in the data room.</a:t>
+              <a:t>Founder-led. Globally distributed.</a:t>
             </a:r>
           </a:p>
         </p:txBody>
@@ -18967,21 +18967,21 @@
         </p:nvSpPr>
         <p:spPr>
           <a:xfrm>
-            <a:off x="704088" y="1280160"/>
-            <a:ext cx="3200400" cy="365760"/>
-          </a:xfrm>
-          <a:prstGeom prst="rect">
-            <a:avLst/>
-          </a:prstGeom>
-          <a:noFill/>
-        </p:spPr>
-        <p:txBody>
-          <a:bodyPr wrap="square" anchor="t"/>
-          <a:lstStyle/>
-          <a:p>
-            <a:pPr algn="l"/>
-            <a:r>
-              <a:rPr sz="1800" b="1" i="0">
+            <a:off x="704088" y="1225296"/>
+            <a:ext cx="3200400" cy="310896"/>
+          </a:xfrm>
+          <a:prstGeom prst="rect">
+            <a:avLst/>
+          </a:prstGeom>
+          <a:noFill/>
+        </p:spPr>
+        <p:txBody>
+          <a:bodyPr wrap="square" anchor="t"/>
+          <a:lstStyle/>
+          <a:p>
+            <a:pPr algn="l"/>
+            <a:r>
+              <a:rPr sz="1600" b="1" i="0">
                 <a:solidFill>
                   <a:srgbClr val="0B1F33"/>
                 </a:solidFill>
@@ -19002,21 +19002,21 @@
         </p:nvSpPr>
         <p:spPr>
           <a:xfrm>
-            <a:off x="704088" y="1645920"/>
-            <a:ext cx="3200400" cy="274320"/>
-          </a:xfrm>
-          <a:prstGeom prst="rect">
-            <a:avLst/>
-          </a:prstGeom>
-          <a:noFill/>
-        </p:spPr>
-        <p:txBody>
-          <a:bodyPr wrap="square" anchor="t"/>
-          <a:lstStyle/>
-          <a:p>
-            <a:pPr algn="l"/>
-            <a:r>
-              <a:rPr sz="1200" b="1" i="0">
+            <a:off x="704088" y="1536192"/>
+            <a:ext cx="3200400" cy="237744"/>
+          </a:xfrm>
+          <a:prstGeom prst="rect">
+            <a:avLst/>
+          </a:prstGeom>
+          <a:noFill/>
+        </p:spPr>
+        <p:txBody>
+          <a:bodyPr wrap="square" anchor="t"/>
+          <a:lstStyle/>
+          <a:p>
+            <a:pPr algn="l"/>
+            <a:r>
+              <a:rPr sz="1100" b="1" i="0">
                 <a:solidFill>
                   <a:srgbClr val="0A6B63"/>
                 </a:solidFill>
@@ -19037,21 +19037,21 @@
         </p:nvSpPr>
         <p:spPr>
           <a:xfrm>
-            <a:off x="704088" y="1993392"/>
-            <a:ext cx="3200400" cy="1371600"/>
-          </a:xfrm>
-          <a:prstGeom prst="rect">
-            <a:avLst/>
-          </a:prstGeom>
-          <a:noFill/>
-        </p:spPr>
-        <p:txBody>
-          <a:bodyPr wrap="square" anchor="t"/>
-          <a:lstStyle/>
-          <a:p>
-            <a:pPr algn="l"/>
-            <a:r>
-              <a:rPr sz="1300" b="0" i="0">
+            <a:off x="704088" y="1828800"/>
+            <a:ext cx="3200400" cy="804672"/>
+          </a:xfrm>
+          <a:prstGeom prst="rect">
+            <a:avLst/>
+          </a:prstGeom>
+          <a:noFill/>
+        </p:spPr>
+        <p:txBody>
+          <a:bodyPr wrap="square" anchor="t"/>
+          <a:lstStyle/>
+          <a:p>
+            <a:pPr algn="l"/>
+            <a:r>
+              <a:rPr sz="1200" b="0" i="0">
                 <a:solidFill>
                   <a:srgbClr val="2C3A4B"/>
                 </a:solidFill>
@@ -19059,14 +19059,49 @@
                 <a:ea typeface="Segoe UI"/>
                 <a:cs typeface="Segoe UI"/>
               </a:rPr>
-              <a:t>Founder of 51 Careers and 51 Careers.AI; investor and Managing Director at publicly listed Helio. Decade of international business, capital markets, and global resource integration.</a:t>
-            </a:r>
-          </a:p>
-        </p:txBody>
-      </p:sp>
-      <p:sp>
-        <p:nvSpPr>
-          <p:cNvPr id="10" name="Rounded Rectangle 9"/>
+              <a:t>▸  Founded 51 Careers in New York in 2016 and built it from a boutique consultancy into a multi-market career-services and technology business.</a:t>
+            </a:r>
+          </a:p>
+        </p:txBody>
+      </p:sp>
+      <p:sp>
+        <p:nvSpPr>
+          <p:cNvPr id="10" name="TextBox 9"/>
+          <p:cNvSpPr txBox="1"/>
+          <p:nvPr/>
+        </p:nvSpPr>
+        <p:spPr>
+          <a:xfrm>
+            <a:off x="704088" y="2651760"/>
+            <a:ext cx="3200400" cy="804672"/>
+          </a:xfrm>
+          <a:prstGeom prst="rect">
+            <a:avLst/>
+          </a:prstGeom>
+          <a:noFill/>
+        </p:spPr>
+        <p:txBody>
+          <a:bodyPr wrap="square" anchor="t"/>
+          <a:lstStyle/>
+          <a:p>
+            <a:pPr algn="l"/>
+            <a:r>
+              <a:rPr sz="1200" b="0" i="0">
+                <a:solidFill>
+                  <a:srgbClr val="2C3A4B"/>
+                </a:solidFill>
+                <a:latin typeface="Segoe UI"/>
+                <a:ea typeface="Segoe UI"/>
+                <a:cs typeface="Segoe UI"/>
+              </a:rPr>
+              <a:t>▸  Founder of 51 Careers.AI; investor and Managing Director at publicly listed Helio. Architect of the AI-first strategy, including the 2025 Alibaba Cloud AI partnership.</a:t>
+            </a:r>
+          </a:p>
+        </p:txBody>
+      </p:sp>
+      <p:sp>
+        <p:nvSpPr>
+          <p:cNvPr id="11" name="Rounded Rectangle 10"/>
           <p:cNvSpPr/>
           <p:nvPr/>
         </p:nvSpPr>
@@ -19111,7 +19146,7 @@
       </p:sp>
       <p:sp>
         <p:nvSpPr>
-          <p:cNvPr id="11" name="Rectangle 10"/>
+          <p:cNvPr id="12" name="Rectangle 11"/>
           <p:cNvSpPr/>
           <p:nvPr/>
         </p:nvSpPr>
@@ -19154,27 +19189,27 @@
       </p:sp>
       <p:sp>
         <p:nvSpPr>
-          <p:cNvPr id="12" name="TextBox 11"/>
-          <p:cNvSpPr txBox="1"/>
-          <p:nvPr/>
-        </p:nvSpPr>
-        <p:spPr>
-          <a:xfrm>
-            <a:off x="4434840" y="1280160"/>
-            <a:ext cx="3200400" cy="365760"/>
-          </a:xfrm>
-          <a:prstGeom prst="rect">
-            <a:avLst/>
-          </a:prstGeom>
-          <a:noFill/>
-        </p:spPr>
-        <p:txBody>
-          <a:bodyPr wrap="square" anchor="t"/>
-          <a:lstStyle/>
-          <a:p>
-            <a:pPr algn="l"/>
-            <a:r>
-              <a:rPr sz="1800" b="1" i="0">
+          <p:cNvPr id="13" name="TextBox 12"/>
+          <p:cNvSpPr txBox="1"/>
+          <p:nvPr/>
+        </p:nvSpPr>
+        <p:spPr>
+          <a:xfrm>
+            <a:off x="4434840" y="1225296"/>
+            <a:ext cx="3200400" cy="310896"/>
+          </a:xfrm>
+          <a:prstGeom prst="rect">
+            <a:avLst/>
+          </a:prstGeom>
+          <a:noFill/>
+        </p:spPr>
+        <p:txBody>
+          <a:bodyPr wrap="square" anchor="t"/>
+          <a:lstStyle/>
+          <a:p>
+            <a:pPr algn="l"/>
+            <a:r>
+              <a:rPr sz="1600" b="1" i="0">
                 <a:solidFill>
                   <a:srgbClr val="0B1F33"/>
                 </a:solidFill>
@@ -19189,27 +19224,27 @@
       </p:sp>
       <p:sp>
         <p:nvSpPr>
-          <p:cNvPr id="13" name="TextBox 12"/>
-          <p:cNvSpPr txBox="1"/>
-          <p:nvPr/>
-        </p:nvSpPr>
-        <p:spPr>
-          <a:xfrm>
-            <a:off x="4434840" y="1645920"/>
-            <a:ext cx="3200400" cy="274320"/>
-          </a:xfrm>
-          <a:prstGeom prst="rect">
-            <a:avLst/>
-          </a:prstGeom>
-          <a:noFill/>
-        </p:spPr>
-        <p:txBody>
-          <a:bodyPr wrap="square" anchor="t"/>
-          <a:lstStyle/>
-          <a:p>
-            <a:pPr algn="l"/>
-            <a:r>
-              <a:rPr sz="1200" b="1" i="0">
+          <p:cNvPr id="14" name="TextBox 13"/>
+          <p:cNvSpPr txBox="1"/>
+          <p:nvPr/>
+        </p:nvSpPr>
+        <p:spPr>
+          <a:xfrm>
+            <a:off x="4434840" y="1536192"/>
+            <a:ext cx="3200400" cy="237744"/>
+          </a:xfrm>
+          <a:prstGeom prst="rect">
+            <a:avLst/>
+          </a:prstGeom>
+          <a:noFill/>
+        </p:spPr>
+        <p:txBody>
+          <a:bodyPr wrap="square" anchor="t"/>
+          <a:lstStyle/>
+          <a:p>
+            <a:pPr algn="l"/>
+            <a:r>
+              <a:rPr sz="1100" b="1" i="0">
                 <a:solidFill>
                   <a:srgbClr val="0A6B63"/>
                 </a:solidFill>
@@ -19224,27 +19259,27 @@
       </p:sp>
       <p:sp>
         <p:nvSpPr>
-          <p:cNvPr id="14" name="TextBox 13"/>
-          <p:cNvSpPr txBox="1"/>
-          <p:nvPr/>
-        </p:nvSpPr>
-        <p:spPr>
-          <a:xfrm>
-            <a:off x="4434840" y="1993392"/>
-            <a:ext cx="3200400" cy="1371600"/>
-          </a:xfrm>
-          <a:prstGeom prst="rect">
-            <a:avLst/>
-          </a:prstGeom>
-          <a:noFill/>
-        </p:spPr>
-        <p:txBody>
-          <a:bodyPr wrap="square" anchor="t"/>
-          <a:lstStyle/>
-          <a:p>
-            <a:pPr algn="l"/>
-            <a:r>
-              <a:rPr sz="1300" b="0" i="0">
+          <p:cNvPr id="15" name="TextBox 14"/>
+          <p:cNvSpPr txBox="1"/>
+          <p:nvPr/>
+        </p:nvSpPr>
+        <p:spPr>
+          <a:xfrm>
+            <a:off x="4434840" y="1828800"/>
+            <a:ext cx="3200400" cy="804672"/>
+          </a:xfrm>
+          <a:prstGeom prst="rect">
+            <a:avLst/>
+          </a:prstGeom>
+          <a:noFill/>
+        </p:spPr>
+        <p:txBody>
+          <a:bodyPr wrap="square" anchor="t"/>
+          <a:lstStyle/>
+          <a:p>
+            <a:pPr algn="l"/>
+            <a:r>
+              <a:rPr sz="1200" b="0" i="0">
                 <a:solidFill>
                   <a:srgbClr val="2C3A4B"/>
                 </a:solidFill>
@@ -19252,14 +19287,49 @@
                 <a:ea typeface="Segoe UI"/>
                 <a:cs typeface="Segoe UI"/>
               </a:rPr>
-              <a:t>Co-founder since 2016. U.S. CPA; M.S. Accounting, Pace University. Oversees financial strategy, corporate governance, and sustainable growth.</a:t>
-            </a:r>
-          </a:p>
-        </p:txBody>
-      </p:sp>
-      <p:sp>
-        <p:nvSpPr>
-          <p:cNvPr id="15" name="Rounded Rectangle 14"/>
+              <a:t>▸  Co-founder since 2016. U.S. CPA; M.S. Accounting, Pace University.</a:t>
+            </a:r>
+          </a:p>
+        </p:txBody>
+      </p:sp>
+      <p:sp>
+        <p:nvSpPr>
+          <p:cNvPr id="16" name="TextBox 15"/>
+          <p:cNvSpPr txBox="1"/>
+          <p:nvPr/>
+        </p:nvSpPr>
+        <p:spPr>
+          <a:xfrm>
+            <a:off x="4434840" y="2651760"/>
+            <a:ext cx="3200400" cy="804672"/>
+          </a:xfrm>
+          <a:prstGeom prst="rect">
+            <a:avLst/>
+          </a:prstGeom>
+          <a:noFill/>
+        </p:spPr>
+        <p:txBody>
+          <a:bodyPr wrap="square" anchor="t"/>
+          <a:lstStyle/>
+          <a:p>
+            <a:pPr algn="l"/>
+            <a:r>
+              <a:rPr sz="1200" b="0" i="0">
+                <a:solidFill>
+                  <a:srgbClr val="2C3A4B"/>
+                </a:solidFill>
+                <a:latin typeface="Segoe UI"/>
+                <a:ea typeface="Segoe UI"/>
+                <a:cs typeface="Segoe UI"/>
+              </a:rPr>
+              <a:t>▸  Oversees financial strategy, corporate governance, and sustainable growth for 51 Careers and 51 Careers.AI.</a:t>
+            </a:r>
+          </a:p>
+        </p:txBody>
+      </p:sp>
+      <p:sp>
+        <p:nvSpPr>
+          <p:cNvPr id="17" name="Rounded Rectangle 16"/>
           <p:cNvSpPr/>
           <p:nvPr/>
         </p:nvSpPr>
@@ -19304,7 +19374,7 @@
       </p:sp>
       <p:sp>
         <p:nvSpPr>
-          <p:cNvPr id="16" name="Rectangle 15"/>
+          <p:cNvPr id="18" name="Rectangle 17"/>
           <p:cNvSpPr/>
           <p:nvPr/>
         </p:nvSpPr>
@@ -19347,27 +19417,27 @@
       </p:sp>
       <p:sp>
         <p:nvSpPr>
-          <p:cNvPr id="17" name="TextBox 16"/>
-          <p:cNvSpPr txBox="1"/>
-          <p:nvPr/>
-        </p:nvSpPr>
-        <p:spPr>
-          <a:xfrm>
-            <a:off x="8165592" y="1280160"/>
-            <a:ext cx="3200400" cy="365760"/>
-          </a:xfrm>
-          <a:prstGeom prst="rect">
-            <a:avLst/>
-          </a:prstGeom>
-          <a:noFill/>
-        </p:spPr>
-        <p:txBody>
-          <a:bodyPr wrap="square" anchor="t"/>
-          <a:lstStyle/>
-          <a:p>
-            <a:pPr algn="l"/>
-            <a:r>
-              <a:rPr sz="1800" b="1" i="0">
+          <p:cNvPr id="19" name="TextBox 18"/>
+          <p:cNvSpPr txBox="1"/>
+          <p:nvPr/>
+        </p:nvSpPr>
+        <p:spPr>
+          <a:xfrm>
+            <a:off x="8165592" y="1225296"/>
+            <a:ext cx="3200400" cy="310896"/>
+          </a:xfrm>
+          <a:prstGeom prst="rect">
+            <a:avLst/>
+          </a:prstGeom>
+          <a:noFill/>
+        </p:spPr>
+        <p:txBody>
+          <a:bodyPr wrap="square" anchor="t"/>
+          <a:lstStyle/>
+          <a:p>
+            <a:pPr algn="l"/>
+            <a:r>
+              <a:rPr sz="1600" b="1" i="0">
                 <a:solidFill>
                   <a:srgbClr val="0B1F33"/>
                 </a:solidFill>
@@ -19382,27 +19452,27 @@
       </p:sp>
       <p:sp>
         <p:nvSpPr>
-          <p:cNvPr id="18" name="TextBox 17"/>
-          <p:cNvSpPr txBox="1"/>
-          <p:nvPr/>
-        </p:nvSpPr>
-        <p:spPr>
-          <a:xfrm>
-            <a:off x="8165592" y="1645920"/>
-            <a:ext cx="3200400" cy="274320"/>
-          </a:xfrm>
-          <a:prstGeom prst="rect">
-            <a:avLst/>
-          </a:prstGeom>
-          <a:noFill/>
-        </p:spPr>
-        <p:txBody>
-          <a:bodyPr wrap="square" anchor="t"/>
-          <a:lstStyle/>
-          <a:p>
-            <a:pPr algn="l"/>
-            <a:r>
-              <a:rPr sz="1200" b="1" i="0">
+          <p:cNvPr id="20" name="TextBox 19"/>
+          <p:cNvSpPr txBox="1"/>
+          <p:nvPr/>
+        </p:nvSpPr>
+        <p:spPr>
+          <a:xfrm>
+            <a:off x="8165592" y="1536192"/>
+            <a:ext cx="3200400" cy="237744"/>
+          </a:xfrm>
+          <a:prstGeom prst="rect">
+            <a:avLst/>
+          </a:prstGeom>
+          <a:noFill/>
+        </p:spPr>
+        <p:txBody>
+          <a:bodyPr wrap="square" anchor="t"/>
+          <a:lstStyle/>
+          <a:p>
+            <a:pPr algn="l"/>
+            <a:r>
+              <a:rPr sz="1100" b="1" i="0">
                 <a:solidFill>
                   <a:srgbClr val="0A6B63"/>
                 </a:solidFill>
@@ -19417,27 +19487,27 @@
       </p:sp>
       <p:sp>
         <p:nvSpPr>
-          <p:cNvPr id="19" name="TextBox 18"/>
-          <p:cNvSpPr txBox="1"/>
-          <p:nvPr/>
-        </p:nvSpPr>
-        <p:spPr>
-          <a:xfrm>
-            <a:off x="8165592" y="1993392"/>
-            <a:ext cx="3200400" cy="1371600"/>
-          </a:xfrm>
-          <a:prstGeom prst="rect">
-            <a:avLst/>
-          </a:prstGeom>
-          <a:noFill/>
-        </p:spPr>
-        <p:txBody>
-          <a:bodyPr wrap="square" anchor="t"/>
-          <a:lstStyle/>
-          <a:p>
-            <a:pPr algn="l"/>
-            <a:r>
-              <a:rPr sz="1300" b="0" i="0">
+          <p:cNvPr id="21" name="TextBox 20"/>
+          <p:cNvSpPr txBox="1"/>
+          <p:nvPr/>
+        </p:nvSpPr>
+        <p:spPr>
+          <a:xfrm>
+            <a:off x="8165592" y="1828800"/>
+            <a:ext cx="3200400" cy="804672"/>
+          </a:xfrm>
+          <a:prstGeom prst="rect">
+            <a:avLst/>
+          </a:prstGeom>
+          <a:noFill/>
+        </p:spPr>
+        <p:txBody>
+          <a:bodyPr wrap="square" anchor="t"/>
+          <a:lstStyle/>
+          <a:p>
+            <a:pPr algn="l"/>
+            <a:r>
+              <a:rPr sz="1200" b="0" i="0">
                 <a:solidFill>
                   <a:srgbClr val="2C3A4B"/>
                 </a:solidFill>
@@ -19445,14 +19515,49 @@
                 <a:ea typeface="Segoe UI"/>
                 <a:cs typeface="Segoe UI"/>
               </a:rPr>
-              <a:t>Serial entrepreneur (10+ years) across SaaS, AI, and digital business; B.S. Computer Science, ECUST. Leads technology, operations, and AI.</a:t>
-            </a:r>
-          </a:p>
-        </p:txBody>
-      </p:sp>
-      <p:sp>
-        <p:nvSpPr>
-          <p:cNvPr id="20" name="Rounded Rectangle 19"/>
+              <a:t>▸  Serial entrepreneur (10+ years) across SaaS, AI, and digital business; B.S. Computer Science, ECUST.</a:t>
+            </a:r>
+          </a:p>
+        </p:txBody>
+      </p:sp>
+      <p:sp>
+        <p:nvSpPr>
+          <p:cNvPr id="22" name="TextBox 21"/>
+          <p:cNvSpPr txBox="1"/>
+          <p:nvPr/>
+        </p:nvSpPr>
+        <p:spPr>
+          <a:xfrm>
+            <a:off x="8165592" y="2651760"/>
+            <a:ext cx="3200400" cy="804672"/>
+          </a:xfrm>
+          <a:prstGeom prst="rect">
+            <a:avLst/>
+          </a:prstGeom>
+          <a:noFill/>
+        </p:spPr>
+        <p:txBody>
+          <a:bodyPr wrap="square" anchor="t"/>
+          <a:lstStyle/>
+          <a:p>
+            <a:pPr algn="l"/>
+            <a:r>
+              <a:rPr sz="1200" b="0" i="0">
+                <a:solidFill>
+                  <a:srgbClr val="2C3A4B"/>
+                </a:solidFill>
+                <a:latin typeface="Segoe UI"/>
+                <a:ea typeface="Segoe UI"/>
+                <a:cs typeface="Segoe UI"/>
+              </a:rPr>
+              <a:t>▸  Prior CTO roles and multiple co-founded ventures. Leads technology, operations, and AI.</a:t>
+            </a:r>
+          </a:p>
+        </p:txBody>
+      </p:sp>
+      <p:sp>
+        <p:nvSpPr>
+          <p:cNvPr id="23" name="Rounded Rectangle 22"/>
           <p:cNvSpPr/>
           <p:nvPr/>
         </p:nvSpPr>
@@ -19497,7 +19602,7 @@
       </p:sp>
       <p:sp>
         <p:nvSpPr>
-          <p:cNvPr id="21" name="Rectangle 20"/>
+          <p:cNvPr id="24" name="Rectangle 23"/>
           <p:cNvSpPr/>
           <p:nvPr/>
         </p:nvSpPr>
@@ -19540,27 +19645,27 @@
       </p:sp>
       <p:sp>
         <p:nvSpPr>
-          <p:cNvPr id="22" name="TextBox 21"/>
-          <p:cNvSpPr txBox="1"/>
-          <p:nvPr/>
-        </p:nvSpPr>
-        <p:spPr>
-          <a:xfrm>
-            <a:off x="704088" y="3840480"/>
-            <a:ext cx="3200400" cy="365760"/>
-          </a:xfrm>
-          <a:prstGeom prst="rect">
-            <a:avLst/>
-          </a:prstGeom>
-          <a:noFill/>
-        </p:spPr>
-        <p:txBody>
-          <a:bodyPr wrap="square" anchor="t"/>
-          <a:lstStyle/>
-          <a:p>
-            <a:pPr algn="l"/>
-            <a:r>
-              <a:rPr sz="1800" b="1" i="0">
+          <p:cNvPr id="25" name="TextBox 24"/>
+          <p:cNvSpPr txBox="1"/>
+          <p:nvPr/>
+        </p:nvSpPr>
+        <p:spPr>
+          <a:xfrm>
+            <a:off x="704088" y="3785616"/>
+            <a:ext cx="3200400" cy="310896"/>
+          </a:xfrm>
+          <a:prstGeom prst="rect">
+            <a:avLst/>
+          </a:prstGeom>
+          <a:noFill/>
+        </p:spPr>
+        <p:txBody>
+          <a:bodyPr wrap="square" anchor="t"/>
+          <a:lstStyle/>
+          <a:p>
+            <a:pPr algn="l"/>
+            <a:r>
+              <a:rPr sz="1600" b="1" i="0">
                 <a:solidFill>
                   <a:srgbClr val="0B1F33"/>
                 </a:solidFill>
@@ -19575,27 +19680,27 @@
       </p:sp>
       <p:sp>
         <p:nvSpPr>
-          <p:cNvPr id="23" name="TextBox 22"/>
-          <p:cNvSpPr txBox="1"/>
-          <p:nvPr/>
-        </p:nvSpPr>
-        <p:spPr>
-          <a:xfrm>
-            <a:off x="704088" y="4206240"/>
-            <a:ext cx="3200400" cy="274320"/>
-          </a:xfrm>
-          <a:prstGeom prst="rect">
-            <a:avLst/>
-          </a:prstGeom>
-          <a:noFill/>
-        </p:spPr>
-        <p:txBody>
-          <a:bodyPr wrap="square" anchor="t"/>
-          <a:lstStyle/>
-          <a:p>
-            <a:pPr algn="l"/>
-            <a:r>
-              <a:rPr sz="1200" b="1" i="0">
+          <p:cNvPr id="26" name="TextBox 25"/>
+          <p:cNvSpPr txBox="1"/>
+          <p:nvPr/>
+        </p:nvSpPr>
+        <p:spPr>
+          <a:xfrm>
+            <a:off x="704088" y="4096512"/>
+            <a:ext cx="3200400" cy="237744"/>
+          </a:xfrm>
+          <a:prstGeom prst="rect">
+            <a:avLst/>
+          </a:prstGeom>
+          <a:noFill/>
+        </p:spPr>
+        <p:txBody>
+          <a:bodyPr wrap="square" anchor="t"/>
+          <a:lstStyle/>
+          <a:p>
+            <a:pPr algn="l"/>
+            <a:r>
+              <a:rPr sz="1100" b="1" i="0">
                 <a:solidFill>
                   <a:srgbClr val="0A6B63"/>
                 </a:solidFill>
@@ -19610,27 +19715,27 @@
       </p:sp>
       <p:sp>
         <p:nvSpPr>
-          <p:cNvPr id="24" name="TextBox 23"/>
-          <p:cNvSpPr txBox="1"/>
-          <p:nvPr/>
-        </p:nvSpPr>
-        <p:spPr>
-          <a:xfrm>
-            <a:off x="704088" y="4553712"/>
-            <a:ext cx="3200400" cy="1371600"/>
-          </a:xfrm>
-          <a:prstGeom prst="rect">
-            <a:avLst/>
-          </a:prstGeom>
-          <a:noFill/>
-        </p:spPr>
-        <p:txBody>
-          <a:bodyPr wrap="square" anchor="t"/>
-          <a:lstStyle/>
-          <a:p>
-            <a:pPr algn="l"/>
-            <a:r>
-              <a:rPr sz="1300" b="0" i="0">
+          <p:cNvPr id="27" name="TextBox 26"/>
+          <p:cNvSpPr txBox="1"/>
+          <p:nvPr/>
+        </p:nvSpPr>
+        <p:spPr>
+          <a:xfrm>
+            <a:off x="704088" y="4389120"/>
+            <a:ext cx="3200400" cy="804672"/>
+          </a:xfrm>
+          <a:prstGeom prst="rect">
+            <a:avLst/>
+          </a:prstGeom>
+          <a:noFill/>
+        </p:spPr>
+        <p:txBody>
+          <a:bodyPr wrap="square" anchor="t"/>
+          <a:lstStyle/>
+          <a:p>
+            <a:pPr algn="l"/>
+            <a:r>
+              <a:rPr sz="1200" b="0" i="0">
                 <a:solidFill>
                   <a:srgbClr val="2C3A4B"/>
                 </a:solidFill>
@@ -19638,14 +19743,49 @@
                 <a:ea typeface="Segoe UI"/>
                 <a:cs typeface="Segoe UI"/>
               </a:rPr>
-              <a:t>Leads product strategy, architecture, and development of the AI-powered platform. Former CTO &amp; Director of Product, Ci Finance; senior roles at CPIC, Allinpay, and Noah.</a:t>
-            </a:r>
-          </a:p>
-        </p:txBody>
-      </p:sp>
-      <p:sp>
-        <p:nvSpPr>
-          <p:cNvPr id="25" name="Rounded Rectangle 24"/>
+              <a:t>▸  Leads product strategy, architecture, and development of the AI-powered career platform.</a:t>
+            </a:r>
+          </a:p>
+        </p:txBody>
+      </p:sp>
+      <p:sp>
+        <p:nvSpPr>
+          <p:cNvPr id="28" name="TextBox 27"/>
+          <p:cNvSpPr txBox="1"/>
+          <p:nvPr/>
+        </p:nvSpPr>
+        <p:spPr>
+          <a:xfrm>
+            <a:off x="704088" y="5212080"/>
+            <a:ext cx="3200400" cy="804672"/>
+          </a:xfrm>
+          <a:prstGeom prst="rect">
+            <a:avLst/>
+          </a:prstGeom>
+          <a:noFill/>
+        </p:spPr>
+        <p:txBody>
+          <a:bodyPr wrap="square" anchor="t"/>
+          <a:lstStyle/>
+          <a:p>
+            <a:pPr algn="l"/>
+            <a:r>
+              <a:rPr sz="1200" b="0" i="0">
+                <a:solidFill>
+                  <a:srgbClr val="2C3A4B"/>
+                </a:solidFill>
+                <a:latin typeface="Segoe UI"/>
+                <a:ea typeface="Segoe UI"/>
+                <a:cs typeface="Segoe UI"/>
+              </a:rPr>
+              <a:t>▸  Former CTO &amp; Director of Product at Ci Finance; senior product roles at CPIC, Allinpay, and Noah.</a:t>
+            </a:r>
+          </a:p>
+        </p:txBody>
+      </p:sp>
+      <p:sp>
+        <p:nvSpPr>
+          <p:cNvPr id="29" name="Rounded Rectangle 28"/>
           <p:cNvSpPr/>
           <p:nvPr/>
         </p:nvSpPr>
@@ -19690,7 +19830,7 @@
       </p:sp>
       <p:sp>
         <p:nvSpPr>
-          <p:cNvPr id="26" name="Rectangle 25"/>
+          <p:cNvPr id="30" name="Rectangle 29"/>
           <p:cNvSpPr/>
           <p:nvPr/>
         </p:nvSpPr>
@@ -19733,27 +19873,27 @@
       </p:sp>
       <p:sp>
         <p:nvSpPr>
-          <p:cNvPr id="27" name="TextBox 26"/>
-          <p:cNvSpPr txBox="1"/>
-          <p:nvPr/>
-        </p:nvSpPr>
-        <p:spPr>
-          <a:xfrm>
-            <a:off x="4434840" y="3840480"/>
-            <a:ext cx="3200400" cy="365760"/>
-          </a:xfrm>
-          <a:prstGeom prst="rect">
-            <a:avLst/>
-          </a:prstGeom>
-          <a:noFill/>
-        </p:spPr>
-        <p:txBody>
-          <a:bodyPr wrap="square" anchor="t"/>
-          <a:lstStyle/>
-          <a:p>
-            <a:pPr algn="l"/>
-            <a:r>
-              <a:rPr sz="1800" b="1" i="0">
+          <p:cNvPr id="31" name="TextBox 30"/>
+          <p:cNvSpPr txBox="1"/>
+          <p:nvPr/>
+        </p:nvSpPr>
+        <p:spPr>
+          <a:xfrm>
+            <a:off x="4434840" y="3785616"/>
+            <a:ext cx="3200400" cy="310896"/>
+          </a:xfrm>
+          <a:prstGeom prst="rect">
+            <a:avLst/>
+          </a:prstGeom>
+          <a:noFill/>
+        </p:spPr>
+        <p:txBody>
+          <a:bodyPr wrap="square" anchor="t"/>
+          <a:lstStyle/>
+          <a:p>
+            <a:pPr algn="l"/>
+            <a:r>
+              <a:rPr sz="1600" b="1" i="0">
                 <a:solidFill>
                   <a:srgbClr val="0B1F33"/>
                 </a:solidFill>
@@ -19768,27 +19908,27 @@
       </p:sp>
       <p:sp>
         <p:nvSpPr>
-          <p:cNvPr id="28" name="TextBox 27"/>
-          <p:cNvSpPr txBox="1"/>
-          <p:nvPr/>
-        </p:nvSpPr>
-        <p:spPr>
-          <a:xfrm>
-            <a:off x="4434840" y="4206240"/>
-            <a:ext cx="3200400" cy="274320"/>
-          </a:xfrm>
-          <a:prstGeom prst="rect">
-            <a:avLst/>
-          </a:prstGeom>
-          <a:noFill/>
-        </p:spPr>
-        <p:txBody>
-          <a:bodyPr wrap="square" anchor="t"/>
-          <a:lstStyle/>
-          <a:p>
-            <a:pPr algn="l"/>
-            <a:r>
-              <a:rPr sz="1200" b="1" i="0">
+          <p:cNvPr id="32" name="TextBox 31"/>
+          <p:cNvSpPr txBox="1"/>
+          <p:nvPr/>
+        </p:nvSpPr>
+        <p:spPr>
+          <a:xfrm>
+            <a:off x="4434840" y="4096512"/>
+            <a:ext cx="3200400" cy="237744"/>
+          </a:xfrm>
+          <a:prstGeom prst="rect">
+            <a:avLst/>
+          </a:prstGeom>
+          <a:noFill/>
+        </p:spPr>
+        <p:txBody>
+          <a:bodyPr wrap="square" anchor="t"/>
+          <a:lstStyle/>
+          <a:p>
+            <a:pPr algn="l"/>
+            <a:r>
+              <a:rPr sz="1100" b="1" i="0">
                 <a:solidFill>
                   <a:srgbClr val="0A6B63"/>
                 </a:solidFill>
@@ -19803,27 +19943,27 @@
       </p:sp>
       <p:sp>
         <p:nvSpPr>
-          <p:cNvPr id="29" name="TextBox 28"/>
-          <p:cNvSpPr txBox="1"/>
-          <p:nvPr/>
-        </p:nvSpPr>
-        <p:spPr>
-          <a:xfrm>
-            <a:off x="4434840" y="4553712"/>
-            <a:ext cx="3200400" cy="1371600"/>
-          </a:xfrm>
-          <a:prstGeom prst="rect">
-            <a:avLst/>
-          </a:prstGeom>
-          <a:noFill/>
-        </p:spPr>
-        <p:txBody>
-          <a:bodyPr wrap="square" anchor="t"/>
-          <a:lstStyle/>
-          <a:p>
-            <a:pPr algn="l"/>
-            <a:r>
-              <a:rPr sz="1300" b="0" i="0">
+          <p:cNvPr id="33" name="TextBox 32"/>
+          <p:cNvSpPr txBox="1"/>
+          <p:nvPr/>
+        </p:nvSpPr>
+        <p:spPr>
+          <a:xfrm>
+            <a:off x="4434840" y="4389120"/>
+            <a:ext cx="3200400" cy="804672"/>
+          </a:xfrm>
+          <a:prstGeom prst="rect">
+            <a:avLst/>
+          </a:prstGeom>
+          <a:noFill/>
+        </p:spPr>
+        <p:txBody>
+          <a:bodyPr wrap="square" anchor="t"/>
+          <a:lstStyle/>
+          <a:p>
+            <a:pPr algn="l"/>
+            <a:r>
+              <a:rPr sz="1200" b="0" i="0">
                 <a:solidFill>
                   <a:srgbClr val="2C3A4B"/>
                 </a:solidFill>
@@ -19831,14 +19971,49 @@
                 <a:ea typeface="Segoe UI"/>
                 <a:cs typeface="Segoe UI"/>
               </a:rPr>
-              <a:t>Full-stack engineer; previously at Amazon Web Services (AWS). B.S. Northwestern; M.S. Robotics. Extensive hiring-panel experience and mentorship.</a:t>
-            </a:r>
-          </a:p>
-        </p:txBody>
-      </p:sp>
-      <p:sp>
-        <p:nvSpPr>
-          <p:cNvPr id="30" name="Rounded Rectangle 29"/>
+              <a:t>▸  Full-stack engineer; previously at Amazon Web Services (AWS).</a:t>
+            </a:r>
+          </a:p>
+        </p:txBody>
+      </p:sp>
+      <p:sp>
+        <p:nvSpPr>
+          <p:cNvPr id="34" name="TextBox 33"/>
+          <p:cNvSpPr txBox="1"/>
+          <p:nvPr/>
+        </p:nvSpPr>
+        <p:spPr>
+          <a:xfrm>
+            <a:off x="4434840" y="5212080"/>
+            <a:ext cx="3200400" cy="804672"/>
+          </a:xfrm>
+          <a:prstGeom prst="rect">
+            <a:avLst/>
+          </a:prstGeom>
+          <a:noFill/>
+        </p:spPr>
+        <p:txBody>
+          <a:bodyPr wrap="square" anchor="t"/>
+          <a:lstStyle/>
+          <a:p>
+            <a:pPr algn="l"/>
+            <a:r>
+              <a:rPr sz="1200" b="0" i="0">
+                <a:solidFill>
+                  <a:srgbClr val="2C3A4B"/>
+                </a:solidFill>
+                <a:latin typeface="Segoe UI"/>
+                <a:ea typeface="Segoe UI"/>
+                <a:cs typeface="Segoe UI"/>
+              </a:rPr>
+              <a:t>▸  B.S. Northwestern; M.S. Robotics. Extensive hiring-panel experience and professional mentorship.</a:t>
+            </a:r>
+          </a:p>
+        </p:txBody>
+      </p:sp>
+      <p:sp>
+        <p:nvSpPr>
+          <p:cNvPr id="35" name="Rounded Rectangle 34"/>
           <p:cNvSpPr/>
           <p:nvPr/>
         </p:nvSpPr>
@@ -19883,7 +20058,7 @@
       </p:sp>
       <p:sp>
         <p:nvSpPr>
-          <p:cNvPr id="31" name="Rectangle 30"/>
+          <p:cNvPr id="36" name="Rectangle 35"/>
           <p:cNvSpPr/>
           <p:nvPr/>
         </p:nvSpPr>
@@ -19926,27 +20101,27 @@
       </p:sp>
       <p:sp>
         <p:nvSpPr>
-          <p:cNvPr id="32" name="TextBox 31"/>
-          <p:cNvSpPr txBox="1"/>
-          <p:nvPr/>
-        </p:nvSpPr>
-        <p:spPr>
-          <a:xfrm>
-            <a:off x="8165592" y="3840480"/>
-            <a:ext cx="3200400" cy="365760"/>
-          </a:xfrm>
-          <a:prstGeom prst="rect">
-            <a:avLst/>
-          </a:prstGeom>
-          <a:noFill/>
-        </p:spPr>
-        <p:txBody>
-          <a:bodyPr wrap="square" anchor="t"/>
-          <a:lstStyle/>
-          <a:p>
-            <a:pPr algn="l"/>
-            <a:r>
-              <a:rPr sz="1800" b="1" i="0">
+          <p:cNvPr id="37" name="TextBox 36"/>
+          <p:cNvSpPr txBox="1"/>
+          <p:nvPr/>
+        </p:nvSpPr>
+        <p:spPr>
+          <a:xfrm>
+            <a:off x="8165592" y="3785616"/>
+            <a:ext cx="3200400" cy="310896"/>
+          </a:xfrm>
+          <a:prstGeom prst="rect">
+            <a:avLst/>
+          </a:prstGeom>
+          <a:noFill/>
+        </p:spPr>
+        <p:txBody>
+          <a:bodyPr wrap="square" anchor="t"/>
+          <a:lstStyle/>
+          <a:p>
+            <a:pPr algn="l"/>
+            <a:r>
+              <a:rPr sz="1600" b="1" i="0">
                 <a:solidFill>
                   <a:srgbClr val="0B1F33"/>
                 </a:solidFill>
@@ -19961,27 +20136,27 @@
       </p:sp>
       <p:sp>
         <p:nvSpPr>
-          <p:cNvPr id="33" name="TextBox 32"/>
-          <p:cNvSpPr txBox="1"/>
-          <p:nvPr/>
-        </p:nvSpPr>
-        <p:spPr>
-          <a:xfrm>
-            <a:off x="8165592" y="4206240"/>
-            <a:ext cx="3200400" cy="274320"/>
-          </a:xfrm>
-          <a:prstGeom prst="rect">
-            <a:avLst/>
-          </a:prstGeom>
-          <a:noFill/>
-        </p:spPr>
-        <p:txBody>
-          <a:bodyPr wrap="square" anchor="t"/>
-          <a:lstStyle/>
-          <a:p>
-            <a:pPr algn="l"/>
-            <a:r>
-              <a:rPr sz="1200" b="1" i="0">
+          <p:cNvPr id="38" name="TextBox 37"/>
+          <p:cNvSpPr txBox="1"/>
+          <p:nvPr/>
+        </p:nvSpPr>
+        <p:spPr>
+          <a:xfrm>
+            <a:off x="8165592" y="4096512"/>
+            <a:ext cx="3200400" cy="237744"/>
+          </a:xfrm>
+          <a:prstGeom prst="rect">
+            <a:avLst/>
+          </a:prstGeom>
+          <a:noFill/>
+        </p:spPr>
+        <p:txBody>
+          <a:bodyPr wrap="square" anchor="t"/>
+          <a:lstStyle/>
+          <a:p>
+            <a:pPr algn="l"/>
+            <a:r>
+              <a:rPr sz="1100" b="1" i="0">
                 <a:solidFill>
                   <a:srgbClr val="0A6B63"/>
                 </a:solidFill>
@@ -19996,27 +20171,27 @@
       </p:sp>
       <p:sp>
         <p:nvSpPr>
-          <p:cNvPr id="34" name="TextBox 33"/>
-          <p:cNvSpPr txBox="1"/>
-          <p:nvPr/>
-        </p:nvSpPr>
-        <p:spPr>
-          <a:xfrm>
-            <a:off x="8165592" y="4553712"/>
-            <a:ext cx="3200400" cy="1371600"/>
-          </a:xfrm>
-          <a:prstGeom prst="rect">
-            <a:avLst/>
-          </a:prstGeom>
-          <a:noFill/>
-        </p:spPr>
-        <p:txBody>
-          <a:bodyPr wrap="square" anchor="t"/>
-          <a:lstStyle/>
-          <a:p>
-            <a:pPr algn="l"/>
-            <a:r>
-              <a:rPr sz="1300" b="0" i="0">
+          <p:cNvPr id="39" name="TextBox 38"/>
+          <p:cNvSpPr txBox="1"/>
+          <p:nvPr/>
+        </p:nvSpPr>
+        <p:spPr>
+          <a:xfrm>
+            <a:off x="8165592" y="4389120"/>
+            <a:ext cx="3200400" cy="804672"/>
+          </a:xfrm>
+          <a:prstGeom prst="rect">
+            <a:avLst/>
+          </a:prstGeom>
+          <a:noFill/>
+        </p:spPr>
+        <p:txBody>
+          <a:bodyPr wrap="square" anchor="t"/>
+          <a:lstStyle/>
+          <a:p>
+            <a:pPr algn="l"/>
+            <a:r>
+              <a:rPr sz="1200" b="0" i="0">
                 <a:solidFill>
                   <a:srgbClr val="2C3A4B"/>
                 </a:solidFill>
@@ -20024,14 +20199,49 @@
                 <a:ea typeface="Segoe UI"/>
                 <a:cs typeface="Segoe UI"/>
               </a:rPr>
-              <a:t>Harvard and MIT; former senior executive at Morgan Stanley; founder of Cedar. 40+ years in tech M&amp;A and capital raising; advises on growth and expansion.</a:t>
-            </a:r>
-          </a:p>
-        </p:txBody>
-      </p:sp>
-      <p:sp>
-        <p:nvSpPr>
-          <p:cNvPr id="35" name="Rectangle 34"/>
+              <a:t>▸  Harvard and MIT; former senior executive at Morgan Stanley; founder of Cedar.</a:t>
+            </a:r>
+          </a:p>
+        </p:txBody>
+      </p:sp>
+      <p:sp>
+        <p:nvSpPr>
+          <p:cNvPr id="40" name="TextBox 39"/>
+          <p:cNvSpPr txBox="1"/>
+          <p:nvPr/>
+        </p:nvSpPr>
+        <p:spPr>
+          <a:xfrm>
+            <a:off x="8165592" y="5212080"/>
+            <a:ext cx="3200400" cy="804672"/>
+          </a:xfrm>
+          <a:prstGeom prst="rect">
+            <a:avLst/>
+          </a:prstGeom>
+          <a:noFill/>
+        </p:spPr>
+        <p:txBody>
+          <a:bodyPr wrap="square" anchor="t"/>
+          <a:lstStyle/>
+          <a:p>
+            <a:pPr algn="l"/>
+            <a:r>
+              <a:rPr sz="1200" b="0" i="0">
+                <a:solidFill>
+                  <a:srgbClr val="2C3A4B"/>
+                </a:solidFill>
+                <a:latin typeface="Segoe UI"/>
+                <a:ea typeface="Segoe UI"/>
+                <a:cs typeface="Segoe UI"/>
+              </a:rPr>
+              <a:t>▸  40+ years in technology M&amp;A and capital raising. Advises 51 Careers on growth and expansion.</a:t>
+            </a:r>
+          </a:p>
+        </p:txBody>
+      </p:sp>
+      <p:sp>
+        <p:nvSpPr>
+          <p:cNvPr id="41" name="Rectangle 40"/>
           <p:cNvSpPr/>
           <p:nvPr/>
         </p:nvSpPr>
@@ -20074,7 +20284,7 @@
       </p:sp>
       <p:sp>
         <p:nvSpPr>
-          <p:cNvPr id="36" name="Rectangle 35"/>
+          <p:cNvPr id="42" name="Rectangle 41"/>
           <p:cNvSpPr/>
           <p:nvPr/>
         </p:nvSpPr>
@@ -20117,7 +20327,7 @@
       </p:sp>
       <p:sp>
         <p:nvSpPr>
-          <p:cNvPr id="37" name="Rectangle 36"/>
+          <p:cNvPr id="43" name="Rectangle 42"/>
           <p:cNvSpPr/>
           <p:nvPr/>
         </p:nvSpPr>
@@ -20160,7 +20370,7 @@
       </p:sp>
       <p:sp>
         <p:nvSpPr>
-          <p:cNvPr id="38" name="TextBox 37"/>
+          <p:cNvPr id="44" name="TextBox 43"/>
           <p:cNvSpPr txBox="1"/>
           <p:nvPr/>
         </p:nvSpPr>
@@ -20195,7 +20405,7 @@
       </p:sp>
       <p:sp>
         <p:nvSpPr>
-          <p:cNvPr id="39" name="TextBox 38"/>
+          <p:cNvPr id="45" name="TextBox 44"/>
           <p:cNvSpPr txBox="1"/>
           <p:nvPr/>
         </p:nvSpPr>
